--- a/Materials.pptx
+++ b/Materials.pptx
@@ -16,10 +16,11 @@
     <p:sldId id="263" r:id="rId13"/>
     <p:sldId id="264" r:id="rId14"/>
     <p:sldId id="266" r:id="rId15"/>
-    <p:sldId id="267" r:id="rId16"/>
-    <p:sldId id="272" r:id="rId17"/>
-    <p:sldId id="271" r:id="rId18"/>
-    <p:sldId id="273" r:id="rId19"/>
+    <p:sldId id="274" r:id="rId16"/>
+    <p:sldId id="267" r:id="rId17"/>
+    <p:sldId id="272" r:id="rId18"/>
+    <p:sldId id="271" r:id="rId19"/>
+    <p:sldId id="273" r:id="rId20"/>
   </p:sldIdLst>
   <p:sldSz cx="12192000" cy="6858000"/>
   <p:notesSz cx="7102475" cy="9388475"/>
@@ -129,7 +130,7 @@
 <file path=ppt/revisionInfo.xml><?xml version="1.0" encoding="utf-8"?>
 <p1510:revInfo xmlns:a="http://schemas.openxmlformats.org/drawingml/2006/main" xmlns:r="http://schemas.openxmlformats.org/officeDocument/2006/relationships" xmlns:p1510="http://schemas.microsoft.com/office/powerpoint/2015/10/main">
   <p1510:revLst>
-    <p1510:client id="{C7F86D9B-447A-41E3-A63F-8920382A99EF}" v="429" dt="2026-07-23T10:51:11.552"/>
+    <p1510:client id="{2E73B93B-076D-4B14-AC4D-A7B074A06377}" v="5" dt="2026-10-20T08:37:59.123"/>
   </p1510:revLst>
 </p1510:revInfo>
 </file>
@@ -139,1257 +140,134 @@
   <pc:docChgLst>
     <pc:chgData name="全 香玉" userId="1f3450e5-81b9-4f7a-82d7-841c32c029e0" providerId="ADAL" clId="{670531AC-1667-4F97-B1A6-5D38F8A44A79}"/>
     <pc:docChg chg="undo redo custSel addSld delSld modSld sldOrd">
-      <pc:chgData name="全 香玉" userId="1f3450e5-81b9-4f7a-82d7-841c32c029e0" providerId="ADAL" clId="{670531AC-1667-4F97-B1A6-5D38F8A44A79}" dt="2026-07-23T10:52:18.564" v="2823" actId="1076"/>
+      <pc:chgData name="全 香玉" userId="1f3450e5-81b9-4f7a-82d7-841c32c029e0" providerId="ADAL" clId="{670531AC-1667-4F97-B1A6-5D38F8A44A79}" dt="2026-10-20T08:39:11.601" v="2915" actId="1076"/>
       <pc:docMkLst>
         <pc:docMk/>
       </pc:docMkLst>
-      <pc:sldChg chg="addSp delSp modSp add mod">
-        <pc:chgData name="全 香玉" userId="1f3450e5-81b9-4f7a-82d7-841c32c029e0" providerId="ADAL" clId="{670531AC-1667-4F97-B1A6-5D38F8A44A79}" dt="2026-07-17T03:13:46.705" v="188" actId="20577"/>
+      <pc:sldChg chg="addSp modSp add mod">
+        <pc:chgData name="全 香玉" userId="1f3450e5-81b9-4f7a-82d7-841c32c029e0" providerId="ADAL" clId="{670531AC-1667-4F97-B1A6-5D38F8A44A79}" dt="2026-10-20T08:39:11.601" v="2915" actId="1076"/>
         <pc:sldMkLst>
           <pc:docMk/>
-          <pc:sldMk cId="3041934445" sldId="268"/>
+          <pc:sldMk cId="1716350635" sldId="274"/>
         </pc:sldMkLst>
-        <pc:spChg chg="mod">
-          <ac:chgData name="全 香玉" userId="1f3450e5-81b9-4f7a-82d7-841c32c029e0" providerId="ADAL" clId="{670531AC-1667-4F97-B1A6-5D38F8A44A79}" dt="2026-07-17T03:08:21.525" v="154" actId="1076"/>
+        <pc:spChg chg="add mod">
+          <ac:chgData name="全 香玉" userId="1f3450e5-81b9-4f7a-82d7-841c32c029e0" providerId="ADAL" clId="{670531AC-1667-4F97-B1A6-5D38F8A44A79}" dt="2026-10-20T08:36:00.046" v="2850" actId="1076"/>
           <ac:spMkLst>
             <pc:docMk/>
-            <pc:sldMk cId="3041934445" sldId="268"/>
-            <ac:spMk id="16" creationId="{C5B0D60D-1456-3E1C-73F8-93DE5569D9AF}"/>
+            <pc:sldMk cId="1716350635" sldId="274"/>
+            <ac:spMk id="17" creationId="{388240D9-1D48-3EED-7BB1-5B051A29A936}"/>
+          </ac:spMkLst>
+        </pc:spChg>
+        <pc:spChg chg="add mod">
+          <ac:chgData name="全 香玉" userId="1f3450e5-81b9-4f7a-82d7-841c32c029e0" providerId="ADAL" clId="{670531AC-1667-4F97-B1A6-5D38F8A44A79}" dt="2026-10-20T08:36:32.690" v="2855" actId="1076"/>
+          <ac:spMkLst>
+            <pc:docMk/>
+            <pc:sldMk cId="1716350635" sldId="274"/>
+            <ac:spMk id="19" creationId="{F57FA24F-1BDF-BAD1-A090-50D115FAB0BD}"/>
+          </ac:spMkLst>
+        </pc:spChg>
+        <pc:spChg chg="add mod">
+          <ac:chgData name="全 香玉" userId="1f3450e5-81b9-4f7a-82d7-841c32c029e0" providerId="ADAL" clId="{670531AC-1667-4F97-B1A6-5D38F8A44A79}" dt="2026-10-20T08:38:56.642" v="2894" actId="1076"/>
+          <ac:spMkLst>
+            <pc:docMk/>
+            <pc:sldMk cId="1716350635" sldId="274"/>
+            <ac:spMk id="30" creationId="{8485A7C4-DFCD-CAEA-D395-42AEA18DC63E}"/>
+          </ac:spMkLst>
+        </pc:spChg>
+        <pc:spChg chg="add mod">
+          <ac:chgData name="全 香玉" userId="1f3450e5-81b9-4f7a-82d7-841c32c029e0" providerId="ADAL" clId="{670531AC-1667-4F97-B1A6-5D38F8A44A79}" dt="2026-10-20T08:39:11.601" v="2915" actId="1076"/>
+          <ac:spMkLst>
+            <pc:docMk/>
+            <pc:sldMk cId="1716350635" sldId="274"/>
+            <ac:spMk id="33" creationId="{08F959DC-22BB-2804-A466-949BE942EBA4}"/>
           </ac:spMkLst>
         </pc:spChg>
         <pc:spChg chg="mod">
-          <ac:chgData name="全 香玉" userId="1f3450e5-81b9-4f7a-82d7-841c32c029e0" providerId="ADAL" clId="{670531AC-1667-4F97-B1A6-5D38F8A44A79}" dt="2026-07-17T03:13:46.705" v="188" actId="20577"/>
+          <ac:chgData name="全 香玉" userId="1f3450e5-81b9-4f7a-82d7-841c32c029e0" providerId="ADAL" clId="{670531AC-1667-4F97-B1A6-5D38F8A44A79}" dt="2026-10-20T08:35:50.833" v="2848" actId="1076"/>
           <ac:spMkLst>
             <pc:docMk/>
-            <pc:sldMk cId="3041934445" sldId="268"/>
-            <ac:spMk id="17" creationId="{E62A6218-D51E-A281-2173-9DE048FA601F}"/>
+            <pc:sldMk cId="1716350635" sldId="274"/>
+            <ac:spMk id="68" creationId="{6D8BA0D4-548F-9F64-3A5C-2F737C68A186}"/>
           </ac:spMkLst>
         </pc:spChg>
-        <pc:spChg chg="add mod">
-          <ac:chgData name="全 香玉" userId="1f3450e5-81b9-4f7a-82d7-841c32c029e0" providerId="ADAL" clId="{670531AC-1667-4F97-B1A6-5D38F8A44A79}" dt="2026-07-17T03:13:26.421" v="186" actId="20577"/>
+        <pc:spChg chg="mod">
+          <ac:chgData name="全 香玉" userId="1f3450e5-81b9-4f7a-82d7-841c32c029e0" providerId="ADAL" clId="{670531AC-1667-4F97-B1A6-5D38F8A44A79}" dt="2026-10-20T08:35:28.522" v="2838" actId="1076"/>
           <ac:spMkLst>
             <pc:docMk/>
-            <pc:sldMk cId="3041934445" sldId="268"/>
-            <ac:spMk id="54" creationId="{287BF06D-E5D3-14D7-4367-5633832A9E6C}"/>
+            <pc:sldMk cId="1716350635" sldId="274"/>
+            <ac:spMk id="127" creationId="{4C37C059-7456-41F2-6FB2-21CCF6032028}"/>
           </ac:spMkLst>
         </pc:spChg>
-        <pc:spChg chg="add mod">
-          <ac:chgData name="全 香玉" userId="1f3450e5-81b9-4f7a-82d7-841c32c029e0" providerId="ADAL" clId="{670531AC-1667-4F97-B1A6-5D38F8A44A79}" dt="2026-07-17T03:13:16.977" v="183" actId="1076"/>
+        <pc:spChg chg="mod">
+          <ac:chgData name="全 香玉" userId="1f3450e5-81b9-4f7a-82d7-841c32c029e0" providerId="ADAL" clId="{670531AC-1667-4F97-B1A6-5D38F8A44A79}" dt="2026-10-20T08:36:10.722" v="2851" actId="1076"/>
           <ac:spMkLst>
             <pc:docMk/>
-            <pc:sldMk cId="3041934445" sldId="268"/>
-            <ac:spMk id="56" creationId="{718C072A-79B7-E8E6-2EFE-E27A6A8BF9F2}"/>
+            <pc:sldMk cId="1716350635" sldId="274"/>
+            <ac:spMk id="131" creationId="{C5C2C5DD-6391-E3D7-1327-2DD30603514B}"/>
           </ac:spMkLst>
         </pc:spChg>
-        <pc:cxnChg chg="add mod">
-          <ac:chgData name="全 香玉" userId="1f3450e5-81b9-4f7a-82d7-841c32c029e0" providerId="ADAL" clId="{670531AC-1667-4F97-B1A6-5D38F8A44A79}" dt="2026-07-17T03:07:15.870" v="138" actId="1076"/>
+        <pc:cxnChg chg="add mod ord">
+          <ac:chgData name="全 香玉" userId="1f3450e5-81b9-4f7a-82d7-841c32c029e0" providerId="ADAL" clId="{670531AC-1667-4F97-B1A6-5D38F8A44A79}" dt="2026-10-20T08:37:28.994" v="2861" actId="14100"/>
           <ac:cxnSpMkLst>
             <pc:docMk/>
-            <pc:sldMk cId="3041934445" sldId="268"/>
-            <ac:cxnSpMk id="10" creationId="{11C1B729-71AF-E499-8D77-0743BB9453EB}"/>
+            <pc:sldMk cId="1716350635" sldId="274"/>
+            <ac:cxnSpMk id="24" creationId="{9AD24558-ECC4-D7E6-67C2-EDE4927AAD4C}"/>
           </ac:cxnSpMkLst>
         </pc:cxnChg>
-        <pc:cxnChg chg="add mod">
-          <ac:chgData name="全 香玉" userId="1f3450e5-81b9-4f7a-82d7-841c32c029e0" providerId="ADAL" clId="{670531AC-1667-4F97-B1A6-5D38F8A44A79}" dt="2026-07-17T03:11:06.631" v="176" actId="14100"/>
+        <pc:cxnChg chg="add mod ord">
+          <ac:chgData name="全 香玉" userId="1f3450e5-81b9-4f7a-82d7-841c32c029e0" providerId="ADAL" clId="{670531AC-1667-4F97-B1A6-5D38F8A44A79}" dt="2026-10-20T08:37:41.905" v="2864" actId="167"/>
           <ac:cxnSpMkLst>
             <pc:docMk/>
-            <pc:sldMk cId="3041934445" sldId="268"/>
-            <ac:cxnSpMk id="24" creationId="{32E592DE-1510-3F3F-5820-0CE8A2840572}"/>
+            <pc:sldMk cId="1716350635" sldId="274"/>
+            <ac:cxnSpMk id="29" creationId="{BE7FA2A7-B0B0-1690-6F6F-66A4BE3BF254}"/>
           </ac:cxnSpMkLst>
         </pc:cxnChg>
         <pc:cxnChg chg="mod">
-          <ac:chgData name="全 香玉" userId="1f3450e5-81b9-4f7a-82d7-841c32c029e0" providerId="ADAL" clId="{670531AC-1667-4F97-B1A6-5D38F8A44A79}" dt="2026-07-17T03:07:08.801" v="134" actId="14100"/>
+          <ac:chgData name="全 香玉" userId="1f3450e5-81b9-4f7a-82d7-841c32c029e0" providerId="ADAL" clId="{670531AC-1667-4F97-B1A6-5D38F8A44A79}" dt="2026-10-20T08:34:29.058" v="2829" actId="14100"/>
           <ac:cxnSpMkLst>
             <pc:docMk/>
-            <pc:sldMk cId="3041934445" sldId="268"/>
-            <ac:cxnSpMk id="40" creationId="{C823132E-4C09-6130-B040-27D536789369}"/>
+            <pc:sldMk cId="1716350635" sldId="274"/>
+            <ac:cxnSpMk id="78" creationId="{221DE917-3759-D660-8EC0-259A7DE36FE5}"/>
           </ac:cxnSpMkLst>
         </pc:cxnChg>
         <pc:cxnChg chg="mod">
-          <ac:chgData name="全 香玉" userId="1f3450e5-81b9-4f7a-82d7-841c32c029e0" providerId="ADAL" clId="{670531AC-1667-4F97-B1A6-5D38F8A44A79}" dt="2026-07-17T03:10:44.583" v="174" actId="14100"/>
+          <ac:chgData name="全 香玉" userId="1f3450e5-81b9-4f7a-82d7-841c32c029e0" providerId="ADAL" clId="{670531AC-1667-4F97-B1A6-5D38F8A44A79}" dt="2026-10-20T08:37:14.617" v="2857" actId="14100"/>
           <ac:cxnSpMkLst>
             <pc:docMk/>
-            <pc:sldMk cId="3041934445" sldId="268"/>
-            <ac:cxnSpMk id="41" creationId="{4DCED330-D698-3CD9-478D-60C71CFFE4DF}"/>
-          </ac:cxnSpMkLst>
-        </pc:cxnChg>
-      </pc:sldChg>
-      <pc:sldChg chg="addSp delSp modSp new del mod setBg">
-        <pc:chgData name="全 香玉" userId="1f3450e5-81b9-4f7a-82d7-841c32c029e0" providerId="ADAL" clId="{670531AC-1667-4F97-B1A6-5D38F8A44A79}" dt="2026-07-23T02:35:25.284" v="2305" actId="47"/>
-        <pc:sldMkLst>
-          <pc:docMk/>
-          <pc:sldMk cId="3109571289" sldId="269"/>
-        </pc:sldMkLst>
-      </pc:sldChg>
-      <pc:sldChg chg="add del">
-        <pc:chgData name="全 香玉" userId="1f3450e5-81b9-4f7a-82d7-841c32c029e0" providerId="ADAL" clId="{670531AC-1667-4F97-B1A6-5D38F8A44A79}" dt="2026-07-23T02:35:23.089" v="2304" actId="47"/>
-        <pc:sldMkLst>
-          <pc:docMk/>
-          <pc:sldMk cId="1116325694" sldId="270"/>
-        </pc:sldMkLst>
-      </pc:sldChg>
-      <pc:sldChg chg="addSp delSp modSp add mod ord">
-        <pc:chgData name="全 香玉" userId="1f3450e5-81b9-4f7a-82d7-841c32c029e0" providerId="ADAL" clId="{670531AC-1667-4F97-B1A6-5D38F8A44A79}" dt="2026-07-23T10:52:18.564" v="2823" actId="1076"/>
-        <pc:sldMkLst>
-          <pc:docMk/>
-          <pc:sldMk cId="320822935" sldId="271"/>
-        </pc:sldMkLst>
-        <pc:spChg chg="add del mod ord">
-          <ac:chgData name="全 香玉" userId="1f3450e5-81b9-4f7a-82d7-841c32c029e0" providerId="ADAL" clId="{670531AC-1667-4F97-B1A6-5D38F8A44A79}" dt="2026-07-23T02:16:57.729" v="1858" actId="478"/>
-          <ac:spMkLst>
-            <pc:docMk/>
-            <pc:sldMk cId="320822935" sldId="271"/>
-            <ac:spMk id="27" creationId="{FFD9A9D9-2967-FA03-E1BD-B19A9D41DF5A}"/>
-          </ac:spMkLst>
-        </pc:spChg>
-        <pc:spChg chg="add del mod ord">
-          <ac:chgData name="全 香玉" userId="1f3450e5-81b9-4f7a-82d7-841c32c029e0" providerId="ADAL" clId="{670531AC-1667-4F97-B1A6-5D38F8A44A79}" dt="2026-07-23T02:19:15.481" v="1875" actId="478"/>
-          <ac:spMkLst>
-            <pc:docMk/>
-            <pc:sldMk cId="320822935" sldId="271"/>
-            <ac:spMk id="28" creationId="{B59C5699-7ABD-A1C5-7832-2ED8D96D7A46}"/>
-          </ac:spMkLst>
-        </pc:spChg>
-        <pc:spChg chg="add del mod ord">
-          <ac:chgData name="全 香玉" userId="1f3450e5-81b9-4f7a-82d7-841c32c029e0" providerId="ADAL" clId="{670531AC-1667-4F97-B1A6-5D38F8A44A79}" dt="2026-07-23T02:12:30.406" v="1723" actId="478"/>
-          <ac:spMkLst>
-            <pc:docMk/>
-            <pc:sldMk cId="320822935" sldId="271"/>
-            <ac:spMk id="29" creationId="{F3A9DA67-D51D-C994-487A-DAF76C5C852B}"/>
-          </ac:spMkLst>
-        </pc:spChg>
-        <pc:spChg chg="add mod ord">
-          <ac:chgData name="全 香玉" userId="1f3450e5-81b9-4f7a-82d7-841c32c029e0" providerId="ADAL" clId="{670531AC-1667-4F97-B1A6-5D38F8A44A79}" dt="2026-07-23T09:30:35.788" v="2377" actId="165"/>
-          <ac:spMkLst>
-            <pc:docMk/>
-            <pc:sldMk cId="320822935" sldId="271"/>
-            <ac:spMk id="31" creationId="{053F6D08-41BC-F51C-A6F6-B8CDB7DC25E7}"/>
-          </ac:spMkLst>
-        </pc:spChg>
-        <pc:spChg chg="add mod ord">
-          <ac:chgData name="全 香玉" userId="1f3450e5-81b9-4f7a-82d7-841c32c029e0" providerId="ADAL" clId="{670531AC-1667-4F97-B1A6-5D38F8A44A79}" dt="2026-07-23T10:01:50.617" v="2536" actId="14100"/>
-          <ac:spMkLst>
-            <pc:docMk/>
-            <pc:sldMk cId="320822935" sldId="271"/>
-            <ac:spMk id="34" creationId="{9B4C47D8-5653-946E-25C0-E3D177A3002B}"/>
-          </ac:spMkLst>
-        </pc:spChg>
-        <pc:spChg chg="add mod ord">
-          <ac:chgData name="全 香玉" userId="1f3450e5-81b9-4f7a-82d7-841c32c029e0" providerId="ADAL" clId="{670531AC-1667-4F97-B1A6-5D38F8A44A79}" dt="2026-07-23T02:27:00.001" v="2092" actId="16959"/>
-          <ac:spMkLst>
-            <pc:docMk/>
-            <pc:sldMk cId="320822935" sldId="271"/>
-            <ac:spMk id="36" creationId="{56E31054-4C6F-71D5-6FD0-6EBCCEDE91C6}"/>
-          </ac:spMkLst>
-        </pc:spChg>
-        <pc:spChg chg="add mod topLvl">
-          <ac:chgData name="全 香玉" userId="1f3450e5-81b9-4f7a-82d7-841c32c029e0" providerId="ADAL" clId="{670531AC-1667-4F97-B1A6-5D38F8A44A79}" dt="2026-07-23T09:30:54.694" v="2382" actId="164"/>
-          <ac:spMkLst>
-            <pc:docMk/>
-            <pc:sldMk cId="320822935" sldId="271"/>
-            <ac:spMk id="60" creationId="{87CA5E10-8FFB-FF0D-4C15-679FFB0122AE}"/>
-          </ac:spMkLst>
-        </pc:spChg>
-        <pc:spChg chg="add mod topLvl">
-          <ac:chgData name="全 香玉" userId="1f3450e5-81b9-4f7a-82d7-841c32c029e0" providerId="ADAL" clId="{670531AC-1667-4F97-B1A6-5D38F8A44A79}" dt="2026-07-23T09:30:54.694" v="2382" actId="164"/>
-          <ac:spMkLst>
-            <pc:docMk/>
-            <pc:sldMk cId="320822935" sldId="271"/>
-            <ac:spMk id="63" creationId="{2D9CC5A0-C964-FFF0-E492-7C7F2DEE61EA}"/>
-          </ac:spMkLst>
-        </pc:spChg>
-        <pc:spChg chg="mod topLvl">
-          <ac:chgData name="全 香玉" userId="1f3450e5-81b9-4f7a-82d7-841c32c029e0" providerId="ADAL" clId="{670531AC-1667-4F97-B1A6-5D38F8A44A79}" dt="2026-07-23T09:30:35.788" v="2377" actId="165"/>
-          <ac:spMkLst>
-            <pc:docMk/>
-            <pc:sldMk cId="320822935" sldId="271"/>
-            <ac:spMk id="130" creationId="{22BFB687-C0E6-FB0D-1AAA-840E9FC83963}"/>
-          </ac:spMkLst>
-        </pc:spChg>
-        <pc:spChg chg="add mod">
-          <ac:chgData name="全 香玉" userId="1f3450e5-81b9-4f7a-82d7-841c32c029e0" providerId="ADAL" clId="{670531AC-1667-4F97-B1A6-5D38F8A44A79}" dt="2026-07-23T09:30:54.694" v="2382" actId="164"/>
-          <ac:spMkLst>
-            <pc:docMk/>
-            <pc:sldMk cId="320822935" sldId="271"/>
-            <ac:spMk id="133" creationId="{0C0F2BBB-A0F2-09E4-7A21-C03B3DD56AF8}"/>
-          </ac:spMkLst>
-        </pc:spChg>
-        <pc:spChg chg="add mod">
-          <ac:chgData name="全 香玉" userId="1f3450e5-81b9-4f7a-82d7-841c32c029e0" providerId="ADAL" clId="{670531AC-1667-4F97-B1A6-5D38F8A44A79}" dt="2026-07-23T09:30:54.694" v="2382" actId="164"/>
-          <ac:spMkLst>
-            <pc:docMk/>
-            <pc:sldMk cId="320822935" sldId="271"/>
-            <ac:spMk id="137" creationId="{67EA756C-7178-2337-255A-A4B77D6AF8D1}"/>
-          </ac:spMkLst>
-        </pc:spChg>
-        <pc:spChg chg="add mod">
-          <ac:chgData name="全 香玉" userId="1f3450e5-81b9-4f7a-82d7-841c32c029e0" providerId="ADAL" clId="{670531AC-1667-4F97-B1A6-5D38F8A44A79}" dt="2026-07-23T09:30:54.694" v="2382" actId="164"/>
-          <ac:spMkLst>
-            <pc:docMk/>
-            <pc:sldMk cId="320822935" sldId="271"/>
-            <ac:spMk id="139" creationId="{14B5F41D-01F2-C36C-6088-61A4F03794DA}"/>
-          </ac:spMkLst>
-        </pc:spChg>
-        <pc:spChg chg="mod topLvl">
-          <ac:chgData name="全 香玉" userId="1f3450e5-81b9-4f7a-82d7-841c32c029e0" providerId="ADAL" clId="{670531AC-1667-4F97-B1A6-5D38F8A44A79}" dt="2026-07-23T09:30:35.788" v="2377" actId="165"/>
-          <ac:spMkLst>
-            <pc:docMk/>
-            <pc:sldMk cId="320822935" sldId="271"/>
-            <ac:spMk id="140" creationId="{FA72BF2D-E283-9927-82F3-17E3D17C66C2}"/>
-          </ac:spMkLst>
-        </pc:spChg>
-        <pc:spChg chg="del mod topLvl">
-          <ac:chgData name="全 香玉" userId="1f3450e5-81b9-4f7a-82d7-841c32c029e0" providerId="ADAL" clId="{670531AC-1667-4F97-B1A6-5D38F8A44A79}" dt="2026-07-23T02:23:32.891" v="2060" actId="478"/>
-          <ac:spMkLst>
-            <pc:docMk/>
-            <pc:sldMk cId="320822935" sldId="271"/>
-            <ac:spMk id="141" creationId="{5EF8C26F-9158-3BD3-4ABA-6A618303F457}"/>
-          </ac:spMkLst>
-        </pc:spChg>
-        <pc:spChg chg="add mod topLvl">
-          <ac:chgData name="全 香玉" userId="1f3450e5-81b9-4f7a-82d7-841c32c029e0" providerId="ADAL" clId="{670531AC-1667-4F97-B1A6-5D38F8A44A79}" dt="2026-07-23T09:30:54.694" v="2382" actId="164"/>
-          <ac:spMkLst>
-            <pc:docMk/>
-            <pc:sldMk cId="320822935" sldId="271"/>
-            <ac:spMk id="144" creationId="{49E8488A-CE86-DE29-4D91-21BFADF57941}"/>
-          </ac:spMkLst>
-        </pc:spChg>
-        <pc:spChg chg="add mod ord">
-          <ac:chgData name="全 香玉" userId="1f3450e5-81b9-4f7a-82d7-841c32c029e0" providerId="ADAL" clId="{670531AC-1667-4F97-B1A6-5D38F8A44A79}" dt="2026-07-23T10:46:50.570" v="2781" actId="164"/>
-          <ac:spMkLst>
-            <pc:docMk/>
-            <pc:sldMk cId="320822935" sldId="271"/>
-            <ac:spMk id="145" creationId="{D6C9D1BC-CE0C-7411-21DD-4C0C237BFF11}"/>
-          </ac:spMkLst>
-        </pc:spChg>
-        <pc:spChg chg="add mod ord">
-          <ac:chgData name="全 香玉" userId="1f3450e5-81b9-4f7a-82d7-841c32c029e0" providerId="ADAL" clId="{670531AC-1667-4F97-B1A6-5D38F8A44A79}" dt="2026-07-23T10:46:50.570" v="2781" actId="164"/>
-          <ac:spMkLst>
-            <pc:docMk/>
-            <pc:sldMk cId="320822935" sldId="271"/>
-            <ac:spMk id="147" creationId="{78FC8C47-95BE-12D3-AA4B-E942B16BCE1A}"/>
-          </ac:spMkLst>
-        </pc:spChg>
-        <pc:spChg chg="add mod">
-          <ac:chgData name="全 香玉" userId="1f3450e5-81b9-4f7a-82d7-841c32c029e0" providerId="ADAL" clId="{670531AC-1667-4F97-B1A6-5D38F8A44A79}" dt="2026-07-23T10:46:50.570" v="2781" actId="164"/>
-          <ac:spMkLst>
-            <pc:docMk/>
-            <pc:sldMk cId="320822935" sldId="271"/>
-            <ac:spMk id="177" creationId="{0C0E0EEB-5816-CE46-43F4-C1C0972C8938}"/>
-          </ac:spMkLst>
-        </pc:spChg>
-        <pc:spChg chg="mod topLvl">
-          <ac:chgData name="全 香玉" userId="1f3450e5-81b9-4f7a-82d7-841c32c029e0" providerId="ADAL" clId="{670531AC-1667-4F97-B1A6-5D38F8A44A79}" dt="2026-07-23T09:30:35.788" v="2377" actId="165"/>
-          <ac:spMkLst>
-            <pc:docMk/>
-            <pc:sldMk cId="320822935" sldId="271"/>
-            <ac:spMk id="178" creationId="{2A2BC753-74A4-22CD-55C6-2A9758ED9DAA}"/>
-          </ac:spMkLst>
-        </pc:spChg>
-        <pc:spChg chg="mod ord topLvl">
-          <ac:chgData name="全 香玉" userId="1f3450e5-81b9-4f7a-82d7-841c32c029e0" providerId="ADAL" clId="{670531AC-1667-4F97-B1A6-5D38F8A44A79}" dt="2026-07-23T09:30:35.788" v="2377" actId="165"/>
-          <ac:spMkLst>
-            <pc:docMk/>
-            <pc:sldMk cId="320822935" sldId="271"/>
-            <ac:spMk id="180" creationId="{8F953448-758B-31CD-0A02-20F48018AC22}"/>
-          </ac:spMkLst>
-        </pc:spChg>
-        <pc:spChg chg="del mod topLvl">
-          <ac:chgData name="全 香玉" userId="1f3450e5-81b9-4f7a-82d7-841c32c029e0" providerId="ADAL" clId="{670531AC-1667-4F97-B1A6-5D38F8A44A79}" dt="2026-07-23T02:07:09.122" v="1558" actId="478"/>
-          <ac:spMkLst>
-            <pc:docMk/>
-            <pc:sldMk cId="320822935" sldId="271"/>
-            <ac:spMk id="181" creationId="{F5112C38-B312-357A-72EF-0EE7DBC94A85}"/>
-          </ac:spMkLst>
-        </pc:spChg>
-        <pc:spChg chg="mod topLvl">
-          <ac:chgData name="全 香玉" userId="1f3450e5-81b9-4f7a-82d7-841c32c029e0" providerId="ADAL" clId="{670531AC-1667-4F97-B1A6-5D38F8A44A79}" dt="2026-07-23T02:27:00.001" v="2092" actId="16959"/>
-          <ac:spMkLst>
-            <pc:docMk/>
-            <pc:sldMk cId="320822935" sldId="271"/>
-            <ac:spMk id="183" creationId="{023170A7-EE8B-6405-9336-2916FF6DC7E4}"/>
-          </ac:spMkLst>
-        </pc:spChg>
-        <pc:spChg chg="del mod topLvl">
-          <ac:chgData name="全 香玉" userId="1f3450e5-81b9-4f7a-82d7-841c32c029e0" providerId="ADAL" clId="{670531AC-1667-4F97-B1A6-5D38F8A44A79}" dt="2026-07-23T02:10:21.985" v="1667" actId="478"/>
-          <ac:spMkLst>
-            <pc:docMk/>
-            <pc:sldMk cId="320822935" sldId="271"/>
-            <ac:spMk id="187" creationId="{D0E5ED6B-F5EA-0182-2ACC-212170B3EDE7}"/>
-          </ac:spMkLst>
-        </pc:spChg>
-        <pc:spChg chg="del mod topLvl">
-          <ac:chgData name="全 香玉" userId="1f3450e5-81b9-4f7a-82d7-841c32c029e0" providerId="ADAL" clId="{670531AC-1667-4F97-B1A6-5D38F8A44A79}" dt="2026-07-23T02:19:15.481" v="1875" actId="478"/>
-          <ac:spMkLst>
-            <pc:docMk/>
-            <pc:sldMk cId="320822935" sldId="271"/>
-            <ac:spMk id="189" creationId="{E316FA86-1BF0-B3C7-CFFB-B03CA543C481}"/>
-          </ac:spMkLst>
-        </pc:spChg>
-        <pc:spChg chg="add del">
-          <ac:chgData name="全 香玉" userId="1f3450e5-81b9-4f7a-82d7-841c32c029e0" providerId="ADAL" clId="{670531AC-1667-4F97-B1A6-5D38F8A44A79}" dt="2026-07-23T09:35:29.613" v="2425" actId="478"/>
-          <ac:spMkLst>
-            <pc:docMk/>
-            <pc:sldMk cId="320822935" sldId="271"/>
-            <ac:spMk id="190" creationId="{FEDAA750-3B69-DE98-1501-A2BBE804E0E8}"/>
-          </ac:spMkLst>
-        </pc:spChg>
-        <pc:spChg chg="mod topLvl">
-          <ac:chgData name="全 香玉" userId="1f3450e5-81b9-4f7a-82d7-841c32c029e0" providerId="ADAL" clId="{670531AC-1667-4F97-B1A6-5D38F8A44A79}" dt="2026-07-23T02:27:00.001" v="2092" actId="16959"/>
-          <ac:spMkLst>
-            <pc:docMk/>
-            <pc:sldMk cId="320822935" sldId="271"/>
-            <ac:spMk id="191" creationId="{D0DA9189-6A2D-5C33-F1C7-7F50887983BB}"/>
-          </ac:spMkLst>
-        </pc:spChg>
-        <pc:spChg chg="add del mod">
-          <ac:chgData name="全 香玉" userId="1f3450e5-81b9-4f7a-82d7-841c32c029e0" providerId="ADAL" clId="{670531AC-1667-4F97-B1A6-5D38F8A44A79}" dt="2026-07-23T09:35:59.977" v="2429" actId="11529"/>
-          <ac:spMkLst>
-            <pc:docMk/>
-            <pc:sldMk cId="320822935" sldId="271"/>
-            <ac:spMk id="192" creationId="{617BD96F-44A1-6704-0A1A-9238664EF6AC}"/>
-          </ac:spMkLst>
-        </pc:spChg>
-        <pc:spChg chg="add mod">
-          <ac:chgData name="全 香玉" userId="1f3450e5-81b9-4f7a-82d7-841c32c029e0" providerId="ADAL" clId="{670531AC-1667-4F97-B1A6-5D38F8A44A79}" dt="2026-07-23T10:46:50.570" v="2781" actId="164"/>
-          <ac:spMkLst>
-            <pc:docMk/>
-            <pc:sldMk cId="320822935" sldId="271"/>
-            <ac:spMk id="193" creationId="{5F2773B3-850F-8B3B-89F1-0DFFFAF28E45}"/>
-          </ac:spMkLst>
-        </pc:spChg>
-        <pc:spChg chg="add mod">
-          <ac:chgData name="全 香玉" userId="1f3450e5-81b9-4f7a-82d7-841c32c029e0" providerId="ADAL" clId="{670531AC-1667-4F97-B1A6-5D38F8A44A79}" dt="2026-07-23T10:46:50.570" v="2781" actId="164"/>
-          <ac:spMkLst>
-            <pc:docMk/>
-            <pc:sldMk cId="320822935" sldId="271"/>
-            <ac:spMk id="194" creationId="{F714665F-88F8-A173-1FC4-485C43F341D0}"/>
-          </ac:spMkLst>
-        </pc:spChg>
-        <pc:spChg chg="mod topLvl">
-          <ac:chgData name="全 香玉" userId="1f3450e5-81b9-4f7a-82d7-841c32c029e0" providerId="ADAL" clId="{670531AC-1667-4F97-B1A6-5D38F8A44A79}" dt="2026-07-23T02:27:00.001" v="2092" actId="16959"/>
-          <ac:spMkLst>
-            <pc:docMk/>
-            <pc:sldMk cId="320822935" sldId="271"/>
-            <ac:spMk id="196" creationId="{16FBB22E-A9A0-33EF-6667-C1ECD9251DD6}"/>
-          </ac:spMkLst>
-        </pc:spChg>
-        <pc:spChg chg="mod topLvl">
-          <ac:chgData name="全 香玉" userId="1f3450e5-81b9-4f7a-82d7-841c32c029e0" providerId="ADAL" clId="{670531AC-1667-4F97-B1A6-5D38F8A44A79}" dt="2026-07-23T02:27:00.001" v="2092" actId="16959"/>
-          <ac:spMkLst>
-            <pc:docMk/>
-            <pc:sldMk cId="320822935" sldId="271"/>
-            <ac:spMk id="199" creationId="{FA67BE37-6E72-0E99-6032-D1BB595475CA}"/>
-          </ac:spMkLst>
-        </pc:spChg>
-        <pc:spChg chg="mod topLvl">
-          <ac:chgData name="全 香玉" userId="1f3450e5-81b9-4f7a-82d7-841c32c029e0" providerId="ADAL" clId="{670531AC-1667-4F97-B1A6-5D38F8A44A79}" dt="2026-07-23T02:27:00.001" v="2092" actId="16959"/>
-          <ac:spMkLst>
-            <pc:docMk/>
-            <pc:sldMk cId="320822935" sldId="271"/>
-            <ac:spMk id="201" creationId="{074B58AF-8E92-D535-1FCF-BDF1F2891A69}"/>
-          </ac:spMkLst>
-        </pc:spChg>
-        <pc:spChg chg="mod">
-          <ac:chgData name="全 香玉" userId="1f3450e5-81b9-4f7a-82d7-841c32c029e0" providerId="ADAL" clId="{670531AC-1667-4F97-B1A6-5D38F8A44A79}" dt="2026-07-23T02:20:50.369" v="1883" actId="1076"/>
-          <ac:spMkLst>
-            <pc:docMk/>
-            <pc:sldMk cId="320822935" sldId="271"/>
-            <ac:spMk id="203" creationId="{95356ABD-AC5C-BED3-27C2-8A1C46A62254}"/>
-          </ac:spMkLst>
-        </pc:spChg>
-        <pc:spChg chg="mod">
-          <ac:chgData name="全 香玉" userId="1f3450e5-81b9-4f7a-82d7-841c32c029e0" providerId="ADAL" clId="{670531AC-1667-4F97-B1A6-5D38F8A44A79}" dt="2026-07-23T09:30:35.788" v="2377" actId="165"/>
-          <ac:spMkLst>
-            <pc:docMk/>
-            <pc:sldMk cId="320822935" sldId="271"/>
-            <ac:spMk id="212" creationId="{092AF00C-4641-0E1C-0B67-753240ED7557}"/>
-          </ac:spMkLst>
-        </pc:spChg>
-        <pc:spChg chg="add del mod ord">
-          <ac:chgData name="全 香玉" userId="1f3450e5-81b9-4f7a-82d7-841c32c029e0" providerId="ADAL" clId="{670531AC-1667-4F97-B1A6-5D38F8A44A79}" dt="2026-07-23T10:52:07.942" v="2816" actId="478"/>
-          <ac:spMkLst>
-            <pc:docMk/>
-            <pc:sldMk cId="320822935" sldId="271"/>
-            <ac:spMk id="220" creationId="{407ED3E9-F43C-94F6-4132-4527AFE67117}"/>
-          </ac:spMkLst>
-        </pc:spChg>
-        <pc:spChg chg="add del mod ord">
-          <ac:chgData name="全 香玉" userId="1f3450e5-81b9-4f7a-82d7-841c32c029e0" providerId="ADAL" clId="{670531AC-1667-4F97-B1A6-5D38F8A44A79}" dt="2026-07-23T10:01:46.349" v="2535" actId="478"/>
-          <ac:spMkLst>
-            <pc:docMk/>
-            <pc:sldMk cId="320822935" sldId="271"/>
-            <ac:spMk id="229" creationId="{BBAD08DA-CC7A-B0C6-0196-05BD0D20AC70}"/>
-          </ac:spMkLst>
-        </pc:spChg>
-        <pc:spChg chg="add del ord">
-          <ac:chgData name="全 香玉" userId="1f3450e5-81b9-4f7a-82d7-841c32c029e0" providerId="ADAL" clId="{670531AC-1667-4F97-B1A6-5D38F8A44A79}" dt="2026-07-23T10:23:06.258" v="2593" actId="11529"/>
-          <ac:spMkLst>
-            <pc:docMk/>
-            <pc:sldMk cId="320822935" sldId="271"/>
-            <ac:spMk id="254" creationId="{5A54AD7F-087F-EE8B-4E5A-CCD417DB7B9A}"/>
-          </ac:spMkLst>
-        </pc:spChg>
-        <pc:spChg chg="add del mod">
-          <ac:chgData name="全 香玉" userId="1f3450e5-81b9-4f7a-82d7-841c32c029e0" providerId="ADAL" clId="{670531AC-1667-4F97-B1A6-5D38F8A44A79}" dt="2026-07-23T10:24:39.289" v="2606" actId="478"/>
-          <ac:spMkLst>
-            <pc:docMk/>
-            <pc:sldMk cId="320822935" sldId="271"/>
-            <ac:spMk id="255" creationId="{D659BD4F-130B-2A5C-1AF6-B556A487B493}"/>
-          </ac:spMkLst>
-        </pc:spChg>
-        <pc:spChg chg="add mod">
-          <ac:chgData name="全 香玉" userId="1f3450e5-81b9-4f7a-82d7-841c32c029e0" providerId="ADAL" clId="{670531AC-1667-4F97-B1A6-5D38F8A44A79}" dt="2026-07-23T10:47:08.571" v="2784" actId="1076"/>
-          <ac:spMkLst>
-            <pc:docMk/>
-            <pc:sldMk cId="320822935" sldId="271"/>
-            <ac:spMk id="260" creationId="{35224B4F-E20D-8F62-31A6-DD4951021291}"/>
-          </ac:spMkLst>
-        </pc:spChg>
-        <pc:spChg chg="add del mod ord">
-          <ac:chgData name="全 香玉" userId="1f3450e5-81b9-4f7a-82d7-841c32c029e0" providerId="ADAL" clId="{670531AC-1667-4F97-B1A6-5D38F8A44A79}" dt="2026-07-23T10:52:10.989" v="2819" actId="478"/>
-          <ac:spMkLst>
-            <pc:docMk/>
-            <pc:sldMk cId="320822935" sldId="271"/>
-            <ac:spMk id="278" creationId="{B78E66E3-EBF8-FD26-E47B-9FA7E5796691}"/>
-          </ac:spMkLst>
-        </pc:spChg>
-        <pc:spChg chg="add del mod ord">
-          <ac:chgData name="全 香玉" userId="1f3450e5-81b9-4f7a-82d7-841c32c029e0" providerId="ADAL" clId="{670531AC-1667-4F97-B1A6-5D38F8A44A79}" dt="2026-07-23T10:52:08.829" v="2817" actId="478"/>
-          <ac:spMkLst>
-            <pc:docMk/>
-            <pc:sldMk cId="320822935" sldId="271"/>
-            <ac:spMk id="279" creationId="{5FBFD174-2408-6656-11B1-7888DA8932EB}"/>
-          </ac:spMkLst>
-        </pc:spChg>
-        <pc:spChg chg="add del mod">
-          <ac:chgData name="全 香玉" userId="1f3450e5-81b9-4f7a-82d7-841c32c029e0" providerId="ADAL" clId="{670531AC-1667-4F97-B1A6-5D38F8A44A79}" dt="2026-07-23T10:38:43.487" v="2732" actId="478"/>
-          <ac:spMkLst>
-            <pc:docMk/>
-            <pc:sldMk cId="320822935" sldId="271"/>
-            <ac:spMk id="281" creationId="{9AC6C243-5AFF-F5FF-F51E-87A949FD8094}"/>
-          </ac:spMkLst>
-        </pc:spChg>
-        <pc:spChg chg="add del">
-          <ac:chgData name="全 香玉" userId="1f3450e5-81b9-4f7a-82d7-841c32c029e0" providerId="ADAL" clId="{670531AC-1667-4F97-B1A6-5D38F8A44A79}" dt="2026-07-23T10:39:09.830" v="2734" actId="478"/>
-          <ac:spMkLst>
-            <pc:docMk/>
-            <pc:sldMk cId="320822935" sldId="271"/>
-            <ac:spMk id="282" creationId="{9E0E18F1-0735-DBFC-3065-E68BD408F226}"/>
-          </ac:spMkLst>
-        </pc:spChg>
-        <pc:spChg chg="add del">
-          <ac:chgData name="全 香玉" userId="1f3450e5-81b9-4f7a-82d7-841c32c029e0" providerId="ADAL" clId="{670531AC-1667-4F97-B1A6-5D38F8A44A79}" dt="2026-07-23T10:52:14.440" v="2822" actId="478"/>
-          <ac:spMkLst>
-            <pc:docMk/>
-            <pc:sldMk cId="320822935" sldId="271"/>
-            <ac:spMk id="283" creationId="{36D6306A-C174-232D-CFBA-E50701C69659}"/>
-          </ac:spMkLst>
-        </pc:spChg>
-        <pc:spChg chg="add del">
-          <ac:chgData name="全 香玉" userId="1f3450e5-81b9-4f7a-82d7-841c32c029e0" providerId="ADAL" clId="{670531AC-1667-4F97-B1A6-5D38F8A44A79}" dt="2026-07-23T10:52:12.135" v="2820" actId="478"/>
-          <ac:spMkLst>
-            <pc:docMk/>
-            <pc:sldMk cId="320822935" sldId="271"/>
-            <ac:spMk id="284" creationId="{DA89A084-8168-804C-4264-BC7C752FC629}"/>
-          </ac:spMkLst>
-        </pc:spChg>
-        <pc:spChg chg="add mod ord">
-          <ac:chgData name="全 香玉" userId="1f3450e5-81b9-4f7a-82d7-841c32c029e0" providerId="ADAL" clId="{670531AC-1667-4F97-B1A6-5D38F8A44A79}" dt="2026-07-23T10:47:29.112" v="2785" actId="14100"/>
-          <ac:spMkLst>
-            <pc:docMk/>
-            <pc:sldMk cId="320822935" sldId="271"/>
-            <ac:spMk id="287" creationId="{424EF706-D0D6-1FF6-E923-78BCEDE021E6}"/>
-          </ac:spMkLst>
-        </pc:spChg>
-        <pc:spChg chg="add del mod ord">
-          <ac:chgData name="全 香玉" userId="1f3450e5-81b9-4f7a-82d7-841c32c029e0" providerId="ADAL" clId="{670531AC-1667-4F97-B1A6-5D38F8A44A79}" dt="2026-07-23T10:52:13.237" v="2821" actId="478"/>
-          <ac:spMkLst>
-            <pc:docMk/>
-            <pc:sldMk cId="320822935" sldId="271"/>
-            <ac:spMk id="291" creationId="{D6946235-9C2D-2E63-CF57-F56679DBAF38}"/>
-          </ac:spMkLst>
-        </pc:spChg>
-        <pc:grpChg chg="mod">
-          <ac:chgData name="全 香玉" userId="1f3450e5-81b9-4f7a-82d7-841c32c029e0" providerId="ADAL" clId="{670531AC-1667-4F97-B1A6-5D38F8A44A79}" dt="2026-07-23T09:30:54.694" v="2382" actId="164"/>
-          <ac:grpSpMkLst>
-            <pc:docMk/>
-            <pc:sldMk cId="320822935" sldId="271"/>
-            <ac:grpSpMk id="37" creationId="{523E0F75-90EC-EC08-EC0F-ADCD9661C9A2}"/>
-          </ac:grpSpMkLst>
-        </pc:grpChg>
-        <pc:grpChg chg="add mod">
-          <ac:chgData name="全 香玉" userId="1f3450e5-81b9-4f7a-82d7-841c32c029e0" providerId="ADAL" clId="{670531AC-1667-4F97-B1A6-5D38F8A44A79}" dt="2026-07-23T09:30:30.551" v="2376" actId="1076"/>
-          <ac:grpSpMkLst>
-            <pc:docMk/>
-            <pc:sldMk cId="320822935" sldId="271"/>
-            <ac:grpSpMk id="167" creationId="{F47602E7-7789-D153-03A2-5BF243FEE7B6}"/>
-          </ac:grpSpMkLst>
-        </pc:grpChg>
-        <pc:grpChg chg="add mod">
-          <ac:chgData name="全 香玉" userId="1f3450e5-81b9-4f7a-82d7-841c32c029e0" providerId="ADAL" clId="{670531AC-1667-4F97-B1A6-5D38F8A44A79}" dt="2026-07-23T10:52:18.564" v="2823" actId="1076"/>
-          <ac:grpSpMkLst>
-            <pc:docMk/>
-            <pc:sldMk cId="320822935" sldId="271"/>
-            <ac:grpSpMk id="171" creationId="{676647FD-B9D8-F8CB-BADF-142739ADCF25}"/>
-          </ac:grpSpMkLst>
-        </pc:grpChg>
-        <pc:grpChg chg="del">
-          <ac:chgData name="全 香玉" userId="1f3450e5-81b9-4f7a-82d7-841c32c029e0" providerId="ADAL" clId="{670531AC-1667-4F97-B1A6-5D38F8A44A79}" dt="2026-07-23T02:06:56.821" v="1555" actId="165"/>
-          <ac:grpSpMkLst>
-            <pc:docMk/>
-            <pc:sldMk cId="320822935" sldId="271"/>
-            <ac:grpSpMk id="182" creationId="{BBB59E1B-4FF0-490A-26C6-572CD115A998}"/>
-          </ac:grpSpMkLst>
-        </pc:grpChg>
-        <pc:grpChg chg="mod">
-          <ac:chgData name="全 香玉" userId="1f3450e5-81b9-4f7a-82d7-841c32c029e0" providerId="ADAL" clId="{670531AC-1667-4F97-B1A6-5D38F8A44A79}" dt="2026-07-23T02:01:24.518" v="1199" actId="1076"/>
-          <ac:grpSpMkLst>
-            <pc:docMk/>
-            <pc:sldMk cId="320822935" sldId="271"/>
-            <ac:grpSpMk id="210" creationId="{30C23E97-AE9B-2D4B-27CF-8B18946BF5A0}"/>
-          </ac:grpSpMkLst>
-        </pc:grpChg>
-        <pc:grpChg chg="add mod">
-          <ac:chgData name="全 香玉" userId="1f3450e5-81b9-4f7a-82d7-841c32c029e0" providerId="ADAL" clId="{670531AC-1667-4F97-B1A6-5D38F8A44A79}" dt="2026-07-23T10:45:41.042" v="2779" actId="164"/>
-          <ac:grpSpMkLst>
-            <pc:docMk/>
-            <pc:sldMk cId="320822935" sldId="271"/>
-            <ac:grpSpMk id="285" creationId="{67FC5463-D511-12DF-3BA9-921ADDFF2600}"/>
-          </ac:grpSpMkLst>
-        </pc:grpChg>
-        <pc:grpChg chg="add del mod">
-          <ac:chgData name="全 香玉" userId="1f3450e5-81b9-4f7a-82d7-841c32c029e0" providerId="ADAL" clId="{670531AC-1667-4F97-B1A6-5D38F8A44A79}" dt="2026-07-23T10:52:02.846" v="2814" actId="478"/>
-          <ac:grpSpMkLst>
-            <pc:docMk/>
-            <pc:sldMk cId="320822935" sldId="271"/>
-            <ac:grpSpMk id="288" creationId="{8A131B54-56A0-7238-4268-1587E6E479F5}"/>
-          </ac:grpSpMkLst>
-        </pc:grpChg>
-        <pc:grpChg chg="add del mod">
-          <ac:chgData name="全 香玉" userId="1f3450e5-81b9-4f7a-82d7-841c32c029e0" providerId="ADAL" clId="{670531AC-1667-4F97-B1A6-5D38F8A44A79}" dt="2026-07-23T10:52:05.204" v="2815" actId="478"/>
-          <ac:grpSpMkLst>
-            <pc:docMk/>
-            <pc:sldMk cId="320822935" sldId="271"/>
-            <ac:grpSpMk id="289" creationId="{E715D5C9-D24D-FD67-7BA3-DE754E043FA9}"/>
-          </ac:grpSpMkLst>
-        </pc:grpChg>
-        <pc:cxnChg chg="add mod">
-          <ac:chgData name="全 香玉" userId="1f3450e5-81b9-4f7a-82d7-841c32c029e0" providerId="ADAL" clId="{670531AC-1667-4F97-B1A6-5D38F8A44A79}" dt="2026-07-23T02:25:11.682" v="2078" actId="1076"/>
-          <ac:cxnSpMkLst>
-            <pc:docMk/>
-            <pc:sldMk cId="320822935" sldId="271"/>
-            <ac:cxnSpMk id="5" creationId="{26570B17-F552-E6EA-5480-FE1282944121}"/>
-          </ac:cxnSpMkLst>
-        </pc:cxnChg>
-        <pc:cxnChg chg="add mod">
-          <ac:chgData name="全 香玉" userId="1f3450e5-81b9-4f7a-82d7-841c32c029e0" providerId="ADAL" clId="{670531AC-1667-4F97-B1A6-5D38F8A44A79}" dt="2026-07-23T02:25:05.558" v="2076" actId="1076"/>
-          <ac:cxnSpMkLst>
-            <pc:docMk/>
-            <pc:sldMk cId="320822935" sldId="271"/>
-            <ac:cxnSpMk id="6" creationId="{70412230-B909-5321-2D54-5ED8C3918027}"/>
-          </ac:cxnSpMkLst>
-        </pc:cxnChg>
-        <pc:cxnChg chg="add mod">
-          <ac:chgData name="全 香玉" userId="1f3450e5-81b9-4f7a-82d7-841c32c029e0" providerId="ADAL" clId="{670531AC-1667-4F97-B1A6-5D38F8A44A79}" dt="2026-07-23T02:25:16.677" v="2080" actId="1076"/>
-          <ac:cxnSpMkLst>
-            <pc:docMk/>
-            <pc:sldMk cId="320822935" sldId="271"/>
-            <ac:cxnSpMk id="7" creationId="{E7C3E9B0-9473-D3DB-E115-BAA569A6627B}"/>
-          </ac:cxnSpMkLst>
-        </pc:cxnChg>
-        <pc:cxnChg chg="add mod">
-          <ac:chgData name="全 香玉" userId="1f3450e5-81b9-4f7a-82d7-841c32c029e0" providerId="ADAL" clId="{670531AC-1667-4F97-B1A6-5D38F8A44A79}" dt="2026-07-23T02:03:25.169" v="1342" actId="1038"/>
-          <ac:cxnSpMkLst>
-            <pc:docMk/>
-            <pc:sldMk cId="320822935" sldId="271"/>
-            <ac:cxnSpMk id="12" creationId="{63F6F569-48BB-671E-B253-615713DFC82E}"/>
-          </ac:cxnSpMkLst>
-        </pc:cxnChg>
-        <pc:cxnChg chg="add mod">
-          <ac:chgData name="全 香玉" userId="1f3450e5-81b9-4f7a-82d7-841c32c029e0" providerId="ADAL" clId="{670531AC-1667-4F97-B1A6-5D38F8A44A79}" dt="2026-07-23T02:03:24.300" v="1341" actId="1038"/>
-          <ac:cxnSpMkLst>
-            <pc:docMk/>
-            <pc:sldMk cId="320822935" sldId="271"/>
-            <ac:cxnSpMk id="13" creationId="{F9C66CBD-B29E-8B38-0297-479F654AF13F}"/>
-          </ac:cxnSpMkLst>
-        </pc:cxnChg>
-        <pc:cxnChg chg="add mod">
-          <ac:chgData name="全 香玉" userId="1f3450e5-81b9-4f7a-82d7-841c32c029e0" providerId="ADAL" clId="{670531AC-1667-4F97-B1A6-5D38F8A44A79}" dt="2026-07-23T02:02:26.658" v="1282" actId="1076"/>
-          <ac:cxnSpMkLst>
-            <pc:docMk/>
-            <pc:sldMk cId="320822935" sldId="271"/>
-            <ac:cxnSpMk id="14" creationId="{EA0651D3-F6F3-ED88-396E-B1551949C6BD}"/>
-          </ac:cxnSpMkLst>
-        </pc:cxnChg>
-        <pc:cxnChg chg="add mod">
-          <ac:chgData name="全 香玉" userId="1f3450e5-81b9-4f7a-82d7-841c32c029e0" providerId="ADAL" clId="{670531AC-1667-4F97-B1A6-5D38F8A44A79}" dt="2026-07-23T02:02:00.866" v="1209" actId="1035"/>
-          <ac:cxnSpMkLst>
-            <pc:docMk/>
-            <pc:sldMk cId="320822935" sldId="271"/>
-            <ac:cxnSpMk id="15" creationId="{316CBBD2-3CDF-8AB8-23AB-00BE64B8D754}"/>
-          </ac:cxnSpMkLst>
-        </pc:cxnChg>
-        <pc:cxnChg chg="add mod">
-          <ac:chgData name="全 香玉" userId="1f3450e5-81b9-4f7a-82d7-841c32c029e0" providerId="ADAL" clId="{670531AC-1667-4F97-B1A6-5D38F8A44A79}" dt="2026-07-23T02:04:10.928" v="1352" actId="1076"/>
-          <ac:cxnSpMkLst>
-            <pc:docMk/>
-            <pc:sldMk cId="320822935" sldId="271"/>
-            <ac:cxnSpMk id="16" creationId="{B7C41C58-D085-04FF-7B4E-4A32BCC6D01E}"/>
-          </ac:cxnSpMkLst>
-        </pc:cxnChg>
-        <pc:cxnChg chg="add mod">
-          <ac:chgData name="全 香玉" userId="1f3450e5-81b9-4f7a-82d7-841c32c029e0" providerId="ADAL" clId="{670531AC-1667-4F97-B1A6-5D38F8A44A79}" dt="2026-07-23T02:04:10.928" v="1352" actId="1076"/>
-          <ac:cxnSpMkLst>
-            <pc:docMk/>
-            <pc:sldMk cId="320822935" sldId="271"/>
-            <ac:cxnSpMk id="17" creationId="{745CD498-5BC0-8ED8-FDF8-62F50292128D}"/>
-          </ac:cxnSpMkLst>
-        </pc:cxnChg>
-        <pc:cxnChg chg="add mod">
-          <ac:chgData name="全 香玉" userId="1f3450e5-81b9-4f7a-82d7-841c32c029e0" providerId="ADAL" clId="{670531AC-1667-4F97-B1A6-5D38F8A44A79}" dt="2026-07-23T02:04:10.928" v="1352" actId="1076"/>
-          <ac:cxnSpMkLst>
-            <pc:docMk/>
-            <pc:sldMk cId="320822935" sldId="271"/>
-            <ac:cxnSpMk id="18" creationId="{AB6349A2-576A-6C22-8143-16516B4E3C6E}"/>
-          </ac:cxnSpMkLst>
-        </pc:cxnChg>
-        <pc:cxnChg chg="add mod">
-          <ac:chgData name="全 香玉" userId="1f3450e5-81b9-4f7a-82d7-841c32c029e0" providerId="ADAL" clId="{670531AC-1667-4F97-B1A6-5D38F8A44A79}" dt="2026-07-23T02:04:10.928" v="1352" actId="1076"/>
-          <ac:cxnSpMkLst>
-            <pc:docMk/>
-            <pc:sldMk cId="320822935" sldId="271"/>
-            <ac:cxnSpMk id="19" creationId="{51D85B5F-A07F-7176-4009-7604BDECFB0A}"/>
-          </ac:cxnSpMkLst>
-        </pc:cxnChg>
-        <pc:cxnChg chg="add mod ord">
-          <ac:chgData name="全 香玉" userId="1f3450e5-81b9-4f7a-82d7-841c32c029e0" providerId="ADAL" clId="{670531AC-1667-4F97-B1A6-5D38F8A44A79}" dt="2026-07-23T02:05:00.554" v="1431" actId="167"/>
-          <ac:cxnSpMkLst>
-            <pc:docMk/>
-            <pc:sldMk cId="320822935" sldId="271"/>
-            <ac:cxnSpMk id="20" creationId="{4069FAE7-DCE3-8368-4C29-3D6328386224}"/>
-          </ac:cxnSpMkLst>
-        </pc:cxnChg>
-        <pc:cxnChg chg="add mod">
-          <ac:chgData name="全 香玉" userId="1f3450e5-81b9-4f7a-82d7-841c32c029e0" providerId="ADAL" clId="{670531AC-1667-4F97-B1A6-5D38F8A44A79}" dt="2026-07-23T02:23:43.122" v="2061" actId="14100"/>
-          <ac:cxnSpMkLst>
-            <pc:docMk/>
-            <pc:sldMk cId="320822935" sldId="271"/>
-            <ac:cxnSpMk id="42" creationId="{37DA9B1E-7E83-1C5A-34AE-7B7E7D6EAAF7}"/>
-          </ac:cxnSpMkLst>
-        </pc:cxnChg>
-        <pc:cxnChg chg="add mod">
-          <ac:chgData name="全 香玉" userId="1f3450e5-81b9-4f7a-82d7-841c32c029e0" providerId="ADAL" clId="{670531AC-1667-4F97-B1A6-5D38F8A44A79}" dt="2026-07-23T09:30:54.694" v="2382" actId="164"/>
-          <ac:cxnSpMkLst>
-            <pc:docMk/>
-            <pc:sldMk cId="320822935" sldId="271"/>
-            <ac:cxnSpMk id="45" creationId="{95E6A913-5B89-DE48-23E5-C409E51A29CF}"/>
-          </ac:cxnSpMkLst>
-        </pc:cxnChg>
-        <pc:cxnChg chg="add mod">
-          <ac:chgData name="全 香玉" userId="1f3450e5-81b9-4f7a-82d7-841c32c029e0" providerId="ADAL" clId="{670531AC-1667-4F97-B1A6-5D38F8A44A79}" dt="2026-07-23T09:30:54.694" v="2382" actId="164"/>
-          <ac:cxnSpMkLst>
-            <pc:docMk/>
-            <pc:sldMk cId="320822935" sldId="271"/>
-            <ac:cxnSpMk id="46" creationId="{288B4B7A-E52F-C99A-6E89-382554E3C11E}"/>
-          </ac:cxnSpMkLst>
-        </pc:cxnChg>
-        <pc:cxnChg chg="add mod">
-          <ac:chgData name="全 香玉" userId="1f3450e5-81b9-4f7a-82d7-841c32c029e0" providerId="ADAL" clId="{670531AC-1667-4F97-B1A6-5D38F8A44A79}" dt="2026-07-23T09:30:16.409" v="2374" actId="1076"/>
-          <ac:cxnSpMkLst>
-            <pc:docMk/>
-            <pc:sldMk cId="320822935" sldId="271"/>
-            <ac:cxnSpMk id="50" creationId="{4332A866-32C7-5247-FECA-A36AA40669A7}"/>
+            <pc:sldMk cId="1716350635" sldId="274"/>
+            <ac:cxnSpMk id="81" creationId="{38D1B38D-E95B-0D56-E6DD-2965AABC1875}"/>
           </ac:cxnSpMkLst>
         </pc:cxnChg>
         <pc:cxnChg chg="mod">
-          <ac:chgData name="全 香玉" userId="1f3450e5-81b9-4f7a-82d7-841c32c029e0" providerId="ADAL" clId="{670531AC-1667-4F97-B1A6-5D38F8A44A79}" dt="2026-07-23T02:19:56.377" v="1879" actId="1582"/>
+          <ac:chgData name="全 香玉" userId="1f3450e5-81b9-4f7a-82d7-841c32c029e0" providerId="ADAL" clId="{670531AC-1667-4F97-B1A6-5D38F8A44A79}" dt="2026-10-20T08:34:32.422" v="2831" actId="14100"/>
           <ac:cxnSpMkLst>
             <pc:docMk/>
-            <pc:sldMk cId="320822935" sldId="271"/>
-            <ac:cxnSpMk id="129" creationId="{639B7E91-3F4A-EBBD-C91D-5768D1AF3314}"/>
-          </ac:cxnSpMkLst>
-        </pc:cxnChg>
-        <pc:cxnChg chg="mod topLvl">
-          <ac:chgData name="全 香玉" userId="1f3450e5-81b9-4f7a-82d7-841c32c029e0" providerId="ADAL" clId="{670531AC-1667-4F97-B1A6-5D38F8A44A79}" dt="2026-07-23T02:06:56.821" v="1555" actId="165"/>
-          <ac:cxnSpMkLst>
-            <pc:docMk/>
-            <pc:sldMk cId="320822935" sldId="271"/>
-            <ac:cxnSpMk id="131" creationId="{1F611055-F9A2-BD5C-B2D4-D911B7632ACE}"/>
-          </ac:cxnSpMkLst>
-        </pc:cxnChg>
-        <pc:cxnChg chg="mod topLvl">
-          <ac:chgData name="全 香玉" userId="1f3450e5-81b9-4f7a-82d7-841c32c029e0" providerId="ADAL" clId="{670531AC-1667-4F97-B1A6-5D38F8A44A79}" dt="2026-07-23T02:06:56.821" v="1555" actId="165"/>
-          <ac:cxnSpMkLst>
-            <pc:docMk/>
-            <pc:sldMk cId="320822935" sldId="271"/>
-            <ac:cxnSpMk id="132" creationId="{7E00D959-AC30-E395-E395-2F650D884ED1}"/>
-          </ac:cxnSpMkLst>
-        </pc:cxnChg>
-        <pc:cxnChg chg="del mod topLvl">
-          <ac:chgData name="全 香玉" userId="1f3450e5-81b9-4f7a-82d7-841c32c029e0" providerId="ADAL" clId="{670531AC-1667-4F97-B1A6-5D38F8A44A79}" dt="2026-07-23T02:11:47.122" v="1715" actId="478"/>
-          <ac:cxnSpMkLst>
-            <pc:docMk/>
-            <pc:sldMk cId="320822935" sldId="271"/>
-            <ac:cxnSpMk id="134" creationId="{520862A8-9786-241D-58B8-193971A1E7A9}"/>
+            <pc:sldMk cId="1716350635" sldId="274"/>
+            <ac:cxnSpMk id="89" creationId="{050716EC-A096-4795-39CF-7F2D4B0211F6}"/>
           </ac:cxnSpMkLst>
         </pc:cxnChg>
         <pc:cxnChg chg="mod">
-          <ac:chgData name="全 香玉" userId="1f3450e5-81b9-4f7a-82d7-841c32c029e0" providerId="ADAL" clId="{670531AC-1667-4F97-B1A6-5D38F8A44A79}" dt="2026-07-23T02:11:20.903" v="1673" actId="1076"/>
+          <ac:chgData name="全 香玉" userId="1f3450e5-81b9-4f7a-82d7-841c32c029e0" providerId="ADAL" clId="{670531AC-1667-4F97-B1A6-5D38F8A44A79}" dt="2026-10-20T08:34:42.802" v="2835" actId="14100"/>
           <ac:cxnSpMkLst>
             <pc:docMk/>
-            <pc:sldMk cId="320822935" sldId="271"/>
-            <ac:cxnSpMk id="135" creationId="{8FD917A6-592F-607D-8BF3-628EDE51C2A5}"/>
+            <pc:sldMk cId="1716350635" sldId="274"/>
+            <ac:cxnSpMk id="93" creationId="{9AB6DAB1-64D1-2B43-7E11-1751097F8409}"/>
           </ac:cxnSpMkLst>
         </pc:cxnChg>
         <pc:cxnChg chg="mod">
-          <ac:chgData name="全 香玉" userId="1f3450e5-81b9-4f7a-82d7-841c32c029e0" providerId="ADAL" clId="{670531AC-1667-4F97-B1A6-5D38F8A44A79}" dt="2026-07-23T02:23:47.618" v="2062" actId="14100"/>
+          <ac:chgData name="全 香玉" userId="1f3450e5-81b9-4f7a-82d7-841c32c029e0" providerId="ADAL" clId="{670531AC-1667-4F97-B1A6-5D38F8A44A79}" dt="2026-10-20T08:34:59.722" v="2837" actId="14100"/>
           <ac:cxnSpMkLst>
             <pc:docMk/>
-            <pc:sldMk cId="320822935" sldId="271"/>
-            <ac:cxnSpMk id="142" creationId="{AC96840D-D78E-8D7F-46E8-A471D899BA2F}"/>
-          </ac:cxnSpMkLst>
-        </pc:cxnChg>
-        <pc:cxnChg chg="add del mod">
-          <ac:chgData name="全 香玉" userId="1f3450e5-81b9-4f7a-82d7-841c32c029e0" providerId="ADAL" clId="{670531AC-1667-4F97-B1A6-5D38F8A44A79}" dt="2026-07-23T09:32:33.493" v="2405" actId="478"/>
-          <ac:cxnSpMkLst>
-            <pc:docMk/>
-            <pc:sldMk cId="320822935" sldId="271"/>
-            <ac:cxnSpMk id="146" creationId="{FD47928C-27B1-8612-A3A3-3DF7F25C429F}"/>
-          </ac:cxnSpMkLst>
-        </pc:cxnChg>
-        <pc:cxnChg chg="add del mod">
-          <ac:chgData name="全 香玉" userId="1f3450e5-81b9-4f7a-82d7-841c32c029e0" providerId="ADAL" clId="{670531AC-1667-4F97-B1A6-5D38F8A44A79}" dt="2026-07-23T09:32:27.206" v="2402" actId="478"/>
-          <ac:cxnSpMkLst>
-            <pc:docMk/>
-            <pc:sldMk cId="320822935" sldId="271"/>
-            <ac:cxnSpMk id="148" creationId="{819E9A56-F731-ABF1-19F4-12F7E09CA628}"/>
-          </ac:cxnSpMkLst>
-        </pc:cxnChg>
-        <pc:cxnChg chg="del">
-          <ac:chgData name="全 香玉" userId="1f3450e5-81b9-4f7a-82d7-841c32c029e0" providerId="ADAL" clId="{670531AC-1667-4F97-B1A6-5D38F8A44A79}" dt="2026-07-23T01:59:27.480" v="1137" actId="478"/>
-          <ac:cxnSpMkLst>
-            <pc:docMk/>
-            <pc:sldMk cId="320822935" sldId="271"/>
-            <ac:cxnSpMk id="153" creationId="{9C92DD70-9CA5-45C1-9F5E-239DC35EA5DE}"/>
-          </ac:cxnSpMkLst>
-        </pc:cxnChg>
-        <pc:cxnChg chg="add del mod">
-          <ac:chgData name="全 香玉" userId="1f3450e5-81b9-4f7a-82d7-841c32c029e0" providerId="ADAL" clId="{670531AC-1667-4F97-B1A6-5D38F8A44A79}" dt="2026-07-23T09:32:32.188" v="2404" actId="478"/>
-          <ac:cxnSpMkLst>
-            <pc:docMk/>
-            <pc:sldMk cId="320822935" sldId="271"/>
-            <ac:cxnSpMk id="154" creationId="{951DB6E8-98F0-CBFE-DA46-B8444A0D0701}"/>
-          </ac:cxnSpMkLst>
-        </pc:cxnChg>
-        <pc:cxnChg chg="add del mod">
-          <ac:chgData name="全 香玉" userId="1f3450e5-81b9-4f7a-82d7-841c32c029e0" providerId="ADAL" clId="{670531AC-1667-4F97-B1A6-5D38F8A44A79}" dt="2026-07-23T09:00:07.205" v="2365" actId="478"/>
-          <ac:cxnSpMkLst>
-            <pc:docMk/>
-            <pc:sldMk cId="320822935" sldId="271"/>
-            <ac:cxnSpMk id="157" creationId="{EA6F8B3E-060F-59D7-1A9D-50EDAFA3EAEF}"/>
-          </ac:cxnSpMkLst>
-        </pc:cxnChg>
-        <pc:cxnChg chg="del">
-          <ac:chgData name="全 香玉" userId="1f3450e5-81b9-4f7a-82d7-841c32c029e0" providerId="ADAL" clId="{670531AC-1667-4F97-B1A6-5D38F8A44A79}" dt="2026-07-23T01:59:26.058" v="1136" actId="478"/>
-          <ac:cxnSpMkLst>
-            <pc:docMk/>
-            <pc:sldMk cId="320822935" sldId="271"/>
-            <ac:cxnSpMk id="158" creationId="{43FFACA5-1E80-21CC-0BF1-E2812692B3AB}"/>
-          </ac:cxnSpMkLst>
-        </pc:cxnChg>
-        <pc:cxnChg chg="del mod">
-          <ac:chgData name="全 香玉" userId="1f3450e5-81b9-4f7a-82d7-841c32c029e0" providerId="ADAL" clId="{670531AC-1667-4F97-B1A6-5D38F8A44A79}" dt="2026-07-23T01:59:24.027" v="1135" actId="478"/>
-          <ac:cxnSpMkLst>
-            <pc:docMk/>
-            <pc:sldMk cId="320822935" sldId="271"/>
-            <ac:cxnSpMk id="159" creationId="{40E63A3C-2CCF-9E1B-206F-EEA09D4F499A}"/>
+            <pc:sldMk cId="1716350635" sldId="274"/>
+            <ac:cxnSpMk id="117" creationId="{102A1884-1D8E-0644-51B4-81FFDEE2775A}"/>
           </ac:cxnSpMkLst>
         </pc:cxnChg>
         <pc:cxnChg chg="mod">
-          <ac:chgData name="全 香玉" userId="1f3450e5-81b9-4f7a-82d7-841c32c029e0" providerId="ADAL" clId="{670531AC-1667-4F97-B1A6-5D38F8A44A79}" dt="2026-07-23T02:24:55.826" v="2074" actId="14100"/>
+          <ac:chgData name="全 香玉" userId="1f3450e5-81b9-4f7a-82d7-841c32c029e0" providerId="ADAL" clId="{670531AC-1667-4F97-B1A6-5D38F8A44A79}" dt="2026-10-20T08:34:37.397" v="2833" actId="14100"/>
           <ac:cxnSpMkLst>
             <pc:docMk/>
-            <pc:sldMk cId="320822935" sldId="271"/>
-            <ac:cxnSpMk id="160" creationId="{875859F5-07DC-22F0-BAEA-DDF1F9C71522}"/>
-          </ac:cxnSpMkLst>
-        </pc:cxnChg>
-        <pc:cxnChg chg="add del mod">
-          <ac:chgData name="全 香玉" userId="1f3450e5-81b9-4f7a-82d7-841c32c029e0" providerId="ADAL" clId="{670531AC-1667-4F97-B1A6-5D38F8A44A79}" dt="2026-07-23T09:32:30.949" v="2403" actId="478"/>
-          <ac:cxnSpMkLst>
-            <pc:docMk/>
-            <pc:sldMk cId="320822935" sldId="271"/>
-            <ac:cxnSpMk id="162" creationId="{9E3194D0-E3A7-E947-B8B6-A882A5BEF505}"/>
-          </ac:cxnSpMkLst>
-        </pc:cxnChg>
-        <pc:cxnChg chg="mod">
-          <ac:chgData name="全 香玉" userId="1f3450e5-81b9-4f7a-82d7-841c32c029e0" providerId="ADAL" clId="{670531AC-1667-4F97-B1A6-5D38F8A44A79}" dt="2026-07-23T02:10:58.347" v="1670" actId="1036"/>
-          <ac:cxnSpMkLst>
-            <pc:docMk/>
-            <pc:sldMk cId="320822935" sldId="271"/>
-            <ac:cxnSpMk id="163" creationId="{FD737309-5506-701E-4240-BC1D9CAB0CE3}"/>
-          </ac:cxnSpMkLst>
-        </pc:cxnChg>
-        <pc:cxnChg chg="add mod">
-          <ac:chgData name="全 香玉" userId="1f3450e5-81b9-4f7a-82d7-841c32c029e0" providerId="ADAL" clId="{670531AC-1667-4F97-B1A6-5D38F8A44A79}" dt="2026-07-23T10:46:50.570" v="2781" actId="164"/>
-          <ac:cxnSpMkLst>
-            <pc:docMk/>
-            <pc:sldMk cId="320822935" sldId="271"/>
-            <ac:cxnSpMk id="164" creationId="{25CAEF57-C271-9C79-7E48-CF3EBDE77D1E}"/>
-          </ac:cxnSpMkLst>
-        </pc:cxnChg>
-        <pc:cxnChg chg="del">
-          <ac:chgData name="全 香玉" userId="1f3450e5-81b9-4f7a-82d7-841c32c029e0" providerId="ADAL" clId="{670531AC-1667-4F97-B1A6-5D38F8A44A79}" dt="2026-07-23T02:00:58.669" v="1189" actId="478"/>
-          <ac:cxnSpMkLst>
-            <pc:docMk/>
-            <pc:sldMk cId="320822935" sldId="271"/>
-            <ac:cxnSpMk id="165" creationId="{34A2464D-2AD2-8FCC-DD4F-D9C8E6042047}"/>
-          </ac:cxnSpMkLst>
-        </pc:cxnChg>
-        <pc:cxnChg chg="add mod ord">
-          <ac:chgData name="全 香玉" userId="1f3450e5-81b9-4f7a-82d7-841c32c029e0" providerId="ADAL" clId="{670531AC-1667-4F97-B1A6-5D38F8A44A79}" dt="2026-07-23T10:10:18.362" v="2553" actId="208"/>
-          <ac:cxnSpMkLst>
-            <pc:docMk/>
-            <pc:sldMk cId="320822935" sldId="271"/>
-            <ac:cxnSpMk id="166" creationId="{004C5E66-F4D2-3765-6F44-66C141D4046C}"/>
-          </ac:cxnSpMkLst>
-        </pc:cxnChg>
-        <pc:cxnChg chg="del">
-          <ac:chgData name="全 香玉" userId="1f3450e5-81b9-4f7a-82d7-841c32c029e0" providerId="ADAL" clId="{670531AC-1667-4F97-B1A6-5D38F8A44A79}" dt="2026-07-23T02:00:58.669" v="1189" actId="478"/>
-          <ac:cxnSpMkLst>
-            <pc:docMk/>
-            <pc:sldMk cId="320822935" sldId="271"/>
-            <ac:cxnSpMk id="168" creationId="{9499294F-03AC-9884-2FB5-4B17B57F356A}"/>
-          </ac:cxnSpMkLst>
-        </pc:cxnChg>
-        <pc:cxnChg chg="del">
-          <ac:chgData name="全 香玉" userId="1f3450e5-81b9-4f7a-82d7-841c32c029e0" providerId="ADAL" clId="{670531AC-1667-4F97-B1A6-5D38F8A44A79}" dt="2026-07-23T02:00:58.669" v="1189" actId="478"/>
-          <ac:cxnSpMkLst>
-            <pc:docMk/>
-            <pc:sldMk cId="320822935" sldId="271"/>
-            <ac:cxnSpMk id="169" creationId="{330A9D0D-3042-4742-85E8-69FB1DBF4DA4}"/>
-          </ac:cxnSpMkLst>
-        </pc:cxnChg>
-        <pc:cxnChg chg="del">
-          <ac:chgData name="全 香玉" userId="1f3450e5-81b9-4f7a-82d7-841c32c029e0" providerId="ADAL" clId="{670531AC-1667-4F97-B1A6-5D38F8A44A79}" dt="2026-07-23T02:00:58.669" v="1189" actId="478"/>
-          <ac:cxnSpMkLst>
-            <pc:docMk/>
-            <pc:sldMk cId="320822935" sldId="271"/>
-            <ac:cxnSpMk id="170" creationId="{BE361835-1293-07D1-DB72-CD0FAD6EFD57}"/>
-          </ac:cxnSpMkLst>
-        </pc:cxnChg>
-        <pc:cxnChg chg="mod">
-          <ac:chgData name="全 香玉" userId="1f3450e5-81b9-4f7a-82d7-841c32c029e0" providerId="ADAL" clId="{670531AC-1667-4F97-B1A6-5D38F8A44A79}" dt="2026-07-23T02:02:24.758" v="1281" actId="1076"/>
-          <ac:cxnSpMkLst>
-            <pc:docMk/>
-            <pc:sldMk cId="320822935" sldId="271"/>
-            <ac:cxnSpMk id="173" creationId="{17626213-B6BE-4EBB-34E4-2244CACCEED0}"/>
-          </ac:cxnSpMkLst>
-        </pc:cxnChg>
-        <pc:cxnChg chg="del">
-          <ac:chgData name="全 香玉" userId="1f3450e5-81b9-4f7a-82d7-841c32c029e0" providerId="ADAL" clId="{670531AC-1667-4F97-B1A6-5D38F8A44A79}" dt="2026-07-23T02:00:58.669" v="1189" actId="478"/>
-          <ac:cxnSpMkLst>
-            <pc:docMk/>
-            <pc:sldMk cId="320822935" sldId="271"/>
-            <ac:cxnSpMk id="174" creationId="{023B8548-C31C-F75A-833F-1F1337BB6F93}"/>
-          </ac:cxnSpMkLst>
-        </pc:cxnChg>
-        <pc:cxnChg chg="del">
-          <ac:chgData name="全 香玉" userId="1f3450e5-81b9-4f7a-82d7-841c32c029e0" providerId="ADAL" clId="{670531AC-1667-4F97-B1A6-5D38F8A44A79}" dt="2026-07-23T02:00:58.669" v="1189" actId="478"/>
-          <ac:cxnSpMkLst>
-            <pc:docMk/>
-            <pc:sldMk cId="320822935" sldId="271"/>
-            <ac:cxnSpMk id="175" creationId="{71FF5CAF-0EA7-1028-63F0-5A58101360D9}"/>
-          </ac:cxnSpMkLst>
-        </pc:cxnChg>
-        <pc:cxnChg chg="del">
-          <ac:chgData name="全 香玉" userId="1f3450e5-81b9-4f7a-82d7-841c32c029e0" providerId="ADAL" clId="{670531AC-1667-4F97-B1A6-5D38F8A44A79}" dt="2026-07-23T02:00:58.669" v="1189" actId="478"/>
-          <ac:cxnSpMkLst>
-            <pc:docMk/>
-            <pc:sldMk cId="320822935" sldId="271"/>
-            <ac:cxnSpMk id="176" creationId="{EF61DF78-0C96-C432-2F45-B7DD221E3A2E}"/>
-          </ac:cxnSpMkLst>
-        </pc:cxnChg>
-        <pc:cxnChg chg="add mod">
-          <ac:chgData name="全 香玉" userId="1f3450e5-81b9-4f7a-82d7-841c32c029e0" providerId="ADAL" clId="{670531AC-1667-4F97-B1A6-5D38F8A44A79}" dt="2026-07-23T10:52:05.204" v="2815" actId="478"/>
-          <ac:cxnSpMkLst>
-            <pc:docMk/>
-            <pc:sldMk cId="320822935" sldId="271"/>
-            <ac:cxnSpMk id="185" creationId="{7BFF2DB0-2389-03AF-8790-D3724A3EE597}"/>
-          </ac:cxnSpMkLst>
-        </pc:cxnChg>
-        <pc:cxnChg chg="add mod">
-          <ac:chgData name="全 香玉" userId="1f3450e5-81b9-4f7a-82d7-841c32c029e0" providerId="ADAL" clId="{670531AC-1667-4F97-B1A6-5D38F8A44A79}" dt="2026-07-23T10:00:34.096" v="2523" actId="14100"/>
-          <ac:cxnSpMkLst>
-            <pc:docMk/>
-            <pc:sldMk cId="320822935" sldId="271"/>
-            <ac:cxnSpMk id="197" creationId="{7D87D7C4-658C-53CC-74C0-2BAEF419EBE3}"/>
-          </ac:cxnSpMkLst>
-        </pc:cxnChg>
-        <pc:cxnChg chg="add mod">
-          <ac:chgData name="全 香玉" userId="1f3450e5-81b9-4f7a-82d7-841c32c029e0" providerId="ADAL" clId="{670531AC-1667-4F97-B1A6-5D38F8A44A79}" dt="2026-07-23T10:46:50.570" v="2781" actId="164"/>
-          <ac:cxnSpMkLst>
-            <pc:docMk/>
-            <pc:sldMk cId="320822935" sldId="271"/>
-            <ac:cxnSpMk id="205" creationId="{DB172EC3-5292-4629-ECAE-0F59157851D4}"/>
-          </ac:cxnSpMkLst>
-        </pc:cxnChg>
-        <pc:cxnChg chg="mod">
-          <ac:chgData name="全 香玉" userId="1f3450e5-81b9-4f7a-82d7-841c32c029e0" providerId="ADAL" clId="{670531AC-1667-4F97-B1A6-5D38F8A44A79}" dt="2026-07-23T02:27:22.822" v="2097" actId="14100"/>
-          <ac:cxnSpMkLst>
-            <pc:docMk/>
-            <pc:sldMk cId="320822935" sldId="271"/>
-            <ac:cxnSpMk id="208" creationId="{6B74278D-C87D-8862-29F7-368C42A6F1E5}"/>
-          </ac:cxnSpMkLst>
-        </pc:cxnChg>
-        <pc:cxnChg chg="add del mod">
-          <ac:chgData name="全 香玉" userId="1f3450e5-81b9-4f7a-82d7-841c32c029e0" providerId="ADAL" clId="{670531AC-1667-4F97-B1A6-5D38F8A44A79}" dt="2026-07-23T09:40:24.966" v="2454" actId="478"/>
-          <ac:cxnSpMkLst>
-            <pc:docMk/>
-            <pc:sldMk cId="320822935" sldId="271"/>
-            <ac:cxnSpMk id="209" creationId="{7857D8B4-8831-36F0-F150-C1BE6756A855}"/>
-          </ac:cxnSpMkLst>
-        </pc:cxnChg>
-        <pc:cxnChg chg="add del mod">
-          <ac:chgData name="全 香玉" userId="1f3450e5-81b9-4f7a-82d7-841c32c029e0" providerId="ADAL" clId="{670531AC-1667-4F97-B1A6-5D38F8A44A79}" dt="2026-07-23T09:40:35.958" v="2457" actId="478"/>
-          <ac:cxnSpMkLst>
-            <pc:docMk/>
-            <pc:sldMk cId="320822935" sldId="271"/>
-            <ac:cxnSpMk id="211" creationId="{FBBDD0D9-9775-4832-DF6E-2896B87E2779}"/>
-          </ac:cxnSpMkLst>
-        </pc:cxnChg>
-        <pc:cxnChg chg="add mod">
-          <ac:chgData name="全 香玉" userId="1f3450e5-81b9-4f7a-82d7-841c32c029e0" providerId="ADAL" clId="{670531AC-1667-4F97-B1A6-5D38F8A44A79}" dt="2026-07-23T10:46:50.570" v="2781" actId="164"/>
-          <ac:cxnSpMkLst>
-            <pc:docMk/>
-            <pc:sldMk cId="320822935" sldId="271"/>
-            <ac:cxnSpMk id="215" creationId="{3F0DEE14-9B17-D157-D366-E1C27C1DC482}"/>
-          </ac:cxnSpMkLst>
-        </pc:cxnChg>
-        <pc:cxnChg chg="add mod">
-          <ac:chgData name="全 香玉" userId="1f3450e5-81b9-4f7a-82d7-841c32c029e0" providerId="ADAL" clId="{670531AC-1667-4F97-B1A6-5D38F8A44A79}" dt="2026-07-23T10:10:18.362" v="2553" actId="208"/>
-          <ac:cxnSpMkLst>
-            <pc:docMk/>
-            <pc:sldMk cId="320822935" sldId="271"/>
-            <ac:cxnSpMk id="218" creationId="{F1B4D3CC-73A0-8F1F-0131-914F8B641E98}"/>
-          </ac:cxnSpMkLst>
-        </pc:cxnChg>
-        <pc:cxnChg chg="add mod">
-          <ac:chgData name="全 香玉" userId="1f3450e5-81b9-4f7a-82d7-841c32c029e0" providerId="ADAL" clId="{670531AC-1667-4F97-B1A6-5D38F8A44A79}" dt="2026-07-23T10:10:18.362" v="2553" actId="208"/>
-          <ac:cxnSpMkLst>
-            <pc:docMk/>
-            <pc:sldMk cId="320822935" sldId="271"/>
-            <ac:cxnSpMk id="219" creationId="{6B31631A-0F07-FFD3-DA27-78CDC3C6834B}"/>
-          </ac:cxnSpMkLst>
-        </pc:cxnChg>
-        <pc:cxnChg chg="add mod">
-          <ac:chgData name="全 香玉" userId="1f3450e5-81b9-4f7a-82d7-841c32c029e0" providerId="ADAL" clId="{670531AC-1667-4F97-B1A6-5D38F8A44A79}" dt="2026-07-23T10:11:05.893" v="2559" actId="1076"/>
-          <ac:cxnSpMkLst>
-            <pc:docMk/>
-            <pc:sldMk cId="320822935" sldId="271"/>
-            <ac:cxnSpMk id="221" creationId="{105EB2EC-A13D-7617-536A-E4BAEEA14F2F}"/>
-          </ac:cxnSpMkLst>
-        </pc:cxnChg>
-        <pc:cxnChg chg="add del mod">
-          <ac:chgData name="全 香玉" userId="1f3450e5-81b9-4f7a-82d7-841c32c029e0" providerId="ADAL" clId="{670531AC-1667-4F97-B1A6-5D38F8A44A79}" dt="2026-07-23T09:58:02.497" v="2511" actId="478"/>
-          <ac:cxnSpMkLst>
-            <pc:docMk/>
-            <pc:sldMk cId="320822935" sldId="271"/>
-            <ac:cxnSpMk id="224" creationId="{AB8EEDBE-110B-D203-6E91-6FE4BC983D01}"/>
-          </ac:cxnSpMkLst>
-        </pc:cxnChg>
-        <pc:cxnChg chg="add mod">
-          <ac:chgData name="全 香玉" userId="1f3450e5-81b9-4f7a-82d7-841c32c029e0" providerId="ADAL" clId="{670531AC-1667-4F97-B1A6-5D38F8A44A79}" dt="2026-07-23T10:52:05.204" v="2815" actId="478"/>
-          <ac:cxnSpMkLst>
-            <pc:docMk/>
-            <pc:sldMk cId="320822935" sldId="271"/>
-            <ac:cxnSpMk id="231" creationId="{20236023-DCE5-CA6A-B03F-99043A274337}"/>
-          </ac:cxnSpMkLst>
-        </pc:cxnChg>
-        <pc:cxnChg chg="add del mod">
-          <ac:chgData name="全 香玉" userId="1f3450e5-81b9-4f7a-82d7-841c32c029e0" providerId="ADAL" clId="{670531AC-1667-4F97-B1A6-5D38F8A44A79}" dt="2026-07-23T10:06:58.155" v="2542" actId="11529"/>
-          <ac:cxnSpMkLst>
-            <pc:docMk/>
-            <pc:sldMk cId="320822935" sldId="271"/>
-            <ac:cxnSpMk id="235" creationId="{1154FAD0-9CF4-C2AC-0ED6-42CFC8EF609F}"/>
-          </ac:cxnSpMkLst>
-        </pc:cxnChg>
-        <pc:cxnChg chg="add mod">
-          <ac:chgData name="全 香玉" userId="1f3450e5-81b9-4f7a-82d7-841c32c029e0" providerId="ADAL" clId="{670531AC-1667-4F97-B1A6-5D38F8A44A79}" dt="2026-07-23T10:11:13.820" v="2563" actId="1076"/>
-          <ac:cxnSpMkLst>
-            <pc:docMk/>
-            <pc:sldMk cId="320822935" sldId="271"/>
-            <ac:cxnSpMk id="241" creationId="{AFA5CF65-990C-2E54-7C2F-B57FBF9F2A53}"/>
-          </ac:cxnSpMkLst>
-        </pc:cxnChg>
-        <pc:cxnChg chg="add mod">
-          <ac:chgData name="全 香玉" userId="1f3450e5-81b9-4f7a-82d7-841c32c029e0" providerId="ADAL" clId="{670531AC-1667-4F97-B1A6-5D38F8A44A79}" dt="2026-07-23T10:46:50.570" v="2781" actId="164"/>
-          <ac:cxnSpMkLst>
-            <pc:docMk/>
-            <pc:sldMk cId="320822935" sldId="271"/>
-            <ac:cxnSpMk id="242" creationId="{CB088162-0339-CBA8-0522-22CCA640CBBF}"/>
-          </ac:cxnSpMkLst>
-        </pc:cxnChg>
-        <pc:cxnChg chg="add del mod">
-          <ac:chgData name="全 香玉" userId="1f3450e5-81b9-4f7a-82d7-841c32c029e0" providerId="ADAL" clId="{670531AC-1667-4F97-B1A6-5D38F8A44A79}" dt="2026-07-23T10:21:26.889" v="2585" actId="478"/>
-          <ac:cxnSpMkLst>
-            <pc:docMk/>
-            <pc:sldMk cId="320822935" sldId="271"/>
-            <ac:cxnSpMk id="243" creationId="{805DDF42-205F-9055-663B-C1D38DEAB966}"/>
-          </ac:cxnSpMkLst>
-        </pc:cxnChg>
-        <pc:cxnChg chg="add del">
-          <ac:chgData name="全 香玉" userId="1f3450e5-81b9-4f7a-82d7-841c32c029e0" providerId="ADAL" clId="{670531AC-1667-4F97-B1A6-5D38F8A44A79}" dt="2026-07-23T10:17:46.229" v="2571" actId="478"/>
-          <ac:cxnSpMkLst>
-            <pc:docMk/>
-            <pc:sldMk cId="320822935" sldId="271"/>
-            <ac:cxnSpMk id="247" creationId="{BD4A2DC6-C97D-4CE1-5F46-D6B881A413A1}"/>
-          </ac:cxnSpMkLst>
-        </pc:cxnChg>
-        <pc:cxnChg chg="add del mod">
-          <ac:chgData name="全 香玉" userId="1f3450e5-81b9-4f7a-82d7-841c32c029e0" providerId="ADAL" clId="{670531AC-1667-4F97-B1A6-5D38F8A44A79}" dt="2026-07-23T10:21:32.332" v="2587" actId="478"/>
-          <ac:cxnSpMkLst>
-            <pc:docMk/>
-            <pc:sldMk cId="320822935" sldId="271"/>
-            <ac:cxnSpMk id="248" creationId="{196F661A-AC4E-79A0-E7C1-09275430531B}"/>
-          </ac:cxnSpMkLst>
-        </pc:cxnChg>
-        <pc:cxnChg chg="add del mod">
-          <ac:chgData name="全 香玉" userId="1f3450e5-81b9-4f7a-82d7-841c32c029e0" providerId="ADAL" clId="{670531AC-1667-4F97-B1A6-5D38F8A44A79}" dt="2026-07-23T10:21:29.660" v="2586" actId="478"/>
-          <ac:cxnSpMkLst>
-            <pc:docMk/>
-            <pc:sldMk cId="320822935" sldId="271"/>
-            <ac:cxnSpMk id="250" creationId="{4D3C5614-8BA6-2950-3594-5A6F3C5E6342}"/>
-          </ac:cxnSpMkLst>
-        </pc:cxnChg>
-        <pc:cxnChg chg="add del mod">
-          <ac:chgData name="全 香玉" userId="1f3450e5-81b9-4f7a-82d7-841c32c029e0" providerId="ADAL" clId="{670531AC-1667-4F97-B1A6-5D38F8A44A79}" dt="2026-07-23T10:19:32.935" v="2583" actId="478"/>
-          <ac:cxnSpMkLst>
-            <pc:docMk/>
-            <pc:sldMk cId="320822935" sldId="271"/>
-            <ac:cxnSpMk id="252" creationId="{2C034CD1-91A2-9E0E-BEB8-231013CA93C7}"/>
-          </ac:cxnSpMkLst>
-        </pc:cxnChg>
-        <pc:cxnChg chg="add del">
-          <ac:chgData name="全 香玉" userId="1f3450e5-81b9-4f7a-82d7-841c32c029e0" providerId="ADAL" clId="{670531AC-1667-4F97-B1A6-5D38F8A44A79}" dt="2026-07-23T10:26:23.587" v="2610" actId="478"/>
-          <ac:cxnSpMkLst>
-            <pc:docMk/>
-            <pc:sldMk cId="320822935" sldId="271"/>
-            <ac:cxnSpMk id="257" creationId="{E31BE453-0124-561A-4873-0C8E12F550F4}"/>
-          </ac:cxnSpMkLst>
-        </pc:cxnChg>
-        <pc:cxnChg chg="add del mod">
-          <ac:chgData name="全 香玉" userId="1f3450e5-81b9-4f7a-82d7-841c32c029e0" providerId="ADAL" clId="{670531AC-1667-4F97-B1A6-5D38F8A44A79}" dt="2026-07-23T10:26:24.504" v="2611" actId="478"/>
-          <ac:cxnSpMkLst>
-            <pc:docMk/>
-            <pc:sldMk cId="320822935" sldId="271"/>
-            <ac:cxnSpMk id="258" creationId="{2576EF54-8430-6859-779B-6405AFA4D0B6}"/>
-          </ac:cxnSpMkLst>
-        </pc:cxnChg>
-        <pc:cxnChg chg="add del mod">
-          <ac:chgData name="全 香玉" userId="1f3450e5-81b9-4f7a-82d7-841c32c029e0" providerId="ADAL" clId="{670531AC-1667-4F97-B1A6-5D38F8A44A79}" dt="2026-07-23T10:43:13.648" v="2759" actId="1076"/>
-          <ac:cxnSpMkLst>
-            <pc:docMk/>
-            <pc:sldMk cId="320822935" sldId="271"/>
-            <ac:cxnSpMk id="262" creationId="{C244CA01-9C7F-E6A5-05AE-CF9E4D986776}"/>
-          </ac:cxnSpMkLst>
-        </pc:cxnChg>
-        <pc:cxnChg chg="add mod">
-          <ac:chgData name="全 香玉" userId="1f3450e5-81b9-4f7a-82d7-841c32c029e0" providerId="ADAL" clId="{670531AC-1667-4F97-B1A6-5D38F8A44A79}" dt="2026-07-23T10:43:10.260" v="2758" actId="1076"/>
-          <ac:cxnSpMkLst>
-            <pc:docMk/>
-            <pc:sldMk cId="320822935" sldId="271"/>
-            <ac:cxnSpMk id="267" creationId="{4E0BFC17-FF4B-6DA9-8A87-74714C34FD9B}"/>
-          </ac:cxnSpMkLst>
-        </pc:cxnChg>
-        <pc:cxnChg chg="add mod">
-          <ac:chgData name="全 香玉" userId="1f3450e5-81b9-4f7a-82d7-841c32c029e0" providerId="ADAL" clId="{670531AC-1667-4F97-B1A6-5D38F8A44A79}" dt="2026-07-23T10:43:05.828" v="2757" actId="14100"/>
-          <ac:cxnSpMkLst>
-            <pc:docMk/>
-            <pc:sldMk cId="320822935" sldId="271"/>
-            <ac:cxnSpMk id="273" creationId="{124A14AB-C677-0625-0876-6F8E81493924}"/>
-          </ac:cxnSpMkLst>
-        </pc:cxnChg>
-        <pc:cxnChg chg="add del mod">
-          <ac:chgData name="全 香玉" userId="1f3450e5-81b9-4f7a-82d7-841c32c029e0" providerId="ADAL" clId="{670531AC-1667-4F97-B1A6-5D38F8A44A79}" dt="2026-07-23T10:52:10.187" v="2818" actId="478"/>
-          <ac:cxnSpMkLst>
-            <pc:docMk/>
-            <pc:sldMk cId="320822935" sldId="271"/>
-            <ac:cxnSpMk id="276" creationId="{5A363A23-732C-48FB-5F27-5EDA1C3F2464}"/>
-          </ac:cxnSpMkLst>
-        </pc:cxnChg>
-      </pc:sldChg>
-      <pc:sldChg chg="addSp modSp add mod">
-        <pc:chgData name="全 香玉" userId="1f3450e5-81b9-4f7a-82d7-841c32c029e0" providerId="ADAL" clId="{670531AC-1667-4F97-B1A6-5D38F8A44A79}" dt="2026-07-23T02:36:21.628" v="2328"/>
-        <pc:sldMkLst>
-          <pc:docMk/>
-          <pc:sldMk cId="3765132764" sldId="272"/>
-        </pc:sldMkLst>
-        <pc:spChg chg="add mod">
-          <ac:chgData name="全 香玉" userId="1f3450e5-81b9-4f7a-82d7-841c32c029e0" providerId="ADAL" clId="{670531AC-1667-4F97-B1A6-5D38F8A44A79}" dt="2026-07-23T02:36:21.628" v="2328"/>
-          <ac:spMkLst>
-            <pc:docMk/>
-            <pc:sldMk cId="3765132764" sldId="272"/>
-            <ac:spMk id="3" creationId="{60F48FD9-03D9-85AB-75A4-844BE93043CC}"/>
-          </ac:spMkLst>
-        </pc:spChg>
-        <pc:cxnChg chg="mod">
-          <ac:chgData name="全 香玉" userId="1f3450e5-81b9-4f7a-82d7-841c32c029e0" providerId="ADAL" clId="{670531AC-1667-4F97-B1A6-5D38F8A44A79}" dt="2026-07-23T02:27:37.988" v="2098" actId="14100"/>
-          <ac:cxnSpMkLst>
-            <pc:docMk/>
-            <pc:sldMk cId="3765132764" sldId="272"/>
-            <ac:cxnSpMk id="208" creationId="{BCB8AD9C-EC91-B69E-699F-E113CD1D22CA}"/>
-          </ac:cxnSpMkLst>
-        </pc:cxnChg>
-      </pc:sldChg>
-      <pc:sldChg chg="addSp delSp modSp add mod">
-        <pc:chgData name="全 香玉" userId="1f3450e5-81b9-4f7a-82d7-841c32c029e0" providerId="ADAL" clId="{670531AC-1667-4F97-B1A6-5D38F8A44A79}" dt="2026-07-23T10:51:14.781" v="2813" actId="167"/>
-        <pc:sldMkLst>
-          <pc:docMk/>
-          <pc:sldMk cId="1669152728" sldId="273"/>
-        </pc:sldMkLst>
-        <pc:spChg chg="del mod">
-          <ac:chgData name="全 香玉" userId="1f3450e5-81b9-4f7a-82d7-841c32c029e0" providerId="ADAL" clId="{670531AC-1667-4F97-B1A6-5D38F8A44A79}" dt="2026-07-23T10:49:01.605" v="2798" actId="478"/>
-          <ac:spMkLst>
-            <pc:docMk/>
-            <pc:sldMk cId="1669152728" sldId="273"/>
-            <ac:spMk id="260" creationId="{23190031-BA3D-A9F5-7152-99078F2BE0D3}"/>
-          </ac:spMkLst>
-        </pc:spChg>
-        <pc:spChg chg="mod">
-          <ac:chgData name="全 香玉" userId="1f3450e5-81b9-4f7a-82d7-841c32c029e0" providerId="ADAL" clId="{670531AC-1667-4F97-B1A6-5D38F8A44A79}" dt="2026-07-23T10:50:35.350" v="2808" actId="1076"/>
-          <ac:spMkLst>
-            <pc:docMk/>
-            <pc:sldMk cId="1669152728" sldId="273"/>
-            <ac:spMk id="278" creationId="{8D9FA2DC-0E53-E479-45CD-338719FAA1E2}"/>
-          </ac:spMkLst>
-        </pc:spChg>
-        <pc:spChg chg="mod">
-          <ac:chgData name="全 香玉" userId="1f3450e5-81b9-4f7a-82d7-841c32c029e0" providerId="ADAL" clId="{670531AC-1667-4F97-B1A6-5D38F8A44A79}" dt="2026-07-23T10:50:35.350" v="2808" actId="1076"/>
-          <ac:spMkLst>
-            <pc:docMk/>
-            <pc:sldMk cId="1669152728" sldId="273"/>
-            <ac:spMk id="279" creationId="{B018BA33-4E8F-2B27-A7A4-DC5F0B4EB6B2}"/>
-          </ac:spMkLst>
-        </pc:spChg>
-        <pc:spChg chg="mod">
-          <ac:chgData name="全 香玉" userId="1f3450e5-81b9-4f7a-82d7-841c32c029e0" providerId="ADAL" clId="{670531AC-1667-4F97-B1A6-5D38F8A44A79}" dt="2026-07-23T10:50:35.350" v="2808" actId="1076"/>
-          <ac:spMkLst>
-            <pc:docMk/>
-            <pc:sldMk cId="1669152728" sldId="273"/>
-            <ac:spMk id="283" creationId="{5CBEC4DF-8416-53BE-62FA-AB584CA2FDC3}"/>
-          </ac:spMkLst>
-        </pc:spChg>
-        <pc:spChg chg="mod">
-          <ac:chgData name="全 香玉" userId="1f3450e5-81b9-4f7a-82d7-841c32c029e0" providerId="ADAL" clId="{670531AC-1667-4F97-B1A6-5D38F8A44A79}" dt="2026-07-23T10:50:35.350" v="2808" actId="1076"/>
-          <ac:spMkLst>
-            <pc:docMk/>
-            <pc:sldMk cId="1669152728" sldId="273"/>
-            <ac:spMk id="284" creationId="{EEDDE005-8C39-0DF2-9F3E-0912B2A0A016}"/>
-          </ac:spMkLst>
-        </pc:spChg>
-        <pc:spChg chg="mod">
-          <ac:chgData name="全 香玉" userId="1f3450e5-81b9-4f7a-82d7-841c32c029e0" providerId="ADAL" clId="{670531AC-1667-4F97-B1A6-5D38F8A44A79}" dt="2026-07-23T10:51:11.552" v="2812" actId="165"/>
-          <ac:spMkLst>
-            <pc:docMk/>
-            <pc:sldMk cId="1669152728" sldId="273"/>
-            <ac:spMk id="287" creationId="{C920431D-B32D-9B75-6171-7D166C2F7CD5}"/>
-          </ac:spMkLst>
-        </pc:spChg>
-        <pc:spChg chg="mod ord topLvl">
-          <ac:chgData name="全 香玉" userId="1f3450e5-81b9-4f7a-82d7-841c32c029e0" providerId="ADAL" clId="{670531AC-1667-4F97-B1A6-5D38F8A44A79}" dt="2026-07-23T10:51:14.781" v="2813" actId="167"/>
-          <ac:spMkLst>
-            <pc:docMk/>
-            <pc:sldMk cId="1669152728" sldId="273"/>
-            <ac:spMk id="291" creationId="{4032F71E-450D-7E1F-90C2-0635FB33D38F}"/>
-          </ac:spMkLst>
-        </pc:spChg>
-        <pc:grpChg chg="add del mod">
-          <ac:chgData name="全 香玉" userId="1f3450e5-81b9-4f7a-82d7-841c32c029e0" providerId="ADAL" clId="{670531AC-1667-4F97-B1A6-5D38F8A44A79}" dt="2026-07-23T10:49:22.313" v="2801" actId="165"/>
-          <ac:grpSpMkLst>
-            <pc:docMk/>
-            <pc:sldMk cId="1669152728" sldId="273"/>
-            <ac:grpSpMk id="2" creationId="{4008402C-532C-C434-B6FD-F109BDB99C8C}"/>
-          </ac:grpSpMkLst>
-        </pc:grpChg>
-        <pc:grpChg chg="add del mod">
-          <ac:chgData name="全 香玉" userId="1f3450e5-81b9-4f7a-82d7-841c32c029e0" providerId="ADAL" clId="{670531AC-1667-4F97-B1A6-5D38F8A44A79}" dt="2026-07-23T10:51:11.552" v="2812" actId="165"/>
-          <ac:grpSpMkLst>
-            <pc:docMk/>
-            <pc:sldMk cId="1669152728" sldId="273"/>
-            <ac:grpSpMk id="3" creationId="{A03EEE1C-2A4B-58FA-D46B-770FC66B5A75}"/>
-          </ac:grpSpMkLst>
-        </pc:grpChg>
-        <pc:grpChg chg="del">
-          <ac:chgData name="全 香玉" userId="1f3450e5-81b9-4f7a-82d7-841c32c029e0" providerId="ADAL" clId="{670531AC-1667-4F97-B1A6-5D38F8A44A79}" dt="2026-07-23T10:48:26.037" v="2790" actId="478"/>
-          <ac:grpSpMkLst>
-            <pc:docMk/>
-            <pc:sldMk cId="1669152728" sldId="273"/>
-            <ac:grpSpMk id="171" creationId="{0F75828E-79BC-C379-1376-38C2236C7574}"/>
-          </ac:grpSpMkLst>
-        </pc:grpChg>
-        <pc:grpChg chg="mod">
-          <ac:chgData name="全 香玉" userId="1f3450e5-81b9-4f7a-82d7-841c32c029e0" providerId="ADAL" clId="{670531AC-1667-4F97-B1A6-5D38F8A44A79}" dt="2026-07-23T10:51:11.552" v="2812" actId="165"/>
-          <ac:grpSpMkLst>
-            <pc:docMk/>
-            <pc:sldMk cId="1669152728" sldId="273"/>
-            <ac:grpSpMk id="285" creationId="{91EC8264-C0A6-E592-A000-854BC2F983D4}"/>
-          </ac:grpSpMkLst>
-        </pc:grpChg>
-        <pc:grpChg chg="mod topLvl">
-          <ac:chgData name="全 香玉" userId="1f3450e5-81b9-4f7a-82d7-841c32c029e0" providerId="ADAL" clId="{670531AC-1667-4F97-B1A6-5D38F8A44A79}" dt="2026-07-23T10:51:11.552" v="2812" actId="165"/>
-          <ac:grpSpMkLst>
-            <pc:docMk/>
-            <pc:sldMk cId="1669152728" sldId="273"/>
-            <ac:grpSpMk id="288" creationId="{30BE6C6D-F483-1CBB-45F0-9DCB9570A1C0}"/>
-          </ac:grpSpMkLst>
-        </pc:grpChg>
-        <pc:grpChg chg="mod">
-          <ac:chgData name="全 香玉" userId="1f3450e5-81b9-4f7a-82d7-841c32c029e0" providerId="ADAL" clId="{670531AC-1667-4F97-B1A6-5D38F8A44A79}" dt="2026-07-23T10:48:50.148" v="2796" actId="1076"/>
-          <ac:grpSpMkLst>
-            <pc:docMk/>
-            <pc:sldMk cId="1669152728" sldId="273"/>
-            <ac:grpSpMk id="289" creationId="{03A168F5-7312-7202-0397-C4E305F5CCAE}"/>
-          </ac:grpSpMkLst>
-        </pc:grpChg>
-        <pc:cxnChg chg="mod">
-          <ac:chgData name="全 香玉" userId="1f3450e5-81b9-4f7a-82d7-841c32c029e0" providerId="ADAL" clId="{670531AC-1667-4F97-B1A6-5D38F8A44A79}" dt="2026-07-23T10:48:26.037" v="2790" actId="478"/>
-          <ac:cxnSpMkLst>
-            <pc:docMk/>
-            <pc:sldMk cId="1669152728" sldId="273"/>
-            <ac:cxnSpMk id="50" creationId="{485C4F42-9E02-CFE2-4904-B894E4BBCA54}"/>
-          </ac:cxnSpMkLst>
-        </pc:cxnChg>
-        <pc:cxnChg chg="mod">
-          <ac:chgData name="全 香玉" userId="1f3450e5-81b9-4f7a-82d7-841c32c029e0" providerId="ADAL" clId="{670531AC-1667-4F97-B1A6-5D38F8A44A79}" dt="2026-07-23T10:51:11.552" v="2812" actId="165"/>
-          <ac:cxnSpMkLst>
-            <pc:docMk/>
-            <pc:sldMk cId="1669152728" sldId="273"/>
-            <ac:cxnSpMk id="262" creationId="{25A0D2BA-7ADE-0412-0654-A3E9C40279B3}"/>
-          </ac:cxnSpMkLst>
-        </pc:cxnChg>
-        <pc:cxnChg chg="mod">
-          <ac:chgData name="全 香玉" userId="1f3450e5-81b9-4f7a-82d7-841c32c029e0" providerId="ADAL" clId="{670531AC-1667-4F97-B1A6-5D38F8A44A79}" dt="2026-07-23T10:51:11.552" v="2812" actId="165"/>
-          <ac:cxnSpMkLst>
-            <pc:docMk/>
-            <pc:sldMk cId="1669152728" sldId="273"/>
-            <ac:cxnSpMk id="267" creationId="{436164A0-B519-2103-643E-DEB888D4664D}"/>
-          </ac:cxnSpMkLst>
-        </pc:cxnChg>
-        <pc:cxnChg chg="mod">
-          <ac:chgData name="全 香玉" userId="1f3450e5-81b9-4f7a-82d7-841c32c029e0" providerId="ADAL" clId="{670531AC-1667-4F97-B1A6-5D38F8A44A79}" dt="2026-07-23T10:51:11.552" v="2812" actId="165"/>
-          <ac:cxnSpMkLst>
-            <pc:docMk/>
-            <pc:sldMk cId="1669152728" sldId="273"/>
-            <ac:cxnSpMk id="273" creationId="{4EDEC711-BDB5-9BCC-827D-BD5449A7DDBD}"/>
-          </ac:cxnSpMkLst>
-        </pc:cxnChg>
-        <pc:cxnChg chg="mod">
-          <ac:chgData name="全 香玉" userId="1f3450e5-81b9-4f7a-82d7-841c32c029e0" providerId="ADAL" clId="{670531AC-1667-4F97-B1A6-5D38F8A44A79}" dt="2026-07-23T10:50:35.350" v="2808" actId="1076"/>
-          <ac:cxnSpMkLst>
-            <pc:docMk/>
-            <pc:sldMk cId="1669152728" sldId="273"/>
-            <ac:cxnSpMk id="276" creationId="{BA564435-F521-B91F-43D9-65F5C51DAF26}"/>
+            <pc:sldMk cId="1716350635" sldId="274"/>
+            <ac:cxnSpMk id="120" creationId="{E5E11A20-1B4B-2A02-6590-8892BFF39232}"/>
           </ac:cxnSpMkLst>
         </pc:cxnChg>
       </pc:sldChg>
@@ -1547,7 +425,7 @@
           <a:p>
             <a:fld id="{9236E18D-A30F-4D3C-BC15-86FA9E93A319}" type="datetimeFigureOut">
               <a:rPr kumimoji="1" lang="ja-JP" altLang="en-US" smtClean="0"/>
-              <a:t>2026/7/23</a:t>
+              <a:t>2026/10/20</a:t>
             </a:fld>
             <a:endParaRPr kumimoji="1" lang="ja-JP" altLang="en-US"/>
           </a:p>
@@ -1747,7 +625,7 @@
           <a:p>
             <a:fld id="{9236E18D-A30F-4D3C-BC15-86FA9E93A319}" type="datetimeFigureOut">
               <a:rPr kumimoji="1" lang="ja-JP" altLang="en-US" smtClean="0"/>
-              <a:t>2026/7/23</a:t>
+              <a:t>2026/10/20</a:t>
             </a:fld>
             <a:endParaRPr kumimoji="1" lang="ja-JP" altLang="en-US"/>
           </a:p>
@@ -1957,7 +835,7 @@
           <a:p>
             <a:fld id="{9236E18D-A30F-4D3C-BC15-86FA9E93A319}" type="datetimeFigureOut">
               <a:rPr kumimoji="1" lang="ja-JP" altLang="en-US" smtClean="0"/>
-              <a:t>2026/7/23</a:t>
+              <a:t>2026/10/20</a:t>
             </a:fld>
             <a:endParaRPr kumimoji="1" lang="ja-JP" altLang="en-US"/>
           </a:p>
@@ -2157,7 +1035,7 @@
           <a:p>
             <a:fld id="{9236E18D-A30F-4D3C-BC15-86FA9E93A319}" type="datetimeFigureOut">
               <a:rPr kumimoji="1" lang="ja-JP" altLang="en-US" smtClean="0"/>
-              <a:t>2026/7/23</a:t>
+              <a:t>2026/10/20</a:t>
             </a:fld>
             <a:endParaRPr kumimoji="1" lang="ja-JP" altLang="en-US"/>
           </a:p>
@@ -2433,7 +1311,7 @@
           <a:p>
             <a:fld id="{9236E18D-A30F-4D3C-BC15-86FA9E93A319}" type="datetimeFigureOut">
               <a:rPr kumimoji="1" lang="ja-JP" altLang="en-US" smtClean="0"/>
-              <a:t>2026/7/23</a:t>
+              <a:t>2026/10/20</a:t>
             </a:fld>
             <a:endParaRPr kumimoji="1" lang="ja-JP" altLang="en-US"/>
           </a:p>
@@ -2701,7 +1579,7 @@
           <a:p>
             <a:fld id="{9236E18D-A30F-4D3C-BC15-86FA9E93A319}" type="datetimeFigureOut">
               <a:rPr kumimoji="1" lang="ja-JP" altLang="en-US" smtClean="0"/>
-              <a:t>2026/7/23</a:t>
+              <a:t>2026/10/20</a:t>
             </a:fld>
             <a:endParaRPr kumimoji="1" lang="ja-JP" altLang="en-US"/>
           </a:p>
@@ -3116,7 +1994,7 @@
           <a:p>
             <a:fld id="{9236E18D-A30F-4D3C-BC15-86FA9E93A319}" type="datetimeFigureOut">
               <a:rPr kumimoji="1" lang="ja-JP" altLang="en-US" smtClean="0"/>
-              <a:t>2026/7/23</a:t>
+              <a:t>2026/10/20</a:t>
             </a:fld>
             <a:endParaRPr kumimoji="1" lang="ja-JP" altLang="en-US"/>
           </a:p>
@@ -3258,7 +2136,7 @@
           <a:p>
             <a:fld id="{9236E18D-A30F-4D3C-BC15-86FA9E93A319}" type="datetimeFigureOut">
               <a:rPr kumimoji="1" lang="ja-JP" altLang="en-US" smtClean="0"/>
-              <a:t>2026/7/23</a:t>
+              <a:t>2026/10/20</a:t>
             </a:fld>
             <a:endParaRPr kumimoji="1" lang="ja-JP" altLang="en-US"/>
           </a:p>
@@ -3371,7 +2249,7 @@
           <a:p>
             <a:fld id="{9236E18D-A30F-4D3C-BC15-86FA9E93A319}" type="datetimeFigureOut">
               <a:rPr kumimoji="1" lang="ja-JP" altLang="en-US" smtClean="0"/>
-              <a:t>2026/7/23</a:t>
+              <a:t>2026/10/20</a:t>
             </a:fld>
             <a:endParaRPr kumimoji="1" lang="ja-JP" altLang="en-US"/>
           </a:p>
@@ -3684,7 +2562,7 @@
           <a:p>
             <a:fld id="{9236E18D-A30F-4D3C-BC15-86FA9E93A319}" type="datetimeFigureOut">
               <a:rPr kumimoji="1" lang="ja-JP" altLang="en-US" smtClean="0"/>
-              <a:t>2026/7/23</a:t>
+              <a:t>2026/10/20</a:t>
             </a:fld>
             <a:endParaRPr kumimoji="1" lang="ja-JP" altLang="en-US"/>
           </a:p>
@@ -3973,7 +2851,7 @@
           <a:p>
             <a:fld id="{9236E18D-A30F-4D3C-BC15-86FA9E93A319}" type="datetimeFigureOut">
               <a:rPr kumimoji="1" lang="ja-JP" altLang="en-US" smtClean="0"/>
-              <a:t>2026/7/23</a:t>
+              <a:t>2026/10/20</a:t>
             </a:fld>
             <a:endParaRPr kumimoji="1" lang="ja-JP" altLang="en-US"/>
           </a:p>
@@ -4216,7 +3094,7 @@
           <a:p>
             <a:fld id="{9236E18D-A30F-4D3C-BC15-86FA9E93A319}" type="datetimeFigureOut">
               <a:rPr kumimoji="1" lang="ja-JP" altLang="en-US" smtClean="0"/>
-              <a:t>2026/7/23</a:t>
+              <a:t>2026/10/20</a:t>
             </a:fld>
             <a:endParaRPr kumimoji="1" lang="ja-JP" altLang="en-US"/>
           </a:p>
@@ -6305,10 +5183,7 @@
                 <a:pPr/>
                 <a14:m>
                   <m:oMathPara xmlns:m="http://schemas.openxmlformats.org/officeDocument/2006/math">
-                    <m:oMathParaPr>
-                      <m:jc m:val="centerGroup"/>
-                    </m:oMathParaPr>
-                    <m:oMath xmlns:m="http://schemas.openxmlformats.org/officeDocument/2006/math">
+                    <m:oMath>
                       <m:r>
                         <a:rPr lang="en-US" sz="2400" i="1" smtClean="0">
                           <a:latin typeface="Cambria Math" panose="02040503050406030204" pitchFamily="18" charset="0"/>
@@ -6983,10 +5858,7 @@
                 <a:pPr/>
                 <a14:m>
                   <m:oMathPara xmlns:m="http://schemas.openxmlformats.org/officeDocument/2006/math">
-                    <m:oMathParaPr>
-                      <m:jc m:val="centerGroup"/>
-                    </m:oMathParaPr>
-                    <m:oMath xmlns:m="http://schemas.openxmlformats.org/officeDocument/2006/math">
+                    <m:oMath>
                       <m:r>
                         <a:rPr lang="en-US" sz="2400" i="1" smtClean="0">
                           <a:latin typeface="Cambria Math" panose="02040503050406030204" pitchFamily="18" charset="0"/>
@@ -7164,10 +6036,7 @@
                 <a:pPr/>
                 <a14:m>
                   <m:oMathPara xmlns:m="http://schemas.openxmlformats.org/officeDocument/2006/math">
-                    <m:oMathParaPr>
-                      <m:jc m:val="centerGroup"/>
-                    </m:oMathParaPr>
-                    <m:oMath xmlns:m="http://schemas.openxmlformats.org/officeDocument/2006/math">
+                    <m:oMath>
                       <m:r>
                         <a:rPr lang="en-US" sz="2400" i="1" smtClean="0">
                           <a:latin typeface="Cambria Math" panose="02040503050406030204" pitchFamily="18" charset="0"/>
@@ -7261,14 +6130,11 @@
                 <a:pPr/>
                 <a14:m>
                   <m:oMathPara xmlns:m="http://schemas.openxmlformats.org/officeDocument/2006/math">
-                    <m:oMathParaPr>
-                      <m:jc m:val="centerGroup"/>
-                    </m:oMathParaPr>
-                    <m:oMath xmlns:m="http://schemas.openxmlformats.org/officeDocument/2006/math">
+                    <m:oMath>
                       <m:sSub>
                         <m:sSubPr>
                           <m:ctrlPr>
-                            <a:rPr lang="en-US" sz="2400" i="1" smtClean="0">
+                            <a:rPr lang="en-US" sz="2400" b="0" i="1" smtClean="0">
                               <a:latin typeface="Cambria Math" panose="02040503050406030204" pitchFamily="18" charset="0"/>
                             </a:rPr>
                           </m:ctrlPr>
@@ -7361,6 +6227,2094 @@
   <p:cSld>
     <p:spTree>
       <p:nvGrpSpPr>
+        <p:cNvPr id="1" name="">
+          <a:extLst>
+            <a:ext uri="{FF2B5EF4-FFF2-40B4-BE49-F238E27FC236}">
+              <a16:creationId xmlns:a16="http://schemas.microsoft.com/office/drawing/2014/main" id="{4B33FC46-BB6F-2937-FC15-EAD68CA60E80}"/>
+            </a:ext>
+          </a:extLst>
+        </p:cNvPr>
+        <p:cNvGrpSpPr/>
+        <p:nvPr/>
+      </p:nvGrpSpPr>
+      <p:grpSpPr>
+        <a:xfrm>
+          <a:off x="0" y="0"/>
+          <a:ext cx="0" cy="0"/>
+          <a:chOff x="0" y="0"/>
+          <a:chExt cx="0" cy="0"/>
+        </a:xfrm>
+      </p:grpSpPr>
+      <p:cxnSp>
+        <p:nvCxnSpPr>
+          <p:cNvPr id="29" name="Straight Arrow Connector 22">
+            <a:extLst>
+              <a:ext uri="{FF2B5EF4-FFF2-40B4-BE49-F238E27FC236}">
+                <a16:creationId xmlns:a16="http://schemas.microsoft.com/office/drawing/2014/main" id="{BE7FA2A7-B0B0-1690-6F6F-66A4BE3BF254}"/>
+              </a:ext>
+            </a:extLst>
+          </p:cNvPr>
+          <p:cNvCxnSpPr>
+            <a:cxnSpLocks/>
+          </p:cNvCxnSpPr>
+          <p:nvPr/>
+        </p:nvCxnSpPr>
+        <p:spPr>
+          <a:xfrm flipH="1" flipV="1">
+            <a:off x="9398292" y="3059116"/>
+            <a:ext cx="1625319" cy="524261"/>
+          </a:xfrm>
+          <a:prstGeom prst="straightConnector1">
+            <a:avLst/>
+          </a:prstGeom>
+          <a:ln>
+            <a:solidFill>
+              <a:srgbClr val="FF0000"/>
+            </a:solidFill>
+            <a:tailEnd type="triangle"/>
+          </a:ln>
+        </p:spPr>
+        <p:style>
+          <a:lnRef idx="2">
+            <a:schemeClr val="dk1"/>
+          </a:lnRef>
+          <a:fillRef idx="0">
+            <a:schemeClr val="dk1"/>
+          </a:fillRef>
+          <a:effectRef idx="1">
+            <a:schemeClr val="dk1"/>
+          </a:effectRef>
+          <a:fontRef idx="minor">
+            <a:schemeClr val="tx1"/>
+          </a:fontRef>
+        </p:style>
+      </p:cxnSp>
+      <p:cxnSp>
+        <p:nvCxnSpPr>
+          <p:cNvPr id="24" name="Straight Arrow Connector 19">
+            <a:extLst>
+              <a:ext uri="{FF2B5EF4-FFF2-40B4-BE49-F238E27FC236}">
+                <a16:creationId xmlns:a16="http://schemas.microsoft.com/office/drawing/2014/main" id="{9AD24558-ECC4-D7E6-67C2-EDE4927AAD4C}"/>
+              </a:ext>
+            </a:extLst>
+          </p:cNvPr>
+          <p:cNvCxnSpPr>
+            <a:cxnSpLocks/>
+          </p:cNvCxnSpPr>
+          <p:nvPr/>
+        </p:nvCxnSpPr>
+        <p:spPr>
+          <a:xfrm flipV="1">
+            <a:off x="9400688" y="1081445"/>
+            <a:ext cx="1462774" cy="2012161"/>
+          </a:xfrm>
+          <a:prstGeom prst="straightConnector1">
+            <a:avLst/>
+          </a:prstGeom>
+          <a:ln>
+            <a:prstDash val="sysDot"/>
+            <a:headEnd type="arrow" w="med" len="med"/>
+            <a:tailEnd type="none" w="med" len="med"/>
+          </a:ln>
+        </p:spPr>
+        <p:style>
+          <a:lnRef idx="2">
+            <a:schemeClr val="dk1"/>
+          </a:lnRef>
+          <a:fillRef idx="0">
+            <a:schemeClr val="dk1"/>
+          </a:fillRef>
+          <a:effectRef idx="1">
+            <a:schemeClr val="dk1"/>
+          </a:effectRef>
+          <a:fontRef idx="minor">
+            <a:schemeClr val="tx1"/>
+          </a:fontRef>
+        </p:style>
+      </p:cxnSp>
+      <p:sp>
+        <p:nvSpPr>
+          <p:cNvPr id="4" name="Oval 3">
+            <a:extLst>
+              <a:ext uri="{FF2B5EF4-FFF2-40B4-BE49-F238E27FC236}">
+                <a16:creationId xmlns:a16="http://schemas.microsoft.com/office/drawing/2014/main" id="{BD8BFBF1-3113-6790-E6E3-41453731788A}"/>
+              </a:ext>
+            </a:extLst>
+          </p:cNvPr>
+          <p:cNvSpPr/>
+          <p:nvPr/>
+        </p:nvSpPr>
+        <p:spPr>
+          <a:xfrm>
+            <a:off x="2946400" y="1981200"/>
+            <a:ext cx="1479550" cy="2120900"/>
+          </a:xfrm>
+          <a:prstGeom prst="ellipse">
+            <a:avLst/>
+          </a:prstGeom>
+          <a:solidFill>
+            <a:schemeClr val="bg2">
+              <a:lumMod val="90000"/>
+            </a:schemeClr>
+          </a:solidFill>
+        </p:spPr>
+        <p:style>
+          <a:lnRef idx="2">
+            <a:schemeClr val="dk1">
+              <a:shade val="15000"/>
+            </a:schemeClr>
+          </a:lnRef>
+          <a:fillRef idx="1">
+            <a:schemeClr val="dk1"/>
+          </a:fillRef>
+          <a:effectRef idx="0">
+            <a:schemeClr val="dk1"/>
+          </a:effectRef>
+          <a:fontRef idx="minor">
+            <a:schemeClr val="lt1"/>
+          </a:fontRef>
+        </p:style>
+        <p:txBody>
+          <a:bodyPr rtlCol="0" anchor="ctr"/>
+          <a:lstStyle/>
+          <a:p>
+            <a:pPr algn="ctr"/>
+            <a:endParaRPr kumimoji="1" lang="ja-JP" altLang="en-US" dirty="0"/>
+          </a:p>
+        </p:txBody>
+      </p:sp>
+      <p:sp>
+        <p:nvSpPr>
+          <p:cNvPr id="5" name="Oval 4">
+            <a:extLst>
+              <a:ext uri="{FF2B5EF4-FFF2-40B4-BE49-F238E27FC236}">
+                <a16:creationId xmlns:a16="http://schemas.microsoft.com/office/drawing/2014/main" id="{89FEFAC8-7164-CBDC-D1EB-63BAB15383F3}"/>
+              </a:ext>
+            </a:extLst>
+          </p:cNvPr>
+          <p:cNvSpPr/>
+          <p:nvPr/>
+        </p:nvSpPr>
+        <p:spPr>
+          <a:xfrm>
+            <a:off x="3282950" y="2495550"/>
+            <a:ext cx="737532" cy="1057234"/>
+          </a:xfrm>
+          <a:prstGeom prst="ellipse">
+            <a:avLst/>
+          </a:prstGeom>
+          <a:solidFill>
+            <a:schemeClr val="bg1"/>
+          </a:solidFill>
+        </p:spPr>
+        <p:style>
+          <a:lnRef idx="2">
+            <a:schemeClr val="dk1">
+              <a:shade val="15000"/>
+            </a:schemeClr>
+          </a:lnRef>
+          <a:fillRef idx="1">
+            <a:schemeClr val="dk1"/>
+          </a:fillRef>
+          <a:effectRef idx="0">
+            <a:schemeClr val="dk1"/>
+          </a:effectRef>
+          <a:fontRef idx="minor">
+            <a:schemeClr val="lt1"/>
+          </a:fontRef>
+        </p:style>
+        <p:txBody>
+          <a:bodyPr rtlCol="0" anchor="ctr"/>
+          <a:lstStyle/>
+          <a:p>
+            <a:pPr algn="ctr"/>
+            <a:endParaRPr kumimoji="1" lang="ja-JP" altLang="en-US"/>
+          </a:p>
+        </p:txBody>
+      </p:sp>
+      <p:cxnSp>
+        <p:nvCxnSpPr>
+          <p:cNvPr id="7" name="Straight Connector 6">
+            <a:extLst>
+              <a:ext uri="{FF2B5EF4-FFF2-40B4-BE49-F238E27FC236}">
+                <a16:creationId xmlns:a16="http://schemas.microsoft.com/office/drawing/2014/main" id="{904A6613-F680-470A-11A8-8E24AFA3EEB6}"/>
+              </a:ext>
+            </a:extLst>
+          </p:cNvPr>
+          <p:cNvCxnSpPr>
+            <a:stCxn id="4" idx="0"/>
+          </p:cNvCxnSpPr>
+          <p:nvPr/>
+        </p:nvCxnSpPr>
+        <p:spPr>
+          <a:xfrm>
+            <a:off x="3686175" y="1981200"/>
+            <a:ext cx="3971925" cy="0"/>
+          </a:xfrm>
+          <a:prstGeom prst="line">
+            <a:avLst/>
+          </a:prstGeom>
+        </p:spPr>
+        <p:style>
+          <a:lnRef idx="2">
+            <a:schemeClr val="dk1"/>
+          </a:lnRef>
+          <a:fillRef idx="0">
+            <a:schemeClr val="dk1"/>
+          </a:fillRef>
+          <a:effectRef idx="1">
+            <a:schemeClr val="dk1"/>
+          </a:effectRef>
+          <a:fontRef idx="minor">
+            <a:schemeClr val="tx1"/>
+          </a:fontRef>
+        </p:style>
+      </p:cxnSp>
+      <p:cxnSp>
+        <p:nvCxnSpPr>
+          <p:cNvPr id="8" name="Straight Connector 7">
+            <a:extLst>
+              <a:ext uri="{FF2B5EF4-FFF2-40B4-BE49-F238E27FC236}">
+                <a16:creationId xmlns:a16="http://schemas.microsoft.com/office/drawing/2014/main" id="{A31CF7A5-A4FB-EF61-0E19-65F32143B3D3}"/>
+              </a:ext>
+            </a:extLst>
+          </p:cNvPr>
+          <p:cNvCxnSpPr>
+            <a:cxnSpLocks/>
+            <a:stCxn id="4" idx="4"/>
+          </p:cNvCxnSpPr>
+          <p:nvPr/>
+        </p:nvCxnSpPr>
+        <p:spPr>
+          <a:xfrm>
+            <a:off x="3686175" y="4102100"/>
+            <a:ext cx="4079877" cy="0"/>
+          </a:xfrm>
+          <a:prstGeom prst="line">
+            <a:avLst/>
+          </a:prstGeom>
+        </p:spPr>
+        <p:style>
+          <a:lnRef idx="2">
+            <a:schemeClr val="dk1"/>
+          </a:lnRef>
+          <a:fillRef idx="0">
+            <a:schemeClr val="dk1"/>
+          </a:fillRef>
+          <a:effectRef idx="1">
+            <a:schemeClr val="dk1"/>
+          </a:effectRef>
+          <a:fontRef idx="minor">
+            <a:schemeClr val="tx1"/>
+          </a:fontRef>
+        </p:style>
+      </p:cxnSp>
+      <p:cxnSp>
+        <p:nvCxnSpPr>
+          <p:cNvPr id="20" name="Straight Arrow Connector 19">
+            <a:extLst>
+              <a:ext uri="{FF2B5EF4-FFF2-40B4-BE49-F238E27FC236}">
+                <a16:creationId xmlns:a16="http://schemas.microsoft.com/office/drawing/2014/main" id="{1141618A-5BC9-DEC4-9A6E-8C48DED91455}"/>
+              </a:ext>
+            </a:extLst>
+          </p:cNvPr>
+          <p:cNvCxnSpPr>
+            <a:cxnSpLocks/>
+          </p:cNvCxnSpPr>
+          <p:nvPr/>
+        </p:nvCxnSpPr>
+        <p:spPr>
+          <a:xfrm>
+            <a:off x="4425950" y="3088685"/>
+            <a:ext cx="3536950" cy="0"/>
+          </a:xfrm>
+          <a:prstGeom prst="straightConnector1">
+            <a:avLst/>
+          </a:prstGeom>
+          <a:ln>
+            <a:prstDash val="sysDot"/>
+            <a:tailEnd type="triangle"/>
+          </a:ln>
+        </p:spPr>
+        <p:style>
+          <a:lnRef idx="2">
+            <a:schemeClr val="dk1"/>
+          </a:lnRef>
+          <a:fillRef idx="0">
+            <a:schemeClr val="dk1"/>
+          </a:fillRef>
+          <a:effectRef idx="1">
+            <a:schemeClr val="dk1"/>
+          </a:effectRef>
+          <a:fontRef idx="minor">
+            <a:schemeClr val="tx1"/>
+          </a:fontRef>
+        </p:style>
+      </p:cxnSp>
+      <p:cxnSp>
+        <p:nvCxnSpPr>
+          <p:cNvPr id="21" name="Straight Arrow Connector 20">
+            <a:extLst>
+              <a:ext uri="{FF2B5EF4-FFF2-40B4-BE49-F238E27FC236}">
+                <a16:creationId xmlns:a16="http://schemas.microsoft.com/office/drawing/2014/main" id="{1A193A9B-32EF-BB5E-423C-C7C12DA55127}"/>
+              </a:ext>
+            </a:extLst>
+          </p:cNvPr>
+          <p:cNvCxnSpPr>
+            <a:cxnSpLocks/>
+          </p:cNvCxnSpPr>
+          <p:nvPr/>
+        </p:nvCxnSpPr>
+        <p:spPr>
+          <a:xfrm flipV="1">
+            <a:off x="3683918" y="1498600"/>
+            <a:ext cx="0" cy="3498850"/>
+          </a:xfrm>
+          <a:prstGeom prst="straightConnector1">
+            <a:avLst/>
+          </a:prstGeom>
+          <a:ln>
+            <a:prstDash val="sysDot"/>
+            <a:tailEnd type="triangle"/>
+          </a:ln>
+        </p:spPr>
+        <p:style>
+          <a:lnRef idx="2">
+            <a:schemeClr val="dk1"/>
+          </a:lnRef>
+          <a:fillRef idx="0">
+            <a:schemeClr val="dk1"/>
+          </a:fillRef>
+          <a:effectRef idx="1">
+            <a:schemeClr val="dk1"/>
+          </a:effectRef>
+          <a:fontRef idx="minor">
+            <a:schemeClr val="tx1"/>
+          </a:fontRef>
+        </p:style>
+      </p:cxnSp>
+      <p:sp>
+        <p:nvSpPr>
+          <p:cNvPr id="26" name="TextBox 25">
+            <a:extLst>
+              <a:ext uri="{FF2B5EF4-FFF2-40B4-BE49-F238E27FC236}">
+                <a16:creationId xmlns:a16="http://schemas.microsoft.com/office/drawing/2014/main" id="{776156A5-BEE5-0172-0D94-8B3E147B499F}"/>
+              </a:ext>
+            </a:extLst>
+          </p:cNvPr>
+          <p:cNvSpPr txBox="1"/>
+          <p:nvPr/>
+        </p:nvSpPr>
+        <p:spPr>
+          <a:xfrm>
+            <a:off x="3533877" y="1084558"/>
+            <a:ext cx="300082" cy="369332"/>
+          </a:xfrm>
+          <a:prstGeom prst="rect">
+            <a:avLst/>
+          </a:prstGeom>
+          <a:noFill/>
+        </p:spPr>
+        <p:txBody>
+          <a:bodyPr wrap="none" rtlCol="0">
+            <a:spAutoFit/>
+          </a:bodyPr>
+          <a:lstStyle/>
+          <a:p>
+            <a:r>
+              <a:rPr kumimoji="1" lang="en-US" altLang="ja-JP" dirty="0">
+                <a:latin typeface="times" panose="02020603050405020304" pitchFamily="18" charset="0"/>
+                <a:cs typeface="times" panose="02020603050405020304" pitchFamily="18" charset="0"/>
+              </a:rPr>
+              <a:t>x</a:t>
+            </a:r>
+            <a:endParaRPr kumimoji="1" lang="ja-JP" altLang="en-US" dirty="0">
+              <a:latin typeface="times" panose="02020603050405020304" pitchFamily="18" charset="0"/>
+              <a:cs typeface="times" panose="02020603050405020304" pitchFamily="18" charset="0"/>
+            </a:endParaRPr>
+          </a:p>
+        </p:txBody>
+      </p:sp>
+      <p:sp>
+        <p:nvSpPr>
+          <p:cNvPr id="27" name="TextBox 26">
+            <a:extLst>
+              <a:ext uri="{FF2B5EF4-FFF2-40B4-BE49-F238E27FC236}">
+                <a16:creationId xmlns:a16="http://schemas.microsoft.com/office/drawing/2014/main" id="{C06236FF-D554-74E9-7C4B-EC69AFBF513F}"/>
+              </a:ext>
+            </a:extLst>
+          </p:cNvPr>
+          <p:cNvSpPr txBox="1"/>
+          <p:nvPr/>
+        </p:nvSpPr>
+        <p:spPr>
+          <a:xfrm>
+            <a:off x="2667607" y="1796446"/>
+            <a:ext cx="300082" cy="369332"/>
+          </a:xfrm>
+          <a:prstGeom prst="rect">
+            <a:avLst/>
+          </a:prstGeom>
+          <a:noFill/>
+        </p:spPr>
+        <p:txBody>
+          <a:bodyPr wrap="none" rtlCol="0">
+            <a:spAutoFit/>
+          </a:bodyPr>
+          <a:lstStyle/>
+          <a:p>
+            <a:r>
+              <a:rPr kumimoji="1" lang="en-US" altLang="ja-JP" dirty="0">
+                <a:latin typeface="times" panose="02020603050405020304" pitchFamily="18" charset="0"/>
+                <a:cs typeface="times" panose="02020603050405020304" pitchFamily="18" charset="0"/>
+              </a:rPr>
+              <a:t>y</a:t>
+            </a:r>
+            <a:endParaRPr kumimoji="1" lang="ja-JP" altLang="en-US" dirty="0">
+              <a:latin typeface="times" panose="02020603050405020304" pitchFamily="18" charset="0"/>
+              <a:cs typeface="times" panose="02020603050405020304" pitchFamily="18" charset="0"/>
+            </a:endParaRPr>
+          </a:p>
+        </p:txBody>
+      </p:sp>
+      <p:sp>
+        <p:nvSpPr>
+          <p:cNvPr id="28" name="TextBox 27">
+            <a:extLst>
+              <a:ext uri="{FF2B5EF4-FFF2-40B4-BE49-F238E27FC236}">
+                <a16:creationId xmlns:a16="http://schemas.microsoft.com/office/drawing/2014/main" id="{A8DD9976-F884-80AA-B366-33BD79C0B5F4}"/>
+              </a:ext>
+            </a:extLst>
+          </p:cNvPr>
+          <p:cNvSpPr txBox="1"/>
+          <p:nvPr/>
+        </p:nvSpPr>
+        <p:spPr>
+          <a:xfrm>
+            <a:off x="7675642" y="3004643"/>
+            <a:ext cx="287258" cy="369332"/>
+          </a:xfrm>
+          <a:prstGeom prst="rect">
+            <a:avLst/>
+          </a:prstGeom>
+          <a:noFill/>
+        </p:spPr>
+        <p:txBody>
+          <a:bodyPr wrap="none" rtlCol="0">
+            <a:spAutoFit/>
+          </a:bodyPr>
+          <a:lstStyle/>
+          <a:p>
+            <a:r>
+              <a:rPr kumimoji="1" lang="en-US" altLang="ja-JP" dirty="0">
+                <a:latin typeface="times" panose="02020603050405020304" pitchFamily="18" charset="0"/>
+                <a:cs typeface="times" panose="02020603050405020304" pitchFamily="18" charset="0"/>
+              </a:rPr>
+              <a:t>z</a:t>
+            </a:r>
+            <a:endParaRPr kumimoji="1" lang="ja-JP" altLang="en-US" dirty="0">
+              <a:latin typeface="times" panose="02020603050405020304" pitchFamily="18" charset="0"/>
+              <a:cs typeface="times" panose="02020603050405020304" pitchFamily="18" charset="0"/>
+            </a:endParaRPr>
+          </a:p>
+        </p:txBody>
+      </p:sp>
+      <p:cxnSp>
+        <p:nvCxnSpPr>
+          <p:cNvPr id="6" name="Straight Arrow Connector 19">
+            <a:extLst>
+              <a:ext uri="{FF2B5EF4-FFF2-40B4-BE49-F238E27FC236}">
+                <a16:creationId xmlns:a16="http://schemas.microsoft.com/office/drawing/2014/main" id="{CFEFD5B6-5F27-D53B-BCF8-91289F04DB83}"/>
+              </a:ext>
+            </a:extLst>
+          </p:cNvPr>
+          <p:cNvCxnSpPr>
+            <a:cxnSpLocks/>
+          </p:cNvCxnSpPr>
+          <p:nvPr/>
+        </p:nvCxnSpPr>
+        <p:spPr>
+          <a:xfrm>
+            <a:off x="2946400" y="2165778"/>
+            <a:ext cx="2011715" cy="2446487"/>
+          </a:xfrm>
+          <a:prstGeom prst="straightConnector1">
+            <a:avLst/>
+          </a:prstGeom>
+          <a:ln>
+            <a:prstDash val="sysDot"/>
+            <a:headEnd type="arrow" w="med" len="med"/>
+            <a:tailEnd type="none" w="med" len="med"/>
+          </a:ln>
+        </p:spPr>
+        <p:style>
+          <a:lnRef idx="2">
+            <a:schemeClr val="dk1"/>
+          </a:lnRef>
+          <a:fillRef idx="0">
+            <a:schemeClr val="dk1"/>
+          </a:fillRef>
+          <a:effectRef idx="1">
+            <a:schemeClr val="dk1"/>
+          </a:effectRef>
+          <a:fontRef idx="minor">
+            <a:schemeClr val="tx1"/>
+          </a:fontRef>
+        </p:style>
+      </p:cxnSp>
+      <p:cxnSp>
+        <p:nvCxnSpPr>
+          <p:cNvPr id="31" name="Straight Arrow Connector 19">
+            <a:extLst>
+              <a:ext uri="{FF2B5EF4-FFF2-40B4-BE49-F238E27FC236}">
+                <a16:creationId xmlns:a16="http://schemas.microsoft.com/office/drawing/2014/main" id="{839F3962-C9FB-742A-0849-2C52DC626F76}"/>
+              </a:ext>
+            </a:extLst>
+          </p:cNvPr>
+          <p:cNvCxnSpPr>
+            <a:cxnSpLocks/>
+          </p:cNvCxnSpPr>
+          <p:nvPr/>
+        </p:nvCxnSpPr>
+        <p:spPr>
+          <a:xfrm>
+            <a:off x="3683918" y="3074953"/>
+            <a:ext cx="336564" cy="0"/>
+          </a:xfrm>
+          <a:prstGeom prst="straightConnector1">
+            <a:avLst/>
+          </a:prstGeom>
+          <a:ln>
+            <a:prstDash val="sysDot"/>
+            <a:headEnd type="none" w="med" len="med"/>
+            <a:tailEnd type="none" w="med" len="med"/>
+          </a:ln>
+        </p:spPr>
+        <p:style>
+          <a:lnRef idx="2">
+            <a:schemeClr val="dk1"/>
+          </a:lnRef>
+          <a:fillRef idx="0">
+            <a:schemeClr val="dk1"/>
+          </a:fillRef>
+          <a:effectRef idx="1">
+            <a:schemeClr val="dk1"/>
+          </a:effectRef>
+          <a:fontRef idx="minor">
+            <a:schemeClr val="tx1"/>
+          </a:fontRef>
+        </p:style>
+      </p:cxnSp>
+      <p:grpSp>
+        <p:nvGrpSpPr>
+          <p:cNvPr id="59" name="그룹 58">
+            <a:extLst>
+              <a:ext uri="{FF2B5EF4-FFF2-40B4-BE49-F238E27FC236}">
+                <a16:creationId xmlns:a16="http://schemas.microsoft.com/office/drawing/2014/main" id="{7CDD3DB9-A56A-4B7D-A6C6-A56AEB685761}"/>
+              </a:ext>
+            </a:extLst>
+          </p:cNvPr>
+          <p:cNvGrpSpPr/>
+          <p:nvPr/>
+        </p:nvGrpSpPr>
+        <p:grpSpPr>
+          <a:xfrm rot="378356">
+            <a:off x="1830944" y="1847269"/>
+            <a:ext cx="3674235" cy="2561673"/>
+            <a:chOff x="1845071" y="1861618"/>
+            <a:chExt cx="3674235" cy="2561673"/>
+          </a:xfrm>
+        </p:grpSpPr>
+        <p:cxnSp>
+          <p:nvCxnSpPr>
+            <p:cNvPr id="23" name="Straight Arrow Connector 22">
+              <a:extLst>
+                <a:ext uri="{FF2B5EF4-FFF2-40B4-BE49-F238E27FC236}">
+                  <a16:creationId xmlns:a16="http://schemas.microsoft.com/office/drawing/2014/main" id="{006304EE-18EA-397E-9FC3-E29C7C1412F3}"/>
+                </a:ext>
+              </a:extLst>
+            </p:cNvPr>
+            <p:cNvCxnSpPr>
+              <a:cxnSpLocks/>
+            </p:cNvCxnSpPr>
+            <p:nvPr/>
+          </p:nvCxnSpPr>
+          <p:spPr>
+            <a:xfrm flipV="1">
+              <a:off x="1845071" y="3056062"/>
+              <a:ext cx="1888729" cy="1367229"/>
+            </a:xfrm>
+            <a:prstGeom prst="straightConnector1">
+              <a:avLst/>
+            </a:prstGeom>
+            <a:ln>
+              <a:solidFill>
+                <a:srgbClr val="FF0000"/>
+              </a:solidFill>
+              <a:tailEnd type="triangle"/>
+            </a:ln>
+          </p:spPr>
+          <p:style>
+            <a:lnRef idx="2">
+              <a:schemeClr val="dk1"/>
+            </a:lnRef>
+            <a:fillRef idx="0">
+              <a:schemeClr val="dk1"/>
+            </a:fillRef>
+            <a:effectRef idx="1">
+              <a:schemeClr val="dk1"/>
+            </a:effectRef>
+            <a:fontRef idx="minor">
+              <a:schemeClr val="tx1"/>
+            </a:fontRef>
+          </p:style>
+        </p:cxnSp>
+        <p:cxnSp>
+          <p:nvCxnSpPr>
+            <p:cNvPr id="39" name="Straight Arrow Connector 22">
+              <a:extLst>
+                <a:ext uri="{FF2B5EF4-FFF2-40B4-BE49-F238E27FC236}">
+                  <a16:creationId xmlns:a16="http://schemas.microsoft.com/office/drawing/2014/main" id="{D9B0785C-7A83-287D-F248-17E1D968FEB2}"/>
+                </a:ext>
+              </a:extLst>
+            </p:cNvPr>
+            <p:cNvCxnSpPr>
+              <a:cxnSpLocks/>
+            </p:cNvCxnSpPr>
+            <p:nvPr/>
+          </p:nvCxnSpPr>
+          <p:spPr>
+            <a:xfrm rot="21221644" flipV="1">
+              <a:off x="4308375" y="1861618"/>
+              <a:ext cx="1210931" cy="687748"/>
+            </a:xfrm>
+            <a:prstGeom prst="straightConnector1">
+              <a:avLst/>
+            </a:prstGeom>
+            <a:ln>
+              <a:solidFill>
+                <a:srgbClr val="FF0000"/>
+              </a:solidFill>
+              <a:tailEnd type="triangle"/>
+            </a:ln>
+          </p:spPr>
+          <p:style>
+            <a:lnRef idx="2">
+              <a:schemeClr val="dk1"/>
+            </a:lnRef>
+            <a:fillRef idx="0">
+              <a:schemeClr val="dk1"/>
+            </a:fillRef>
+            <a:effectRef idx="1">
+              <a:schemeClr val="dk1"/>
+            </a:effectRef>
+            <a:fontRef idx="minor">
+              <a:schemeClr val="tx1"/>
+            </a:fontRef>
+          </p:style>
+        </p:cxnSp>
+        <p:cxnSp>
+          <p:nvCxnSpPr>
+            <p:cNvPr id="44" name="Straight Arrow Connector 22">
+              <a:extLst>
+                <a:ext uri="{FF2B5EF4-FFF2-40B4-BE49-F238E27FC236}">
+                  <a16:creationId xmlns:a16="http://schemas.microsoft.com/office/drawing/2014/main" id="{4AF22325-074F-F654-CCA8-0E1E3F23DFC5}"/>
+                </a:ext>
+              </a:extLst>
+            </p:cNvPr>
+            <p:cNvCxnSpPr>
+              <a:cxnSpLocks/>
+            </p:cNvCxnSpPr>
+            <p:nvPr/>
+          </p:nvCxnSpPr>
+          <p:spPr>
+            <a:xfrm flipV="1">
+              <a:off x="3700367" y="2609702"/>
+              <a:ext cx="649919" cy="470469"/>
+            </a:xfrm>
+            <a:prstGeom prst="straightConnector1">
+              <a:avLst/>
+            </a:prstGeom>
+            <a:ln>
+              <a:solidFill>
+                <a:srgbClr val="FF0000"/>
+              </a:solidFill>
+              <a:prstDash val="sysDot"/>
+              <a:headEnd type="none" w="med" len="med"/>
+              <a:tailEnd type="none" w="med" len="med"/>
+            </a:ln>
+          </p:spPr>
+          <p:style>
+            <a:lnRef idx="2">
+              <a:schemeClr val="dk1"/>
+            </a:lnRef>
+            <a:fillRef idx="0">
+              <a:schemeClr val="dk1"/>
+            </a:fillRef>
+            <a:effectRef idx="1">
+              <a:schemeClr val="dk1"/>
+            </a:effectRef>
+            <a:fontRef idx="minor">
+              <a:schemeClr val="tx1"/>
+            </a:fontRef>
+          </p:style>
+        </p:cxnSp>
+      </p:grpSp>
+      <p:sp>
+        <p:nvSpPr>
+          <p:cNvPr id="49" name="막힌 원호 48">
+            <a:extLst>
+              <a:ext uri="{FF2B5EF4-FFF2-40B4-BE49-F238E27FC236}">
+                <a16:creationId xmlns:a16="http://schemas.microsoft.com/office/drawing/2014/main" id="{CCB9D032-2293-FD6C-E294-920168EFCB63}"/>
+              </a:ext>
+            </a:extLst>
+          </p:cNvPr>
+          <p:cNvSpPr/>
+          <p:nvPr/>
+        </p:nvSpPr>
+        <p:spPr>
+          <a:xfrm rot="4701866">
+            <a:off x="4289355" y="2759001"/>
+            <a:ext cx="448730" cy="227548"/>
+          </a:xfrm>
+          <a:prstGeom prst="blockArc">
+            <a:avLst>
+              <a:gd name="adj1" fmla="val 10800000"/>
+              <a:gd name="adj2" fmla="val 21574061"/>
+              <a:gd name="adj3" fmla="val 0"/>
+            </a:avLst>
+          </a:prstGeom>
+        </p:spPr>
+        <p:style>
+          <a:lnRef idx="2">
+            <a:schemeClr val="accent1">
+              <a:shade val="15000"/>
+            </a:schemeClr>
+          </a:lnRef>
+          <a:fillRef idx="1">
+            <a:schemeClr val="accent1"/>
+          </a:fillRef>
+          <a:effectRef idx="0">
+            <a:schemeClr val="accent1"/>
+          </a:effectRef>
+          <a:fontRef idx="minor">
+            <a:schemeClr val="lt1"/>
+          </a:fontRef>
+        </p:style>
+        <p:txBody>
+          <a:bodyPr rtlCol="0" anchor="ctr"/>
+          <a:lstStyle/>
+          <a:p>
+            <a:pPr algn="ctr"/>
+            <a:endParaRPr lang="en-US">
+              <a:solidFill>
+                <a:schemeClr val="tx1"/>
+              </a:solidFill>
+            </a:endParaRPr>
+          </a:p>
+        </p:txBody>
+      </p:sp>
+      <mc:AlternateContent xmlns:mc="http://schemas.openxmlformats.org/markup-compatibility/2006" xmlns:a14="http://schemas.microsoft.com/office/drawing/2010/main">
+        <mc:Choice Requires="a14">
+          <p:sp>
+            <p:nvSpPr>
+              <p:cNvPr id="50" name="TextBox 49">
+                <a:extLst>
+                  <a:ext uri="{FF2B5EF4-FFF2-40B4-BE49-F238E27FC236}">
+                    <a16:creationId xmlns:a16="http://schemas.microsoft.com/office/drawing/2014/main" id="{720A94CB-CD7B-B03C-0D0B-4724567096AC}"/>
+                  </a:ext>
+                </a:extLst>
+              </p:cNvPr>
+              <p:cNvSpPr txBox="1"/>
+              <p:nvPr/>
+            </p:nvSpPr>
+            <p:spPr>
+              <a:xfrm>
+                <a:off x="4661968" y="2582222"/>
+                <a:ext cx="270330" cy="369332"/>
+              </a:xfrm>
+              <a:prstGeom prst="rect">
+                <a:avLst/>
+              </a:prstGeom>
+              <a:noFill/>
+            </p:spPr>
+            <p:txBody>
+              <a:bodyPr wrap="none" lIns="0" tIns="0" rIns="0" bIns="0" rtlCol="0">
+                <a:spAutoFit/>
+              </a:bodyPr>
+              <a:lstStyle/>
+              <a:p>
+                <a:pPr/>
+                <a14:m>
+                  <m:oMathPara xmlns:m="http://schemas.openxmlformats.org/officeDocument/2006/math">
+                    <m:oMath>
+                      <m:r>
+                        <a:rPr lang="en-US" sz="2400" i="1" smtClean="0">
+                          <a:latin typeface="Cambria Math" panose="02040503050406030204" pitchFamily="18" charset="0"/>
+                          <a:ea typeface="Cambria Math" panose="02040503050406030204" pitchFamily="18" charset="0"/>
+                        </a:rPr>
+                        <m:t>𝜃</m:t>
+                      </m:r>
+                    </m:oMath>
+                  </m:oMathPara>
+                </a14:m>
+                <a:endParaRPr lang="en-US" sz="2400" dirty="0"/>
+              </a:p>
+            </p:txBody>
+          </p:sp>
+        </mc:Choice>
+        <mc:Fallback xmlns="">
+          <p:sp>
+            <p:nvSpPr>
+              <p:cNvPr id="50" name="TextBox 49">
+                <a:extLst>
+                  <a:ext uri="{FF2B5EF4-FFF2-40B4-BE49-F238E27FC236}">
+                    <a16:creationId xmlns:a16="http://schemas.microsoft.com/office/drawing/2014/main" id="{57F4BA69-D557-1588-83C2-C9943254ACF6}"/>
+                  </a:ext>
+                </a:extLst>
+              </p:cNvPr>
+              <p:cNvSpPr txBox="1">
+                <a:spLocks noRot="1" noChangeAspect="1" noMove="1" noResize="1" noEditPoints="1" noAdjustHandles="1" noChangeArrowheads="1" noChangeShapeType="1" noTextEdit="1"/>
+              </p:cNvSpPr>
+              <p:nvPr/>
+            </p:nvSpPr>
+            <p:spPr>
+              <a:xfrm>
+                <a:off x="4661968" y="2582222"/>
+                <a:ext cx="270330" cy="369332"/>
+              </a:xfrm>
+              <a:prstGeom prst="rect">
+                <a:avLst/>
+              </a:prstGeom>
+              <a:blipFill>
+                <a:blip r:embed="rId2"/>
+                <a:stretch>
+                  <a:fillRect l="-25000" r="-18182" b="-5000"/>
+                </a:stretch>
+              </a:blipFill>
+            </p:spPr>
+            <p:txBody>
+              <a:bodyPr/>
+              <a:lstStyle/>
+              <a:p>
+                <a:r>
+                  <a:rPr lang="en-US">
+                    <a:noFill/>
+                  </a:rPr>
+                  <a:t> </a:t>
+                </a:r>
+              </a:p>
+            </p:txBody>
+          </p:sp>
+        </mc:Fallback>
+      </mc:AlternateContent>
+      <p:sp>
+        <p:nvSpPr>
+          <p:cNvPr id="68" name="Oval 3">
+            <a:extLst>
+              <a:ext uri="{FF2B5EF4-FFF2-40B4-BE49-F238E27FC236}">
+                <a16:creationId xmlns:a16="http://schemas.microsoft.com/office/drawing/2014/main" id="{6D8BA0D4-548F-9F64-3A5C-2F737C68A186}"/>
+              </a:ext>
+            </a:extLst>
+          </p:cNvPr>
+          <p:cNvSpPr/>
+          <p:nvPr/>
+        </p:nvSpPr>
+        <p:spPr>
+          <a:xfrm>
+            <a:off x="8356032" y="1981200"/>
+            <a:ext cx="2102457" cy="2120900"/>
+          </a:xfrm>
+          <a:prstGeom prst="ellipse">
+            <a:avLst/>
+          </a:prstGeom>
+          <a:solidFill>
+            <a:schemeClr val="bg2"/>
+          </a:solidFill>
+        </p:spPr>
+        <p:style>
+          <a:lnRef idx="2">
+            <a:schemeClr val="dk1">
+              <a:shade val="15000"/>
+            </a:schemeClr>
+          </a:lnRef>
+          <a:fillRef idx="1">
+            <a:schemeClr val="dk1"/>
+          </a:fillRef>
+          <a:effectRef idx="0">
+            <a:schemeClr val="dk1"/>
+          </a:effectRef>
+          <a:fontRef idx="minor">
+            <a:schemeClr val="lt1"/>
+          </a:fontRef>
+        </p:style>
+        <p:txBody>
+          <a:bodyPr rtlCol="0" anchor="ctr"/>
+          <a:lstStyle/>
+          <a:p>
+            <a:pPr algn="ctr"/>
+            <a:endParaRPr kumimoji="1" lang="ja-JP" altLang="en-US" dirty="0"/>
+          </a:p>
+        </p:txBody>
+      </p:sp>
+      <p:cxnSp>
+        <p:nvCxnSpPr>
+          <p:cNvPr id="69" name="Straight Arrow Connector 19">
+            <a:extLst>
+              <a:ext uri="{FF2B5EF4-FFF2-40B4-BE49-F238E27FC236}">
+                <a16:creationId xmlns:a16="http://schemas.microsoft.com/office/drawing/2014/main" id="{8E926416-21DC-533E-291D-BD6F1E0AC06D}"/>
+              </a:ext>
+            </a:extLst>
+          </p:cNvPr>
+          <p:cNvCxnSpPr>
+            <a:cxnSpLocks/>
+          </p:cNvCxnSpPr>
+          <p:nvPr/>
+        </p:nvCxnSpPr>
+        <p:spPr>
+          <a:xfrm flipH="1">
+            <a:off x="9407260" y="3087606"/>
+            <a:ext cx="1556985" cy="0"/>
+          </a:xfrm>
+          <a:prstGeom prst="straightConnector1">
+            <a:avLst/>
+          </a:prstGeom>
+          <a:ln>
+            <a:prstDash val="sysDot"/>
+            <a:headEnd type="arrow" w="med" len="med"/>
+            <a:tailEnd type="none" w="med" len="med"/>
+          </a:ln>
+        </p:spPr>
+        <p:style>
+          <a:lnRef idx="2">
+            <a:schemeClr val="dk1"/>
+          </a:lnRef>
+          <a:fillRef idx="0">
+            <a:schemeClr val="dk1"/>
+          </a:fillRef>
+          <a:effectRef idx="1">
+            <a:schemeClr val="dk1"/>
+          </a:effectRef>
+          <a:fontRef idx="minor">
+            <a:schemeClr val="tx1"/>
+          </a:fontRef>
+        </p:style>
+      </p:cxnSp>
+      <p:cxnSp>
+        <p:nvCxnSpPr>
+          <p:cNvPr id="72" name="Straight Arrow Connector 20">
+            <a:extLst>
+              <a:ext uri="{FF2B5EF4-FFF2-40B4-BE49-F238E27FC236}">
+                <a16:creationId xmlns:a16="http://schemas.microsoft.com/office/drawing/2014/main" id="{28F7990B-8B1E-C4C7-BE7E-5E4941778B39}"/>
+              </a:ext>
+            </a:extLst>
+          </p:cNvPr>
+          <p:cNvCxnSpPr>
+            <a:cxnSpLocks/>
+          </p:cNvCxnSpPr>
+          <p:nvPr/>
+        </p:nvCxnSpPr>
+        <p:spPr>
+          <a:xfrm flipV="1">
+            <a:off x="9407260" y="1018745"/>
+            <a:ext cx="0" cy="2096732"/>
+          </a:xfrm>
+          <a:prstGeom prst="straightConnector1">
+            <a:avLst/>
+          </a:prstGeom>
+          <a:ln>
+            <a:prstDash val="sysDot"/>
+            <a:tailEnd type="triangle"/>
+          </a:ln>
+        </p:spPr>
+        <p:style>
+          <a:lnRef idx="2">
+            <a:schemeClr val="dk1"/>
+          </a:lnRef>
+          <a:fillRef idx="0">
+            <a:schemeClr val="dk1"/>
+          </a:fillRef>
+          <a:effectRef idx="1">
+            <a:schemeClr val="dk1"/>
+          </a:effectRef>
+          <a:fontRef idx="minor">
+            <a:schemeClr val="tx1"/>
+          </a:fontRef>
+        </p:style>
+      </p:cxnSp>
+      <p:sp>
+        <p:nvSpPr>
+          <p:cNvPr id="75" name="TextBox 74">
+            <a:extLst>
+              <a:ext uri="{FF2B5EF4-FFF2-40B4-BE49-F238E27FC236}">
+                <a16:creationId xmlns:a16="http://schemas.microsoft.com/office/drawing/2014/main" id="{E7076182-6DD5-2E05-B15F-AFCA74D125CE}"/>
+              </a:ext>
+            </a:extLst>
+          </p:cNvPr>
+          <p:cNvSpPr txBox="1"/>
+          <p:nvPr/>
+        </p:nvSpPr>
+        <p:spPr>
+          <a:xfrm>
+            <a:off x="11006380" y="2828839"/>
+            <a:ext cx="300082" cy="369332"/>
+          </a:xfrm>
+          <a:prstGeom prst="rect">
+            <a:avLst/>
+          </a:prstGeom>
+          <a:noFill/>
+        </p:spPr>
+        <p:txBody>
+          <a:bodyPr wrap="square" rtlCol="0">
+            <a:spAutoFit/>
+          </a:bodyPr>
+          <a:lstStyle/>
+          <a:p>
+            <a:r>
+              <a:rPr kumimoji="1" lang="en-US" altLang="ja-JP" dirty="0">
+                <a:latin typeface="times" panose="02020603050405020304" pitchFamily="18" charset="0"/>
+                <a:cs typeface="times" panose="02020603050405020304" pitchFamily="18" charset="0"/>
+              </a:rPr>
+              <a:t>y</a:t>
+            </a:r>
+            <a:endParaRPr kumimoji="1" lang="ja-JP" altLang="en-US" dirty="0">
+              <a:latin typeface="times" panose="02020603050405020304" pitchFamily="18" charset="0"/>
+              <a:cs typeface="times" panose="02020603050405020304" pitchFamily="18" charset="0"/>
+            </a:endParaRPr>
+          </a:p>
+        </p:txBody>
+      </p:sp>
+      <p:sp>
+        <p:nvSpPr>
+          <p:cNvPr id="77" name="TextBox 76">
+            <a:extLst>
+              <a:ext uri="{FF2B5EF4-FFF2-40B4-BE49-F238E27FC236}">
+                <a16:creationId xmlns:a16="http://schemas.microsoft.com/office/drawing/2014/main" id="{DA8EE3B4-BC52-FBC0-B938-4E2473783B92}"/>
+              </a:ext>
+            </a:extLst>
+          </p:cNvPr>
+          <p:cNvSpPr txBox="1"/>
+          <p:nvPr/>
+        </p:nvSpPr>
+        <p:spPr>
+          <a:xfrm>
+            <a:off x="9407259" y="854949"/>
+            <a:ext cx="300082" cy="369332"/>
+          </a:xfrm>
+          <a:prstGeom prst="rect">
+            <a:avLst/>
+          </a:prstGeom>
+          <a:noFill/>
+        </p:spPr>
+        <p:txBody>
+          <a:bodyPr wrap="none" rtlCol="0">
+            <a:spAutoFit/>
+          </a:bodyPr>
+          <a:lstStyle/>
+          <a:p>
+            <a:r>
+              <a:rPr kumimoji="1" lang="en-US" altLang="ja-JP" dirty="0">
+                <a:latin typeface="times" panose="02020603050405020304" pitchFamily="18" charset="0"/>
+                <a:cs typeface="times" panose="02020603050405020304" pitchFamily="18" charset="0"/>
+              </a:rPr>
+              <a:t>x</a:t>
+            </a:r>
+            <a:endParaRPr kumimoji="1" lang="ja-JP" altLang="en-US" dirty="0">
+              <a:latin typeface="times" panose="02020603050405020304" pitchFamily="18" charset="0"/>
+              <a:cs typeface="times" panose="02020603050405020304" pitchFamily="18" charset="0"/>
+            </a:endParaRPr>
+          </a:p>
+        </p:txBody>
+      </p:sp>
+      <p:cxnSp>
+        <p:nvCxnSpPr>
+          <p:cNvPr id="78" name="Straight Arrow Connector 22">
+            <a:extLst>
+              <a:ext uri="{FF2B5EF4-FFF2-40B4-BE49-F238E27FC236}">
+                <a16:creationId xmlns:a16="http://schemas.microsoft.com/office/drawing/2014/main" id="{221DE917-3759-D660-8EC0-259A7DE36FE5}"/>
+              </a:ext>
+            </a:extLst>
+          </p:cNvPr>
+          <p:cNvCxnSpPr>
+            <a:cxnSpLocks/>
+          </p:cNvCxnSpPr>
+          <p:nvPr/>
+        </p:nvCxnSpPr>
+        <p:spPr>
+          <a:xfrm flipH="1" flipV="1">
+            <a:off x="7746624" y="2535475"/>
+            <a:ext cx="1625319" cy="524261"/>
+          </a:xfrm>
+          <a:prstGeom prst="straightConnector1">
+            <a:avLst/>
+          </a:prstGeom>
+          <a:ln>
+            <a:solidFill>
+              <a:srgbClr val="FF0000"/>
+            </a:solidFill>
+            <a:tailEnd type="triangle"/>
+          </a:ln>
+        </p:spPr>
+        <p:style>
+          <a:lnRef idx="2">
+            <a:schemeClr val="dk1"/>
+          </a:lnRef>
+          <a:fillRef idx="0">
+            <a:schemeClr val="dk1"/>
+          </a:fillRef>
+          <a:effectRef idx="1">
+            <a:schemeClr val="dk1"/>
+          </a:effectRef>
+          <a:fontRef idx="minor">
+            <a:schemeClr val="tx1"/>
+          </a:fontRef>
+        </p:style>
+      </p:cxnSp>
+      <p:cxnSp>
+        <p:nvCxnSpPr>
+          <p:cNvPr id="81" name="Straight Arrow Connector 19">
+            <a:extLst>
+              <a:ext uri="{FF2B5EF4-FFF2-40B4-BE49-F238E27FC236}">
+                <a16:creationId xmlns:a16="http://schemas.microsoft.com/office/drawing/2014/main" id="{38D1B38D-E95B-0D56-E6DD-2965AABC1875}"/>
+              </a:ext>
+            </a:extLst>
+          </p:cNvPr>
+          <p:cNvCxnSpPr>
+            <a:cxnSpLocks/>
+          </p:cNvCxnSpPr>
+          <p:nvPr/>
+        </p:nvCxnSpPr>
+        <p:spPr>
+          <a:xfrm flipV="1">
+            <a:off x="8278622" y="3059736"/>
+            <a:ext cx="1128637" cy="1552529"/>
+          </a:xfrm>
+          <a:prstGeom prst="straightConnector1">
+            <a:avLst/>
+          </a:prstGeom>
+          <a:ln>
+            <a:prstDash val="sysDot"/>
+            <a:headEnd type="arrow" w="med" len="med"/>
+            <a:tailEnd type="none" w="med" len="med"/>
+          </a:ln>
+        </p:spPr>
+        <p:style>
+          <a:lnRef idx="2">
+            <a:schemeClr val="dk1"/>
+          </a:lnRef>
+          <a:fillRef idx="0">
+            <a:schemeClr val="dk1"/>
+          </a:fillRef>
+          <a:effectRef idx="1">
+            <a:schemeClr val="dk1"/>
+          </a:effectRef>
+          <a:fontRef idx="minor">
+            <a:schemeClr val="tx1"/>
+          </a:fontRef>
+        </p:style>
+      </p:cxnSp>
+      <p:sp>
+        <p:nvSpPr>
+          <p:cNvPr id="86" name="TextBox 85">
+            <a:extLst>
+              <a:ext uri="{FF2B5EF4-FFF2-40B4-BE49-F238E27FC236}">
+                <a16:creationId xmlns:a16="http://schemas.microsoft.com/office/drawing/2014/main" id="{03880F79-DA1C-BFFA-0C3D-7CF92D88C26D}"/>
+              </a:ext>
+            </a:extLst>
+          </p:cNvPr>
+          <p:cNvSpPr txBox="1"/>
+          <p:nvPr/>
+        </p:nvSpPr>
+        <p:spPr>
+          <a:xfrm>
+            <a:off x="8356032" y="4489687"/>
+            <a:ext cx="300082" cy="369332"/>
+          </a:xfrm>
+          <a:prstGeom prst="rect">
+            <a:avLst/>
+          </a:prstGeom>
+          <a:noFill/>
+        </p:spPr>
+        <p:txBody>
+          <a:bodyPr wrap="square" rtlCol="0">
+            <a:spAutoFit/>
+          </a:bodyPr>
+          <a:lstStyle/>
+          <a:p>
+            <a:r>
+              <a:rPr kumimoji="1" lang="en-US" altLang="ja-JP" dirty="0">
+                <a:latin typeface="times" panose="02020603050405020304" pitchFamily="18" charset="0"/>
+                <a:cs typeface="times" panose="02020603050405020304" pitchFamily="18" charset="0"/>
+              </a:rPr>
+              <a:t>z</a:t>
+            </a:r>
+            <a:endParaRPr kumimoji="1" lang="ja-JP" altLang="en-US" dirty="0">
+              <a:latin typeface="times" panose="02020603050405020304" pitchFamily="18" charset="0"/>
+              <a:cs typeface="times" panose="02020603050405020304" pitchFamily="18" charset="0"/>
+            </a:endParaRPr>
+          </a:p>
+        </p:txBody>
+      </p:sp>
+      <p:cxnSp>
+        <p:nvCxnSpPr>
+          <p:cNvPr id="89" name="Straight Arrow Connector 22">
+            <a:extLst>
+              <a:ext uri="{FF2B5EF4-FFF2-40B4-BE49-F238E27FC236}">
+                <a16:creationId xmlns:a16="http://schemas.microsoft.com/office/drawing/2014/main" id="{050716EC-A096-4795-39CF-7F2D4B0211F6}"/>
+              </a:ext>
+            </a:extLst>
+          </p:cNvPr>
+          <p:cNvCxnSpPr>
+            <a:cxnSpLocks/>
+          </p:cNvCxnSpPr>
+          <p:nvPr/>
+        </p:nvCxnSpPr>
+        <p:spPr>
+          <a:xfrm flipH="1" flipV="1">
+            <a:off x="7797282" y="2548409"/>
+            <a:ext cx="879214" cy="1473782"/>
+          </a:xfrm>
+          <a:prstGeom prst="straightConnector1">
+            <a:avLst/>
+          </a:prstGeom>
+          <a:ln>
+            <a:solidFill>
+              <a:srgbClr val="FF0000"/>
+            </a:solidFill>
+            <a:prstDash val="sysDot"/>
+            <a:headEnd type="none" w="med" len="med"/>
+            <a:tailEnd type="none" w="med" len="med"/>
+          </a:ln>
+        </p:spPr>
+        <p:style>
+          <a:lnRef idx="2">
+            <a:schemeClr val="dk1"/>
+          </a:lnRef>
+          <a:fillRef idx="0">
+            <a:schemeClr val="dk1"/>
+          </a:fillRef>
+          <a:effectRef idx="1">
+            <a:schemeClr val="dk1"/>
+          </a:effectRef>
+          <a:fontRef idx="minor">
+            <a:schemeClr val="tx1"/>
+          </a:fontRef>
+        </p:style>
+      </p:cxnSp>
+      <p:cxnSp>
+        <p:nvCxnSpPr>
+          <p:cNvPr id="93" name="Straight Arrow Connector 22">
+            <a:extLst>
+              <a:ext uri="{FF2B5EF4-FFF2-40B4-BE49-F238E27FC236}">
+                <a16:creationId xmlns:a16="http://schemas.microsoft.com/office/drawing/2014/main" id="{9AB6DAB1-64D1-2B43-7E11-1751097F8409}"/>
+              </a:ext>
+            </a:extLst>
+          </p:cNvPr>
+          <p:cNvCxnSpPr>
+            <a:cxnSpLocks/>
+          </p:cNvCxnSpPr>
+          <p:nvPr/>
+        </p:nvCxnSpPr>
+        <p:spPr>
+          <a:xfrm flipH="1">
+            <a:off x="7850276" y="1734218"/>
+            <a:ext cx="736071" cy="814027"/>
+          </a:xfrm>
+          <a:prstGeom prst="straightConnector1">
+            <a:avLst/>
+          </a:prstGeom>
+          <a:ln>
+            <a:solidFill>
+              <a:srgbClr val="FF0000"/>
+            </a:solidFill>
+            <a:prstDash val="sysDot"/>
+            <a:headEnd type="none" w="med" len="med"/>
+            <a:tailEnd type="none" w="med" len="med"/>
+          </a:ln>
+        </p:spPr>
+        <p:style>
+          <a:lnRef idx="2">
+            <a:schemeClr val="dk1"/>
+          </a:lnRef>
+          <a:fillRef idx="0">
+            <a:schemeClr val="dk1"/>
+          </a:fillRef>
+          <a:effectRef idx="1">
+            <a:schemeClr val="dk1"/>
+          </a:effectRef>
+          <a:fontRef idx="minor">
+            <a:schemeClr val="tx1"/>
+          </a:fontRef>
+        </p:style>
+      </p:cxnSp>
+      <p:cxnSp>
+        <p:nvCxnSpPr>
+          <p:cNvPr id="117" name="Straight Arrow Connector 22">
+            <a:extLst>
+              <a:ext uri="{FF2B5EF4-FFF2-40B4-BE49-F238E27FC236}">
+                <a16:creationId xmlns:a16="http://schemas.microsoft.com/office/drawing/2014/main" id="{102A1884-1D8E-0644-51B4-81FFDEE2775A}"/>
+              </a:ext>
+            </a:extLst>
+          </p:cNvPr>
+          <p:cNvCxnSpPr>
+            <a:cxnSpLocks/>
+          </p:cNvCxnSpPr>
+          <p:nvPr/>
+        </p:nvCxnSpPr>
+        <p:spPr>
+          <a:xfrm flipH="1" flipV="1">
+            <a:off x="8628482" y="1696300"/>
+            <a:ext cx="758840" cy="1345350"/>
+          </a:xfrm>
+          <a:prstGeom prst="straightConnector1">
+            <a:avLst/>
+          </a:prstGeom>
+          <a:ln>
+            <a:solidFill>
+              <a:srgbClr val="FF0000"/>
+            </a:solidFill>
+            <a:tailEnd type="triangle"/>
+          </a:ln>
+        </p:spPr>
+        <p:style>
+          <a:lnRef idx="2">
+            <a:schemeClr val="dk1"/>
+          </a:lnRef>
+          <a:fillRef idx="0">
+            <a:schemeClr val="dk1"/>
+          </a:fillRef>
+          <a:effectRef idx="1">
+            <a:schemeClr val="dk1"/>
+          </a:effectRef>
+          <a:fontRef idx="minor">
+            <a:schemeClr val="tx1"/>
+          </a:fontRef>
+        </p:style>
+      </p:cxnSp>
+      <p:cxnSp>
+        <p:nvCxnSpPr>
+          <p:cNvPr id="120" name="Straight Arrow Connector 22">
+            <a:extLst>
+              <a:ext uri="{FF2B5EF4-FFF2-40B4-BE49-F238E27FC236}">
+                <a16:creationId xmlns:a16="http://schemas.microsoft.com/office/drawing/2014/main" id="{E5E11A20-1B4B-2A02-6590-8892BFF39232}"/>
+              </a:ext>
+            </a:extLst>
+          </p:cNvPr>
+          <p:cNvCxnSpPr>
+            <a:cxnSpLocks/>
+          </p:cNvCxnSpPr>
+          <p:nvPr/>
+        </p:nvCxnSpPr>
+        <p:spPr>
+          <a:xfrm flipH="1">
+            <a:off x="8666410" y="3087970"/>
+            <a:ext cx="720912" cy="1003778"/>
+          </a:xfrm>
+          <a:prstGeom prst="straightConnector1">
+            <a:avLst/>
+          </a:prstGeom>
+          <a:ln>
+            <a:solidFill>
+              <a:srgbClr val="FF0000"/>
+            </a:solidFill>
+            <a:tailEnd type="triangle"/>
+          </a:ln>
+        </p:spPr>
+        <p:style>
+          <a:lnRef idx="2">
+            <a:schemeClr val="dk1"/>
+          </a:lnRef>
+          <a:fillRef idx="0">
+            <a:schemeClr val="dk1"/>
+          </a:fillRef>
+          <a:effectRef idx="1">
+            <a:schemeClr val="dk1"/>
+          </a:effectRef>
+          <a:fontRef idx="minor">
+            <a:schemeClr val="tx1"/>
+          </a:fontRef>
+        </p:style>
+      </p:cxnSp>
+      <p:sp>
+        <p:nvSpPr>
+          <p:cNvPr id="125" name="막힌 원호 124">
+            <a:extLst>
+              <a:ext uri="{FF2B5EF4-FFF2-40B4-BE49-F238E27FC236}">
+                <a16:creationId xmlns:a16="http://schemas.microsoft.com/office/drawing/2014/main" id="{72FAF008-4972-BC45-930E-0232D518C1EA}"/>
+              </a:ext>
+            </a:extLst>
+          </p:cNvPr>
+          <p:cNvSpPr/>
+          <p:nvPr/>
+        </p:nvSpPr>
+        <p:spPr>
+          <a:xfrm rot="14184790">
+            <a:off x="9078423" y="3059226"/>
+            <a:ext cx="279822" cy="141896"/>
+          </a:xfrm>
+          <a:prstGeom prst="blockArc">
+            <a:avLst>
+              <a:gd name="adj1" fmla="val 10800000"/>
+              <a:gd name="adj2" fmla="val 21574061"/>
+              <a:gd name="adj3" fmla="val 0"/>
+            </a:avLst>
+          </a:prstGeom>
+        </p:spPr>
+        <p:style>
+          <a:lnRef idx="2">
+            <a:schemeClr val="accent1">
+              <a:shade val="15000"/>
+            </a:schemeClr>
+          </a:lnRef>
+          <a:fillRef idx="1">
+            <a:schemeClr val="accent1"/>
+          </a:fillRef>
+          <a:effectRef idx="0">
+            <a:schemeClr val="accent1"/>
+          </a:effectRef>
+          <a:fontRef idx="minor">
+            <a:schemeClr val="lt1"/>
+          </a:fontRef>
+        </p:style>
+        <p:txBody>
+          <a:bodyPr rtlCol="0" anchor="ctr"/>
+          <a:lstStyle/>
+          <a:p>
+            <a:pPr algn="ctr"/>
+            <a:endParaRPr lang="en-US">
+              <a:solidFill>
+                <a:schemeClr val="tx1"/>
+              </a:solidFill>
+            </a:endParaRPr>
+          </a:p>
+        </p:txBody>
+      </p:sp>
+      <mc:AlternateContent xmlns:mc="http://schemas.openxmlformats.org/markup-compatibility/2006">
+        <mc:Choice xmlns:a14="http://schemas.microsoft.com/office/drawing/2010/main" Requires="a14">
+          <p:sp>
+            <p:nvSpPr>
+              <p:cNvPr id="127" name="TextBox 126">
+                <a:extLst>
+                  <a:ext uri="{FF2B5EF4-FFF2-40B4-BE49-F238E27FC236}">
+                    <a16:creationId xmlns:a16="http://schemas.microsoft.com/office/drawing/2014/main" id="{4C37C059-7456-41F2-6FB2-21CCF6032028}"/>
+                  </a:ext>
+                </a:extLst>
+              </p:cNvPr>
+              <p:cNvSpPr txBox="1"/>
+              <p:nvPr/>
+            </p:nvSpPr>
+            <p:spPr>
+              <a:xfrm>
+                <a:off x="8798136" y="3145914"/>
+                <a:ext cx="270330" cy="369332"/>
+              </a:xfrm>
+              <a:prstGeom prst="rect">
+                <a:avLst/>
+              </a:prstGeom>
+              <a:noFill/>
+            </p:spPr>
+            <p:txBody>
+              <a:bodyPr wrap="none" lIns="0" tIns="0" rIns="0" bIns="0" rtlCol="0">
+                <a:spAutoFit/>
+              </a:bodyPr>
+              <a:lstStyle/>
+              <a:p>
+                <a:pPr/>
+                <a14:m>
+                  <m:oMathPara xmlns:m="http://schemas.openxmlformats.org/officeDocument/2006/math">
+                    <m:oMath>
+                      <m:r>
+                        <a:rPr lang="en-US" sz="2400" i="1" smtClean="0">
+                          <a:latin typeface="Cambria Math" panose="02040503050406030204" pitchFamily="18" charset="0"/>
+                          <a:ea typeface="Cambria Math" panose="02040503050406030204" pitchFamily="18" charset="0"/>
+                        </a:rPr>
+                        <m:t>𝜃</m:t>
+                      </m:r>
+                    </m:oMath>
+                  </m:oMathPara>
+                </a14:m>
+                <a:endParaRPr lang="en-US" sz="2400" dirty="0"/>
+              </a:p>
+            </p:txBody>
+          </p:sp>
+        </mc:Choice>
+        <mc:Fallback>
+          <p:sp>
+            <p:nvSpPr>
+              <p:cNvPr id="127" name="TextBox 126">
+                <a:extLst>
+                  <a:ext uri="{FF2B5EF4-FFF2-40B4-BE49-F238E27FC236}">
+                    <a16:creationId xmlns:a16="http://schemas.microsoft.com/office/drawing/2014/main" id="{4C37C059-7456-41F2-6FB2-21CCF6032028}"/>
+                  </a:ext>
+                </a:extLst>
+              </p:cNvPr>
+              <p:cNvSpPr txBox="1">
+                <a:spLocks noRot="1" noChangeAspect="1" noMove="1" noResize="1" noEditPoints="1" noAdjustHandles="1" noChangeArrowheads="1" noChangeShapeType="1" noTextEdit="1"/>
+              </p:cNvSpPr>
+              <p:nvPr/>
+            </p:nvSpPr>
+            <p:spPr>
+              <a:xfrm>
+                <a:off x="8798136" y="3145914"/>
+                <a:ext cx="270330" cy="369332"/>
+              </a:xfrm>
+              <a:prstGeom prst="rect">
+                <a:avLst/>
+              </a:prstGeom>
+              <a:blipFill>
+                <a:blip r:embed="rId3"/>
+                <a:stretch>
+                  <a:fillRect l="-22222" r="-17778" b="-4918"/>
+                </a:stretch>
+              </a:blipFill>
+            </p:spPr>
+            <p:txBody>
+              <a:bodyPr/>
+              <a:lstStyle/>
+              <a:p>
+                <a:r>
+                  <a:rPr lang="en-US">
+                    <a:noFill/>
+                  </a:rPr>
+                  <a:t> </a:t>
+                </a:r>
+              </a:p>
+            </p:txBody>
+          </p:sp>
+        </mc:Fallback>
+      </mc:AlternateContent>
+      <p:sp>
+        <p:nvSpPr>
+          <p:cNvPr id="128" name="화살표: 아래쪽 127">
+            <a:extLst>
+              <a:ext uri="{FF2B5EF4-FFF2-40B4-BE49-F238E27FC236}">
+                <a16:creationId xmlns:a16="http://schemas.microsoft.com/office/drawing/2014/main" id="{2B969BEB-BA25-21CB-F4D2-D0219944F744}"/>
+              </a:ext>
+            </a:extLst>
+          </p:cNvPr>
+          <p:cNvSpPr/>
+          <p:nvPr/>
+        </p:nvSpPr>
+        <p:spPr>
+          <a:xfrm rot="3217201">
+            <a:off x="4078016" y="1128800"/>
+            <a:ext cx="460574" cy="990712"/>
+          </a:xfrm>
+          <a:prstGeom prst="downArrow">
+            <a:avLst/>
+          </a:prstGeom>
+        </p:spPr>
+        <p:style>
+          <a:lnRef idx="2">
+            <a:schemeClr val="accent1">
+              <a:shade val="15000"/>
+            </a:schemeClr>
+          </a:lnRef>
+          <a:fillRef idx="1">
+            <a:schemeClr val="accent1"/>
+          </a:fillRef>
+          <a:effectRef idx="0">
+            <a:schemeClr val="accent1"/>
+          </a:effectRef>
+          <a:fontRef idx="minor">
+            <a:schemeClr val="lt1"/>
+          </a:fontRef>
+        </p:style>
+        <p:txBody>
+          <a:bodyPr rtlCol="0" anchor="ctr"/>
+          <a:lstStyle/>
+          <a:p>
+            <a:pPr algn="ctr"/>
+            <a:endParaRPr lang="en-US"/>
+          </a:p>
+        </p:txBody>
+      </p:sp>
+      <p:sp>
+        <p:nvSpPr>
+          <p:cNvPr id="129" name="TextBox 128">
+            <a:extLst>
+              <a:ext uri="{FF2B5EF4-FFF2-40B4-BE49-F238E27FC236}">
+                <a16:creationId xmlns:a16="http://schemas.microsoft.com/office/drawing/2014/main" id="{0986F476-7F76-8202-48EE-6E21D7834448}"/>
+              </a:ext>
+            </a:extLst>
+          </p:cNvPr>
+          <p:cNvSpPr txBox="1"/>
+          <p:nvPr/>
+        </p:nvSpPr>
+        <p:spPr>
+          <a:xfrm>
+            <a:off x="4711605" y="1082534"/>
+            <a:ext cx="4012637" cy="369332"/>
+          </a:xfrm>
+          <a:prstGeom prst="rect">
+            <a:avLst/>
+          </a:prstGeom>
+          <a:noFill/>
+        </p:spPr>
+        <p:txBody>
+          <a:bodyPr wrap="none" rtlCol="0">
+            <a:spAutoFit/>
+          </a:bodyPr>
+          <a:lstStyle/>
+          <a:p>
+            <a:r>
+              <a:rPr lang="en-US" dirty="0">
+                <a:latin typeface="Gungsuh" panose="02030600000101010101" pitchFamily="18" charset="-127"/>
+                <a:ea typeface="Gungsuh" panose="02030600000101010101" pitchFamily="18" charset="-127"/>
+              </a:rPr>
+              <a:t>Look at from this perspective</a:t>
+            </a:r>
+          </a:p>
+        </p:txBody>
+      </p:sp>
+      <mc:AlternateContent xmlns:mc="http://schemas.openxmlformats.org/markup-compatibility/2006">
+        <mc:Choice xmlns:a14="http://schemas.microsoft.com/office/drawing/2010/main" Requires="a14">
+          <p:sp>
+            <p:nvSpPr>
+              <p:cNvPr id="131" name="TextBox 130">
+                <a:extLst>
+                  <a:ext uri="{FF2B5EF4-FFF2-40B4-BE49-F238E27FC236}">
+                    <a16:creationId xmlns:a16="http://schemas.microsoft.com/office/drawing/2014/main" id="{C5C2C5DD-6391-E3D7-1327-2DD30603514B}"/>
+                  </a:ext>
+                </a:extLst>
+              </p:cNvPr>
+              <p:cNvSpPr txBox="1"/>
+              <p:nvPr/>
+            </p:nvSpPr>
+            <p:spPr>
+              <a:xfrm rot="21357679">
+                <a:off x="9111194" y="3304926"/>
+                <a:ext cx="283411" cy="369332"/>
+              </a:xfrm>
+              <a:prstGeom prst="rect">
+                <a:avLst/>
+              </a:prstGeom>
+              <a:noFill/>
+            </p:spPr>
+            <p:txBody>
+              <a:bodyPr wrap="none" lIns="0" tIns="0" rIns="0" bIns="0" rtlCol="0">
+                <a:spAutoFit/>
+              </a:bodyPr>
+              <a:lstStyle/>
+              <a:p>
+                <a:pPr/>
+                <a14:m>
+                  <m:oMathPara xmlns:m="http://schemas.openxmlformats.org/officeDocument/2006/math">
+                    <m:oMath>
+                      <m:r>
+                        <a:rPr lang="en-US" sz="2400" i="1" smtClean="0">
+                          <a:latin typeface="Cambria Math" panose="02040503050406030204" pitchFamily="18" charset="0"/>
+                          <a:ea typeface="Cambria Math" panose="02040503050406030204" pitchFamily="18" charset="0"/>
+                        </a:rPr>
+                        <m:t>𝛽</m:t>
+                      </m:r>
+                    </m:oMath>
+                  </m:oMathPara>
+                </a14:m>
+                <a:endParaRPr lang="en-US" sz="2400" dirty="0"/>
+              </a:p>
+            </p:txBody>
+          </p:sp>
+        </mc:Choice>
+        <mc:Fallback>
+          <p:sp>
+            <p:nvSpPr>
+              <p:cNvPr id="131" name="TextBox 130">
+                <a:extLst>
+                  <a:ext uri="{FF2B5EF4-FFF2-40B4-BE49-F238E27FC236}">
+                    <a16:creationId xmlns:a16="http://schemas.microsoft.com/office/drawing/2014/main" id="{C5C2C5DD-6391-E3D7-1327-2DD30603514B}"/>
+                  </a:ext>
+                </a:extLst>
+              </p:cNvPr>
+              <p:cNvSpPr txBox="1">
+                <a:spLocks noRot="1" noChangeAspect="1" noMove="1" noResize="1" noEditPoints="1" noAdjustHandles="1" noChangeArrowheads="1" noChangeShapeType="1" noTextEdit="1"/>
+              </p:cNvSpPr>
+              <p:nvPr/>
+            </p:nvSpPr>
+            <p:spPr>
+              <a:xfrm rot="21357679">
+                <a:off x="9111194" y="3304926"/>
+                <a:ext cx="283411" cy="369332"/>
+              </a:xfrm>
+              <a:prstGeom prst="rect">
+                <a:avLst/>
+              </a:prstGeom>
+              <a:blipFill>
+                <a:blip r:embed="rId4"/>
+                <a:stretch>
+                  <a:fillRect l="-30769" t="-1538" r="-28846" b="-30769"/>
+                </a:stretch>
+              </a:blipFill>
+            </p:spPr>
+            <p:txBody>
+              <a:bodyPr/>
+              <a:lstStyle/>
+              <a:p>
+                <a:r>
+                  <a:rPr lang="en-US">
+                    <a:noFill/>
+                  </a:rPr>
+                  <a:t> </a:t>
+                </a:r>
+              </a:p>
+            </p:txBody>
+          </p:sp>
+        </mc:Fallback>
+      </mc:AlternateContent>
+      <mc:AlternateContent xmlns:mc="http://schemas.openxmlformats.org/markup-compatibility/2006" xmlns:a14="http://schemas.microsoft.com/office/drawing/2010/main">
+        <mc:Choice Requires="a14">
+          <p:sp>
+            <p:nvSpPr>
+              <p:cNvPr id="133" name="TextBox 132">
+                <a:extLst>
+                  <a:ext uri="{FF2B5EF4-FFF2-40B4-BE49-F238E27FC236}">
+                    <a16:creationId xmlns:a16="http://schemas.microsoft.com/office/drawing/2014/main" id="{BACFF777-B22E-E442-6C6E-30134FC49964}"/>
+                  </a:ext>
+                </a:extLst>
+              </p:cNvPr>
+              <p:cNvSpPr txBox="1"/>
+              <p:nvPr/>
+            </p:nvSpPr>
+            <p:spPr>
+              <a:xfrm rot="20180983">
+                <a:off x="8939007" y="2035808"/>
+                <a:ext cx="396582" cy="369332"/>
+              </a:xfrm>
+              <a:prstGeom prst="rect">
+                <a:avLst/>
+              </a:prstGeom>
+              <a:noFill/>
+            </p:spPr>
+            <p:txBody>
+              <a:bodyPr wrap="none" lIns="0" tIns="0" rIns="0" bIns="0" rtlCol="0">
+                <a:spAutoFit/>
+              </a:bodyPr>
+              <a:lstStyle/>
+              <a:p>
+                <a:pPr/>
+                <a14:m>
+                  <m:oMathPara xmlns:m="http://schemas.openxmlformats.org/officeDocument/2006/math">
+                    <m:oMath>
+                      <m:sSub>
+                        <m:sSubPr>
+                          <m:ctrlPr>
+                            <a:rPr lang="en-US" sz="2400" b="0" i="1" smtClean="0">
+                              <a:latin typeface="Cambria Math" panose="02040503050406030204" pitchFamily="18" charset="0"/>
+                            </a:rPr>
+                          </m:ctrlPr>
+                        </m:sSubPr>
+                        <m:e>
+                          <m:r>
+                            <a:rPr lang="en-US" sz="2400" b="0" i="1" smtClean="0">
+                              <a:latin typeface="Cambria Math" panose="02040503050406030204" pitchFamily="18" charset="0"/>
+                            </a:rPr>
+                            <m:t>𝑘</m:t>
+                          </m:r>
+                        </m:e>
+                        <m:sub>
+                          <m:r>
+                            <a:rPr lang="en-US" sz="2400" b="0" i="1" smtClean="0">
+                              <a:latin typeface="Cambria Math" panose="02040503050406030204" pitchFamily="18" charset="0"/>
+                            </a:rPr>
+                            <m:t>𝑟</m:t>
+                          </m:r>
+                        </m:sub>
+                      </m:sSub>
+                    </m:oMath>
+                  </m:oMathPara>
+                </a14:m>
+                <a:endParaRPr lang="en-US" sz="2400" dirty="0"/>
+              </a:p>
+            </p:txBody>
+          </p:sp>
+        </mc:Choice>
+        <mc:Fallback xmlns="">
+          <p:sp>
+            <p:nvSpPr>
+              <p:cNvPr id="133" name="TextBox 132">
+                <a:extLst>
+                  <a:ext uri="{FF2B5EF4-FFF2-40B4-BE49-F238E27FC236}">
+                    <a16:creationId xmlns:a16="http://schemas.microsoft.com/office/drawing/2014/main" id="{52F9BC21-A2B1-D757-7F0F-231774C5EB1A}"/>
+                  </a:ext>
+                </a:extLst>
+              </p:cNvPr>
+              <p:cNvSpPr txBox="1">
+                <a:spLocks noRot="1" noChangeAspect="1" noMove="1" noResize="1" noEditPoints="1" noAdjustHandles="1" noChangeArrowheads="1" noChangeShapeType="1" noTextEdit="1"/>
+              </p:cNvSpPr>
+              <p:nvPr/>
+            </p:nvSpPr>
+            <p:spPr>
+              <a:xfrm rot="20180983">
+                <a:off x="8939007" y="2035808"/>
+                <a:ext cx="396582" cy="369332"/>
+              </a:xfrm>
+              <a:prstGeom prst="rect">
+                <a:avLst/>
+              </a:prstGeom>
+              <a:blipFill>
+                <a:blip r:embed="rId5"/>
+                <a:stretch>
+                  <a:fillRect l="-9412" r="-1176" b="-7229"/>
+                </a:stretch>
+              </a:blipFill>
+            </p:spPr>
+            <p:txBody>
+              <a:bodyPr/>
+              <a:lstStyle/>
+              <a:p>
+                <a:r>
+                  <a:rPr lang="en-US">
+                    <a:noFill/>
+                  </a:rPr>
+                  <a:t> </a:t>
+                </a:r>
+              </a:p>
+            </p:txBody>
+          </p:sp>
+        </mc:Fallback>
+      </mc:AlternateContent>
+      <p:sp>
+        <p:nvSpPr>
+          <p:cNvPr id="17" name="막힌 원호 124">
+            <a:extLst>
+              <a:ext uri="{FF2B5EF4-FFF2-40B4-BE49-F238E27FC236}">
+                <a16:creationId xmlns:a16="http://schemas.microsoft.com/office/drawing/2014/main" id="{388240D9-1D48-3EED-7BB1-5B051A29A936}"/>
+              </a:ext>
+            </a:extLst>
+          </p:cNvPr>
+          <p:cNvSpPr/>
+          <p:nvPr/>
+        </p:nvSpPr>
+        <p:spPr>
+          <a:xfrm rot="2486177">
+            <a:off x="9246690" y="2762512"/>
+            <a:ext cx="405325" cy="376596"/>
+          </a:xfrm>
+          <a:prstGeom prst="blockArc">
+            <a:avLst>
+              <a:gd name="adj1" fmla="val 10800000"/>
+              <a:gd name="adj2" fmla="val 21574061"/>
+              <a:gd name="adj3" fmla="val 0"/>
+            </a:avLst>
+          </a:prstGeom>
+        </p:spPr>
+        <p:style>
+          <a:lnRef idx="2">
+            <a:schemeClr val="accent1">
+              <a:shade val="15000"/>
+            </a:schemeClr>
+          </a:lnRef>
+          <a:fillRef idx="1">
+            <a:schemeClr val="accent1"/>
+          </a:fillRef>
+          <a:effectRef idx="0">
+            <a:schemeClr val="accent1"/>
+          </a:effectRef>
+          <a:fontRef idx="minor">
+            <a:schemeClr val="lt1"/>
+          </a:fontRef>
+        </p:style>
+        <p:txBody>
+          <a:bodyPr rtlCol="0" anchor="ctr"/>
+          <a:lstStyle/>
+          <a:p>
+            <a:pPr algn="ctr"/>
+            <a:endParaRPr lang="en-US">
+              <a:solidFill>
+                <a:schemeClr val="tx1"/>
+              </a:solidFill>
+            </a:endParaRPr>
+          </a:p>
+        </p:txBody>
+      </p:sp>
+      <mc:AlternateContent xmlns:mc="http://schemas.openxmlformats.org/markup-compatibility/2006">
+        <mc:Choice xmlns:a14="http://schemas.microsoft.com/office/drawing/2010/main" Requires="a14">
+          <p:sp>
+            <p:nvSpPr>
+              <p:cNvPr id="19" name="TextBox 130">
+                <a:extLst>
+                  <a:ext uri="{FF2B5EF4-FFF2-40B4-BE49-F238E27FC236}">
+                    <a16:creationId xmlns:a16="http://schemas.microsoft.com/office/drawing/2014/main" id="{F57FA24F-1BDF-BAD1-A090-50D115FAB0BD}"/>
+                  </a:ext>
+                </a:extLst>
+              </p:cNvPr>
+              <p:cNvSpPr txBox="1"/>
+              <p:nvPr/>
+            </p:nvSpPr>
+            <p:spPr>
+              <a:xfrm rot="21357679">
+                <a:off x="9309252" y="2327560"/>
+                <a:ext cx="303160" cy="369332"/>
+              </a:xfrm>
+              <a:prstGeom prst="rect">
+                <a:avLst/>
+              </a:prstGeom>
+              <a:noFill/>
+            </p:spPr>
+            <p:txBody>
+              <a:bodyPr wrap="none" lIns="0" tIns="0" rIns="0" bIns="0" rtlCol="0">
+                <a:spAutoFit/>
+              </a:bodyPr>
+              <a:lstStyle/>
+              <a:p>
+                <a:pPr/>
+                <a14:m>
+                  <m:oMathPara xmlns:m="http://schemas.openxmlformats.org/officeDocument/2006/math">
+                    <m:oMath>
+                      <m:r>
+                        <a:rPr lang="en-US" sz="2400" i="1" smtClean="0">
+                          <a:latin typeface="Cambria Math" panose="02040503050406030204" pitchFamily="18" charset="0"/>
+                          <a:ea typeface="Cambria Math" panose="02040503050406030204" pitchFamily="18" charset="0"/>
+                        </a:rPr>
+                        <m:t>𝜑</m:t>
+                      </m:r>
+                    </m:oMath>
+                  </m:oMathPara>
+                </a14:m>
+                <a:endParaRPr lang="en-US" sz="2400" dirty="0"/>
+              </a:p>
+            </p:txBody>
+          </p:sp>
+        </mc:Choice>
+        <mc:Fallback>
+          <p:sp>
+            <p:nvSpPr>
+              <p:cNvPr id="19" name="TextBox 130">
+                <a:extLst>
+                  <a:ext uri="{FF2B5EF4-FFF2-40B4-BE49-F238E27FC236}">
+                    <a16:creationId xmlns:a16="http://schemas.microsoft.com/office/drawing/2014/main" id="{F57FA24F-1BDF-BAD1-A090-50D115FAB0BD}"/>
+                  </a:ext>
+                </a:extLst>
+              </p:cNvPr>
+              <p:cNvSpPr txBox="1">
+                <a:spLocks noRot="1" noChangeAspect="1" noMove="1" noResize="1" noEditPoints="1" noAdjustHandles="1" noChangeArrowheads="1" noChangeShapeType="1" noTextEdit="1"/>
+              </p:cNvSpPr>
+              <p:nvPr/>
+            </p:nvSpPr>
+            <p:spPr>
+              <a:xfrm rot="21357679">
+                <a:off x="9309252" y="2327560"/>
+                <a:ext cx="303160" cy="369332"/>
+              </a:xfrm>
+              <a:prstGeom prst="rect">
+                <a:avLst/>
+              </a:prstGeom>
+              <a:blipFill>
+                <a:blip r:embed="rId6"/>
+                <a:stretch>
+                  <a:fillRect l="-18519" r="-18519" b="-21538"/>
+                </a:stretch>
+              </a:blipFill>
+            </p:spPr>
+            <p:txBody>
+              <a:bodyPr/>
+              <a:lstStyle/>
+              <a:p>
+                <a:r>
+                  <a:rPr lang="en-US">
+                    <a:noFill/>
+                  </a:rPr>
+                  <a:t> </a:t>
+                </a:r>
+              </a:p>
+            </p:txBody>
+          </p:sp>
+        </mc:Fallback>
+      </mc:AlternateContent>
+      <p:sp>
+        <p:nvSpPr>
+          <p:cNvPr id="30" name="テキスト ボックス 29">
+            <a:extLst>
+              <a:ext uri="{FF2B5EF4-FFF2-40B4-BE49-F238E27FC236}">
+                <a16:creationId xmlns:a16="http://schemas.microsoft.com/office/drawing/2014/main" id="{8485A7C4-DFCD-CAEA-D395-42AEA18DC63E}"/>
+              </a:ext>
+            </a:extLst>
+          </p:cNvPr>
+          <p:cNvSpPr txBox="1"/>
+          <p:nvPr/>
+        </p:nvSpPr>
+        <p:spPr>
+          <a:xfrm>
+            <a:off x="10458489" y="3515246"/>
+            <a:ext cx="1372492" cy="369332"/>
+          </a:xfrm>
+          <a:prstGeom prst="rect">
+            <a:avLst/>
+          </a:prstGeom>
+          <a:noFill/>
+        </p:spPr>
+        <p:txBody>
+          <a:bodyPr wrap="none" rtlCol="0">
+            <a:spAutoFit/>
+          </a:bodyPr>
+          <a:lstStyle/>
+          <a:p>
+            <a:r>
+              <a:rPr lang="en-US" dirty="0">
+                <a:latin typeface="Gungsuh" panose="02030600000101010101" pitchFamily="18" charset="-127"/>
+                <a:ea typeface="Gungsuh" panose="02030600000101010101" pitchFamily="18" charset="-127"/>
+              </a:rPr>
+              <a:t>Input ray</a:t>
+            </a:r>
+          </a:p>
+        </p:txBody>
+      </p:sp>
+      <p:sp>
+        <p:nvSpPr>
+          <p:cNvPr id="33" name="テキスト ボックス 32">
+            <a:extLst>
+              <a:ext uri="{FF2B5EF4-FFF2-40B4-BE49-F238E27FC236}">
+                <a16:creationId xmlns:a16="http://schemas.microsoft.com/office/drawing/2014/main" id="{08F959DC-22BB-2804-A466-949BE942EBA4}"/>
+              </a:ext>
+            </a:extLst>
+          </p:cNvPr>
+          <p:cNvSpPr txBox="1"/>
+          <p:nvPr/>
+        </p:nvSpPr>
+        <p:spPr>
+          <a:xfrm>
+            <a:off x="10089998" y="764290"/>
+            <a:ext cx="1731564" cy="369332"/>
+          </a:xfrm>
+          <a:prstGeom prst="rect">
+            <a:avLst/>
+          </a:prstGeom>
+          <a:noFill/>
+        </p:spPr>
+        <p:txBody>
+          <a:bodyPr wrap="none" rtlCol="0">
+            <a:spAutoFit/>
+          </a:bodyPr>
+          <a:lstStyle/>
+          <a:p>
+            <a:r>
+              <a:rPr lang="en-US" dirty="0">
+                <a:latin typeface="Gungsuh" panose="02030600000101010101" pitchFamily="18" charset="-127"/>
+                <a:ea typeface="Gungsuh" panose="02030600000101010101" pitchFamily="18" charset="-127"/>
+              </a:rPr>
+              <a:t>Optical axis</a:t>
+            </a:r>
+          </a:p>
+        </p:txBody>
+      </p:sp>
+    </p:spTree>
+    <p:extLst>
+      <p:ext uri="{BB962C8B-B14F-4D97-AF65-F5344CB8AC3E}">
+        <p14:creationId xmlns:p14="http://schemas.microsoft.com/office/powerpoint/2010/main" val="1716350635"/>
+      </p:ext>
+    </p:extLst>
+  </p:cSld>
+  <p:clrMapOvr>
+    <a:masterClrMapping/>
+  </p:clrMapOvr>
+</p:sld>
+</file>
+
+<file path=ppt/slides/slide13.xml><?xml version="1.0" encoding="utf-8"?>
+<p:sld xmlns:a="http://schemas.openxmlformats.org/drawingml/2006/main" xmlns:r="http://schemas.openxmlformats.org/officeDocument/2006/relationships" xmlns:p="http://schemas.openxmlformats.org/presentationml/2006/main">
+  <p:cSld>
+    <p:spTree>
+      <p:nvGrpSpPr>
         <p:cNvPr id="1" name=""/>
         <p:cNvGrpSpPr/>
         <p:nvPr/>
@@ -7809,10 +8763,7 @@
                 <a:pPr/>
                 <a14:m>
                   <m:oMathPara xmlns:m="http://schemas.openxmlformats.org/officeDocument/2006/math">
-                    <m:oMathParaPr>
-                      <m:jc m:val="centerGroup"/>
-                    </m:oMathParaPr>
-                    <m:oMath xmlns:m="http://schemas.openxmlformats.org/officeDocument/2006/math">
+                    <m:oMath>
                       <m:r>
                         <a:rPr lang="en-US" sz="2400" i="1" smtClean="0">
                           <a:latin typeface="Cambria Math" panose="02040503050406030204" pitchFamily="18" charset="0"/>
@@ -7998,14 +8949,11 @@
                 <a:pPr/>
                 <a14:m>
                   <m:oMathPara xmlns:m="http://schemas.openxmlformats.org/officeDocument/2006/math">
-                    <m:oMathParaPr>
-                      <m:jc m:val="centerGroup"/>
-                    </m:oMathParaPr>
-                    <m:oMath xmlns:m="http://schemas.openxmlformats.org/officeDocument/2006/math">
+                    <m:oMath>
                       <m:sSub>
                         <m:sSubPr>
                           <m:ctrlPr>
-                            <a:rPr lang="en-US" sz="2400" i="1" smtClean="0">
+                            <a:rPr lang="en-US" sz="2400" b="0" i="1" smtClean="0">
                               <a:latin typeface="Cambria Math" panose="02040503050406030204" pitchFamily="18" charset="0"/>
                             </a:rPr>
                           </m:ctrlPr>
@@ -8093,7 +9041,7 @@
 </p:sld>
 </file>
 
-<file path=ppt/slides/slide13.xml><?xml version="1.0" encoding="utf-8"?>
+<file path=ppt/slides/slide14.xml><?xml version="1.0" encoding="utf-8"?>
 <p:sld xmlns:a="http://schemas.openxmlformats.org/drawingml/2006/main" xmlns:r="http://schemas.openxmlformats.org/officeDocument/2006/relationships" xmlns:p="http://schemas.openxmlformats.org/presentationml/2006/main">
   <p:cSld>
     <p:spTree>
@@ -8977,8 +9925,8 @@
             </a:fontRef>
           </p:style>
         </p:cxnSp>
-        <mc:AlternateContent xmlns:mc="http://schemas.openxmlformats.org/markup-compatibility/2006">
-          <mc:Choice xmlns:a14="http://schemas.microsoft.com/office/drawing/2010/main" Requires="a14">
+        <mc:AlternateContent xmlns:mc="http://schemas.openxmlformats.org/markup-compatibility/2006" xmlns:a14="http://schemas.microsoft.com/office/drawing/2010/main">
+          <mc:Choice Requires="a14">
             <p:sp>
               <p:nvSpPr>
                 <p:cNvPr id="183" name="テキスト ボックス 182">
@@ -9010,15 +9958,13 @@
                   <a:pPr/>
                   <a14:m>
                     <m:oMathPara xmlns:m="http://schemas.openxmlformats.org/officeDocument/2006/math">
-                      <m:oMathParaPr>
-                        <m:jc m:val="centerGroup"/>
-                      </m:oMathParaPr>
-                      <m:oMath xmlns:m="http://schemas.openxmlformats.org/officeDocument/2006/math">
+                      <m:oMath>
                         <m:sSub>
                           <m:sSubPr>
                             <m:ctrlPr>
                               <a:rPr lang="en-US" i="1" smtClean="0">
                                 <a:latin typeface="Cambria Math" panose="02040503050406030204" pitchFamily="18" charset="0"/>
+                                <a:ea typeface="Cambria Math" panose="02040503050406030204" pitchFamily="18" charset="0"/>
                               </a:rPr>
                             </m:ctrlPr>
                           </m:sSubPr>
@@ -9049,7 +9995,7 @@
               </p:txBody>
             </p:sp>
           </mc:Choice>
-          <mc:Fallback>
+          <mc:Fallback xmlns="">
             <p:sp>
               <p:nvSpPr>
                 <p:cNvPr id="183" name="テキスト ボックス 182">
@@ -9094,8 +10040,8 @@
             </p:sp>
           </mc:Fallback>
         </mc:AlternateContent>
-        <mc:AlternateContent xmlns:mc="http://schemas.openxmlformats.org/markup-compatibility/2006">
-          <mc:Choice xmlns:a14="http://schemas.microsoft.com/office/drawing/2010/main" Requires="a14">
+        <mc:AlternateContent xmlns:mc="http://schemas.openxmlformats.org/markup-compatibility/2006" xmlns:a14="http://schemas.microsoft.com/office/drawing/2010/main">
+          <mc:Choice Requires="a14">
             <p:sp>
               <p:nvSpPr>
                 <p:cNvPr id="184" name="テキスト ボックス 183">
@@ -9127,10 +10073,7 @@
                   <a:pPr/>
                   <a14:m>
                     <m:oMathPara xmlns:m="http://schemas.openxmlformats.org/officeDocument/2006/math">
-                      <m:oMathParaPr>
-                        <m:jc m:val="centerGroup"/>
-                      </m:oMathParaPr>
-                      <m:oMath xmlns:m="http://schemas.openxmlformats.org/officeDocument/2006/math">
+                      <m:oMath>
                         <m:r>
                           <a:rPr lang="en-US" b="0" i="1" smtClean="0">
                             <a:latin typeface="Cambria Math" panose="02040503050406030204" pitchFamily="18" charset="0"/>
@@ -9145,7 +10088,7 @@
               </p:txBody>
             </p:sp>
           </mc:Choice>
-          <mc:Fallback>
+          <mc:Fallback xmlns="">
             <p:sp>
               <p:nvSpPr>
                 <p:cNvPr id="184" name="テキスト ボックス 183">
@@ -9190,8 +10133,8 @@
             </p:sp>
           </mc:Fallback>
         </mc:AlternateContent>
-        <mc:AlternateContent xmlns:mc="http://schemas.openxmlformats.org/markup-compatibility/2006">
-          <mc:Choice xmlns:a14="http://schemas.microsoft.com/office/drawing/2010/main" Requires="a14">
+        <mc:AlternateContent xmlns:mc="http://schemas.openxmlformats.org/markup-compatibility/2006" xmlns:a14="http://schemas.microsoft.com/office/drawing/2010/main">
+          <mc:Choice Requires="a14">
             <p:sp>
               <p:nvSpPr>
                 <p:cNvPr id="191" name="テキスト ボックス 190">
@@ -9223,10 +10166,7 @@
                   <a:pPr/>
                   <a14:m>
                     <m:oMathPara xmlns:m="http://schemas.openxmlformats.org/officeDocument/2006/math">
-                      <m:oMathParaPr>
-                        <m:jc m:val="centerGroup"/>
-                      </m:oMathParaPr>
-                      <m:oMath xmlns:m="http://schemas.openxmlformats.org/officeDocument/2006/math">
+                      <m:oMath>
                         <m:r>
                           <a:rPr lang="en-US" b="0" i="1" smtClean="0">
                             <a:latin typeface="Cambria Math" panose="02040503050406030204" pitchFamily="18" charset="0"/>
@@ -9265,7 +10205,7 @@
               </p:txBody>
             </p:sp>
           </mc:Choice>
-          <mc:Fallback>
+          <mc:Fallback xmlns="">
             <p:sp>
               <p:nvSpPr>
                 <p:cNvPr id="191" name="テキスト ボックス 190">
@@ -9310,8 +10250,8 @@
             </p:sp>
           </mc:Fallback>
         </mc:AlternateContent>
-        <mc:AlternateContent xmlns:mc="http://schemas.openxmlformats.org/markup-compatibility/2006">
-          <mc:Choice xmlns:a14="http://schemas.microsoft.com/office/drawing/2010/main" Requires="a14">
+        <mc:AlternateContent xmlns:mc="http://schemas.openxmlformats.org/markup-compatibility/2006" xmlns:a14="http://schemas.microsoft.com/office/drawing/2010/main">
+          <mc:Choice Requires="a14">
             <p:sp>
               <p:nvSpPr>
                 <p:cNvPr id="196" name="テキスト ボックス 195">
@@ -9343,14 +10283,11 @@
                   <a:pPr/>
                   <a14:m>
                     <m:oMathPara xmlns:m="http://schemas.openxmlformats.org/officeDocument/2006/math">
-                      <m:oMathParaPr>
-                        <m:jc m:val="centerGroup"/>
-                      </m:oMathParaPr>
-                      <m:oMath xmlns:m="http://schemas.openxmlformats.org/officeDocument/2006/math">
+                      <m:oMath>
                         <m:sSub>
                           <m:sSubPr>
                             <m:ctrlPr>
-                              <a:rPr lang="en-US" i="1" smtClean="0">
+                              <a:rPr lang="en-US" b="1" i="1" smtClean="0">
                                 <a:latin typeface="Cambria Math" panose="02040503050406030204" pitchFamily="18" charset="0"/>
                               </a:rPr>
                             </m:ctrlPr>
@@ -9381,7 +10318,7 @@
               </p:txBody>
             </p:sp>
           </mc:Choice>
-          <mc:Fallback>
+          <mc:Fallback xmlns="">
             <p:sp>
               <p:nvSpPr>
                 <p:cNvPr id="196" name="テキスト ボックス 195">
@@ -9426,8 +10363,8 @@
             </p:sp>
           </mc:Fallback>
         </mc:AlternateContent>
-        <mc:AlternateContent xmlns:mc="http://schemas.openxmlformats.org/markup-compatibility/2006">
-          <mc:Choice xmlns:a14="http://schemas.microsoft.com/office/drawing/2010/main" Requires="a14">
+        <mc:AlternateContent xmlns:mc="http://schemas.openxmlformats.org/markup-compatibility/2006" xmlns:a14="http://schemas.microsoft.com/office/drawing/2010/main">
+          <mc:Choice Requires="a14">
             <p:sp>
               <p:nvSpPr>
                 <p:cNvPr id="199" name="テキスト ボックス 198">
@@ -9459,14 +10396,11 @@
                   <a:pPr/>
                   <a14:m>
                     <m:oMathPara xmlns:m="http://schemas.openxmlformats.org/officeDocument/2006/math">
-                      <m:oMathParaPr>
-                        <m:jc m:val="centerGroup"/>
-                      </m:oMathParaPr>
-                      <m:oMath xmlns:m="http://schemas.openxmlformats.org/officeDocument/2006/math">
+                      <m:oMath>
                         <m:sSub>
                           <m:sSubPr>
                             <m:ctrlPr>
-                              <a:rPr lang="en-US" i="1" smtClean="0">
+                              <a:rPr lang="en-US" b="1" i="1">
                                 <a:latin typeface="Cambria Math" panose="02040503050406030204" pitchFamily="18" charset="0"/>
                               </a:rPr>
                             </m:ctrlPr>
@@ -9508,7 +10442,7 @@
               </p:txBody>
             </p:sp>
           </mc:Choice>
-          <mc:Fallback>
+          <mc:Fallback xmlns="">
             <p:sp>
               <p:nvSpPr>
                 <p:cNvPr id="199" name="テキスト ボックス 198">
@@ -9553,8 +10487,8 @@
             </p:sp>
           </mc:Fallback>
         </mc:AlternateContent>
-        <mc:AlternateContent xmlns:mc="http://schemas.openxmlformats.org/markup-compatibility/2006">
-          <mc:Choice xmlns:a14="http://schemas.microsoft.com/office/drawing/2010/main" Requires="a14">
+        <mc:AlternateContent xmlns:mc="http://schemas.openxmlformats.org/markup-compatibility/2006" xmlns:a14="http://schemas.microsoft.com/office/drawing/2010/main">
+          <mc:Choice Requires="a14">
             <p:sp>
               <p:nvSpPr>
                 <p:cNvPr id="201" name="テキスト ボックス 200">
@@ -9586,14 +10520,11 @@
                   <a:pPr/>
                   <a14:m>
                     <m:oMathPara xmlns:m="http://schemas.openxmlformats.org/officeDocument/2006/math">
-                      <m:oMathParaPr>
-                        <m:jc m:val="centerGroup"/>
-                      </m:oMathParaPr>
-                      <m:oMath xmlns:m="http://schemas.openxmlformats.org/officeDocument/2006/math">
+                      <m:oMath>
                         <m:sSub>
                           <m:sSubPr>
                             <m:ctrlPr>
-                              <a:rPr lang="en-US" i="1" smtClean="0">
+                              <a:rPr lang="en-US" b="1" i="1">
                                 <a:latin typeface="Cambria Math" panose="02040503050406030204" pitchFamily="18" charset="0"/>
                               </a:rPr>
                             </m:ctrlPr>
@@ -9635,7 +10566,7 @@
               </p:txBody>
             </p:sp>
           </mc:Choice>
-          <mc:Fallback>
+          <mc:Fallback xmlns="">
             <p:sp>
               <p:nvSpPr>
                 <p:cNvPr id="201" name="テキスト ボックス 200">
@@ -9680,8 +10611,8 @@
             </p:sp>
           </mc:Fallback>
         </mc:AlternateContent>
-        <mc:AlternateContent xmlns:mc="http://schemas.openxmlformats.org/markup-compatibility/2006">
-          <mc:Choice xmlns:a14="http://schemas.microsoft.com/office/drawing/2010/main" Requires="a14">
+        <mc:AlternateContent xmlns:mc="http://schemas.openxmlformats.org/markup-compatibility/2006" xmlns:a14="http://schemas.microsoft.com/office/drawing/2010/main">
+          <mc:Choice Requires="a14">
             <p:sp>
               <p:nvSpPr>
                 <p:cNvPr id="203" name="テキスト ボックス 202">
@@ -9713,14 +10644,11 @@
                   <a:pPr/>
                   <a14:m>
                     <m:oMathPara xmlns:m="http://schemas.openxmlformats.org/officeDocument/2006/math">
-                      <m:oMathParaPr>
-                        <m:jc m:val="centerGroup"/>
-                      </m:oMathParaPr>
-                      <m:oMath xmlns:m="http://schemas.openxmlformats.org/officeDocument/2006/math">
+                      <m:oMath>
                         <m:sSub>
                           <m:sSubPr>
                             <m:ctrlPr>
-                              <a:rPr lang="en-US" i="1" smtClean="0">
+                              <a:rPr lang="en-US" b="1" i="1" smtClean="0">
                                 <a:latin typeface="Cambria Math" panose="02040503050406030204" pitchFamily="18" charset="0"/>
                               </a:rPr>
                             </m:ctrlPr>
@@ -9762,7 +10690,7 @@
               </p:txBody>
             </p:sp>
           </mc:Choice>
-          <mc:Fallback>
+          <mc:Fallback xmlns="">
             <p:sp>
               <p:nvSpPr>
                 <p:cNvPr id="203" name="テキスト ボックス 202">
@@ -9936,8 +10864,8 @@
             </a:fontRef>
           </p:style>
         </p:cxnSp>
-        <mc:AlternateContent xmlns:mc="http://schemas.openxmlformats.org/markup-compatibility/2006">
-          <mc:Choice xmlns:a14="http://schemas.microsoft.com/office/drawing/2010/main" Requires="a14">
+        <mc:AlternateContent xmlns:mc="http://schemas.openxmlformats.org/markup-compatibility/2006" xmlns:a14="http://schemas.microsoft.com/office/drawing/2010/main">
+          <mc:Choice Requires="a14">
             <p:sp>
               <p:nvSpPr>
                 <p:cNvPr id="212" name="テキスト ボックス 211">
@@ -9969,14 +10897,11 @@
                   <a:pPr/>
                   <a14:m>
                     <m:oMathPara xmlns:m="http://schemas.openxmlformats.org/officeDocument/2006/math">
-                      <m:oMathParaPr>
-                        <m:jc m:val="centerGroup"/>
-                      </m:oMathParaPr>
-                      <m:oMath xmlns:m="http://schemas.openxmlformats.org/officeDocument/2006/math">
+                      <m:oMath>
                         <m:sSub>
                           <m:sSubPr>
                             <m:ctrlPr>
-                              <a:rPr lang="en-US" i="1" smtClean="0">
+                              <a:rPr lang="en-US" b="1" i="1" smtClean="0">
                                 <a:latin typeface="Cambria Math" panose="02040503050406030204" pitchFamily="18" charset="0"/>
                               </a:rPr>
                             </m:ctrlPr>
@@ -10013,7 +10938,7 @@
               </p:txBody>
             </p:sp>
           </mc:Choice>
-          <mc:Fallback>
+          <mc:Fallback xmlns="">
             <p:sp>
               <p:nvSpPr>
                 <p:cNvPr id="212" name="テキスト ボックス 211">
@@ -10356,8 +11281,8 @@
           </p:style>
         </p:cxnSp>
       </p:grpSp>
-      <mc:AlternateContent xmlns:mc="http://schemas.openxmlformats.org/markup-compatibility/2006">
-        <mc:Choice xmlns:a14="http://schemas.microsoft.com/office/drawing/2010/main" Requires="a14">
+      <mc:AlternateContent xmlns:mc="http://schemas.openxmlformats.org/markup-compatibility/2006" xmlns:a14="http://schemas.microsoft.com/office/drawing/2010/main">
+        <mc:Choice Requires="a14">
           <p:sp>
             <p:nvSpPr>
               <p:cNvPr id="3" name="テキスト ボックス 2">
@@ -10395,7 +11320,7 @@
                     <m:sSub>
                       <m:sSubPr>
                         <m:ctrlPr>
-                          <a:rPr lang="en-US" i="1">
+                          <a:rPr lang="en-US" b="1" i="1">
                             <a:latin typeface="Cambria Math" panose="02040503050406030204" pitchFamily="18" charset="0"/>
                           </a:rPr>
                         </m:ctrlPr>
@@ -10439,7 +11364,7 @@
             </p:txBody>
           </p:sp>
         </mc:Choice>
-        <mc:Fallback>
+        <mc:Fallback xmlns="">
           <p:sp>
             <p:nvSpPr>
               <p:cNvPr id="3" name="テキスト ボックス 2">
@@ -10497,7 +11422,7 @@
 </p:sld>
 </file>
 
-<file path=ppt/slides/slide14.xml><?xml version="1.0" encoding="utf-8"?>
+<file path=ppt/slides/slide15.xml><?xml version="1.0" encoding="utf-8"?>
 <p:sld xmlns:a="http://schemas.openxmlformats.org/drawingml/2006/main" xmlns:r="http://schemas.openxmlformats.org/officeDocument/2006/relationships" xmlns:p="http://schemas.openxmlformats.org/presentationml/2006/main">
   <p:cSld>
     <p:spTree>
@@ -11344,8 +12269,8 @@
               </a:fontRef>
             </p:style>
           </p:cxnSp>
-          <mc:AlternateContent xmlns:mc="http://schemas.openxmlformats.org/markup-compatibility/2006">
-            <mc:Choice xmlns:a14="http://schemas.microsoft.com/office/drawing/2010/main" Requires="a14">
+          <mc:AlternateContent xmlns:mc="http://schemas.openxmlformats.org/markup-compatibility/2006" xmlns:a14="http://schemas.microsoft.com/office/drawing/2010/main">
+            <mc:Choice Requires="a14">
               <p:sp>
                 <p:nvSpPr>
                   <p:cNvPr id="183" name="テキスト ボックス 182">
@@ -11377,10 +12302,7 @@
                     <a:pPr/>
                     <a14:m>
                       <m:oMathPara xmlns:m="http://schemas.openxmlformats.org/officeDocument/2006/math">
-                        <m:oMathParaPr>
-                          <m:jc m:val="centerGroup"/>
-                        </m:oMathParaPr>
-                        <m:oMath xmlns:m="http://schemas.openxmlformats.org/officeDocument/2006/math">
+                        <m:oMath>
                           <m:r>
                             <a:rPr lang="en-US" i="1">
                               <a:latin typeface="Cambria Math" panose="02040503050406030204" pitchFamily="18" charset="0"/>
@@ -11396,7 +12318,7 @@
                 </p:txBody>
               </p:sp>
             </mc:Choice>
-            <mc:Fallback>
+            <mc:Fallback xmlns="">
               <p:sp>
                 <p:nvSpPr>
                   <p:cNvPr id="183" name="テキスト ボックス 182">
@@ -11441,8 +12363,8 @@
               </p:sp>
             </mc:Fallback>
           </mc:AlternateContent>
-          <mc:AlternateContent xmlns:mc="http://schemas.openxmlformats.org/markup-compatibility/2006">
-            <mc:Choice xmlns:a14="http://schemas.microsoft.com/office/drawing/2010/main" Requires="a14">
+          <mc:AlternateContent xmlns:mc="http://schemas.openxmlformats.org/markup-compatibility/2006" xmlns:a14="http://schemas.microsoft.com/office/drawing/2010/main">
+            <mc:Choice Requires="a14">
               <p:sp>
                 <p:nvSpPr>
                   <p:cNvPr id="184" name="テキスト ボックス 183">
@@ -11474,10 +12396,7 @@
                     <a:pPr/>
                     <a14:m>
                       <m:oMathPara xmlns:m="http://schemas.openxmlformats.org/officeDocument/2006/math">
-                        <m:oMathParaPr>
-                          <m:jc m:val="centerGroup"/>
-                        </m:oMathParaPr>
-                        <m:oMath xmlns:m="http://schemas.openxmlformats.org/officeDocument/2006/math">
+                        <m:oMath>
                           <m:r>
                             <a:rPr lang="en-US" b="0" i="1" smtClean="0">
                               <a:latin typeface="Cambria Math" panose="02040503050406030204" pitchFamily="18" charset="0"/>
@@ -11492,7 +12411,7 @@
                 </p:txBody>
               </p:sp>
             </mc:Choice>
-            <mc:Fallback>
+            <mc:Fallback xmlns="">
               <p:sp>
                 <p:nvSpPr>
                   <p:cNvPr id="184" name="テキスト ボックス 183">
@@ -11537,8 +12456,8 @@
               </p:sp>
             </mc:Fallback>
           </mc:AlternateContent>
-          <mc:AlternateContent xmlns:mc="http://schemas.openxmlformats.org/markup-compatibility/2006">
-            <mc:Choice xmlns:a14="http://schemas.microsoft.com/office/drawing/2010/main" Requires="a14">
+          <mc:AlternateContent xmlns:mc="http://schemas.openxmlformats.org/markup-compatibility/2006" xmlns:a14="http://schemas.microsoft.com/office/drawing/2010/main">
+            <mc:Choice Requires="a14">
               <p:sp>
                 <p:nvSpPr>
                   <p:cNvPr id="191" name="テキスト ボックス 190">
@@ -11570,10 +12489,7 @@
                     <a:pPr/>
                     <a14:m>
                       <m:oMathPara xmlns:m="http://schemas.openxmlformats.org/officeDocument/2006/math">
-                        <m:oMathParaPr>
-                          <m:jc m:val="centerGroup"/>
-                        </m:oMathParaPr>
-                        <m:oMath xmlns:m="http://schemas.openxmlformats.org/officeDocument/2006/math">
+                        <m:oMath>
                           <m:r>
                             <a:rPr lang="en-US" b="0" i="1" smtClean="0">
                               <a:latin typeface="Cambria Math" panose="02040503050406030204" pitchFamily="18" charset="0"/>
@@ -11612,7 +12528,7 @@
                 </p:txBody>
               </p:sp>
             </mc:Choice>
-            <mc:Fallback>
+            <mc:Fallback xmlns="">
               <p:sp>
                 <p:nvSpPr>
                   <p:cNvPr id="191" name="テキスト ボックス 190">
@@ -11657,8 +12573,8 @@
               </p:sp>
             </mc:Fallback>
           </mc:AlternateContent>
-          <mc:AlternateContent xmlns:mc="http://schemas.openxmlformats.org/markup-compatibility/2006">
-            <mc:Choice xmlns:a14="http://schemas.microsoft.com/office/drawing/2010/main" Requires="a14">
+          <mc:AlternateContent xmlns:mc="http://schemas.openxmlformats.org/markup-compatibility/2006" xmlns:a14="http://schemas.microsoft.com/office/drawing/2010/main">
+            <mc:Choice Requires="a14">
               <p:sp>
                 <p:nvSpPr>
                   <p:cNvPr id="196" name="テキスト ボックス 195">
@@ -11690,14 +12606,11 @@
                     <a:pPr/>
                     <a14:m>
                       <m:oMathPara xmlns:m="http://schemas.openxmlformats.org/officeDocument/2006/math">
-                        <m:oMathParaPr>
-                          <m:jc m:val="centerGroup"/>
-                        </m:oMathParaPr>
-                        <m:oMath xmlns:m="http://schemas.openxmlformats.org/officeDocument/2006/math">
+                        <m:oMath>
                           <m:sSub>
                             <m:sSubPr>
                               <m:ctrlPr>
-                                <a:rPr lang="en-US" i="1" smtClean="0">
+                                <a:rPr lang="en-US" b="1" i="1" smtClean="0">
                                   <a:latin typeface="Cambria Math" panose="02040503050406030204" pitchFamily="18" charset="0"/>
                                 </a:rPr>
                               </m:ctrlPr>
@@ -11734,7 +12647,7 @@
                 </p:txBody>
               </p:sp>
             </mc:Choice>
-            <mc:Fallback>
+            <mc:Fallback xmlns="">
               <p:sp>
                 <p:nvSpPr>
                   <p:cNvPr id="196" name="テキスト ボックス 195">
@@ -11779,8 +12692,8 @@
               </p:sp>
             </mc:Fallback>
           </mc:AlternateContent>
-          <mc:AlternateContent xmlns:mc="http://schemas.openxmlformats.org/markup-compatibility/2006">
-            <mc:Choice xmlns:a14="http://schemas.microsoft.com/office/drawing/2010/main" Requires="a14">
+          <mc:AlternateContent xmlns:mc="http://schemas.openxmlformats.org/markup-compatibility/2006" xmlns:a14="http://schemas.microsoft.com/office/drawing/2010/main">
+            <mc:Choice Requires="a14">
               <p:sp>
                 <p:nvSpPr>
                   <p:cNvPr id="199" name="テキスト ボックス 198">
@@ -11812,14 +12725,11 @@
                     <a:pPr/>
                     <a14:m>
                       <m:oMathPara xmlns:m="http://schemas.openxmlformats.org/officeDocument/2006/math">
-                        <m:oMathParaPr>
-                          <m:jc m:val="centerGroup"/>
-                        </m:oMathParaPr>
-                        <m:oMath xmlns:m="http://schemas.openxmlformats.org/officeDocument/2006/math">
+                        <m:oMath>
                           <m:sSub>
                             <m:sSubPr>
                               <m:ctrlPr>
-                                <a:rPr lang="en-US" i="1" smtClean="0">
+                                <a:rPr lang="en-US" b="1" i="1">
                                   <a:latin typeface="Cambria Math" panose="02040503050406030204" pitchFamily="18" charset="0"/>
                                 </a:rPr>
                               </m:ctrlPr>
@@ -11861,7 +12771,7 @@
                 </p:txBody>
               </p:sp>
             </mc:Choice>
-            <mc:Fallback>
+            <mc:Fallback xmlns="">
               <p:sp>
                 <p:nvSpPr>
                   <p:cNvPr id="199" name="テキスト ボックス 198">
@@ -11906,8 +12816,8 @@
               </p:sp>
             </mc:Fallback>
           </mc:AlternateContent>
-          <mc:AlternateContent xmlns:mc="http://schemas.openxmlformats.org/markup-compatibility/2006">
-            <mc:Choice xmlns:a14="http://schemas.microsoft.com/office/drawing/2010/main" Requires="a14">
+          <mc:AlternateContent xmlns:mc="http://schemas.openxmlformats.org/markup-compatibility/2006" xmlns:a14="http://schemas.microsoft.com/office/drawing/2010/main">
+            <mc:Choice Requires="a14">
               <p:sp>
                 <p:nvSpPr>
                   <p:cNvPr id="201" name="テキスト ボックス 200">
@@ -11939,14 +12849,11 @@
                     <a:pPr/>
                     <a14:m>
                       <m:oMathPara xmlns:m="http://schemas.openxmlformats.org/officeDocument/2006/math">
-                        <m:oMathParaPr>
-                          <m:jc m:val="centerGroup"/>
-                        </m:oMathParaPr>
-                        <m:oMath xmlns:m="http://schemas.openxmlformats.org/officeDocument/2006/math">
+                        <m:oMath>
                           <m:sSub>
                             <m:sSubPr>
                               <m:ctrlPr>
-                                <a:rPr lang="en-US" i="1" smtClean="0">
+                                <a:rPr lang="en-US" b="1" i="1">
                                   <a:latin typeface="Cambria Math" panose="02040503050406030204" pitchFamily="18" charset="0"/>
                                 </a:rPr>
                               </m:ctrlPr>
@@ -11988,7 +12895,7 @@
                 </p:txBody>
               </p:sp>
             </mc:Choice>
-            <mc:Fallback>
+            <mc:Fallback xmlns="">
               <p:sp>
                 <p:nvSpPr>
                   <p:cNvPr id="201" name="テキスト ボックス 200">
@@ -12033,8 +12940,8 @@
               </p:sp>
             </mc:Fallback>
           </mc:AlternateContent>
-          <mc:AlternateContent xmlns:mc="http://schemas.openxmlformats.org/markup-compatibility/2006">
-            <mc:Choice xmlns:a14="http://schemas.microsoft.com/office/drawing/2010/main" Requires="a14">
+          <mc:AlternateContent xmlns:mc="http://schemas.openxmlformats.org/markup-compatibility/2006" xmlns:a14="http://schemas.microsoft.com/office/drawing/2010/main">
+            <mc:Choice Requires="a14">
               <p:sp>
                 <p:nvSpPr>
                   <p:cNvPr id="203" name="テキスト ボックス 202">
@@ -12066,14 +12973,11 @@
                     <a:pPr/>
                     <a14:m>
                       <m:oMathPara xmlns:m="http://schemas.openxmlformats.org/officeDocument/2006/math">
-                        <m:oMathParaPr>
-                          <m:jc m:val="centerGroup"/>
-                        </m:oMathParaPr>
-                        <m:oMath xmlns:m="http://schemas.openxmlformats.org/officeDocument/2006/math">
+                        <m:oMath>
                           <m:sSub>
                             <m:sSubPr>
                               <m:ctrlPr>
-                                <a:rPr lang="en-US" i="1" smtClean="0">
+                                <a:rPr lang="en-US" b="1" i="1" smtClean="0">
                                   <a:latin typeface="Cambria Math" panose="02040503050406030204" pitchFamily="18" charset="0"/>
                                 </a:rPr>
                               </m:ctrlPr>
@@ -12115,7 +13019,7 @@
                 </p:txBody>
               </p:sp>
             </mc:Choice>
-            <mc:Fallback>
+            <mc:Fallback xmlns="">
               <p:sp>
                 <p:nvSpPr>
                   <p:cNvPr id="203" name="テキスト ボックス 202">
@@ -12289,8 +13193,8 @@
               </a:fontRef>
             </p:style>
           </p:cxnSp>
-          <mc:AlternateContent xmlns:mc="http://schemas.openxmlformats.org/markup-compatibility/2006">
-            <mc:Choice xmlns:a14="http://schemas.microsoft.com/office/drawing/2010/main" Requires="a14">
+          <mc:AlternateContent xmlns:mc="http://schemas.openxmlformats.org/markup-compatibility/2006" xmlns:a14="http://schemas.microsoft.com/office/drawing/2010/main">
+            <mc:Choice Requires="a14">
               <p:sp>
                 <p:nvSpPr>
                   <p:cNvPr id="212" name="テキスト ボックス 211">
@@ -12322,14 +13226,11 @@
                     <a:pPr/>
                     <a14:m>
                       <m:oMathPara xmlns:m="http://schemas.openxmlformats.org/officeDocument/2006/math">
-                        <m:oMathParaPr>
-                          <m:jc m:val="centerGroup"/>
-                        </m:oMathParaPr>
-                        <m:oMath xmlns:m="http://schemas.openxmlformats.org/officeDocument/2006/math">
+                        <m:oMath>
                           <m:sSub>
                             <m:sSubPr>
                               <m:ctrlPr>
-                                <a:rPr lang="en-US" i="1" smtClean="0">
+                                <a:rPr lang="en-US" b="1" i="1" smtClean="0">
                                   <a:latin typeface="Cambria Math" panose="02040503050406030204" pitchFamily="18" charset="0"/>
                                 </a:rPr>
                               </m:ctrlPr>
@@ -12366,7 +13267,7 @@
                 </p:txBody>
               </p:sp>
             </mc:Choice>
-            <mc:Fallback>
+            <mc:Fallback xmlns="">
               <p:sp>
                 <p:nvSpPr>
                   <p:cNvPr id="212" name="テキスト ボックス 211">
@@ -12878,8 +13779,8 @@
             </a:fontRef>
           </p:style>
         </p:cxnSp>
-        <mc:AlternateContent xmlns:mc="http://schemas.openxmlformats.org/markup-compatibility/2006">
-          <mc:Choice xmlns:a14="http://schemas.microsoft.com/office/drawing/2010/main" Requires="a14">
+        <mc:AlternateContent xmlns:mc="http://schemas.openxmlformats.org/markup-compatibility/2006" xmlns:a14="http://schemas.microsoft.com/office/drawing/2010/main">
+          <mc:Choice Requires="a14">
             <p:sp>
               <p:nvSpPr>
                 <p:cNvPr id="60" name="テキスト ボックス 59">
@@ -12911,14 +13812,11 @@
                   <a:pPr/>
                   <a14:m>
                     <m:oMathPara xmlns:m="http://schemas.openxmlformats.org/officeDocument/2006/math">
-                      <m:oMathParaPr>
-                        <m:jc m:val="centerGroup"/>
-                      </m:oMathParaPr>
-                      <m:oMath xmlns:m="http://schemas.openxmlformats.org/officeDocument/2006/math">
+                      <m:oMath>
                         <m:sSub>
                           <m:sSubPr>
                             <m:ctrlPr>
-                              <a:rPr lang="en-US" i="1" smtClean="0">
+                              <a:rPr lang="en-US" b="1" i="1" smtClean="0">
                                 <a:latin typeface="Cambria Math" panose="02040503050406030204" pitchFamily="18" charset="0"/>
                               </a:rPr>
                             </m:ctrlPr>
@@ -12936,13 +13834,7 @@
                               <a:rPr lang="en-US" b="0" i="1" smtClean="0">
                                 <a:latin typeface="Cambria Math" panose="02040503050406030204" pitchFamily="18" charset="0"/>
                               </a:rPr>
-                              <m:t>2</m:t>
-                            </m:r>
-                            <m:r>
-                              <a:rPr lang="en-US" b="0" i="1" smtClean="0">
-                                <a:latin typeface="Cambria Math" panose="02040503050406030204" pitchFamily="18" charset="0"/>
-                              </a:rPr>
-                              <m:t>,</m:t>
+                              <m:t>2,</m:t>
                             </m:r>
                             <m:r>
                               <a:rPr lang="en-US" b="0" i="1" smtClean="0">
@@ -12961,7 +13853,7 @@
               </p:txBody>
             </p:sp>
           </mc:Choice>
-          <mc:Fallback>
+          <mc:Fallback xmlns="">
             <p:sp>
               <p:nvSpPr>
                 <p:cNvPr id="60" name="テキスト ボックス 59">
@@ -13100,8 +13992,8 @@
             </a:p>
           </p:txBody>
         </p:sp>
-        <mc:AlternateContent xmlns:mc="http://schemas.openxmlformats.org/markup-compatibility/2006">
-          <mc:Choice xmlns:a14="http://schemas.microsoft.com/office/drawing/2010/main" Requires="a14">
+        <mc:AlternateContent xmlns:mc="http://schemas.openxmlformats.org/markup-compatibility/2006" xmlns:a14="http://schemas.microsoft.com/office/drawing/2010/main">
+          <mc:Choice Requires="a14">
             <p:sp>
               <p:nvSpPr>
                 <p:cNvPr id="137" name="テキスト ボックス 136">
@@ -13133,15 +14025,13 @@
                   <a:pPr/>
                   <a14:m>
                     <m:oMathPara xmlns:m="http://schemas.openxmlformats.org/officeDocument/2006/math">
-                      <m:oMathParaPr>
-                        <m:jc m:val="centerGroup"/>
-                      </m:oMathParaPr>
-                      <m:oMath xmlns:m="http://schemas.openxmlformats.org/officeDocument/2006/math">
+                      <m:oMath>
                         <m:sSubSup>
                           <m:sSubSupPr>
                             <m:ctrlPr>
                               <a:rPr lang="en-US" i="1" smtClean="0">
                                 <a:latin typeface="Cambria Math" panose="02040503050406030204" pitchFamily="18" charset="0"/>
+                                <a:ea typeface="Cambria Math" panose="02040503050406030204" pitchFamily="18" charset="0"/>
                               </a:rPr>
                             </m:ctrlPr>
                           </m:sSubSupPr>
@@ -13179,7 +14069,7 @@
               </p:txBody>
             </p:sp>
           </mc:Choice>
-          <mc:Fallback>
+          <mc:Fallback xmlns="">
             <p:sp>
               <p:nvSpPr>
                 <p:cNvPr id="137" name="テキスト ボックス 136">
@@ -13224,8 +14114,8 @@
             </p:sp>
           </mc:Fallback>
         </mc:AlternateContent>
-        <mc:AlternateContent xmlns:mc="http://schemas.openxmlformats.org/markup-compatibility/2006">
-          <mc:Choice xmlns:a14="http://schemas.microsoft.com/office/drawing/2010/main" Requires="a14">
+        <mc:AlternateContent xmlns:mc="http://schemas.openxmlformats.org/markup-compatibility/2006" xmlns:a14="http://schemas.microsoft.com/office/drawing/2010/main">
+          <mc:Choice Requires="a14">
             <p:sp>
               <p:nvSpPr>
                 <p:cNvPr id="139" name="テキスト ボックス 138">
@@ -13257,15 +14147,13 @@
                   <a:pPr/>
                   <a14:m>
                     <m:oMathPara xmlns:m="http://schemas.openxmlformats.org/officeDocument/2006/math">
-                      <m:oMathParaPr>
-                        <m:jc m:val="centerGroup"/>
-                      </m:oMathParaPr>
-                      <m:oMath xmlns:m="http://schemas.openxmlformats.org/officeDocument/2006/math">
+                      <m:oMath>
                         <m:sSubSup>
                           <m:sSubSupPr>
                             <m:ctrlPr>
                               <a:rPr lang="en-US" i="1" smtClean="0">
                                 <a:latin typeface="Cambria Math" panose="02040503050406030204" pitchFamily="18" charset="0"/>
+                                <a:ea typeface="Cambria Math" panose="02040503050406030204" pitchFamily="18" charset="0"/>
                               </a:rPr>
                             </m:ctrlPr>
                           </m:sSubSupPr>
@@ -13304,7 +14192,7 @@
               </p:txBody>
             </p:sp>
           </mc:Choice>
-          <mc:Fallback>
+          <mc:Fallback xmlns="">
             <p:sp>
               <p:nvSpPr>
                 <p:cNvPr id="139" name="テキスト ボックス 138">
@@ -13349,8 +14237,8 @@
             </p:sp>
           </mc:Fallback>
         </mc:AlternateContent>
-        <mc:AlternateContent xmlns:mc="http://schemas.openxmlformats.org/markup-compatibility/2006">
-          <mc:Choice xmlns:a14="http://schemas.microsoft.com/office/drawing/2010/main" Requires="a14">
+        <mc:AlternateContent xmlns:mc="http://schemas.openxmlformats.org/markup-compatibility/2006" xmlns:a14="http://schemas.microsoft.com/office/drawing/2010/main">
+          <mc:Choice Requires="a14">
             <p:sp>
               <p:nvSpPr>
                 <p:cNvPr id="144" name="テキスト ボックス 143">
@@ -13388,7 +14276,7 @@
                       <m:sSub>
                         <m:sSubPr>
                           <m:ctrlPr>
-                            <a:rPr lang="en-US" i="1">
+                            <a:rPr lang="en-US" b="1" i="1">
                               <a:latin typeface="Cambria Math" panose="02040503050406030204" pitchFamily="18" charset="0"/>
                             </a:rPr>
                           </m:ctrlPr>
@@ -13432,7 +14320,7 @@
               </p:txBody>
             </p:sp>
           </mc:Choice>
-          <mc:Fallback>
+          <mc:Fallback xmlns="">
             <p:sp>
               <p:nvSpPr>
                 <p:cNvPr id="144" name="テキスト ボックス 143">
@@ -13491,7 +14379,7 @@
 </p:sld>
 </file>
 
-<file path=ppt/slides/slide15.xml><?xml version="1.0" encoding="utf-8"?>
+<file path=ppt/slides/slide16.xml><?xml version="1.0" encoding="utf-8"?>
 <p:sld xmlns:a="http://schemas.openxmlformats.org/drawingml/2006/main" xmlns:r="http://schemas.openxmlformats.org/officeDocument/2006/relationships" xmlns:p="http://schemas.openxmlformats.org/presentationml/2006/main">
   <p:cSld>
     <p:spTree>
@@ -22406,15 +23294,6 @@
 </file>
 
 <file path=customXml/item1.xml><?xml version="1.0" encoding="utf-8"?>
-<?mso-contentType ?>
-<FormTemplates xmlns="http://schemas.microsoft.com/sharepoint/v3/contenttype/forms">
-  <Display>DocumentLibraryForm</Display>
-  <Edit>DocumentLibraryForm</Edit>
-  <New>DocumentLibraryForm</New>
-</FormTemplates>
-</file>
-
-<file path=customXml/item2.xml><?xml version="1.0" encoding="utf-8"?>
 <ct:contentTypeSchema xmlns:ct="http://schemas.microsoft.com/office/2006/metadata/contentType" xmlns:ma="http://schemas.microsoft.com/office/2006/metadata/properties/metaAttributes" ct:_="" ma:_="" ma:contentTypeName="ドキュメント" ma:contentTypeID="0x010100D291828BE931164DA279E7DB37510E8B" ma:contentTypeVersion="12" ma:contentTypeDescription="新しいドキュメントを作成します。" ma:contentTypeScope="" ma:versionID="d40e79753e265535ebdef0a9a1630dbe">
   <xsd:schema xmlns:xsd="http://www.w3.org/2001/XMLSchema" xmlns:xs="http://www.w3.org/2001/XMLSchema" xmlns:p="http://schemas.microsoft.com/office/2006/metadata/properties" xmlns:ns3="e5fea337-426f-4878-aaa1-6cc4dbed00d3" targetNamespace="http://schemas.microsoft.com/office/2006/metadata/properties" ma:root="true" ma:fieldsID="909ec013045a4ae227a46cef79b1603d" ns3:_="">
     <xsd:import namespace="e5fea337-426f-4878-aaa1-6cc4dbed00d3"/>
@@ -22608,6 +23487,15 @@
 </ct:contentTypeSchema>
 </file>
 
+<file path=customXml/item2.xml><?xml version="1.0" encoding="utf-8"?>
+<?mso-contentType ?>
+<FormTemplates xmlns="http://schemas.microsoft.com/sharepoint/v3/contenttype/forms">
+  <Display>DocumentLibraryForm</Display>
+  <Edit>DocumentLibraryForm</Edit>
+  <New>DocumentLibraryForm</New>
+</FormTemplates>
+</file>
+
 <file path=customXml/item3.xml><?xml version="1.0" encoding="utf-8"?>
 <p:properties xmlns:p="http://schemas.microsoft.com/office/2006/metadata/properties" xmlns:xsi="http://www.w3.org/2001/XMLSchema-instance" xmlns:pc="http://schemas.microsoft.com/office/infopath/2007/PartnerControls">
   <documentManagement>
@@ -22617,14 +23505,6 @@
 </file>
 
 <file path=customXml/itemProps1.xml><?xml version="1.0" encoding="utf-8"?>
-<ds:datastoreItem xmlns:ds="http://schemas.openxmlformats.org/officeDocument/2006/customXml" ds:itemID="{EBB85C3E-FFAD-4A75-A769-4B97E54A903C}">
-  <ds:schemaRefs>
-    <ds:schemaRef ds:uri="http://schemas.microsoft.com/sharepoint/v3/contenttype/forms"/>
-  </ds:schemaRefs>
-</ds:datastoreItem>
-</file>
-
-<file path=customXml/itemProps2.xml><?xml version="1.0" encoding="utf-8"?>
 <ds:datastoreItem xmlns:ds="http://schemas.openxmlformats.org/officeDocument/2006/customXml" ds:itemID="{6231A16C-3E0A-4893-9CB3-DA6770BA5700}">
   <ds:schemaRefs>
     <ds:schemaRef ds:uri="http://schemas.microsoft.com/office/2006/metadata/contentType"/>
@@ -22638,6 +23518,14 @@
     <ds:schemaRef ds:uri="http://purl.org/dc/elements/1.1/"/>
     <ds:schemaRef ds:uri="http://purl.org/dc/terms/"/>
     <ds:schemaRef ds:uri="http://schemas.microsoft.com/internal/obd"/>
+  </ds:schemaRefs>
+</ds:datastoreItem>
+</file>
+
+<file path=customXml/itemProps2.xml><?xml version="1.0" encoding="utf-8"?>
+<ds:datastoreItem xmlns:ds="http://schemas.openxmlformats.org/officeDocument/2006/customXml" ds:itemID="{EBB85C3E-FFAD-4A75-A769-4B97E54A903C}">
+  <ds:schemaRefs>
+    <ds:schemaRef ds:uri="http://schemas.microsoft.com/sharepoint/v3/contenttype/forms"/>
   </ds:schemaRefs>
 </ds:datastoreItem>
 </file>

--- a/Materials.pptx
+++ b/Materials.pptx
@@ -17,10 +17,11 @@
     <p:sldId id="264" r:id="rId14"/>
     <p:sldId id="266" r:id="rId15"/>
     <p:sldId id="274" r:id="rId16"/>
-    <p:sldId id="267" r:id="rId17"/>
-    <p:sldId id="272" r:id="rId18"/>
-    <p:sldId id="271" r:id="rId19"/>
-    <p:sldId id="273" r:id="rId20"/>
+    <p:sldId id="275" r:id="rId17"/>
+    <p:sldId id="267" r:id="rId18"/>
+    <p:sldId id="272" r:id="rId19"/>
+    <p:sldId id="271" r:id="rId20"/>
+    <p:sldId id="273" r:id="rId21"/>
   </p:sldIdLst>
   <p:sldSz cx="12192000" cy="6858000"/>
   <p:notesSz cx="7102475" cy="9388475"/>
@@ -130,7 +131,7 @@
 <file path=ppt/revisionInfo.xml><?xml version="1.0" encoding="utf-8"?>
 <p1510:revInfo xmlns:a="http://schemas.openxmlformats.org/drawingml/2006/main" xmlns:r="http://schemas.openxmlformats.org/officeDocument/2006/relationships" xmlns:p1510="http://schemas.microsoft.com/office/powerpoint/2015/10/main">
   <p1510:revLst>
-    <p1510:client id="{2E73B93B-076D-4B14-AC4D-A7B074A06377}" v="5" dt="2026-10-20T08:37:59.123"/>
+    <p1510:client id="{2E73B93B-076D-4B14-AC4D-A7B074A06377}" v="16" dt="2026-10-20T09:02:40.766"/>
   </p1510:revLst>
 </p1510:revInfo>
 </file>
@@ -140,22 +141,62 @@
   <pc:docChgLst>
     <pc:chgData name="全 香玉" userId="1f3450e5-81b9-4f7a-82d7-841c32c029e0" providerId="ADAL" clId="{670531AC-1667-4F97-B1A6-5D38F8A44A79}"/>
     <pc:docChg chg="undo redo custSel addSld delSld modSld sldOrd">
-      <pc:chgData name="全 香玉" userId="1f3450e5-81b9-4f7a-82d7-841c32c029e0" providerId="ADAL" clId="{670531AC-1667-4F97-B1A6-5D38F8A44A79}" dt="2026-10-20T08:39:11.601" v="2915" actId="1076"/>
+      <pc:chgData name="全 香玉" userId="1f3450e5-81b9-4f7a-82d7-841c32c029e0" providerId="ADAL" clId="{670531AC-1667-4F97-B1A6-5D38F8A44A79}" dt="2026-10-20T09:03:04.789" v="3014" actId="14100"/>
       <pc:docMkLst>
         <pc:docMk/>
       </pc:docMkLst>
-      <pc:sldChg chg="addSp modSp add mod">
-        <pc:chgData name="全 香玉" userId="1f3450e5-81b9-4f7a-82d7-841c32c029e0" providerId="ADAL" clId="{670531AC-1667-4F97-B1A6-5D38F8A44A79}" dt="2026-10-20T08:39:11.601" v="2915" actId="1076"/>
+      <pc:sldChg chg="addSp delSp modSp add mod">
+        <pc:chgData name="全 香玉" userId="1f3450e5-81b9-4f7a-82d7-841c32c029e0" providerId="ADAL" clId="{670531AC-1667-4F97-B1A6-5D38F8A44A79}" dt="2026-10-20T08:51:57.803" v="2998" actId="478"/>
         <pc:sldMkLst>
           <pc:docMk/>
           <pc:sldMk cId="1716350635" sldId="274"/>
         </pc:sldMkLst>
+        <pc:spChg chg="add mod">
+          <ac:chgData name="全 香玉" userId="1f3450e5-81b9-4f7a-82d7-841c32c029e0" providerId="ADAL" clId="{670531AC-1667-4F97-B1A6-5D38F8A44A79}" dt="2026-10-20T08:47:23.628" v="2972" actId="1582"/>
+          <ac:spMkLst>
+            <pc:docMk/>
+            <pc:sldMk cId="1716350635" sldId="274"/>
+            <ac:spMk id="9" creationId="{70AE7793-06FD-8A1A-807C-89DFAA804681}"/>
+          </ac:spMkLst>
+        </pc:spChg>
+        <pc:spChg chg="add mod">
+          <ac:chgData name="全 香玉" userId="1f3450e5-81b9-4f7a-82d7-841c32c029e0" providerId="ADAL" clId="{670531AC-1667-4F97-B1A6-5D38F8A44A79}" dt="2026-10-20T08:47:23.628" v="2972" actId="1582"/>
+          <ac:spMkLst>
+            <pc:docMk/>
+            <pc:sldMk cId="1716350635" sldId="274"/>
+            <ac:spMk id="11" creationId="{E5982690-354E-D4A5-02C0-4317D6056134}"/>
+          </ac:spMkLst>
+        </pc:spChg>
+        <pc:spChg chg="mod">
+          <ac:chgData name="全 香玉" userId="1f3450e5-81b9-4f7a-82d7-841c32c029e0" providerId="ADAL" clId="{670531AC-1667-4F97-B1A6-5D38F8A44A79}" dt="2026-10-20T08:47:23.628" v="2972" actId="1582"/>
+          <ac:spMkLst>
+            <pc:docMk/>
+            <pc:sldMk cId="1716350635" sldId="274"/>
+            <ac:spMk id="14" creationId="{884280DE-560A-7D25-79BD-B939BC49FA38}"/>
+          </ac:spMkLst>
+        </pc:spChg>
+        <pc:spChg chg="mod">
+          <ac:chgData name="全 香玉" userId="1f3450e5-81b9-4f7a-82d7-841c32c029e0" providerId="ADAL" clId="{670531AC-1667-4F97-B1A6-5D38F8A44A79}" dt="2026-10-20T08:47:23.628" v="2972" actId="1582"/>
+          <ac:spMkLst>
+            <pc:docMk/>
+            <pc:sldMk cId="1716350635" sldId="274"/>
+            <ac:spMk id="15" creationId="{C717B62E-250C-9370-F0F7-391E46F72B02}"/>
+          </ac:spMkLst>
+        </pc:spChg>
         <pc:spChg chg="add mod">
           <ac:chgData name="全 香玉" userId="1f3450e5-81b9-4f7a-82d7-841c32c029e0" providerId="ADAL" clId="{670531AC-1667-4F97-B1A6-5D38F8A44A79}" dt="2026-10-20T08:36:00.046" v="2850" actId="1076"/>
           <ac:spMkLst>
             <pc:docMk/>
             <pc:sldMk cId="1716350635" sldId="274"/>
             <ac:spMk id="17" creationId="{388240D9-1D48-3EED-7BB1-5B051A29A936}"/>
+          </ac:spMkLst>
+        </pc:spChg>
+        <pc:spChg chg="mod">
+          <ac:chgData name="全 香玉" userId="1f3450e5-81b9-4f7a-82d7-841c32c029e0" providerId="ADAL" clId="{670531AC-1667-4F97-B1A6-5D38F8A44A79}" dt="2026-10-20T08:48:03.256" v="2974" actId="208"/>
+          <ac:spMkLst>
+            <pc:docMk/>
+            <pc:sldMk cId="1716350635" sldId="274"/>
+            <ac:spMk id="18" creationId="{27219B29-EE0A-025F-6BED-9F46DF836B72}"/>
           </ac:spMkLst>
         </pc:spChg>
         <pc:spChg chg="add mod">
@@ -166,6 +207,14 @@
             <ac:spMk id="19" creationId="{F57FA24F-1BDF-BAD1-A090-50D115FAB0BD}"/>
           </ac:spMkLst>
         </pc:spChg>
+        <pc:spChg chg="mod">
+          <ac:chgData name="全 香玉" userId="1f3450e5-81b9-4f7a-82d7-841c32c029e0" providerId="ADAL" clId="{670531AC-1667-4F97-B1A6-5D38F8A44A79}" dt="2026-10-20T08:48:03.256" v="2974" actId="208"/>
+          <ac:spMkLst>
+            <pc:docMk/>
+            <pc:sldMk cId="1716350635" sldId="274"/>
+            <ac:spMk id="22" creationId="{D24786B3-11B1-C76E-8F30-FD2605F21785}"/>
+          </ac:spMkLst>
+        </pc:spChg>
         <pc:spChg chg="add mod">
           <ac:chgData name="全 香玉" userId="1f3450e5-81b9-4f7a-82d7-841c32c029e0" providerId="ADAL" clId="{670531AC-1667-4F97-B1A6-5D38F8A44A79}" dt="2026-10-20T08:38:56.642" v="2894" actId="1076"/>
           <ac:spMkLst>
@@ -174,12 +223,28 @@
             <ac:spMk id="30" creationId="{8485A7C4-DFCD-CAEA-D395-42AEA18DC63E}"/>
           </ac:spMkLst>
         </pc:spChg>
+        <pc:spChg chg="mod">
+          <ac:chgData name="全 香玉" userId="1f3450e5-81b9-4f7a-82d7-841c32c029e0" providerId="ADAL" clId="{670531AC-1667-4F97-B1A6-5D38F8A44A79}" dt="2026-10-20T08:48:03.256" v="2974" actId="208"/>
+          <ac:spMkLst>
+            <pc:docMk/>
+            <pc:sldMk cId="1716350635" sldId="274"/>
+            <ac:spMk id="32" creationId="{1CD89612-AFE3-BDF4-042D-19E2A97C464C}"/>
+          </ac:spMkLst>
+        </pc:spChg>
         <pc:spChg chg="add mod">
           <ac:chgData name="全 香玉" userId="1f3450e5-81b9-4f7a-82d7-841c32c029e0" providerId="ADAL" clId="{670531AC-1667-4F97-B1A6-5D38F8A44A79}" dt="2026-10-20T08:39:11.601" v="2915" actId="1076"/>
           <ac:spMkLst>
             <pc:docMk/>
             <pc:sldMk cId="1716350635" sldId="274"/>
             <ac:spMk id="33" creationId="{08F959DC-22BB-2804-A466-949BE942EBA4}"/>
+          </ac:spMkLst>
+        </pc:spChg>
+        <pc:spChg chg="mod">
+          <ac:chgData name="全 香玉" userId="1f3450e5-81b9-4f7a-82d7-841c32c029e0" providerId="ADAL" clId="{670531AC-1667-4F97-B1A6-5D38F8A44A79}" dt="2026-10-20T08:48:03.256" v="2974" actId="208"/>
+          <ac:spMkLst>
+            <pc:docMk/>
+            <pc:sldMk cId="1716350635" sldId="274"/>
+            <ac:spMk id="34" creationId="{5776E7E2-CF6C-4D77-EAAB-57ADD4B3441E}"/>
           </ac:spMkLst>
         </pc:spChg>
         <pc:spChg chg="mod">
@@ -206,6 +271,46 @@
             <ac:spMk id="131" creationId="{C5C2C5DD-6391-E3D7-1327-2DD30603514B}"/>
           </ac:spMkLst>
         </pc:spChg>
+        <pc:grpChg chg="add mod">
+          <ac:chgData name="全 香玉" userId="1f3450e5-81b9-4f7a-82d7-841c32c029e0" providerId="ADAL" clId="{670531AC-1667-4F97-B1A6-5D38F8A44A79}" dt="2026-10-20T08:47:16.198" v="2970" actId="207"/>
+          <ac:grpSpMkLst>
+            <pc:docMk/>
+            <pc:sldMk cId="1716350635" sldId="274"/>
+            <ac:grpSpMk id="12" creationId="{835C68A6-85C0-4754-9E35-1642FF23AE90}"/>
+          </ac:grpSpMkLst>
+        </pc:grpChg>
+        <pc:grpChg chg="add mod">
+          <ac:chgData name="全 香玉" userId="1f3450e5-81b9-4f7a-82d7-841c32c029e0" providerId="ADAL" clId="{670531AC-1667-4F97-B1A6-5D38F8A44A79}" dt="2026-10-20T08:47:16.198" v="2970" actId="207"/>
+          <ac:grpSpMkLst>
+            <pc:docMk/>
+            <pc:sldMk cId="1716350635" sldId="274"/>
+            <ac:grpSpMk id="13" creationId="{19AE7C25-F708-FFFD-E1DC-333945E78170}"/>
+          </ac:grpSpMkLst>
+        </pc:grpChg>
+        <pc:grpChg chg="add mod">
+          <ac:chgData name="全 香玉" userId="1f3450e5-81b9-4f7a-82d7-841c32c029e0" providerId="ADAL" clId="{670531AC-1667-4F97-B1A6-5D38F8A44A79}" dt="2026-10-20T08:46:58.301" v="2966" actId="1076"/>
+          <ac:grpSpMkLst>
+            <pc:docMk/>
+            <pc:sldMk cId="1716350635" sldId="274"/>
+            <ac:grpSpMk id="16" creationId="{354411B5-5B3C-EAC6-5274-1984F81DA293}"/>
+          </ac:grpSpMkLst>
+        </pc:grpChg>
+        <pc:grpChg chg="add mod">
+          <ac:chgData name="全 香玉" userId="1f3450e5-81b9-4f7a-82d7-841c32c029e0" providerId="ADAL" clId="{670531AC-1667-4F97-B1A6-5D38F8A44A79}" dt="2026-10-20T08:47:05.248" v="2968" actId="1076"/>
+          <ac:grpSpMkLst>
+            <pc:docMk/>
+            <pc:sldMk cId="1716350635" sldId="274"/>
+            <ac:grpSpMk id="25" creationId="{142D1280-1AE5-A23F-5AAD-7C9928AD060F}"/>
+          </ac:grpSpMkLst>
+        </pc:grpChg>
+        <pc:cxnChg chg="add del">
+          <ac:chgData name="全 香玉" userId="1f3450e5-81b9-4f7a-82d7-841c32c029e0" providerId="ADAL" clId="{670531AC-1667-4F97-B1A6-5D38F8A44A79}" dt="2026-10-20T08:45:47.281" v="2917" actId="478"/>
+          <ac:cxnSpMkLst>
+            <pc:docMk/>
+            <pc:sldMk cId="1716350635" sldId="274"/>
+            <ac:cxnSpMk id="3" creationId="{3CE6AB2E-2AA6-D637-19E2-162F632F4F09}"/>
+          </ac:cxnSpMkLst>
+        </pc:cxnChg>
         <pc:cxnChg chg="add mod ord">
           <ac:chgData name="全 香玉" userId="1f3450e5-81b9-4f7a-82d7-841c32c029e0" providerId="ADAL" clId="{670531AC-1667-4F97-B1A6-5D38F8A44A79}" dt="2026-10-20T08:37:28.994" v="2861" actId="14100"/>
           <ac:cxnSpMkLst>
@@ -220,6 +325,30 @@
             <pc:docMk/>
             <pc:sldMk cId="1716350635" sldId="274"/>
             <ac:cxnSpMk id="29" creationId="{BE7FA2A7-B0B0-1690-6F6F-66A4BE3BF254}"/>
+          </ac:cxnSpMkLst>
+        </pc:cxnChg>
+        <pc:cxnChg chg="add del mod">
+          <ac:chgData name="全 香玉" userId="1f3450e5-81b9-4f7a-82d7-841c32c029e0" providerId="ADAL" clId="{670531AC-1667-4F97-B1A6-5D38F8A44A79}" dt="2026-10-20T08:51:55.948" v="2996" actId="478"/>
+          <ac:cxnSpMkLst>
+            <pc:docMk/>
+            <pc:sldMk cId="1716350635" sldId="274"/>
+            <ac:cxnSpMk id="35" creationId="{D1469957-DE9E-0544-EF04-D32ECDC82D58}"/>
+          </ac:cxnSpMkLst>
+        </pc:cxnChg>
+        <pc:cxnChg chg="add del mod">
+          <ac:chgData name="全 香玉" userId="1f3450e5-81b9-4f7a-82d7-841c32c029e0" providerId="ADAL" clId="{670531AC-1667-4F97-B1A6-5D38F8A44A79}" dt="2026-10-20T08:51:56.988" v="2997" actId="478"/>
+          <ac:cxnSpMkLst>
+            <pc:docMk/>
+            <pc:sldMk cId="1716350635" sldId="274"/>
+            <ac:cxnSpMk id="43" creationId="{C0216E69-2DA6-D7C1-E7E6-59DB860D25CC}"/>
+          </ac:cxnSpMkLst>
+        </pc:cxnChg>
+        <pc:cxnChg chg="add del mod">
+          <ac:chgData name="全 香玉" userId="1f3450e5-81b9-4f7a-82d7-841c32c029e0" providerId="ADAL" clId="{670531AC-1667-4F97-B1A6-5D38F8A44A79}" dt="2026-10-20T08:51:57.803" v="2998" actId="478"/>
+          <ac:cxnSpMkLst>
+            <pc:docMk/>
+            <pc:sldMk cId="1716350635" sldId="274"/>
+            <ac:cxnSpMk id="45" creationId="{4AF3929E-8F15-28A0-9657-8ADA3601B10F}"/>
           </ac:cxnSpMkLst>
         </pc:cxnChg>
         <pc:cxnChg chg="mod">
@@ -268,6 +397,29 @@
             <pc:docMk/>
             <pc:sldMk cId="1716350635" sldId="274"/>
             <ac:cxnSpMk id="120" creationId="{E5E11A20-1B4B-2A02-6590-8892BFF39232}"/>
+          </ac:cxnSpMkLst>
+        </pc:cxnChg>
+      </pc:sldChg>
+      <pc:sldChg chg="addSp modSp add mod">
+        <pc:chgData name="全 香玉" userId="1f3450e5-81b9-4f7a-82d7-841c32c029e0" providerId="ADAL" clId="{670531AC-1667-4F97-B1A6-5D38F8A44A79}" dt="2026-10-20T09:03:04.789" v="3014" actId="14100"/>
+        <pc:sldMkLst>
+          <pc:docMk/>
+          <pc:sldMk cId="3528325271" sldId="275"/>
+        </pc:sldMkLst>
+        <pc:cxnChg chg="add mod">
+          <ac:chgData name="全 香玉" userId="1f3450e5-81b9-4f7a-82d7-841c32c029e0" providerId="ADAL" clId="{670531AC-1667-4F97-B1A6-5D38F8A44A79}" dt="2026-10-20T09:02:49.263" v="3008" actId="14100"/>
+          <ac:cxnSpMkLst>
+            <pc:docMk/>
+            <pc:sldMk cId="3528325271" sldId="275"/>
+            <ac:cxnSpMk id="2" creationId="{98C753AB-37E7-19A4-048C-D18D11179D45}"/>
+          </ac:cxnSpMkLst>
+        </pc:cxnChg>
+        <pc:cxnChg chg="add mod">
+          <ac:chgData name="全 香玉" userId="1f3450e5-81b9-4f7a-82d7-841c32c029e0" providerId="ADAL" clId="{670531AC-1667-4F97-B1A6-5D38F8A44A79}" dt="2026-10-20T09:03:04.789" v="3014" actId="14100"/>
+          <ac:cxnSpMkLst>
+            <pc:docMk/>
+            <pc:sldMk cId="3528325271" sldId="275"/>
+            <ac:cxnSpMk id="35" creationId="{7753F6C3-4431-3B85-9660-C900030B9FE1}"/>
           </ac:cxnSpMkLst>
         </pc:cxnChg>
       </pc:sldChg>
@@ -7689,8 +7841,8 @@
           </a:p>
         </p:txBody>
       </p:sp>
-      <mc:AlternateContent xmlns:mc="http://schemas.openxmlformats.org/markup-compatibility/2006">
-        <mc:Choice xmlns:a14="http://schemas.microsoft.com/office/drawing/2010/main" Requires="a14">
+      <mc:AlternateContent xmlns:mc="http://schemas.openxmlformats.org/markup-compatibility/2006" xmlns:a14="http://schemas.microsoft.com/office/drawing/2010/main">
+        <mc:Choice Requires="a14">
           <p:sp>
             <p:nvSpPr>
               <p:cNvPr id="127" name="TextBox 126">
@@ -7738,7 +7890,7 @@
             </p:txBody>
           </p:sp>
         </mc:Choice>
-        <mc:Fallback>
+        <mc:Fallback xmlns="">
           <p:sp>
             <p:nvSpPr>
               <p:cNvPr id="127" name="TextBox 126">
@@ -7867,8 +8019,8 @@
           </a:p>
         </p:txBody>
       </p:sp>
-      <mc:AlternateContent xmlns:mc="http://schemas.openxmlformats.org/markup-compatibility/2006">
-        <mc:Choice xmlns:a14="http://schemas.microsoft.com/office/drawing/2010/main" Requires="a14">
+      <mc:AlternateContent xmlns:mc="http://schemas.openxmlformats.org/markup-compatibility/2006" xmlns:a14="http://schemas.microsoft.com/office/drawing/2010/main">
+        <mc:Choice Requires="a14">
           <p:sp>
             <p:nvSpPr>
               <p:cNvPr id="131" name="TextBox 130">
@@ -7916,7 +8068,7 @@
             </p:txBody>
           </p:sp>
         </mc:Choice>
-        <mc:Fallback>
+        <mc:Fallback xmlns="">
           <p:sp>
             <p:nvSpPr>
               <p:cNvPr id="131" name="TextBox 130">
@@ -8127,8 +8279,8 @@
           </a:p>
         </p:txBody>
       </p:sp>
-      <mc:AlternateContent xmlns:mc="http://schemas.openxmlformats.org/markup-compatibility/2006">
-        <mc:Choice xmlns:a14="http://schemas.microsoft.com/office/drawing/2010/main" Requires="a14">
+      <mc:AlternateContent xmlns:mc="http://schemas.openxmlformats.org/markup-compatibility/2006" xmlns:a14="http://schemas.microsoft.com/office/drawing/2010/main">
+        <mc:Choice Requires="a14">
           <p:sp>
             <p:nvSpPr>
               <p:cNvPr id="19" name="TextBox 130">
@@ -8176,7 +8328,7 @@
             </p:txBody>
           </p:sp>
         </mc:Choice>
-        <mc:Fallback>
+        <mc:Fallback xmlns="">
           <p:sp>
             <p:nvSpPr>
               <p:cNvPr id="19" name="TextBox 130">
@@ -8297,6 +8449,514 @@
           </a:p>
         </p:txBody>
       </p:sp>
+      <p:grpSp>
+        <p:nvGrpSpPr>
+          <p:cNvPr id="12" name="グループ化 11">
+            <a:extLst>
+              <a:ext uri="{FF2B5EF4-FFF2-40B4-BE49-F238E27FC236}">
+                <a16:creationId xmlns:a16="http://schemas.microsoft.com/office/drawing/2014/main" id="{835C68A6-85C0-4754-9E35-1642FF23AE90}"/>
+              </a:ext>
+            </a:extLst>
+          </p:cNvPr>
+          <p:cNvGrpSpPr/>
+          <p:nvPr/>
+        </p:nvGrpSpPr>
+        <p:grpSpPr>
+          <a:xfrm>
+            <a:off x="4683582" y="2405748"/>
+            <a:ext cx="124769" cy="124769"/>
+            <a:chOff x="4683582" y="2405748"/>
+            <a:chExt cx="124769" cy="124769"/>
+          </a:xfrm>
+        </p:grpSpPr>
+        <p:sp>
+          <p:nvSpPr>
+            <p:cNvPr id="9" name="楕円 8">
+              <a:extLst>
+                <a:ext uri="{FF2B5EF4-FFF2-40B4-BE49-F238E27FC236}">
+                  <a16:creationId xmlns:a16="http://schemas.microsoft.com/office/drawing/2014/main" id="{70AE7793-06FD-8A1A-807C-89DFAA804681}"/>
+                </a:ext>
+              </a:extLst>
+            </p:cNvPr>
+            <p:cNvSpPr/>
+            <p:nvPr/>
+          </p:nvSpPr>
+          <p:spPr>
+            <a:xfrm>
+              <a:off x="4683582" y="2405748"/>
+              <a:ext cx="124769" cy="124769"/>
+            </a:xfrm>
+            <a:prstGeom prst="ellipse">
+              <a:avLst/>
+            </a:prstGeom>
+            <a:noFill/>
+            <a:ln w="12700">
+              <a:solidFill>
+                <a:srgbClr val="C00000"/>
+              </a:solidFill>
+            </a:ln>
+          </p:spPr>
+          <p:style>
+            <a:lnRef idx="2">
+              <a:schemeClr val="accent1">
+                <a:shade val="15000"/>
+              </a:schemeClr>
+            </a:lnRef>
+            <a:fillRef idx="1">
+              <a:schemeClr val="accent1"/>
+            </a:fillRef>
+            <a:effectRef idx="0">
+              <a:schemeClr val="accent1"/>
+            </a:effectRef>
+            <a:fontRef idx="minor">
+              <a:schemeClr val="lt1"/>
+            </a:fontRef>
+          </p:style>
+          <p:txBody>
+            <a:bodyPr rtlCol="0" anchor="ctr"/>
+            <a:lstStyle/>
+            <a:p>
+              <a:pPr algn="ctr"/>
+              <a:endParaRPr lang="en-US"/>
+            </a:p>
+          </p:txBody>
+        </p:sp>
+        <p:sp>
+          <p:nvSpPr>
+            <p:cNvPr id="11" name="楕円 10">
+              <a:extLst>
+                <a:ext uri="{FF2B5EF4-FFF2-40B4-BE49-F238E27FC236}">
+                  <a16:creationId xmlns:a16="http://schemas.microsoft.com/office/drawing/2014/main" id="{E5982690-354E-D4A5-02C0-4317D6056134}"/>
+                </a:ext>
+              </a:extLst>
+            </p:cNvPr>
+            <p:cNvSpPr/>
+            <p:nvPr/>
+          </p:nvSpPr>
+          <p:spPr>
+            <a:xfrm>
+              <a:off x="4729967" y="2445507"/>
+              <a:ext cx="36576" cy="36576"/>
+            </a:xfrm>
+            <a:prstGeom prst="ellipse">
+              <a:avLst/>
+            </a:prstGeom>
+            <a:solidFill>
+              <a:schemeClr val="tx1"/>
+            </a:solidFill>
+            <a:ln w="12700">
+              <a:solidFill>
+                <a:srgbClr val="C00000"/>
+              </a:solidFill>
+            </a:ln>
+          </p:spPr>
+          <p:style>
+            <a:lnRef idx="2">
+              <a:schemeClr val="accent1">
+                <a:shade val="15000"/>
+              </a:schemeClr>
+            </a:lnRef>
+            <a:fillRef idx="1">
+              <a:schemeClr val="accent1"/>
+            </a:fillRef>
+            <a:effectRef idx="0">
+              <a:schemeClr val="accent1"/>
+            </a:effectRef>
+            <a:fontRef idx="minor">
+              <a:schemeClr val="lt1"/>
+            </a:fontRef>
+          </p:style>
+          <p:txBody>
+            <a:bodyPr rtlCol="0" anchor="ctr"/>
+            <a:lstStyle/>
+            <a:p>
+              <a:pPr algn="ctr"/>
+              <a:endParaRPr lang="en-US"/>
+            </a:p>
+          </p:txBody>
+        </p:sp>
+      </p:grpSp>
+      <p:grpSp>
+        <p:nvGrpSpPr>
+          <p:cNvPr id="13" name="グループ化 12">
+            <a:extLst>
+              <a:ext uri="{FF2B5EF4-FFF2-40B4-BE49-F238E27FC236}">
+                <a16:creationId xmlns:a16="http://schemas.microsoft.com/office/drawing/2014/main" id="{19AE7C25-F708-FFFD-E1DC-333945E78170}"/>
+              </a:ext>
+            </a:extLst>
+          </p:cNvPr>
+          <p:cNvGrpSpPr/>
+          <p:nvPr/>
+        </p:nvGrpSpPr>
+        <p:grpSpPr>
+          <a:xfrm>
+            <a:off x="4849618" y="2306590"/>
+            <a:ext cx="124769" cy="124769"/>
+            <a:chOff x="4683582" y="2405748"/>
+            <a:chExt cx="124769" cy="124769"/>
+          </a:xfrm>
+        </p:grpSpPr>
+        <p:sp>
+          <p:nvSpPr>
+            <p:cNvPr id="14" name="楕円 13">
+              <a:extLst>
+                <a:ext uri="{FF2B5EF4-FFF2-40B4-BE49-F238E27FC236}">
+                  <a16:creationId xmlns:a16="http://schemas.microsoft.com/office/drawing/2014/main" id="{884280DE-560A-7D25-79BD-B939BC49FA38}"/>
+                </a:ext>
+              </a:extLst>
+            </p:cNvPr>
+            <p:cNvSpPr/>
+            <p:nvPr/>
+          </p:nvSpPr>
+          <p:spPr>
+            <a:xfrm>
+              <a:off x="4683582" y="2405748"/>
+              <a:ext cx="124769" cy="124769"/>
+            </a:xfrm>
+            <a:prstGeom prst="ellipse">
+              <a:avLst/>
+            </a:prstGeom>
+            <a:noFill/>
+            <a:ln w="12700">
+              <a:solidFill>
+                <a:srgbClr val="C00000"/>
+              </a:solidFill>
+            </a:ln>
+          </p:spPr>
+          <p:style>
+            <a:lnRef idx="2">
+              <a:schemeClr val="accent1">
+                <a:shade val="15000"/>
+              </a:schemeClr>
+            </a:lnRef>
+            <a:fillRef idx="1">
+              <a:schemeClr val="accent1"/>
+            </a:fillRef>
+            <a:effectRef idx="0">
+              <a:schemeClr val="accent1"/>
+            </a:effectRef>
+            <a:fontRef idx="minor">
+              <a:schemeClr val="lt1"/>
+            </a:fontRef>
+          </p:style>
+          <p:txBody>
+            <a:bodyPr rtlCol="0" anchor="ctr"/>
+            <a:lstStyle/>
+            <a:p>
+              <a:pPr algn="ctr"/>
+              <a:endParaRPr lang="en-US"/>
+            </a:p>
+          </p:txBody>
+        </p:sp>
+        <p:sp>
+          <p:nvSpPr>
+            <p:cNvPr id="15" name="楕円 14">
+              <a:extLst>
+                <a:ext uri="{FF2B5EF4-FFF2-40B4-BE49-F238E27FC236}">
+                  <a16:creationId xmlns:a16="http://schemas.microsoft.com/office/drawing/2014/main" id="{C717B62E-250C-9370-F0F7-391E46F72B02}"/>
+                </a:ext>
+              </a:extLst>
+            </p:cNvPr>
+            <p:cNvSpPr/>
+            <p:nvPr/>
+          </p:nvSpPr>
+          <p:spPr>
+            <a:xfrm>
+              <a:off x="4729967" y="2445507"/>
+              <a:ext cx="36576" cy="36576"/>
+            </a:xfrm>
+            <a:prstGeom prst="ellipse">
+              <a:avLst/>
+            </a:prstGeom>
+            <a:solidFill>
+              <a:schemeClr val="tx1"/>
+            </a:solidFill>
+            <a:ln w="12700">
+              <a:solidFill>
+                <a:srgbClr val="C00000"/>
+              </a:solidFill>
+            </a:ln>
+          </p:spPr>
+          <p:style>
+            <a:lnRef idx="2">
+              <a:schemeClr val="accent1">
+                <a:shade val="15000"/>
+              </a:schemeClr>
+            </a:lnRef>
+            <a:fillRef idx="1">
+              <a:schemeClr val="accent1"/>
+            </a:fillRef>
+            <a:effectRef idx="0">
+              <a:schemeClr val="accent1"/>
+            </a:effectRef>
+            <a:fontRef idx="minor">
+              <a:schemeClr val="lt1"/>
+            </a:fontRef>
+          </p:style>
+          <p:txBody>
+            <a:bodyPr rtlCol="0" anchor="ctr"/>
+            <a:lstStyle/>
+            <a:p>
+              <a:pPr algn="ctr"/>
+              <a:endParaRPr lang="en-US"/>
+            </a:p>
+          </p:txBody>
+        </p:sp>
+      </p:grpSp>
+      <p:grpSp>
+        <p:nvGrpSpPr>
+          <p:cNvPr id="16" name="グループ化 15">
+            <a:extLst>
+              <a:ext uri="{FF2B5EF4-FFF2-40B4-BE49-F238E27FC236}">
+                <a16:creationId xmlns:a16="http://schemas.microsoft.com/office/drawing/2014/main" id="{354411B5-5B3C-EAC6-5274-1984F81DA293}"/>
+              </a:ext>
+            </a:extLst>
+          </p:cNvPr>
+          <p:cNvGrpSpPr/>
+          <p:nvPr/>
+        </p:nvGrpSpPr>
+        <p:grpSpPr>
+          <a:xfrm>
+            <a:off x="5029281" y="2207324"/>
+            <a:ext cx="124769" cy="124769"/>
+            <a:chOff x="4683582" y="2405748"/>
+            <a:chExt cx="124769" cy="124769"/>
+          </a:xfrm>
+        </p:grpSpPr>
+        <p:sp>
+          <p:nvSpPr>
+            <p:cNvPr id="18" name="楕円 17">
+              <a:extLst>
+                <a:ext uri="{FF2B5EF4-FFF2-40B4-BE49-F238E27FC236}">
+                  <a16:creationId xmlns:a16="http://schemas.microsoft.com/office/drawing/2014/main" id="{27219B29-EE0A-025F-6BED-9F46DF836B72}"/>
+                </a:ext>
+              </a:extLst>
+            </p:cNvPr>
+            <p:cNvSpPr/>
+            <p:nvPr/>
+          </p:nvSpPr>
+          <p:spPr>
+            <a:xfrm>
+              <a:off x="4683582" y="2405748"/>
+              <a:ext cx="124769" cy="124769"/>
+            </a:xfrm>
+            <a:prstGeom prst="ellipse">
+              <a:avLst/>
+            </a:prstGeom>
+            <a:noFill/>
+            <a:ln w="12700">
+              <a:solidFill>
+                <a:srgbClr val="C00000"/>
+              </a:solidFill>
+            </a:ln>
+          </p:spPr>
+          <p:style>
+            <a:lnRef idx="2">
+              <a:schemeClr val="accent1">
+                <a:shade val="15000"/>
+              </a:schemeClr>
+            </a:lnRef>
+            <a:fillRef idx="1">
+              <a:schemeClr val="accent1"/>
+            </a:fillRef>
+            <a:effectRef idx="0">
+              <a:schemeClr val="accent1"/>
+            </a:effectRef>
+            <a:fontRef idx="minor">
+              <a:schemeClr val="lt1"/>
+            </a:fontRef>
+          </p:style>
+          <p:txBody>
+            <a:bodyPr rtlCol="0" anchor="ctr"/>
+            <a:lstStyle/>
+            <a:p>
+              <a:pPr algn="ctr"/>
+              <a:endParaRPr lang="en-US"/>
+            </a:p>
+          </p:txBody>
+        </p:sp>
+        <p:sp>
+          <p:nvSpPr>
+            <p:cNvPr id="22" name="楕円 21">
+              <a:extLst>
+                <a:ext uri="{FF2B5EF4-FFF2-40B4-BE49-F238E27FC236}">
+                  <a16:creationId xmlns:a16="http://schemas.microsoft.com/office/drawing/2014/main" id="{D24786B3-11B1-C76E-8F30-FD2605F21785}"/>
+                </a:ext>
+              </a:extLst>
+            </p:cNvPr>
+            <p:cNvSpPr/>
+            <p:nvPr/>
+          </p:nvSpPr>
+          <p:spPr>
+            <a:xfrm>
+              <a:off x="4729967" y="2445507"/>
+              <a:ext cx="36576" cy="36576"/>
+            </a:xfrm>
+            <a:prstGeom prst="ellipse">
+              <a:avLst/>
+            </a:prstGeom>
+            <a:solidFill>
+              <a:schemeClr val="tx1"/>
+            </a:solidFill>
+            <a:ln w="12700">
+              <a:solidFill>
+                <a:srgbClr val="C00000"/>
+              </a:solidFill>
+            </a:ln>
+          </p:spPr>
+          <p:style>
+            <a:lnRef idx="2">
+              <a:schemeClr val="accent1">
+                <a:shade val="15000"/>
+              </a:schemeClr>
+            </a:lnRef>
+            <a:fillRef idx="1">
+              <a:schemeClr val="accent1"/>
+            </a:fillRef>
+            <a:effectRef idx="0">
+              <a:schemeClr val="accent1"/>
+            </a:effectRef>
+            <a:fontRef idx="minor">
+              <a:schemeClr val="lt1"/>
+            </a:fontRef>
+          </p:style>
+          <p:txBody>
+            <a:bodyPr rtlCol="0" anchor="ctr"/>
+            <a:lstStyle/>
+            <a:p>
+              <a:pPr algn="ctr"/>
+              <a:endParaRPr lang="en-US"/>
+            </a:p>
+          </p:txBody>
+        </p:sp>
+      </p:grpSp>
+      <p:grpSp>
+        <p:nvGrpSpPr>
+          <p:cNvPr id="25" name="グループ化 24">
+            <a:extLst>
+              <a:ext uri="{FF2B5EF4-FFF2-40B4-BE49-F238E27FC236}">
+                <a16:creationId xmlns:a16="http://schemas.microsoft.com/office/drawing/2014/main" id="{142D1280-1AE5-A23F-5AAD-7C9928AD060F}"/>
+              </a:ext>
+            </a:extLst>
+          </p:cNvPr>
+          <p:cNvGrpSpPr/>
+          <p:nvPr/>
+        </p:nvGrpSpPr>
+        <p:grpSpPr>
+          <a:xfrm>
+            <a:off x="5202573" y="2112401"/>
+            <a:ext cx="124769" cy="124769"/>
+            <a:chOff x="4683582" y="2405748"/>
+            <a:chExt cx="124769" cy="124769"/>
+          </a:xfrm>
+        </p:grpSpPr>
+        <p:sp>
+          <p:nvSpPr>
+            <p:cNvPr id="32" name="楕円 31">
+              <a:extLst>
+                <a:ext uri="{FF2B5EF4-FFF2-40B4-BE49-F238E27FC236}">
+                  <a16:creationId xmlns:a16="http://schemas.microsoft.com/office/drawing/2014/main" id="{1CD89612-AFE3-BDF4-042D-19E2A97C464C}"/>
+                </a:ext>
+              </a:extLst>
+            </p:cNvPr>
+            <p:cNvSpPr/>
+            <p:nvPr/>
+          </p:nvSpPr>
+          <p:spPr>
+            <a:xfrm>
+              <a:off x="4683582" y="2405748"/>
+              <a:ext cx="124769" cy="124769"/>
+            </a:xfrm>
+            <a:prstGeom prst="ellipse">
+              <a:avLst/>
+            </a:prstGeom>
+            <a:noFill/>
+            <a:ln w="12700">
+              <a:solidFill>
+                <a:srgbClr val="C00000"/>
+              </a:solidFill>
+            </a:ln>
+          </p:spPr>
+          <p:style>
+            <a:lnRef idx="2">
+              <a:schemeClr val="accent1">
+                <a:shade val="15000"/>
+              </a:schemeClr>
+            </a:lnRef>
+            <a:fillRef idx="1">
+              <a:schemeClr val="accent1"/>
+            </a:fillRef>
+            <a:effectRef idx="0">
+              <a:schemeClr val="accent1"/>
+            </a:effectRef>
+            <a:fontRef idx="minor">
+              <a:schemeClr val="lt1"/>
+            </a:fontRef>
+          </p:style>
+          <p:txBody>
+            <a:bodyPr rtlCol="0" anchor="ctr"/>
+            <a:lstStyle/>
+            <a:p>
+              <a:pPr algn="ctr"/>
+              <a:endParaRPr lang="en-US"/>
+            </a:p>
+          </p:txBody>
+        </p:sp>
+        <p:sp>
+          <p:nvSpPr>
+            <p:cNvPr id="34" name="楕円 33">
+              <a:extLst>
+                <a:ext uri="{FF2B5EF4-FFF2-40B4-BE49-F238E27FC236}">
+                  <a16:creationId xmlns:a16="http://schemas.microsoft.com/office/drawing/2014/main" id="{5776E7E2-CF6C-4D77-EAAB-57ADD4B3441E}"/>
+                </a:ext>
+              </a:extLst>
+            </p:cNvPr>
+            <p:cNvSpPr/>
+            <p:nvPr/>
+          </p:nvSpPr>
+          <p:spPr>
+            <a:xfrm>
+              <a:off x="4729967" y="2445507"/>
+              <a:ext cx="36576" cy="36576"/>
+            </a:xfrm>
+            <a:prstGeom prst="ellipse">
+              <a:avLst/>
+            </a:prstGeom>
+            <a:solidFill>
+              <a:schemeClr val="tx1"/>
+            </a:solidFill>
+            <a:ln w="12700">
+              <a:solidFill>
+                <a:srgbClr val="C00000"/>
+              </a:solidFill>
+            </a:ln>
+          </p:spPr>
+          <p:style>
+            <a:lnRef idx="2">
+              <a:schemeClr val="accent1">
+                <a:shade val="15000"/>
+              </a:schemeClr>
+            </a:lnRef>
+            <a:fillRef idx="1">
+              <a:schemeClr val="accent1"/>
+            </a:fillRef>
+            <a:effectRef idx="0">
+              <a:schemeClr val="accent1"/>
+            </a:effectRef>
+            <a:fontRef idx="minor">
+              <a:schemeClr val="lt1"/>
+            </a:fontRef>
+          </p:style>
+          <p:txBody>
+            <a:bodyPr rtlCol="0" anchor="ctr"/>
+            <a:lstStyle/>
+            <a:p>
+              <a:pPr algn="ctr"/>
+              <a:endParaRPr lang="en-US"/>
+            </a:p>
+          </p:txBody>
+        </p:sp>
+      </p:grpSp>
     </p:spTree>
     <p:extLst>
       <p:ext uri="{BB962C8B-B14F-4D97-AF65-F5344CB8AC3E}">
@@ -8311,6 +8971,2692 @@
 </file>
 
 <file path=ppt/slides/slide13.xml><?xml version="1.0" encoding="utf-8"?>
+<p:sld xmlns:a="http://schemas.openxmlformats.org/drawingml/2006/main" xmlns:r="http://schemas.openxmlformats.org/officeDocument/2006/relationships" xmlns:p="http://schemas.openxmlformats.org/presentationml/2006/main">
+  <p:cSld>
+    <p:spTree>
+      <p:nvGrpSpPr>
+        <p:cNvPr id="1" name="">
+          <a:extLst>
+            <a:ext uri="{FF2B5EF4-FFF2-40B4-BE49-F238E27FC236}">
+              <a16:creationId xmlns:a16="http://schemas.microsoft.com/office/drawing/2014/main" id="{AD4D4DDE-BAEE-D76E-DFB4-99C383AD32CD}"/>
+            </a:ext>
+          </a:extLst>
+        </p:cNvPr>
+        <p:cNvGrpSpPr/>
+        <p:nvPr/>
+      </p:nvGrpSpPr>
+      <p:grpSpPr>
+        <a:xfrm>
+          <a:off x="0" y="0"/>
+          <a:ext cx="0" cy="0"/>
+          <a:chOff x="0" y="0"/>
+          <a:chExt cx="0" cy="0"/>
+        </a:xfrm>
+      </p:grpSpPr>
+      <p:cxnSp>
+        <p:nvCxnSpPr>
+          <p:cNvPr id="29" name="Straight Arrow Connector 22">
+            <a:extLst>
+              <a:ext uri="{FF2B5EF4-FFF2-40B4-BE49-F238E27FC236}">
+                <a16:creationId xmlns:a16="http://schemas.microsoft.com/office/drawing/2014/main" id="{63B16A5D-4B51-043C-0518-E1148855F686}"/>
+              </a:ext>
+            </a:extLst>
+          </p:cNvPr>
+          <p:cNvCxnSpPr>
+            <a:cxnSpLocks/>
+          </p:cNvCxnSpPr>
+          <p:nvPr/>
+        </p:nvCxnSpPr>
+        <p:spPr>
+          <a:xfrm flipH="1" flipV="1">
+            <a:off x="9398292" y="3059116"/>
+            <a:ext cx="1625319" cy="524261"/>
+          </a:xfrm>
+          <a:prstGeom prst="straightConnector1">
+            <a:avLst/>
+          </a:prstGeom>
+          <a:ln>
+            <a:solidFill>
+              <a:srgbClr val="FF0000"/>
+            </a:solidFill>
+            <a:tailEnd type="triangle"/>
+          </a:ln>
+        </p:spPr>
+        <p:style>
+          <a:lnRef idx="2">
+            <a:schemeClr val="dk1"/>
+          </a:lnRef>
+          <a:fillRef idx="0">
+            <a:schemeClr val="dk1"/>
+          </a:fillRef>
+          <a:effectRef idx="1">
+            <a:schemeClr val="dk1"/>
+          </a:effectRef>
+          <a:fontRef idx="minor">
+            <a:schemeClr val="tx1"/>
+          </a:fontRef>
+        </p:style>
+      </p:cxnSp>
+      <p:cxnSp>
+        <p:nvCxnSpPr>
+          <p:cNvPr id="24" name="Straight Arrow Connector 19">
+            <a:extLst>
+              <a:ext uri="{FF2B5EF4-FFF2-40B4-BE49-F238E27FC236}">
+                <a16:creationId xmlns:a16="http://schemas.microsoft.com/office/drawing/2014/main" id="{06DD9EE0-5BF2-AEAD-C58C-12FDDA9DDD4E}"/>
+              </a:ext>
+            </a:extLst>
+          </p:cNvPr>
+          <p:cNvCxnSpPr>
+            <a:cxnSpLocks/>
+          </p:cNvCxnSpPr>
+          <p:nvPr/>
+        </p:nvCxnSpPr>
+        <p:spPr>
+          <a:xfrm flipV="1">
+            <a:off x="9400688" y="1081445"/>
+            <a:ext cx="1462774" cy="2012161"/>
+          </a:xfrm>
+          <a:prstGeom prst="straightConnector1">
+            <a:avLst/>
+          </a:prstGeom>
+          <a:ln>
+            <a:prstDash val="sysDot"/>
+            <a:headEnd type="arrow" w="med" len="med"/>
+            <a:tailEnd type="none" w="med" len="med"/>
+          </a:ln>
+        </p:spPr>
+        <p:style>
+          <a:lnRef idx="2">
+            <a:schemeClr val="dk1"/>
+          </a:lnRef>
+          <a:fillRef idx="0">
+            <a:schemeClr val="dk1"/>
+          </a:fillRef>
+          <a:effectRef idx="1">
+            <a:schemeClr val="dk1"/>
+          </a:effectRef>
+          <a:fontRef idx="minor">
+            <a:schemeClr val="tx1"/>
+          </a:fontRef>
+        </p:style>
+      </p:cxnSp>
+      <p:sp>
+        <p:nvSpPr>
+          <p:cNvPr id="4" name="Oval 3">
+            <a:extLst>
+              <a:ext uri="{FF2B5EF4-FFF2-40B4-BE49-F238E27FC236}">
+                <a16:creationId xmlns:a16="http://schemas.microsoft.com/office/drawing/2014/main" id="{73C5F88A-A101-AA0E-A508-A68B3BC7C27B}"/>
+              </a:ext>
+            </a:extLst>
+          </p:cNvPr>
+          <p:cNvSpPr/>
+          <p:nvPr/>
+        </p:nvSpPr>
+        <p:spPr>
+          <a:xfrm>
+            <a:off x="2946400" y="1981200"/>
+            <a:ext cx="1479550" cy="2120900"/>
+          </a:xfrm>
+          <a:prstGeom prst="ellipse">
+            <a:avLst/>
+          </a:prstGeom>
+          <a:solidFill>
+            <a:schemeClr val="bg2">
+              <a:lumMod val="90000"/>
+            </a:schemeClr>
+          </a:solidFill>
+        </p:spPr>
+        <p:style>
+          <a:lnRef idx="2">
+            <a:schemeClr val="dk1">
+              <a:shade val="15000"/>
+            </a:schemeClr>
+          </a:lnRef>
+          <a:fillRef idx="1">
+            <a:schemeClr val="dk1"/>
+          </a:fillRef>
+          <a:effectRef idx="0">
+            <a:schemeClr val="dk1"/>
+          </a:effectRef>
+          <a:fontRef idx="minor">
+            <a:schemeClr val="lt1"/>
+          </a:fontRef>
+        </p:style>
+        <p:txBody>
+          <a:bodyPr rtlCol="0" anchor="ctr"/>
+          <a:lstStyle/>
+          <a:p>
+            <a:pPr algn="ctr"/>
+            <a:endParaRPr kumimoji="1" lang="ja-JP" altLang="en-US" dirty="0"/>
+          </a:p>
+        </p:txBody>
+      </p:sp>
+      <p:sp>
+        <p:nvSpPr>
+          <p:cNvPr id="5" name="Oval 4">
+            <a:extLst>
+              <a:ext uri="{FF2B5EF4-FFF2-40B4-BE49-F238E27FC236}">
+                <a16:creationId xmlns:a16="http://schemas.microsoft.com/office/drawing/2014/main" id="{1DDE4627-45C7-36C9-11E7-C763CE3863B7}"/>
+              </a:ext>
+            </a:extLst>
+          </p:cNvPr>
+          <p:cNvSpPr/>
+          <p:nvPr/>
+        </p:nvSpPr>
+        <p:spPr>
+          <a:xfrm>
+            <a:off x="3282950" y="2495550"/>
+            <a:ext cx="737532" cy="1057234"/>
+          </a:xfrm>
+          <a:prstGeom prst="ellipse">
+            <a:avLst/>
+          </a:prstGeom>
+          <a:solidFill>
+            <a:schemeClr val="bg1"/>
+          </a:solidFill>
+        </p:spPr>
+        <p:style>
+          <a:lnRef idx="2">
+            <a:schemeClr val="dk1">
+              <a:shade val="15000"/>
+            </a:schemeClr>
+          </a:lnRef>
+          <a:fillRef idx="1">
+            <a:schemeClr val="dk1"/>
+          </a:fillRef>
+          <a:effectRef idx="0">
+            <a:schemeClr val="dk1"/>
+          </a:effectRef>
+          <a:fontRef idx="minor">
+            <a:schemeClr val="lt1"/>
+          </a:fontRef>
+        </p:style>
+        <p:txBody>
+          <a:bodyPr rtlCol="0" anchor="ctr"/>
+          <a:lstStyle/>
+          <a:p>
+            <a:pPr algn="ctr"/>
+            <a:endParaRPr kumimoji="1" lang="ja-JP" altLang="en-US"/>
+          </a:p>
+        </p:txBody>
+      </p:sp>
+      <p:cxnSp>
+        <p:nvCxnSpPr>
+          <p:cNvPr id="7" name="Straight Connector 6">
+            <a:extLst>
+              <a:ext uri="{FF2B5EF4-FFF2-40B4-BE49-F238E27FC236}">
+                <a16:creationId xmlns:a16="http://schemas.microsoft.com/office/drawing/2014/main" id="{5033A3BD-3A8C-588A-9E7A-56B4C4D4D0F2}"/>
+              </a:ext>
+            </a:extLst>
+          </p:cNvPr>
+          <p:cNvCxnSpPr>
+            <a:stCxn id="4" idx="0"/>
+          </p:cNvCxnSpPr>
+          <p:nvPr/>
+        </p:nvCxnSpPr>
+        <p:spPr>
+          <a:xfrm>
+            <a:off x="3686175" y="1981200"/>
+            <a:ext cx="3971925" cy="0"/>
+          </a:xfrm>
+          <a:prstGeom prst="line">
+            <a:avLst/>
+          </a:prstGeom>
+        </p:spPr>
+        <p:style>
+          <a:lnRef idx="2">
+            <a:schemeClr val="dk1"/>
+          </a:lnRef>
+          <a:fillRef idx="0">
+            <a:schemeClr val="dk1"/>
+          </a:fillRef>
+          <a:effectRef idx="1">
+            <a:schemeClr val="dk1"/>
+          </a:effectRef>
+          <a:fontRef idx="minor">
+            <a:schemeClr val="tx1"/>
+          </a:fontRef>
+        </p:style>
+      </p:cxnSp>
+      <p:cxnSp>
+        <p:nvCxnSpPr>
+          <p:cNvPr id="8" name="Straight Connector 7">
+            <a:extLst>
+              <a:ext uri="{FF2B5EF4-FFF2-40B4-BE49-F238E27FC236}">
+                <a16:creationId xmlns:a16="http://schemas.microsoft.com/office/drawing/2014/main" id="{8065361E-D32D-0501-A657-BFFA876F2288}"/>
+              </a:ext>
+            </a:extLst>
+          </p:cNvPr>
+          <p:cNvCxnSpPr>
+            <a:cxnSpLocks/>
+            <a:stCxn id="4" idx="4"/>
+          </p:cNvCxnSpPr>
+          <p:nvPr/>
+        </p:nvCxnSpPr>
+        <p:spPr>
+          <a:xfrm>
+            <a:off x="3686175" y="4102100"/>
+            <a:ext cx="4079877" cy="0"/>
+          </a:xfrm>
+          <a:prstGeom prst="line">
+            <a:avLst/>
+          </a:prstGeom>
+        </p:spPr>
+        <p:style>
+          <a:lnRef idx="2">
+            <a:schemeClr val="dk1"/>
+          </a:lnRef>
+          <a:fillRef idx="0">
+            <a:schemeClr val="dk1"/>
+          </a:fillRef>
+          <a:effectRef idx="1">
+            <a:schemeClr val="dk1"/>
+          </a:effectRef>
+          <a:fontRef idx="minor">
+            <a:schemeClr val="tx1"/>
+          </a:fontRef>
+        </p:style>
+      </p:cxnSp>
+      <p:cxnSp>
+        <p:nvCxnSpPr>
+          <p:cNvPr id="20" name="Straight Arrow Connector 19">
+            <a:extLst>
+              <a:ext uri="{FF2B5EF4-FFF2-40B4-BE49-F238E27FC236}">
+                <a16:creationId xmlns:a16="http://schemas.microsoft.com/office/drawing/2014/main" id="{3C8F5B36-4EFA-8DEF-0ADF-58406D74F6C4}"/>
+              </a:ext>
+            </a:extLst>
+          </p:cNvPr>
+          <p:cNvCxnSpPr>
+            <a:cxnSpLocks/>
+          </p:cNvCxnSpPr>
+          <p:nvPr/>
+        </p:nvCxnSpPr>
+        <p:spPr>
+          <a:xfrm>
+            <a:off x="4425950" y="3088685"/>
+            <a:ext cx="3536950" cy="0"/>
+          </a:xfrm>
+          <a:prstGeom prst="straightConnector1">
+            <a:avLst/>
+          </a:prstGeom>
+          <a:ln>
+            <a:prstDash val="sysDot"/>
+            <a:tailEnd type="triangle"/>
+          </a:ln>
+        </p:spPr>
+        <p:style>
+          <a:lnRef idx="2">
+            <a:schemeClr val="dk1"/>
+          </a:lnRef>
+          <a:fillRef idx="0">
+            <a:schemeClr val="dk1"/>
+          </a:fillRef>
+          <a:effectRef idx="1">
+            <a:schemeClr val="dk1"/>
+          </a:effectRef>
+          <a:fontRef idx="minor">
+            <a:schemeClr val="tx1"/>
+          </a:fontRef>
+        </p:style>
+      </p:cxnSp>
+      <p:cxnSp>
+        <p:nvCxnSpPr>
+          <p:cNvPr id="21" name="Straight Arrow Connector 20">
+            <a:extLst>
+              <a:ext uri="{FF2B5EF4-FFF2-40B4-BE49-F238E27FC236}">
+                <a16:creationId xmlns:a16="http://schemas.microsoft.com/office/drawing/2014/main" id="{C0E66F11-D00D-6A8A-1273-48FB82BA6515}"/>
+              </a:ext>
+            </a:extLst>
+          </p:cNvPr>
+          <p:cNvCxnSpPr>
+            <a:cxnSpLocks/>
+          </p:cNvCxnSpPr>
+          <p:nvPr/>
+        </p:nvCxnSpPr>
+        <p:spPr>
+          <a:xfrm flipV="1">
+            <a:off x="3683918" y="1498600"/>
+            <a:ext cx="0" cy="3498850"/>
+          </a:xfrm>
+          <a:prstGeom prst="straightConnector1">
+            <a:avLst/>
+          </a:prstGeom>
+          <a:ln>
+            <a:prstDash val="sysDot"/>
+            <a:tailEnd type="triangle"/>
+          </a:ln>
+        </p:spPr>
+        <p:style>
+          <a:lnRef idx="2">
+            <a:schemeClr val="dk1"/>
+          </a:lnRef>
+          <a:fillRef idx="0">
+            <a:schemeClr val="dk1"/>
+          </a:fillRef>
+          <a:effectRef idx="1">
+            <a:schemeClr val="dk1"/>
+          </a:effectRef>
+          <a:fontRef idx="minor">
+            <a:schemeClr val="tx1"/>
+          </a:fontRef>
+        </p:style>
+      </p:cxnSp>
+      <p:sp>
+        <p:nvSpPr>
+          <p:cNvPr id="26" name="TextBox 25">
+            <a:extLst>
+              <a:ext uri="{FF2B5EF4-FFF2-40B4-BE49-F238E27FC236}">
+                <a16:creationId xmlns:a16="http://schemas.microsoft.com/office/drawing/2014/main" id="{3FEBA738-58D5-D278-38C0-7881AD1FD939}"/>
+              </a:ext>
+            </a:extLst>
+          </p:cNvPr>
+          <p:cNvSpPr txBox="1"/>
+          <p:nvPr/>
+        </p:nvSpPr>
+        <p:spPr>
+          <a:xfrm>
+            <a:off x="3533877" y="1084558"/>
+            <a:ext cx="300082" cy="369332"/>
+          </a:xfrm>
+          <a:prstGeom prst="rect">
+            <a:avLst/>
+          </a:prstGeom>
+          <a:noFill/>
+        </p:spPr>
+        <p:txBody>
+          <a:bodyPr wrap="none" rtlCol="0">
+            <a:spAutoFit/>
+          </a:bodyPr>
+          <a:lstStyle/>
+          <a:p>
+            <a:r>
+              <a:rPr kumimoji="1" lang="en-US" altLang="ja-JP" dirty="0">
+                <a:latin typeface="times" panose="02020603050405020304" pitchFamily="18" charset="0"/>
+                <a:cs typeface="times" panose="02020603050405020304" pitchFamily="18" charset="0"/>
+              </a:rPr>
+              <a:t>x</a:t>
+            </a:r>
+            <a:endParaRPr kumimoji="1" lang="ja-JP" altLang="en-US" dirty="0">
+              <a:latin typeface="times" panose="02020603050405020304" pitchFamily="18" charset="0"/>
+              <a:cs typeface="times" panose="02020603050405020304" pitchFamily="18" charset="0"/>
+            </a:endParaRPr>
+          </a:p>
+        </p:txBody>
+      </p:sp>
+      <p:sp>
+        <p:nvSpPr>
+          <p:cNvPr id="27" name="TextBox 26">
+            <a:extLst>
+              <a:ext uri="{FF2B5EF4-FFF2-40B4-BE49-F238E27FC236}">
+                <a16:creationId xmlns:a16="http://schemas.microsoft.com/office/drawing/2014/main" id="{08FF346C-E6F2-0510-1A29-31C2018F0D8D}"/>
+              </a:ext>
+            </a:extLst>
+          </p:cNvPr>
+          <p:cNvSpPr txBox="1"/>
+          <p:nvPr/>
+        </p:nvSpPr>
+        <p:spPr>
+          <a:xfrm>
+            <a:off x="2667607" y="1796446"/>
+            <a:ext cx="300082" cy="369332"/>
+          </a:xfrm>
+          <a:prstGeom prst="rect">
+            <a:avLst/>
+          </a:prstGeom>
+          <a:noFill/>
+        </p:spPr>
+        <p:txBody>
+          <a:bodyPr wrap="none" rtlCol="0">
+            <a:spAutoFit/>
+          </a:bodyPr>
+          <a:lstStyle/>
+          <a:p>
+            <a:r>
+              <a:rPr kumimoji="1" lang="en-US" altLang="ja-JP" dirty="0">
+                <a:latin typeface="times" panose="02020603050405020304" pitchFamily="18" charset="0"/>
+                <a:cs typeface="times" panose="02020603050405020304" pitchFamily="18" charset="0"/>
+              </a:rPr>
+              <a:t>y</a:t>
+            </a:r>
+            <a:endParaRPr kumimoji="1" lang="ja-JP" altLang="en-US" dirty="0">
+              <a:latin typeface="times" panose="02020603050405020304" pitchFamily="18" charset="0"/>
+              <a:cs typeface="times" panose="02020603050405020304" pitchFamily="18" charset="0"/>
+            </a:endParaRPr>
+          </a:p>
+        </p:txBody>
+      </p:sp>
+      <p:sp>
+        <p:nvSpPr>
+          <p:cNvPr id="28" name="TextBox 27">
+            <a:extLst>
+              <a:ext uri="{FF2B5EF4-FFF2-40B4-BE49-F238E27FC236}">
+                <a16:creationId xmlns:a16="http://schemas.microsoft.com/office/drawing/2014/main" id="{A21ECC67-1C4A-13FC-EF9E-D13EF3F2652B}"/>
+              </a:ext>
+            </a:extLst>
+          </p:cNvPr>
+          <p:cNvSpPr txBox="1"/>
+          <p:nvPr/>
+        </p:nvSpPr>
+        <p:spPr>
+          <a:xfrm>
+            <a:off x="7675642" y="3004643"/>
+            <a:ext cx="287258" cy="369332"/>
+          </a:xfrm>
+          <a:prstGeom prst="rect">
+            <a:avLst/>
+          </a:prstGeom>
+          <a:noFill/>
+        </p:spPr>
+        <p:txBody>
+          <a:bodyPr wrap="none" rtlCol="0">
+            <a:spAutoFit/>
+          </a:bodyPr>
+          <a:lstStyle/>
+          <a:p>
+            <a:r>
+              <a:rPr kumimoji="1" lang="en-US" altLang="ja-JP" dirty="0">
+                <a:latin typeface="times" panose="02020603050405020304" pitchFamily="18" charset="0"/>
+                <a:cs typeface="times" panose="02020603050405020304" pitchFamily="18" charset="0"/>
+              </a:rPr>
+              <a:t>z</a:t>
+            </a:r>
+            <a:endParaRPr kumimoji="1" lang="ja-JP" altLang="en-US" dirty="0">
+              <a:latin typeface="times" panose="02020603050405020304" pitchFamily="18" charset="0"/>
+              <a:cs typeface="times" panose="02020603050405020304" pitchFamily="18" charset="0"/>
+            </a:endParaRPr>
+          </a:p>
+        </p:txBody>
+      </p:sp>
+      <p:cxnSp>
+        <p:nvCxnSpPr>
+          <p:cNvPr id="6" name="Straight Arrow Connector 19">
+            <a:extLst>
+              <a:ext uri="{FF2B5EF4-FFF2-40B4-BE49-F238E27FC236}">
+                <a16:creationId xmlns:a16="http://schemas.microsoft.com/office/drawing/2014/main" id="{42C3E7C7-190E-C8D2-F022-FF4CF98EB436}"/>
+              </a:ext>
+            </a:extLst>
+          </p:cNvPr>
+          <p:cNvCxnSpPr>
+            <a:cxnSpLocks/>
+          </p:cNvCxnSpPr>
+          <p:nvPr/>
+        </p:nvCxnSpPr>
+        <p:spPr>
+          <a:xfrm>
+            <a:off x="2946400" y="2165778"/>
+            <a:ext cx="2011715" cy="2446487"/>
+          </a:xfrm>
+          <a:prstGeom prst="straightConnector1">
+            <a:avLst/>
+          </a:prstGeom>
+          <a:ln>
+            <a:prstDash val="sysDot"/>
+            <a:headEnd type="arrow" w="med" len="med"/>
+            <a:tailEnd type="none" w="med" len="med"/>
+          </a:ln>
+        </p:spPr>
+        <p:style>
+          <a:lnRef idx="2">
+            <a:schemeClr val="dk1"/>
+          </a:lnRef>
+          <a:fillRef idx="0">
+            <a:schemeClr val="dk1"/>
+          </a:fillRef>
+          <a:effectRef idx="1">
+            <a:schemeClr val="dk1"/>
+          </a:effectRef>
+          <a:fontRef idx="minor">
+            <a:schemeClr val="tx1"/>
+          </a:fontRef>
+        </p:style>
+      </p:cxnSp>
+      <p:cxnSp>
+        <p:nvCxnSpPr>
+          <p:cNvPr id="31" name="Straight Arrow Connector 19">
+            <a:extLst>
+              <a:ext uri="{FF2B5EF4-FFF2-40B4-BE49-F238E27FC236}">
+                <a16:creationId xmlns:a16="http://schemas.microsoft.com/office/drawing/2014/main" id="{136F74C8-F7A2-9CF4-CA13-7EC1C7058EB3}"/>
+              </a:ext>
+            </a:extLst>
+          </p:cNvPr>
+          <p:cNvCxnSpPr>
+            <a:cxnSpLocks/>
+          </p:cNvCxnSpPr>
+          <p:nvPr/>
+        </p:nvCxnSpPr>
+        <p:spPr>
+          <a:xfrm>
+            <a:off x="3683918" y="3074953"/>
+            <a:ext cx="336564" cy="0"/>
+          </a:xfrm>
+          <a:prstGeom prst="straightConnector1">
+            <a:avLst/>
+          </a:prstGeom>
+          <a:ln>
+            <a:prstDash val="sysDot"/>
+            <a:headEnd type="none" w="med" len="med"/>
+            <a:tailEnd type="none" w="med" len="med"/>
+          </a:ln>
+        </p:spPr>
+        <p:style>
+          <a:lnRef idx="2">
+            <a:schemeClr val="dk1"/>
+          </a:lnRef>
+          <a:fillRef idx="0">
+            <a:schemeClr val="dk1"/>
+          </a:fillRef>
+          <a:effectRef idx="1">
+            <a:schemeClr val="dk1"/>
+          </a:effectRef>
+          <a:fontRef idx="minor">
+            <a:schemeClr val="tx1"/>
+          </a:fontRef>
+        </p:style>
+      </p:cxnSp>
+      <p:grpSp>
+        <p:nvGrpSpPr>
+          <p:cNvPr id="59" name="그룹 58">
+            <a:extLst>
+              <a:ext uri="{FF2B5EF4-FFF2-40B4-BE49-F238E27FC236}">
+                <a16:creationId xmlns:a16="http://schemas.microsoft.com/office/drawing/2014/main" id="{909A0F58-1889-D9C2-2268-0DDFD6C82A31}"/>
+              </a:ext>
+            </a:extLst>
+          </p:cNvPr>
+          <p:cNvGrpSpPr/>
+          <p:nvPr/>
+        </p:nvGrpSpPr>
+        <p:grpSpPr>
+          <a:xfrm rot="378356">
+            <a:off x="1830944" y="1847269"/>
+            <a:ext cx="3674235" cy="2561673"/>
+            <a:chOff x="1845071" y="1861618"/>
+            <a:chExt cx="3674235" cy="2561673"/>
+          </a:xfrm>
+        </p:grpSpPr>
+        <p:cxnSp>
+          <p:nvCxnSpPr>
+            <p:cNvPr id="23" name="Straight Arrow Connector 22">
+              <a:extLst>
+                <a:ext uri="{FF2B5EF4-FFF2-40B4-BE49-F238E27FC236}">
+                  <a16:creationId xmlns:a16="http://schemas.microsoft.com/office/drawing/2014/main" id="{DB533987-1CFF-8959-9B0D-7540FFE4DABC}"/>
+                </a:ext>
+              </a:extLst>
+            </p:cNvPr>
+            <p:cNvCxnSpPr>
+              <a:cxnSpLocks/>
+            </p:cNvCxnSpPr>
+            <p:nvPr/>
+          </p:nvCxnSpPr>
+          <p:spPr>
+            <a:xfrm flipV="1">
+              <a:off x="1845071" y="3056062"/>
+              <a:ext cx="1888729" cy="1367229"/>
+            </a:xfrm>
+            <a:prstGeom prst="straightConnector1">
+              <a:avLst/>
+            </a:prstGeom>
+            <a:ln>
+              <a:solidFill>
+                <a:srgbClr val="FF0000"/>
+              </a:solidFill>
+              <a:tailEnd type="triangle"/>
+            </a:ln>
+          </p:spPr>
+          <p:style>
+            <a:lnRef idx="2">
+              <a:schemeClr val="dk1"/>
+            </a:lnRef>
+            <a:fillRef idx="0">
+              <a:schemeClr val="dk1"/>
+            </a:fillRef>
+            <a:effectRef idx="1">
+              <a:schemeClr val="dk1"/>
+            </a:effectRef>
+            <a:fontRef idx="minor">
+              <a:schemeClr val="tx1"/>
+            </a:fontRef>
+          </p:style>
+        </p:cxnSp>
+        <p:cxnSp>
+          <p:nvCxnSpPr>
+            <p:cNvPr id="39" name="Straight Arrow Connector 22">
+              <a:extLst>
+                <a:ext uri="{FF2B5EF4-FFF2-40B4-BE49-F238E27FC236}">
+                  <a16:creationId xmlns:a16="http://schemas.microsoft.com/office/drawing/2014/main" id="{3AAB29C5-10F8-6AEC-E603-8B34F68C0575}"/>
+                </a:ext>
+              </a:extLst>
+            </p:cNvPr>
+            <p:cNvCxnSpPr>
+              <a:cxnSpLocks/>
+            </p:cNvCxnSpPr>
+            <p:nvPr/>
+          </p:nvCxnSpPr>
+          <p:spPr>
+            <a:xfrm rot="21221644" flipV="1">
+              <a:off x="4308375" y="1861618"/>
+              <a:ext cx="1210931" cy="687748"/>
+            </a:xfrm>
+            <a:prstGeom prst="straightConnector1">
+              <a:avLst/>
+            </a:prstGeom>
+            <a:ln>
+              <a:solidFill>
+                <a:srgbClr val="FF0000"/>
+              </a:solidFill>
+              <a:tailEnd type="triangle"/>
+            </a:ln>
+          </p:spPr>
+          <p:style>
+            <a:lnRef idx="2">
+              <a:schemeClr val="dk1"/>
+            </a:lnRef>
+            <a:fillRef idx="0">
+              <a:schemeClr val="dk1"/>
+            </a:fillRef>
+            <a:effectRef idx="1">
+              <a:schemeClr val="dk1"/>
+            </a:effectRef>
+            <a:fontRef idx="minor">
+              <a:schemeClr val="tx1"/>
+            </a:fontRef>
+          </p:style>
+        </p:cxnSp>
+        <p:cxnSp>
+          <p:nvCxnSpPr>
+            <p:cNvPr id="44" name="Straight Arrow Connector 22">
+              <a:extLst>
+                <a:ext uri="{FF2B5EF4-FFF2-40B4-BE49-F238E27FC236}">
+                  <a16:creationId xmlns:a16="http://schemas.microsoft.com/office/drawing/2014/main" id="{46308FED-5A90-3739-EEF3-9D6B8CCF29A8}"/>
+                </a:ext>
+              </a:extLst>
+            </p:cNvPr>
+            <p:cNvCxnSpPr>
+              <a:cxnSpLocks/>
+            </p:cNvCxnSpPr>
+            <p:nvPr/>
+          </p:nvCxnSpPr>
+          <p:spPr>
+            <a:xfrm flipV="1">
+              <a:off x="3700367" y="2609702"/>
+              <a:ext cx="649919" cy="470469"/>
+            </a:xfrm>
+            <a:prstGeom prst="straightConnector1">
+              <a:avLst/>
+            </a:prstGeom>
+            <a:ln>
+              <a:solidFill>
+                <a:srgbClr val="FF0000"/>
+              </a:solidFill>
+              <a:prstDash val="sysDot"/>
+              <a:headEnd type="none" w="med" len="med"/>
+              <a:tailEnd type="none" w="med" len="med"/>
+            </a:ln>
+          </p:spPr>
+          <p:style>
+            <a:lnRef idx="2">
+              <a:schemeClr val="dk1"/>
+            </a:lnRef>
+            <a:fillRef idx="0">
+              <a:schemeClr val="dk1"/>
+            </a:fillRef>
+            <a:effectRef idx="1">
+              <a:schemeClr val="dk1"/>
+            </a:effectRef>
+            <a:fontRef idx="minor">
+              <a:schemeClr val="tx1"/>
+            </a:fontRef>
+          </p:style>
+        </p:cxnSp>
+      </p:grpSp>
+      <p:sp>
+        <p:nvSpPr>
+          <p:cNvPr id="49" name="막힌 원호 48">
+            <a:extLst>
+              <a:ext uri="{FF2B5EF4-FFF2-40B4-BE49-F238E27FC236}">
+                <a16:creationId xmlns:a16="http://schemas.microsoft.com/office/drawing/2014/main" id="{2F8FEBC0-1727-2317-804C-807573E84E08}"/>
+              </a:ext>
+            </a:extLst>
+          </p:cNvPr>
+          <p:cNvSpPr/>
+          <p:nvPr/>
+        </p:nvSpPr>
+        <p:spPr>
+          <a:xfrm rot="4701866">
+            <a:off x="4289355" y="2759001"/>
+            <a:ext cx="448730" cy="227548"/>
+          </a:xfrm>
+          <a:prstGeom prst="blockArc">
+            <a:avLst>
+              <a:gd name="adj1" fmla="val 10800000"/>
+              <a:gd name="adj2" fmla="val 21574061"/>
+              <a:gd name="adj3" fmla="val 0"/>
+            </a:avLst>
+          </a:prstGeom>
+        </p:spPr>
+        <p:style>
+          <a:lnRef idx="2">
+            <a:schemeClr val="accent1">
+              <a:shade val="15000"/>
+            </a:schemeClr>
+          </a:lnRef>
+          <a:fillRef idx="1">
+            <a:schemeClr val="accent1"/>
+          </a:fillRef>
+          <a:effectRef idx="0">
+            <a:schemeClr val="accent1"/>
+          </a:effectRef>
+          <a:fontRef idx="minor">
+            <a:schemeClr val="lt1"/>
+          </a:fontRef>
+        </p:style>
+        <p:txBody>
+          <a:bodyPr rtlCol="0" anchor="ctr"/>
+          <a:lstStyle/>
+          <a:p>
+            <a:pPr algn="ctr"/>
+            <a:endParaRPr lang="en-US">
+              <a:solidFill>
+                <a:schemeClr val="tx1"/>
+              </a:solidFill>
+            </a:endParaRPr>
+          </a:p>
+        </p:txBody>
+      </p:sp>
+      <mc:AlternateContent xmlns:mc="http://schemas.openxmlformats.org/markup-compatibility/2006" xmlns:a14="http://schemas.microsoft.com/office/drawing/2010/main">
+        <mc:Choice Requires="a14">
+          <p:sp>
+            <p:nvSpPr>
+              <p:cNvPr id="50" name="TextBox 49">
+                <a:extLst>
+                  <a:ext uri="{FF2B5EF4-FFF2-40B4-BE49-F238E27FC236}">
+                    <a16:creationId xmlns:a16="http://schemas.microsoft.com/office/drawing/2014/main" id="{69F5439B-EB51-A5F5-6A14-956DE0E76882}"/>
+                  </a:ext>
+                </a:extLst>
+              </p:cNvPr>
+              <p:cNvSpPr txBox="1"/>
+              <p:nvPr/>
+            </p:nvSpPr>
+            <p:spPr>
+              <a:xfrm>
+                <a:off x="4661968" y="2582222"/>
+                <a:ext cx="270330" cy="369332"/>
+              </a:xfrm>
+              <a:prstGeom prst="rect">
+                <a:avLst/>
+              </a:prstGeom>
+              <a:noFill/>
+            </p:spPr>
+            <p:txBody>
+              <a:bodyPr wrap="none" lIns="0" tIns="0" rIns="0" bIns="0" rtlCol="0">
+                <a:spAutoFit/>
+              </a:bodyPr>
+              <a:lstStyle/>
+              <a:p>
+                <a:pPr/>
+                <a14:m>
+                  <m:oMathPara xmlns:m="http://schemas.openxmlformats.org/officeDocument/2006/math">
+                    <m:oMath>
+                      <m:r>
+                        <a:rPr lang="en-US" sz="2400" i="1" smtClean="0">
+                          <a:latin typeface="Cambria Math" panose="02040503050406030204" pitchFamily="18" charset="0"/>
+                          <a:ea typeface="Cambria Math" panose="02040503050406030204" pitchFamily="18" charset="0"/>
+                        </a:rPr>
+                        <m:t>𝜃</m:t>
+                      </m:r>
+                    </m:oMath>
+                  </m:oMathPara>
+                </a14:m>
+                <a:endParaRPr lang="en-US" sz="2400" dirty="0"/>
+              </a:p>
+            </p:txBody>
+          </p:sp>
+        </mc:Choice>
+        <mc:Fallback xmlns="">
+          <p:sp>
+            <p:nvSpPr>
+              <p:cNvPr id="50" name="TextBox 49">
+                <a:extLst>
+                  <a:ext uri="{FF2B5EF4-FFF2-40B4-BE49-F238E27FC236}">
+                    <a16:creationId xmlns:a16="http://schemas.microsoft.com/office/drawing/2014/main" id="{57F4BA69-D557-1588-83C2-C9943254ACF6}"/>
+                  </a:ext>
+                </a:extLst>
+              </p:cNvPr>
+              <p:cNvSpPr txBox="1">
+                <a:spLocks noRot="1" noChangeAspect="1" noMove="1" noResize="1" noEditPoints="1" noAdjustHandles="1" noChangeArrowheads="1" noChangeShapeType="1" noTextEdit="1"/>
+              </p:cNvSpPr>
+              <p:nvPr/>
+            </p:nvSpPr>
+            <p:spPr>
+              <a:xfrm>
+                <a:off x="4661968" y="2582222"/>
+                <a:ext cx="270330" cy="369332"/>
+              </a:xfrm>
+              <a:prstGeom prst="rect">
+                <a:avLst/>
+              </a:prstGeom>
+              <a:blipFill>
+                <a:blip r:embed="rId2"/>
+                <a:stretch>
+                  <a:fillRect l="-25000" r="-18182" b="-5000"/>
+                </a:stretch>
+              </a:blipFill>
+            </p:spPr>
+            <p:txBody>
+              <a:bodyPr/>
+              <a:lstStyle/>
+              <a:p>
+                <a:r>
+                  <a:rPr lang="en-US">
+                    <a:noFill/>
+                  </a:rPr>
+                  <a:t> </a:t>
+                </a:r>
+              </a:p>
+            </p:txBody>
+          </p:sp>
+        </mc:Fallback>
+      </mc:AlternateContent>
+      <p:sp>
+        <p:nvSpPr>
+          <p:cNvPr id="68" name="Oval 3">
+            <a:extLst>
+              <a:ext uri="{FF2B5EF4-FFF2-40B4-BE49-F238E27FC236}">
+                <a16:creationId xmlns:a16="http://schemas.microsoft.com/office/drawing/2014/main" id="{3579053C-BA13-78DB-C32E-44DE65CBB979}"/>
+              </a:ext>
+            </a:extLst>
+          </p:cNvPr>
+          <p:cNvSpPr/>
+          <p:nvPr/>
+        </p:nvSpPr>
+        <p:spPr>
+          <a:xfrm>
+            <a:off x="8356032" y="1981200"/>
+            <a:ext cx="2102457" cy="2120900"/>
+          </a:xfrm>
+          <a:prstGeom prst="ellipse">
+            <a:avLst/>
+          </a:prstGeom>
+          <a:solidFill>
+            <a:schemeClr val="bg2"/>
+          </a:solidFill>
+        </p:spPr>
+        <p:style>
+          <a:lnRef idx="2">
+            <a:schemeClr val="dk1">
+              <a:shade val="15000"/>
+            </a:schemeClr>
+          </a:lnRef>
+          <a:fillRef idx="1">
+            <a:schemeClr val="dk1"/>
+          </a:fillRef>
+          <a:effectRef idx="0">
+            <a:schemeClr val="dk1"/>
+          </a:effectRef>
+          <a:fontRef idx="minor">
+            <a:schemeClr val="lt1"/>
+          </a:fontRef>
+        </p:style>
+        <p:txBody>
+          <a:bodyPr rtlCol="0" anchor="ctr"/>
+          <a:lstStyle/>
+          <a:p>
+            <a:pPr algn="ctr"/>
+            <a:endParaRPr kumimoji="1" lang="ja-JP" altLang="en-US" dirty="0"/>
+          </a:p>
+        </p:txBody>
+      </p:sp>
+      <p:cxnSp>
+        <p:nvCxnSpPr>
+          <p:cNvPr id="69" name="Straight Arrow Connector 19">
+            <a:extLst>
+              <a:ext uri="{FF2B5EF4-FFF2-40B4-BE49-F238E27FC236}">
+                <a16:creationId xmlns:a16="http://schemas.microsoft.com/office/drawing/2014/main" id="{66474824-C34E-F39D-C173-8300FE581968}"/>
+              </a:ext>
+            </a:extLst>
+          </p:cNvPr>
+          <p:cNvCxnSpPr>
+            <a:cxnSpLocks/>
+          </p:cNvCxnSpPr>
+          <p:nvPr/>
+        </p:nvCxnSpPr>
+        <p:spPr>
+          <a:xfrm flipH="1">
+            <a:off x="9407260" y="3087606"/>
+            <a:ext cx="1556985" cy="0"/>
+          </a:xfrm>
+          <a:prstGeom prst="straightConnector1">
+            <a:avLst/>
+          </a:prstGeom>
+          <a:ln>
+            <a:prstDash val="sysDot"/>
+            <a:headEnd type="arrow" w="med" len="med"/>
+            <a:tailEnd type="none" w="med" len="med"/>
+          </a:ln>
+        </p:spPr>
+        <p:style>
+          <a:lnRef idx="2">
+            <a:schemeClr val="dk1"/>
+          </a:lnRef>
+          <a:fillRef idx="0">
+            <a:schemeClr val="dk1"/>
+          </a:fillRef>
+          <a:effectRef idx="1">
+            <a:schemeClr val="dk1"/>
+          </a:effectRef>
+          <a:fontRef idx="minor">
+            <a:schemeClr val="tx1"/>
+          </a:fontRef>
+        </p:style>
+      </p:cxnSp>
+      <p:cxnSp>
+        <p:nvCxnSpPr>
+          <p:cNvPr id="72" name="Straight Arrow Connector 20">
+            <a:extLst>
+              <a:ext uri="{FF2B5EF4-FFF2-40B4-BE49-F238E27FC236}">
+                <a16:creationId xmlns:a16="http://schemas.microsoft.com/office/drawing/2014/main" id="{2A6AB7F3-583B-AEC9-6B21-22D4D41708C5}"/>
+              </a:ext>
+            </a:extLst>
+          </p:cNvPr>
+          <p:cNvCxnSpPr>
+            <a:cxnSpLocks/>
+          </p:cNvCxnSpPr>
+          <p:nvPr/>
+        </p:nvCxnSpPr>
+        <p:spPr>
+          <a:xfrm flipV="1">
+            <a:off x="9407260" y="1018745"/>
+            <a:ext cx="0" cy="2096732"/>
+          </a:xfrm>
+          <a:prstGeom prst="straightConnector1">
+            <a:avLst/>
+          </a:prstGeom>
+          <a:ln>
+            <a:prstDash val="sysDot"/>
+            <a:tailEnd type="triangle"/>
+          </a:ln>
+        </p:spPr>
+        <p:style>
+          <a:lnRef idx="2">
+            <a:schemeClr val="dk1"/>
+          </a:lnRef>
+          <a:fillRef idx="0">
+            <a:schemeClr val="dk1"/>
+          </a:fillRef>
+          <a:effectRef idx="1">
+            <a:schemeClr val="dk1"/>
+          </a:effectRef>
+          <a:fontRef idx="minor">
+            <a:schemeClr val="tx1"/>
+          </a:fontRef>
+        </p:style>
+      </p:cxnSp>
+      <p:sp>
+        <p:nvSpPr>
+          <p:cNvPr id="75" name="TextBox 74">
+            <a:extLst>
+              <a:ext uri="{FF2B5EF4-FFF2-40B4-BE49-F238E27FC236}">
+                <a16:creationId xmlns:a16="http://schemas.microsoft.com/office/drawing/2014/main" id="{3DF54444-C59C-8FAD-836B-31749EBFC54F}"/>
+              </a:ext>
+            </a:extLst>
+          </p:cNvPr>
+          <p:cNvSpPr txBox="1"/>
+          <p:nvPr/>
+        </p:nvSpPr>
+        <p:spPr>
+          <a:xfrm>
+            <a:off x="11006380" y="2828839"/>
+            <a:ext cx="300082" cy="369332"/>
+          </a:xfrm>
+          <a:prstGeom prst="rect">
+            <a:avLst/>
+          </a:prstGeom>
+          <a:noFill/>
+        </p:spPr>
+        <p:txBody>
+          <a:bodyPr wrap="square" rtlCol="0">
+            <a:spAutoFit/>
+          </a:bodyPr>
+          <a:lstStyle/>
+          <a:p>
+            <a:r>
+              <a:rPr kumimoji="1" lang="en-US" altLang="ja-JP" dirty="0">
+                <a:latin typeface="times" panose="02020603050405020304" pitchFamily="18" charset="0"/>
+                <a:cs typeface="times" panose="02020603050405020304" pitchFamily="18" charset="0"/>
+              </a:rPr>
+              <a:t>y</a:t>
+            </a:r>
+            <a:endParaRPr kumimoji="1" lang="ja-JP" altLang="en-US" dirty="0">
+              <a:latin typeface="times" panose="02020603050405020304" pitchFamily="18" charset="0"/>
+              <a:cs typeface="times" panose="02020603050405020304" pitchFamily="18" charset="0"/>
+            </a:endParaRPr>
+          </a:p>
+        </p:txBody>
+      </p:sp>
+      <p:sp>
+        <p:nvSpPr>
+          <p:cNvPr id="77" name="TextBox 76">
+            <a:extLst>
+              <a:ext uri="{FF2B5EF4-FFF2-40B4-BE49-F238E27FC236}">
+                <a16:creationId xmlns:a16="http://schemas.microsoft.com/office/drawing/2014/main" id="{261A1B73-C574-78F5-DAA8-D73F1BDC57AF}"/>
+              </a:ext>
+            </a:extLst>
+          </p:cNvPr>
+          <p:cNvSpPr txBox="1"/>
+          <p:nvPr/>
+        </p:nvSpPr>
+        <p:spPr>
+          <a:xfrm>
+            <a:off x="9407259" y="854949"/>
+            <a:ext cx="300082" cy="369332"/>
+          </a:xfrm>
+          <a:prstGeom prst="rect">
+            <a:avLst/>
+          </a:prstGeom>
+          <a:noFill/>
+        </p:spPr>
+        <p:txBody>
+          <a:bodyPr wrap="none" rtlCol="0">
+            <a:spAutoFit/>
+          </a:bodyPr>
+          <a:lstStyle/>
+          <a:p>
+            <a:r>
+              <a:rPr kumimoji="1" lang="en-US" altLang="ja-JP" dirty="0">
+                <a:latin typeface="times" panose="02020603050405020304" pitchFamily="18" charset="0"/>
+                <a:cs typeface="times" panose="02020603050405020304" pitchFamily="18" charset="0"/>
+              </a:rPr>
+              <a:t>x</a:t>
+            </a:r>
+            <a:endParaRPr kumimoji="1" lang="ja-JP" altLang="en-US" dirty="0">
+              <a:latin typeface="times" panose="02020603050405020304" pitchFamily="18" charset="0"/>
+              <a:cs typeface="times" panose="02020603050405020304" pitchFamily="18" charset="0"/>
+            </a:endParaRPr>
+          </a:p>
+        </p:txBody>
+      </p:sp>
+      <p:cxnSp>
+        <p:nvCxnSpPr>
+          <p:cNvPr id="78" name="Straight Arrow Connector 22">
+            <a:extLst>
+              <a:ext uri="{FF2B5EF4-FFF2-40B4-BE49-F238E27FC236}">
+                <a16:creationId xmlns:a16="http://schemas.microsoft.com/office/drawing/2014/main" id="{D4979701-4620-0E1D-A047-8432B4F211A0}"/>
+              </a:ext>
+            </a:extLst>
+          </p:cNvPr>
+          <p:cNvCxnSpPr>
+            <a:cxnSpLocks/>
+          </p:cNvCxnSpPr>
+          <p:nvPr/>
+        </p:nvCxnSpPr>
+        <p:spPr>
+          <a:xfrm flipH="1" flipV="1">
+            <a:off x="7746624" y="2535475"/>
+            <a:ext cx="1625319" cy="524261"/>
+          </a:xfrm>
+          <a:prstGeom prst="straightConnector1">
+            <a:avLst/>
+          </a:prstGeom>
+          <a:ln>
+            <a:solidFill>
+              <a:srgbClr val="FF0000"/>
+            </a:solidFill>
+            <a:tailEnd type="triangle"/>
+          </a:ln>
+        </p:spPr>
+        <p:style>
+          <a:lnRef idx="2">
+            <a:schemeClr val="dk1"/>
+          </a:lnRef>
+          <a:fillRef idx="0">
+            <a:schemeClr val="dk1"/>
+          </a:fillRef>
+          <a:effectRef idx="1">
+            <a:schemeClr val="dk1"/>
+          </a:effectRef>
+          <a:fontRef idx="minor">
+            <a:schemeClr val="tx1"/>
+          </a:fontRef>
+        </p:style>
+      </p:cxnSp>
+      <p:cxnSp>
+        <p:nvCxnSpPr>
+          <p:cNvPr id="81" name="Straight Arrow Connector 19">
+            <a:extLst>
+              <a:ext uri="{FF2B5EF4-FFF2-40B4-BE49-F238E27FC236}">
+                <a16:creationId xmlns:a16="http://schemas.microsoft.com/office/drawing/2014/main" id="{7374BFF7-CFCB-0D4B-2A99-38C27F3BCCE7}"/>
+              </a:ext>
+            </a:extLst>
+          </p:cNvPr>
+          <p:cNvCxnSpPr>
+            <a:cxnSpLocks/>
+          </p:cNvCxnSpPr>
+          <p:nvPr/>
+        </p:nvCxnSpPr>
+        <p:spPr>
+          <a:xfrm flipV="1">
+            <a:off x="8278622" y="3059736"/>
+            <a:ext cx="1128637" cy="1552529"/>
+          </a:xfrm>
+          <a:prstGeom prst="straightConnector1">
+            <a:avLst/>
+          </a:prstGeom>
+          <a:ln>
+            <a:prstDash val="sysDot"/>
+            <a:headEnd type="arrow" w="med" len="med"/>
+            <a:tailEnd type="none" w="med" len="med"/>
+          </a:ln>
+        </p:spPr>
+        <p:style>
+          <a:lnRef idx="2">
+            <a:schemeClr val="dk1"/>
+          </a:lnRef>
+          <a:fillRef idx="0">
+            <a:schemeClr val="dk1"/>
+          </a:fillRef>
+          <a:effectRef idx="1">
+            <a:schemeClr val="dk1"/>
+          </a:effectRef>
+          <a:fontRef idx="minor">
+            <a:schemeClr val="tx1"/>
+          </a:fontRef>
+        </p:style>
+      </p:cxnSp>
+      <p:sp>
+        <p:nvSpPr>
+          <p:cNvPr id="86" name="TextBox 85">
+            <a:extLst>
+              <a:ext uri="{FF2B5EF4-FFF2-40B4-BE49-F238E27FC236}">
+                <a16:creationId xmlns:a16="http://schemas.microsoft.com/office/drawing/2014/main" id="{DF0399A6-795D-0331-19AB-129EF70BA6FB}"/>
+              </a:ext>
+            </a:extLst>
+          </p:cNvPr>
+          <p:cNvSpPr txBox="1"/>
+          <p:nvPr/>
+        </p:nvSpPr>
+        <p:spPr>
+          <a:xfrm>
+            <a:off x="8356032" y="4489687"/>
+            <a:ext cx="300082" cy="369332"/>
+          </a:xfrm>
+          <a:prstGeom prst="rect">
+            <a:avLst/>
+          </a:prstGeom>
+          <a:noFill/>
+        </p:spPr>
+        <p:txBody>
+          <a:bodyPr wrap="square" rtlCol="0">
+            <a:spAutoFit/>
+          </a:bodyPr>
+          <a:lstStyle/>
+          <a:p>
+            <a:r>
+              <a:rPr kumimoji="1" lang="en-US" altLang="ja-JP" dirty="0">
+                <a:latin typeface="times" panose="02020603050405020304" pitchFamily="18" charset="0"/>
+                <a:cs typeface="times" panose="02020603050405020304" pitchFamily="18" charset="0"/>
+              </a:rPr>
+              <a:t>z</a:t>
+            </a:r>
+            <a:endParaRPr kumimoji="1" lang="ja-JP" altLang="en-US" dirty="0">
+              <a:latin typeface="times" panose="02020603050405020304" pitchFamily="18" charset="0"/>
+              <a:cs typeface="times" panose="02020603050405020304" pitchFamily="18" charset="0"/>
+            </a:endParaRPr>
+          </a:p>
+        </p:txBody>
+      </p:sp>
+      <p:cxnSp>
+        <p:nvCxnSpPr>
+          <p:cNvPr id="89" name="Straight Arrow Connector 22">
+            <a:extLst>
+              <a:ext uri="{FF2B5EF4-FFF2-40B4-BE49-F238E27FC236}">
+                <a16:creationId xmlns:a16="http://schemas.microsoft.com/office/drawing/2014/main" id="{9E9C3912-AB49-F86D-8287-9BF3776CB427}"/>
+              </a:ext>
+            </a:extLst>
+          </p:cNvPr>
+          <p:cNvCxnSpPr>
+            <a:cxnSpLocks/>
+          </p:cNvCxnSpPr>
+          <p:nvPr/>
+        </p:nvCxnSpPr>
+        <p:spPr>
+          <a:xfrm flipH="1" flipV="1">
+            <a:off x="7797282" y="2548409"/>
+            <a:ext cx="879214" cy="1473782"/>
+          </a:xfrm>
+          <a:prstGeom prst="straightConnector1">
+            <a:avLst/>
+          </a:prstGeom>
+          <a:ln>
+            <a:solidFill>
+              <a:srgbClr val="FF0000"/>
+            </a:solidFill>
+            <a:prstDash val="sysDot"/>
+            <a:headEnd type="none" w="med" len="med"/>
+            <a:tailEnd type="none" w="med" len="med"/>
+          </a:ln>
+        </p:spPr>
+        <p:style>
+          <a:lnRef idx="2">
+            <a:schemeClr val="dk1"/>
+          </a:lnRef>
+          <a:fillRef idx="0">
+            <a:schemeClr val="dk1"/>
+          </a:fillRef>
+          <a:effectRef idx="1">
+            <a:schemeClr val="dk1"/>
+          </a:effectRef>
+          <a:fontRef idx="minor">
+            <a:schemeClr val="tx1"/>
+          </a:fontRef>
+        </p:style>
+      </p:cxnSp>
+      <p:cxnSp>
+        <p:nvCxnSpPr>
+          <p:cNvPr id="93" name="Straight Arrow Connector 22">
+            <a:extLst>
+              <a:ext uri="{FF2B5EF4-FFF2-40B4-BE49-F238E27FC236}">
+                <a16:creationId xmlns:a16="http://schemas.microsoft.com/office/drawing/2014/main" id="{E659CD05-F478-0E5E-17B4-5FBAFF885B29}"/>
+              </a:ext>
+            </a:extLst>
+          </p:cNvPr>
+          <p:cNvCxnSpPr>
+            <a:cxnSpLocks/>
+          </p:cNvCxnSpPr>
+          <p:nvPr/>
+        </p:nvCxnSpPr>
+        <p:spPr>
+          <a:xfrm flipH="1">
+            <a:off x="7850276" y="1734218"/>
+            <a:ext cx="736071" cy="814027"/>
+          </a:xfrm>
+          <a:prstGeom prst="straightConnector1">
+            <a:avLst/>
+          </a:prstGeom>
+          <a:ln>
+            <a:solidFill>
+              <a:srgbClr val="FF0000"/>
+            </a:solidFill>
+            <a:prstDash val="sysDot"/>
+            <a:headEnd type="none" w="med" len="med"/>
+            <a:tailEnd type="none" w="med" len="med"/>
+          </a:ln>
+        </p:spPr>
+        <p:style>
+          <a:lnRef idx="2">
+            <a:schemeClr val="dk1"/>
+          </a:lnRef>
+          <a:fillRef idx="0">
+            <a:schemeClr val="dk1"/>
+          </a:fillRef>
+          <a:effectRef idx="1">
+            <a:schemeClr val="dk1"/>
+          </a:effectRef>
+          <a:fontRef idx="minor">
+            <a:schemeClr val="tx1"/>
+          </a:fontRef>
+        </p:style>
+      </p:cxnSp>
+      <p:cxnSp>
+        <p:nvCxnSpPr>
+          <p:cNvPr id="117" name="Straight Arrow Connector 22">
+            <a:extLst>
+              <a:ext uri="{FF2B5EF4-FFF2-40B4-BE49-F238E27FC236}">
+                <a16:creationId xmlns:a16="http://schemas.microsoft.com/office/drawing/2014/main" id="{D9BEF627-7CAA-B8FF-A82A-F4DFF6F30515}"/>
+              </a:ext>
+            </a:extLst>
+          </p:cNvPr>
+          <p:cNvCxnSpPr>
+            <a:cxnSpLocks/>
+          </p:cNvCxnSpPr>
+          <p:nvPr/>
+        </p:nvCxnSpPr>
+        <p:spPr>
+          <a:xfrm flipH="1" flipV="1">
+            <a:off x="8628482" y="1696300"/>
+            <a:ext cx="758840" cy="1345350"/>
+          </a:xfrm>
+          <a:prstGeom prst="straightConnector1">
+            <a:avLst/>
+          </a:prstGeom>
+          <a:ln>
+            <a:solidFill>
+              <a:srgbClr val="FF0000"/>
+            </a:solidFill>
+            <a:tailEnd type="triangle"/>
+          </a:ln>
+        </p:spPr>
+        <p:style>
+          <a:lnRef idx="2">
+            <a:schemeClr val="dk1"/>
+          </a:lnRef>
+          <a:fillRef idx="0">
+            <a:schemeClr val="dk1"/>
+          </a:fillRef>
+          <a:effectRef idx="1">
+            <a:schemeClr val="dk1"/>
+          </a:effectRef>
+          <a:fontRef idx="minor">
+            <a:schemeClr val="tx1"/>
+          </a:fontRef>
+        </p:style>
+      </p:cxnSp>
+      <p:cxnSp>
+        <p:nvCxnSpPr>
+          <p:cNvPr id="120" name="Straight Arrow Connector 22">
+            <a:extLst>
+              <a:ext uri="{FF2B5EF4-FFF2-40B4-BE49-F238E27FC236}">
+                <a16:creationId xmlns:a16="http://schemas.microsoft.com/office/drawing/2014/main" id="{4A41A855-23E4-95C2-6164-0091CE2F7B09}"/>
+              </a:ext>
+            </a:extLst>
+          </p:cNvPr>
+          <p:cNvCxnSpPr>
+            <a:cxnSpLocks/>
+          </p:cNvCxnSpPr>
+          <p:nvPr/>
+        </p:nvCxnSpPr>
+        <p:spPr>
+          <a:xfrm flipH="1">
+            <a:off x="8666410" y="3087970"/>
+            <a:ext cx="720912" cy="1003778"/>
+          </a:xfrm>
+          <a:prstGeom prst="straightConnector1">
+            <a:avLst/>
+          </a:prstGeom>
+          <a:ln>
+            <a:solidFill>
+              <a:srgbClr val="FF0000"/>
+            </a:solidFill>
+            <a:tailEnd type="triangle"/>
+          </a:ln>
+        </p:spPr>
+        <p:style>
+          <a:lnRef idx="2">
+            <a:schemeClr val="dk1"/>
+          </a:lnRef>
+          <a:fillRef idx="0">
+            <a:schemeClr val="dk1"/>
+          </a:fillRef>
+          <a:effectRef idx="1">
+            <a:schemeClr val="dk1"/>
+          </a:effectRef>
+          <a:fontRef idx="minor">
+            <a:schemeClr val="tx1"/>
+          </a:fontRef>
+        </p:style>
+      </p:cxnSp>
+      <p:sp>
+        <p:nvSpPr>
+          <p:cNvPr id="125" name="막힌 원호 124">
+            <a:extLst>
+              <a:ext uri="{FF2B5EF4-FFF2-40B4-BE49-F238E27FC236}">
+                <a16:creationId xmlns:a16="http://schemas.microsoft.com/office/drawing/2014/main" id="{52A5EEC9-9020-DE8B-6774-BB6E9D602DF5}"/>
+              </a:ext>
+            </a:extLst>
+          </p:cNvPr>
+          <p:cNvSpPr/>
+          <p:nvPr/>
+        </p:nvSpPr>
+        <p:spPr>
+          <a:xfrm rot="14184790">
+            <a:off x="9078423" y="3059226"/>
+            <a:ext cx="279822" cy="141896"/>
+          </a:xfrm>
+          <a:prstGeom prst="blockArc">
+            <a:avLst>
+              <a:gd name="adj1" fmla="val 10800000"/>
+              <a:gd name="adj2" fmla="val 21574061"/>
+              <a:gd name="adj3" fmla="val 0"/>
+            </a:avLst>
+          </a:prstGeom>
+        </p:spPr>
+        <p:style>
+          <a:lnRef idx="2">
+            <a:schemeClr val="accent1">
+              <a:shade val="15000"/>
+            </a:schemeClr>
+          </a:lnRef>
+          <a:fillRef idx="1">
+            <a:schemeClr val="accent1"/>
+          </a:fillRef>
+          <a:effectRef idx="0">
+            <a:schemeClr val="accent1"/>
+          </a:effectRef>
+          <a:fontRef idx="minor">
+            <a:schemeClr val="lt1"/>
+          </a:fontRef>
+        </p:style>
+        <p:txBody>
+          <a:bodyPr rtlCol="0" anchor="ctr"/>
+          <a:lstStyle/>
+          <a:p>
+            <a:pPr algn="ctr"/>
+            <a:endParaRPr lang="en-US">
+              <a:solidFill>
+                <a:schemeClr val="tx1"/>
+              </a:solidFill>
+            </a:endParaRPr>
+          </a:p>
+        </p:txBody>
+      </p:sp>
+      <mc:AlternateContent xmlns:mc="http://schemas.openxmlformats.org/markup-compatibility/2006" xmlns:a14="http://schemas.microsoft.com/office/drawing/2010/main">
+        <mc:Choice Requires="a14">
+          <p:sp>
+            <p:nvSpPr>
+              <p:cNvPr id="127" name="TextBox 126">
+                <a:extLst>
+                  <a:ext uri="{FF2B5EF4-FFF2-40B4-BE49-F238E27FC236}">
+                    <a16:creationId xmlns:a16="http://schemas.microsoft.com/office/drawing/2014/main" id="{7E79B2AC-6F3F-AF56-BF35-82B498E533D9}"/>
+                  </a:ext>
+                </a:extLst>
+              </p:cNvPr>
+              <p:cNvSpPr txBox="1"/>
+              <p:nvPr/>
+            </p:nvSpPr>
+            <p:spPr>
+              <a:xfrm>
+                <a:off x="8798136" y="3145914"/>
+                <a:ext cx="270330" cy="369332"/>
+              </a:xfrm>
+              <a:prstGeom prst="rect">
+                <a:avLst/>
+              </a:prstGeom>
+              <a:noFill/>
+            </p:spPr>
+            <p:txBody>
+              <a:bodyPr wrap="none" lIns="0" tIns="0" rIns="0" bIns="0" rtlCol="0">
+                <a:spAutoFit/>
+              </a:bodyPr>
+              <a:lstStyle/>
+              <a:p>
+                <a:pPr/>
+                <a14:m>
+                  <m:oMathPara xmlns:m="http://schemas.openxmlformats.org/officeDocument/2006/math">
+                    <m:oMath>
+                      <m:r>
+                        <a:rPr lang="en-US" sz="2400" i="1" smtClean="0">
+                          <a:latin typeface="Cambria Math" panose="02040503050406030204" pitchFamily="18" charset="0"/>
+                          <a:ea typeface="Cambria Math" panose="02040503050406030204" pitchFamily="18" charset="0"/>
+                        </a:rPr>
+                        <m:t>𝜃</m:t>
+                      </m:r>
+                    </m:oMath>
+                  </m:oMathPara>
+                </a14:m>
+                <a:endParaRPr lang="en-US" sz="2400" dirty="0"/>
+              </a:p>
+            </p:txBody>
+          </p:sp>
+        </mc:Choice>
+        <mc:Fallback xmlns="">
+          <p:sp>
+            <p:nvSpPr>
+              <p:cNvPr id="127" name="TextBox 126">
+                <a:extLst>
+                  <a:ext uri="{FF2B5EF4-FFF2-40B4-BE49-F238E27FC236}">
+                    <a16:creationId xmlns:a16="http://schemas.microsoft.com/office/drawing/2014/main" id="{4C37C059-7456-41F2-6FB2-21CCF6032028}"/>
+                  </a:ext>
+                </a:extLst>
+              </p:cNvPr>
+              <p:cNvSpPr txBox="1">
+                <a:spLocks noRot="1" noChangeAspect="1" noMove="1" noResize="1" noEditPoints="1" noAdjustHandles="1" noChangeArrowheads="1" noChangeShapeType="1" noTextEdit="1"/>
+              </p:cNvSpPr>
+              <p:nvPr/>
+            </p:nvSpPr>
+            <p:spPr>
+              <a:xfrm>
+                <a:off x="8798136" y="3145914"/>
+                <a:ext cx="270330" cy="369332"/>
+              </a:xfrm>
+              <a:prstGeom prst="rect">
+                <a:avLst/>
+              </a:prstGeom>
+              <a:blipFill>
+                <a:blip r:embed="rId3"/>
+                <a:stretch>
+                  <a:fillRect l="-22222" r="-17778" b="-4918"/>
+                </a:stretch>
+              </a:blipFill>
+            </p:spPr>
+            <p:txBody>
+              <a:bodyPr/>
+              <a:lstStyle/>
+              <a:p>
+                <a:r>
+                  <a:rPr lang="en-US">
+                    <a:noFill/>
+                  </a:rPr>
+                  <a:t> </a:t>
+                </a:r>
+              </a:p>
+            </p:txBody>
+          </p:sp>
+        </mc:Fallback>
+      </mc:AlternateContent>
+      <p:sp>
+        <p:nvSpPr>
+          <p:cNvPr id="128" name="화살표: 아래쪽 127">
+            <a:extLst>
+              <a:ext uri="{FF2B5EF4-FFF2-40B4-BE49-F238E27FC236}">
+                <a16:creationId xmlns:a16="http://schemas.microsoft.com/office/drawing/2014/main" id="{1E38CD4F-1F1D-FFCA-DA07-AA6001EC597D}"/>
+              </a:ext>
+            </a:extLst>
+          </p:cNvPr>
+          <p:cNvSpPr/>
+          <p:nvPr/>
+        </p:nvSpPr>
+        <p:spPr>
+          <a:xfrm rot="3217201">
+            <a:off x="4078016" y="1128800"/>
+            <a:ext cx="460574" cy="990712"/>
+          </a:xfrm>
+          <a:prstGeom prst="downArrow">
+            <a:avLst/>
+          </a:prstGeom>
+        </p:spPr>
+        <p:style>
+          <a:lnRef idx="2">
+            <a:schemeClr val="accent1">
+              <a:shade val="15000"/>
+            </a:schemeClr>
+          </a:lnRef>
+          <a:fillRef idx="1">
+            <a:schemeClr val="accent1"/>
+          </a:fillRef>
+          <a:effectRef idx="0">
+            <a:schemeClr val="accent1"/>
+          </a:effectRef>
+          <a:fontRef idx="minor">
+            <a:schemeClr val="lt1"/>
+          </a:fontRef>
+        </p:style>
+        <p:txBody>
+          <a:bodyPr rtlCol="0" anchor="ctr"/>
+          <a:lstStyle/>
+          <a:p>
+            <a:pPr algn="ctr"/>
+            <a:endParaRPr lang="en-US"/>
+          </a:p>
+        </p:txBody>
+      </p:sp>
+      <p:sp>
+        <p:nvSpPr>
+          <p:cNvPr id="129" name="TextBox 128">
+            <a:extLst>
+              <a:ext uri="{FF2B5EF4-FFF2-40B4-BE49-F238E27FC236}">
+                <a16:creationId xmlns:a16="http://schemas.microsoft.com/office/drawing/2014/main" id="{883C3BFF-D70D-43C2-FD2A-F3951BF68198}"/>
+              </a:ext>
+            </a:extLst>
+          </p:cNvPr>
+          <p:cNvSpPr txBox="1"/>
+          <p:nvPr/>
+        </p:nvSpPr>
+        <p:spPr>
+          <a:xfrm>
+            <a:off x="4711605" y="1082534"/>
+            <a:ext cx="4012637" cy="369332"/>
+          </a:xfrm>
+          <a:prstGeom prst="rect">
+            <a:avLst/>
+          </a:prstGeom>
+          <a:noFill/>
+        </p:spPr>
+        <p:txBody>
+          <a:bodyPr wrap="none" rtlCol="0">
+            <a:spAutoFit/>
+          </a:bodyPr>
+          <a:lstStyle/>
+          <a:p>
+            <a:r>
+              <a:rPr lang="en-US" dirty="0">
+                <a:latin typeface="Gungsuh" panose="02030600000101010101" pitchFamily="18" charset="-127"/>
+                <a:ea typeface="Gungsuh" panose="02030600000101010101" pitchFamily="18" charset="-127"/>
+              </a:rPr>
+              <a:t>Look at from this perspective</a:t>
+            </a:r>
+          </a:p>
+        </p:txBody>
+      </p:sp>
+      <mc:AlternateContent xmlns:mc="http://schemas.openxmlformats.org/markup-compatibility/2006" xmlns:a14="http://schemas.microsoft.com/office/drawing/2010/main">
+        <mc:Choice Requires="a14">
+          <p:sp>
+            <p:nvSpPr>
+              <p:cNvPr id="131" name="TextBox 130">
+                <a:extLst>
+                  <a:ext uri="{FF2B5EF4-FFF2-40B4-BE49-F238E27FC236}">
+                    <a16:creationId xmlns:a16="http://schemas.microsoft.com/office/drawing/2014/main" id="{3C2B27A5-5B9D-E66C-D5CE-436B6D790C87}"/>
+                  </a:ext>
+                </a:extLst>
+              </p:cNvPr>
+              <p:cNvSpPr txBox="1"/>
+              <p:nvPr/>
+            </p:nvSpPr>
+            <p:spPr>
+              <a:xfrm rot="21357679">
+                <a:off x="9111194" y="3304926"/>
+                <a:ext cx="283411" cy="369332"/>
+              </a:xfrm>
+              <a:prstGeom prst="rect">
+                <a:avLst/>
+              </a:prstGeom>
+              <a:noFill/>
+            </p:spPr>
+            <p:txBody>
+              <a:bodyPr wrap="none" lIns="0" tIns="0" rIns="0" bIns="0" rtlCol="0">
+                <a:spAutoFit/>
+              </a:bodyPr>
+              <a:lstStyle/>
+              <a:p>
+                <a:pPr/>
+                <a14:m>
+                  <m:oMathPara xmlns:m="http://schemas.openxmlformats.org/officeDocument/2006/math">
+                    <m:oMath>
+                      <m:r>
+                        <a:rPr lang="en-US" sz="2400" i="1" smtClean="0">
+                          <a:latin typeface="Cambria Math" panose="02040503050406030204" pitchFamily="18" charset="0"/>
+                          <a:ea typeface="Cambria Math" panose="02040503050406030204" pitchFamily="18" charset="0"/>
+                        </a:rPr>
+                        <m:t>𝛽</m:t>
+                      </m:r>
+                    </m:oMath>
+                  </m:oMathPara>
+                </a14:m>
+                <a:endParaRPr lang="en-US" sz="2400" dirty="0"/>
+              </a:p>
+            </p:txBody>
+          </p:sp>
+        </mc:Choice>
+        <mc:Fallback xmlns="">
+          <p:sp>
+            <p:nvSpPr>
+              <p:cNvPr id="131" name="TextBox 130">
+                <a:extLst>
+                  <a:ext uri="{FF2B5EF4-FFF2-40B4-BE49-F238E27FC236}">
+                    <a16:creationId xmlns:a16="http://schemas.microsoft.com/office/drawing/2014/main" id="{C5C2C5DD-6391-E3D7-1327-2DD30603514B}"/>
+                  </a:ext>
+                </a:extLst>
+              </p:cNvPr>
+              <p:cNvSpPr txBox="1">
+                <a:spLocks noRot="1" noChangeAspect="1" noMove="1" noResize="1" noEditPoints="1" noAdjustHandles="1" noChangeArrowheads="1" noChangeShapeType="1" noTextEdit="1"/>
+              </p:cNvSpPr>
+              <p:nvPr/>
+            </p:nvSpPr>
+            <p:spPr>
+              <a:xfrm rot="21357679">
+                <a:off x="9111194" y="3304926"/>
+                <a:ext cx="283411" cy="369332"/>
+              </a:xfrm>
+              <a:prstGeom prst="rect">
+                <a:avLst/>
+              </a:prstGeom>
+              <a:blipFill>
+                <a:blip r:embed="rId4"/>
+                <a:stretch>
+                  <a:fillRect l="-30769" t="-1538" r="-28846" b="-30769"/>
+                </a:stretch>
+              </a:blipFill>
+            </p:spPr>
+            <p:txBody>
+              <a:bodyPr/>
+              <a:lstStyle/>
+              <a:p>
+                <a:r>
+                  <a:rPr lang="en-US">
+                    <a:noFill/>
+                  </a:rPr>
+                  <a:t> </a:t>
+                </a:r>
+              </a:p>
+            </p:txBody>
+          </p:sp>
+        </mc:Fallback>
+      </mc:AlternateContent>
+      <mc:AlternateContent xmlns:mc="http://schemas.openxmlformats.org/markup-compatibility/2006" xmlns:a14="http://schemas.microsoft.com/office/drawing/2010/main">
+        <mc:Choice Requires="a14">
+          <p:sp>
+            <p:nvSpPr>
+              <p:cNvPr id="133" name="TextBox 132">
+                <a:extLst>
+                  <a:ext uri="{FF2B5EF4-FFF2-40B4-BE49-F238E27FC236}">
+                    <a16:creationId xmlns:a16="http://schemas.microsoft.com/office/drawing/2014/main" id="{B91F29FB-5077-3360-9073-E712E2B0DC77}"/>
+                  </a:ext>
+                </a:extLst>
+              </p:cNvPr>
+              <p:cNvSpPr txBox="1"/>
+              <p:nvPr/>
+            </p:nvSpPr>
+            <p:spPr>
+              <a:xfrm rot="20180983">
+                <a:off x="8939007" y="2035808"/>
+                <a:ext cx="396582" cy="369332"/>
+              </a:xfrm>
+              <a:prstGeom prst="rect">
+                <a:avLst/>
+              </a:prstGeom>
+              <a:noFill/>
+            </p:spPr>
+            <p:txBody>
+              <a:bodyPr wrap="none" lIns="0" tIns="0" rIns="0" bIns="0" rtlCol="0">
+                <a:spAutoFit/>
+              </a:bodyPr>
+              <a:lstStyle/>
+              <a:p>
+                <a:pPr/>
+                <a14:m>
+                  <m:oMathPara xmlns:m="http://schemas.openxmlformats.org/officeDocument/2006/math">
+                    <m:oMath>
+                      <m:sSub>
+                        <m:sSubPr>
+                          <m:ctrlPr>
+                            <a:rPr lang="en-US" sz="2400" b="0" i="1" smtClean="0">
+                              <a:latin typeface="Cambria Math" panose="02040503050406030204" pitchFamily="18" charset="0"/>
+                            </a:rPr>
+                          </m:ctrlPr>
+                        </m:sSubPr>
+                        <m:e>
+                          <m:r>
+                            <a:rPr lang="en-US" sz="2400" b="0" i="1" smtClean="0">
+                              <a:latin typeface="Cambria Math" panose="02040503050406030204" pitchFamily="18" charset="0"/>
+                            </a:rPr>
+                            <m:t>𝑘</m:t>
+                          </m:r>
+                        </m:e>
+                        <m:sub>
+                          <m:r>
+                            <a:rPr lang="en-US" sz="2400" b="0" i="1" smtClean="0">
+                              <a:latin typeface="Cambria Math" panose="02040503050406030204" pitchFamily="18" charset="0"/>
+                            </a:rPr>
+                            <m:t>𝑟</m:t>
+                          </m:r>
+                        </m:sub>
+                      </m:sSub>
+                    </m:oMath>
+                  </m:oMathPara>
+                </a14:m>
+                <a:endParaRPr lang="en-US" sz="2400" dirty="0"/>
+              </a:p>
+            </p:txBody>
+          </p:sp>
+        </mc:Choice>
+        <mc:Fallback xmlns="">
+          <p:sp>
+            <p:nvSpPr>
+              <p:cNvPr id="133" name="TextBox 132">
+                <a:extLst>
+                  <a:ext uri="{FF2B5EF4-FFF2-40B4-BE49-F238E27FC236}">
+                    <a16:creationId xmlns:a16="http://schemas.microsoft.com/office/drawing/2014/main" id="{52F9BC21-A2B1-D757-7F0F-231774C5EB1A}"/>
+                  </a:ext>
+                </a:extLst>
+              </p:cNvPr>
+              <p:cNvSpPr txBox="1">
+                <a:spLocks noRot="1" noChangeAspect="1" noMove="1" noResize="1" noEditPoints="1" noAdjustHandles="1" noChangeArrowheads="1" noChangeShapeType="1" noTextEdit="1"/>
+              </p:cNvSpPr>
+              <p:nvPr/>
+            </p:nvSpPr>
+            <p:spPr>
+              <a:xfrm rot="20180983">
+                <a:off x="8939007" y="2035808"/>
+                <a:ext cx="396582" cy="369332"/>
+              </a:xfrm>
+              <a:prstGeom prst="rect">
+                <a:avLst/>
+              </a:prstGeom>
+              <a:blipFill>
+                <a:blip r:embed="rId5"/>
+                <a:stretch>
+                  <a:fillRect l="-9412" r="-1176" b="-7229"/>
+                </a:stretch>
+              </a:blipFill>
+            </p:spPr>
+            <p:txBody>
+              <a:bodyPr/>
+              <a:lstStyle/>
+              <a:p>
+                <a:r>
+                  <a:rPr lang="en-US">
+                    <a:noFill/>
+                  </a:rPr>
+                  <a:t> </a:t>
+                </a:r>
+              </a:p>
+            </p:txBody>
+          </p:sp>
+        </mc:Fallback>
+      </mc:AlternateContent>
+      <p:sp>
+        <p:nvSpPr>
+          <p:cNvPr id="17" name="막힌 원호 124">
+            <a:extLst>
+              <a:ext uri="{FF2B5EF4-FFF2-40B4-BE49-F238E27FC236}">
+                <a16:creationId xmlns:a16="http://schemas.microsoft.com/office/drawing/2014/main" id="{A3E5CBB4-9114-AA47-CABC-71E7C3BBC1D3}"/>
+              </a:ext>
+            </a:extLst>
+          </p:cNvPr>
+          <p:cNvSpPr/>
+          <p:nvPr/>
+        </p:nvSpPr>
+        <p:spPr>
+          <a:xfrm rot="2486177">
+            <a:off x="9246690" y="2762512"/>
+            <a:ext cx="405325" cy="376596"/>
+          </a:xfrm>
+          <a:prstGeom prst="blockArc">
+            <a:avLst>
+              <a:gd name="adj1" fmla="val 10800000"/>
+              <a:gd name="adj2" fmla="val 21574061"/>
+              <a:gd name="adj3" fmla="val 0"/>
+            </a:avLst>
+          </a:prstGeom>
+        </p:spPr>
+        <p:style>
+          <a:lnRef idx="2">
+            <a:schemeClr val="accent1">
+              <a:shade val="15000"/>
+            </a:schemeClr>
+          </a:lnRef>
+          <a:fillRef idx="1">
+            <a:schemeClr val="accent1"/>
+          </a:fillRef>
+          <a:effectRef idx="0">
+            <a:schemeClr val="accent1"/>
+          </a:effectRef>
+          <a:fontRef idx="minor">
+            <a:schemeClr val="lt1"/>
+          </a:fontRef>
+        </p:style>
+        <p:txBody>
+          <a:bodyPr rtlCol="0" anchor="ctr"/>
+          <a:lstStyle/>
+          <a:p>
+            <a:pPr algn="ctr"/>
+            <a:endParaRPr lang="en-US">
+              <a:solidFill>
+                <a:schemeClr val="tx1"/>
+              </a:solidFill>
+            </a:endParaRPr>
+          </a:p>
+        </p:txBody>
+      </p:sp>
+      <mc:AlternateContent xmlns:mc="http://schemas.openxmlformats.org/markup-compatibility/2006" xmlns:a14="http://schemas.microsoft.com/office/drawing/2010/main">
+        <mc:Choice Requires="a14">
+          <p:sp>
+            <p:nvSpPr>
+              <p:cNvPr id="19" name="TextBox 130">
+                <a:extLst>
+                  <a:ext uri="{FF2B5EF4-FFF2-40B4-BE49-F238E27FC236}">
+                    <a16:creationId xmlns:a16="http://schemas.microsoft.com/office/drawing/2014/main" id="{C81DDDEE-42FB-9E59-0C7E-04E44F03CCEF}"/>
+                  </a:ext>
+                </a:extLst>
+              </p:cNvPr>
+              <p:cNvSpPr txBox="1"/>
+              <p:nvPr/>
+            </p:nvSpPr>
+            <p:spPr>
+              <a:xfrm rot="21357679">
+                <a:off x="9309252" y="2327560"/>
+                <a:ext cx="303160" cy="369332"/>
+              </a:xfrm>
+              <a:prstGeom prst="rect">
+                <a:avLst/>
+              </a:prstGeom>
+              <a:noFill/>
+            </p:spPr>
+            <p:txBody>
+              <a:bodyPr wrap="none" lIns="0" tIns="0" rIns="0" bIns="0" rtlCol="0">
+                <a:spAutoFit/>
+              </a:bodyPr>
+              <a:lstStyle/>
+              <a:p>
+                <a:pPr/>
+                <a14:m>
+                  <m:oMathPara xmlns:m="http://schemas.openxmlformats.org/officeDocument/2006/math">
+                    <m:oMath>
+                      <m:r>
+                        <a:rPr lang="en-US" sz="2400" i="1" smtClean="0">
+                          <a:latin typeface="Cambria Math" panose="02040503050406030204" pitchFamily="18" charset="0"/>
+                          <a:ea typeface="Cambria Math" panose="02040503050406030204" pitchFamily="18" charset="0"/>
+                        </a:rPr>
+                        <m:t>𝜑</m:t>
+                      </m:r>
+                    </m:oMath>
+                  </m:oMathPara>
+                </a14:m>
+                <a:endParaRPr lang="en-US" sz="2400" dirty="0"/>
+              </a:p>
+            </p:txBody>
+          </p:sp>
+        </mc:Choice>
+        <mc:Fallback xmlns="">
+          <p:sp>
+            <p:nvSpPr>
+              <p:cNvPr id="19" name="TextBox 130">
+                <a:extLst>
+                  <a:ext uri="{FF2B5EF4-FFF2-40B4-BE49-F238E27FC236}">
+                    <a16:creationId xmlns:a16="http://schemas.microsoft.com/office/drawing/2014/main" id="{F57FA24F-1BDF-BAD1-A090-50D115FAB0BD}"/>
+                  </a:ext>
+                </a:extLst>
+              </p:cNvPr>
+              <p:cNvSpPr txBox="1">
+                <a:spLocks noRot="1" noChangeAspect="1" noMove="1" noResize="1" noEditPoints="1" noAdjustHandles="1" noChangeArrowheads="1" noChangeShapeType="1" noTextEdit="1"/>
+              </p:cNvSpPr>
+              <p:nvPr/>
+            </p:nvSpPr>
+            <p:spPr>
+              <a:xfrm rot="21357679">
+                <a:off x="9309252" y="2327560"/>
+                <a:ext cx="303160" cy="369332"/>
+              </a:xfrm>
+              <a:prstGeom prst="rect">
+                <a:avLst/>
+              </a:prstGeom>
+              <a:blipFill>
+                <a:blip r:embed="rId6"/>
+                <a:stretch>
+                  <a:fillRect l="-18519" r="-18519" b="-21538"/>
+                </a:stretch>
+              </a:blipFill>
+            </p:spPr>
+            <p:txBody>
+              <a:bodyPr/>
+              <a:lstStyle/>
+              <a:p>
+                <a:r>
+                  <a:rPr lang="en-US">
+                    <a:noFill/>
+                  </a:rPr>
+                  <a:t> </a:t>
+                </a:r>
+              </a:p>
+            </p:txBody>
+          </p:sp>
+        </mc:Fallback>
+      </mc:AlternateContent>
+      <p:sp>
+        <p:nvSpPr>
+          <p:cNvPr id="30" name="テキスト ボックス 29">
+            <a:extLst>
+              <a:ext uri="{FF2B5EF4-FFF2-40B4-BE49-F238E27FC236}">
+                <a16:creationId xmlns:a16="http://schemas.microsoft.com/office/drawing/2014/main" id="{9E3C42CC-9D7A-7B79-C529-FC60BF660ABC}"/>
+              </a:ext>
+            </a:extLst>
+          </p:cNvPr>
+          <p:cNvSpPr txBox="1"/>
+          <p:nvPr/>
+        </p:nvSpPr>
+        <p:spPr>
+          <a:xfrm>
+            <a:off x="10458489" y="3515246"/>
+            <a:ext cx="1372492" cy="369332"/>
+          </a:xfrm>
+          <a:prstGeom prst="rect">
+            <a:avLst/>
+          </a:prstGeom>
+          <a:noFill/>
+        </p:spPr>
+        <p:txBody>
+          <a:bodyPr wrap="none" rtlCol="0">
+            <a:spAutoFit/>
+          </a:bodyPr>
+          <a:lstStyle/>
+          <a:p>
+            <a:r>
+              <a:rPr lang="en-US" dirty="0">
+                <a:latin typeface="Gungsuh" panose="02030600000101010101" pitchFamily="18" charset="-127"/>
+                <a:ea typeface="Gungsuh" panose="02030600000101010101" pitchFamily="18" charset="-127"/>
+              </a:rPr>
+              <a:t>Input ray</a:t>
+            </a:r>
+          </a:p>
+        </p:txBody>
+      </p:sp>
+      <p:sp>
+        <p:nvSpPr>
+          <p:cNvPr id="33" name="テキスト ボックス 32">
+            <a:extLst>
+              <a:ext uri="{FF2B5EF4-FFF2-40B4-BE49-F238E27FC236}">
+                <a16:creationId xmlns:a16="http://schemas.microsoft.com/office/drawing/2014/main" id="{D4E7D56C-6C0F-6A84-79F0-E2EA38DB28D2}"/>
+              </a:ext>
+            </a:extLst>
+          </p:cNvPr>
+          <p:cNvSpPr txBox="1"/>
+          <p:nvPr/>
+        </p:nvSpPr>
+        <p:spPr>
+          <a:xfrm>
+            <a:off x="10089998" y="764290"/>
+            <a:ext cx="1731564" cy="369332"/>
+          </a:xfrm>
+          <a:prstGeom prst="rect">
+            <a:avLst/>
+          </a:prstGeom>
+          <a:noFill/>
+        </p:spPr>
+        <p:txBody>
+          <a:bodyPr wrap="none" rtlCol="0">
+            <a:spAutoFit/>
+          </a:bodyPr>
+          <a:lstStyle/>
+          <a:p>
+            <a:r>
+              <a:rPr lang="en-US" dirty="0">
+                <a:latin typeface="Gungsuh" panose="02030600000101010101" pitchFamily="18" charset="-127"/>
+                <a:ea typeface="Gungsuh" panose="02030600000101010101" pitchFamily="18" charset="-127"/>
+              </a:rPr>
+              <a:t>Optical axis</a:t>
+            </a:r>
+          </a:p>
+        </p:txBody>
+      </p:sp>
+      <p:grpSp>
+        <p:nvGrpSpPr>
+          <p:cNvPr id="12" name="グループ化 11">
+            <a:extLst>
+              <a:ext uri="{FF2B5EF4-FFF2-40B4-BE49-F238E27FC236}">
+                <a16:creationId xmlns:a16="http://schemas.microsoft.com/office/drawing/2014/main" id="{438047D6-0C11-EC49-EE60-7AF44F48C927}"/>
+              </a:ext>
+            </a:extLst>
+          </p:cNvPr>
+          <p:cNvGrpSpPr/>
+          <p:nvPr/>
+        </p:nvGrpSpPr>
+        <p:grpSpPr>
+          <a:xfrm>
+            <a:off x="4683582" y="2405748"/>
+            <a:ext cx="124769" cy="124769"/>
+            <a:chOff x="4683582" y="2405748"/>
+            <a:chExt cx="124769" cy="124769"/>
+          </a:xfrm>
+        </p:grpSpPr>
+        <p:sp>
+          <p:nvSpPr>
+            <p:cNvPr id="9" name="楕円 8">
+              <a:extLst>
+                <a:ext uri="{FF2B5EF4-FFF2-40B4-BE49-F238E27FC236}">
+                  <a16:creationId xmlns:a16="http://schemas.microsoft.com/office/drawing/2014/main" id="{768A2AEE-BF83-8060-F8F8-E8D55F535065}"/>
+                </a:ext>
+              </a:extLst>
+            </p:cNvPr>
+            <p:cNvSpPr/>
+            <p:nvPr/>
+          </p:nvSpPr>
+          <p:spPr>
+            <a:xfrm>
+              <a:off x="4683582" y="2405748"/>
+              <a:ext cx="124769" cy="124769"/>
+            </a:xfrm>
+            <a:prstGeom prst="ellipse">
+              <a:avLst/>
+            </a:prstGeom>
+            <a:noFill/>
+            <a:ln w="12700">
+              <a:solidFill>
+                <a:srgbClr val="C00000"/>
+              </a:solidFill>
+            </a:ln>
+          </p:spPr>
+          <p:style>
+            <a:lnRef idx="2">
+              <a:schemeClr val="accent1">
+                <a:shade val="15000"/>
+              </a:schemeClr>
+            </a:lnRef>
+            <a:fillRef idx="1">
+              <a:schemeClr val="accent1"/>
+            </a:fillRef>
+            <a:effectRef idx="0">
+              <a:schemeClr val="accent1"/>
+            </a:effectRef>
+            <a:fontRef idx="minor">
+              <a:schemeClr val="lt1"/>
+            </a:fontRef>
+          </p:style>
+          <p:txBody>
+            <a:bodyPr rtlCol="0" anchor="ctr"/>
+            <a:lstStyle/>
+            <a:p>
+              <a:pPr algn="ctr"/>
+              <a:endParaRPr lang="en-US"/>
+            </a:p>
+          </p:txBody>
+        </p:sp>
+        <p:sp>
+          <p:nvSpPr>
+            <p:cNvPr id="11" name="楕円 10">
+              <a:extLst>
+                <a:ext uri="{FF2B5EF4-FFF2-40B4-BE49-F238E27FC236}">
+                  <a16:creationId xmlns:a16="http://schemas.microsoft.com/office/drawing/2014/main" id="{973D5274-4644-8A13-A948-BAC65BAF60B3}"/>
+                </a:ext>
+              </a:extLst>
+            </p:cNvPr>
+            <p:cNvSpPr/>
+            <p:nvPr/>
+          </p:nvSpPr>
+          <p:spPr>
+            <a:xfrm>
+              <a:off x="4729967" y="2445507"/>
+              <a:ext cx="36576" cy="36576"/>
+            </a:xfrm>
+            <a:prstGeom prst="ellipse">
+              <a:avLst/>
+            </a:prstGeom>
+            <a:solidFill>
+              <a:schemeClr val="tx1"/>
+            </a:solidFill>
+            <a:ln w="12700">
+              <a:solidFill>
+                <a:srgbClr val="C00000"/>
+              </a:solidFill>
+            </a:ln>
+          </p:spPr>
+          <p:style>
+            <a:lnRef idx="2">
+              <a:schemeClr val="accent1">
+                <a:shade val="15000"/>
+              </a:schemeClr>
+            </a:lnRef>
+            <a:fillRef idx="1">
+              <a:schemeClr val="accent1"/>
+            </a:fillRef>
+            <a:effectRef idx="0">
+              <a:schemeClr val="accent1"/>
+            </a:effectRef>
+            <a:fontRef idx="minor">
+              <a:schemeClr val="lt1"/>
+            </a:fontRef>
+          </p:style>
+          <p:txBody>
+            <a:bodyPr rtlCol="0" anchor="ctr"/>
+            <a:lstStyle/>
+            <a:p>
+              <a:pPr algn="ctr"/>
+              <a:endParaRPr lang="en-US"/>
+            </a:p>
+          </p:txBody>
+        </p:sp>
+      </p:grpSp>
+      <p:grpSp>
+        <p:nvGrpSpPr>
+          <p:cNvPr id="13" name="グループ化 12">
+            <a:extLst>
+              <a:ext uri="{FF2B5EF4-FFF2-40B4-BE49-F238E27FC236}">
+                <a16:creationId xmlns:a16="http://schemas.microsoft.com/office/drawing/2014/main" id="{CB2508A2-60D8-5B49-52B5-23A8E1E0A37D}"/>
+              </a:ext>
+            </a:extLst>
+          </p:cNvPr>
+          <p:cNvGrpSpPr/>
+          <p:nvPr/>
+        </p:nvGrpSpPr>
+        <p:grpSpPr>
+          <a:xfrm>
+            <a:off x="4849618" y="2306590"/>
+            <a:ext cx="124769" cy="124769"/>
+            <a:chOff x="4683582" y="2405748"/>
+            <a:chExt cx="124769" cy="124769"/>
+          </a:xfrm>
+        </p:grpSpPr>
+        <p:sp>
+          <p:nvSpPr>
+            <p:cNvPr id="14" name="楕円 13">
+              <a:extLst>
+                <a:ext uri="{FF2B5EF4-FFF2-40B4-BE49-F238E27FC236}">
+                  <a16:creationId xmlns:a16="http://schemas.microsoft.com/office/drawing/2014/main" id="{A723F351-A617-41FA-23F4-4E782AEC8897}"/>
+                </a:ext>
+              </a:extLst>
+            </p:cNvPr>
+            <p:cNvSpPr/>
+            <p:nvPr/>
+          </p:nvSpPr>
+          <p:spPr>
+            <a:xfrm>
+              <a:off x="4683582" y="2405748"/>
+              <a:ext cx="124769" cy="124769"/>
+            </a:xfrm>
+            <a:prstGeom prst="ellipse">
+              <a:avLst/>
+            </a:prstGeom>
+            <a:noFill/>
+            <a:ln w="12700">
+              <a:solidFill>
+                <a:srgbClr val="C00000"/>
+              </a:solidFill>
+            </a:ln>
+          </p:spPr>
+          <p:style>
+            <a:lnRef idx="2">
+              <a:schemeClr val="accent1">
+                <a:shade val="15000"/>
+              </a:schemeClr>
+            </a:lnRef>
+            <a:fillRef idx="1">
+              <a:schemeClr val="accent1"/>
+            </a:fillRef>
+            <a:effectRef idx="0">
+              <a:schemeClr val="accent1"/>
+            </a:effectRef>
+            <a:fontRef idx="minor">
+              <a:schemeClr val="lt1"/>
+            </a:fontRef>
+          </p:style>
+          <p:txBody>
+            <a:bodyPr rtlCol="0" anchor="ctr"/>
+            <a:lstStyle/>
+            <a:p>
+              <a:pPr algn="ctr"/>
+              <a:endParaRPr lang="en-US"/>
+            </a:p>
+          </p:txBody>
+        </p:sp>
+        <p:sp>
+          <p:nvSpPr>
+            <p:cNvPr id="15" name="楕円 14">
+              <a:extLst>
+                <a:ext uri="{FF2B5EF4-FFF2-40B4-BE49-F238E27FC236}">
+                  <a16:creationId xmlns:a16="http://schemas.microsoft.com/office/drawing/2014/main" id="{31416700-81C3-3EFA-8F67-23C89B92AF95}"/>
+                </a:ext>
+              </a:extLst>
+            </p:cNvPr>
+            <p:cNvSpPr/>
+            <p:nvPr/>
+          </p:nvSpPr>
+          <p:spPr>
+            <a:xfrm>
+              <a:off x="4729967" y="2445507"/>
+              <a:ext cx="36576" cy="36576"/>
+            </a:xfrm>
+            <a:prstGeom prst="ellipse">
+              <a:avLst/>
+            </a:prstGeom>
+            <a:solidFill>
+              <a:schemeClr val="tx1"/>
+            </a:solidFill>
+            <a:ln w="12700">
+              <a:solidFill>
+                <a:srgbClr val="C00000"/>
+              </a:solidFill>
+            </a:ln>
+          </p:spPr>
+          <p:style>
+            <a:lnRef idx="2">
+              <a:schemeClr val="accent1">
+                <a:shade val="15000"/>
+              </a:schemeClr>
+            </a:lnRef>
+            <a:fillRef idx="1">
+              <a:schemeClr val="accent1"/>
+            </a:fillRef>
+            <a:effectRef idx="0">
+              <a:schemeClr val="accent1"/>
+            </a:effectRef>
+            <a:fontRef idx="minor">
+              <a:schemeClr val="lt1"/>
+            </a:fontRef>
+          </p:style>
+          <p:txBody>
+            <a:bodyPr rtlCol="0" anchor="ctr"/>
+            <a:lstStyle/>
+            <a:p>
+              <a:pPr algn="ctr"/>
+              <a:endParaRPr lang="en-US"/>
+            </a:p>
+          </p:txBody>
+        </p:sp>
+      </p:grpSp>
+      <p:grpSp>
+        <p:nvGrpSpPr>
+          <p:cNvPr id="16" name="グループ化 15">
+            <a:extLst>
+              <a:ext uri="{FF2B5EF4-FFF2-40B4-BE49-F238E27FC236}">
+                <a16:creationId xmlns:a16="http://schemas.microsoft.com/office/drawing/2014/main" id="{80BDA3CD-1B33-824B-37E4-F31314C8FEEB}"/>
+              </a:ext>
+            </a:extLst>
+          </p:cNvPr>
+          <p:cNvGrpSpPr/>
+          <p:nvPr/>
+        </p:nvGrpSpPr>
+        <p:grpSpPr>
+          <a:xfrm>
+            <a:off x="5029281" y="2207324"/>
+            <a:ext cx="124769" cy="124769"/>
+            <a:chOff x="4683582" y="2405748"/>
+            <a:chExt cx="124769" cy="124769"/>
+          </a:xfrm>
+        </p:grpSpPr>
+        <p:sp>
+          <p:nvSpPr>
+            <p:cNvPr id="18" name="楕円 17">
+              <a:extLst>
+                <a:ext uri="{FF2B5EF4-FFF2-40B4-BE49-F238E27FC236}">
+                  <a16:creationId xmlns:a16="http://schemas.microsoft.com/office/drawing/2014/main" id="{902C171D-DA59-0706-22AD-117C030AE67C}"/>
+                </a:ext>
+              </a:extLst>
+            </p:cNvPr>
+            <p:cNvSpPr/>
+            <p:nvPr/>
+          </p:nvSpPr>
+          <p:spPr>
+            <a:xfrm>
+              <a:off x="4683582" y="2405748"/>
+              <a:ext cx="124769" cy="124769"/>
+            </a:xfrm>
+            <a:prstGeom prst="ellipse">
+              <a:avLst/>
+            </a:prstGeom>
+            <a:noFill/>
+            <a:ln w="12700">
+              <a:solidFill>
+                <a:srgbClr val="C00000"/>
+              </a:solidFill>
+            </a:ln>
+          </p:spPr>
+          <p:style>
+            <a:lnRef idx="2">
+              <a:schemeClr val="accent1">
+                <a:shade val="15000"/>
+              </a:schemeClr>
+            </a:lnRef>
+            <a:fillRef idx="1">
+              <a:schemeClr val="accent1"/>
+            </a:fillRef>
+            <a:effectRef idx="0">
+              <a:schemeClr val="accent1"/>
+            </a:effectRef>
+            <a:fontRef idx="minor">
+              <a:schemeClr val="lt1"/>
+            </a:fontRef>
+          </p:style>
+          <p:txBody>
+            <a:bodyPr rtlCol="0" anchor="ctr"/>
+            <a:lstStyle/>
+            <a:p>
+              <a:pPr algn="ctr"/>
+              <a:endParaRPr lang="en-US"/>
+            </a:p>
+          </p:txBody>
+        </p:sp>
+        <p:sp>
+          <p:nvSpPr>
+            <p:cNvPr id="22" name="楕円 21">
+              <a:extLst>
+                <a:ext uri="{FF2B5EF4-FFF2-40B4-BE49-F238E27FC236}">
+                  <a16:creationId xmlns:a16="http://schemas.microsoft.com/office/drawing/2014/main" id="{E834D704-74B6-B4B0-8829-7F04405D697B}"/>
+                </a:ext>
+              </a:extLst>
+            </p:cNvPr>
+            <p:cNvSpPr/>
+            <p:nvPr/>
+          </p:nvSpPr>
+          <p:spPr>
+            <a:xfrm>
+              <a:off x="4729967" y="2445507"/>
+              <a:ext cx="36576" cy="36576"/>
+            </a:xfrm>
+            <a:prstGeom prst="ellipse">
+              <a:avLst/>
+            </a:prstGeom>
+            <a:solidFill>
+              <a:schemeClr val="tx1"/>
+            </a:solidFill>
+            <a:ln w="12700">
+              <a:solidFill>
+                <a:srgbClr val="C00000"/>
+              </a:solidFill>
+            </a:ln>
+          </p:spPr>
+          <p:style>
+            <a:lnRef idx="2">
+              <a:schemeClr val="accent1">
+                <a:shade val="15000"/>
+              </a:schemeClr>
+            </a:lnRef>
+            <a:fillRef idx="1">
+              <a:schemeClr val="accent1"/>
+            </a:fillRef>
+            <a:effectRef idx="0">
+              <a:schemeClr val="accent1"/>
+            </a:effectRef>
+            <a:fontRef idx="minor">
+              <a:schemeClr val="lt1"/>
+            </a:fontRef>
+          </p:style>
+          <p:txBody>
+            <a:bodyPr rtlCol="0" anchor="ctr"/>
+            <a:lstStyle/>
+            <a:p>
+              <a:pPr algn="ctr"/>
+              <a:endParaRPr lang="en-US"/>
+            </a:p>
+          </p:txBody>
+        </p:sp>
+      </p:grpSp>
+      <p:grpSp>
+        <p:nvGrpSpPr>
+          <p:cNvPr id="25" name="グループ化 24">
+            <a:extLst>
+              <a:ext uri="{FF2B5EF4-FFF2-40B4-BE49-F238E27FC236}">
+                <a16:creationId xmlns:a16="http://schemas.microsoft.com/office/drawing/2014/main" id="{4F2BDE32-10A7-EA77-5388-68D77C61871F}"/>
+              </a:ext>
+            </a:extLst>
+          </p:cNvPr>
+          <p:cNvGrpSpPr/>
+          <p:nvPr/>
+        </p:nvGrpSpPr>
+        <p:grpSpPr>
+          <a:xfrm>
+            <a:off x="5202573" y="2112401"/>
+            <a:ext cx="124769" cy="124769"/>
+            <a:chOff x="4683582" y="2405748"/>
+            <a:chExt cx="124769" cy="124769"/>
+          </a:xfrm>
+        </p:grpSpPr>
+        <p:sp>
+          <p:nvSpPr>
+            <p:cNvPr id="32" name="楕円 31">
+              <a:extLst>
+                <a:ext uri="{FF2B5EF4-FFF2-40B4-BE49-F238E27FC236}">
+                  <a16:creationId xmlns:a16="http://schemas.microsoft.com/office/drawing/2014/main" id="{1BE1654D-9532-1F4E-D3F8-B5682D4341B3}"/>
+                </a:ext>
+              </a:extLst>
+            </p:cNvPr>
+            <p:cNvSpPr/>
+            <p:nvPr/>
+          </p:nvSpPr>
+          <p:spPr>
+            <a:xfrm>
+              <a:off x="4683582" y="2405748"/>
+              <a:ext cx="124769" cy="124769"/>
+            </a:xfrm>
+            <a:prstGeom prst="ellipse">
+              <a:avLst/>
+            </a:prstGeom>
+            <a:noFill/>
+            <a:ln w="12700">
+              <a:solidFill>
+                <a:srgbClr val="C00000"/>
+              </a:solidFill>
+            </a:ln>
+          </p:spPr>
+          <p:style>
+            <a:lnRef idx="2">
+              <a:schemeClr val="accent1">
+                <a:shade val="15000"/>
+              </a:schemeClr>
+            </a:lnRef>
+            <a:fillRef idx="1">
+              <a:schemeClr val="accent1"/>
+            </a:fillRef>
+            <a:effectRef idx="0">
+              <a:schemeClr val="accent1"/>
+            </a:effectRef>
+            <a:fontRef idx="minor">
+              <a:schemeClr val="lt1"/>
+            </a:fontRef>
+          </p:style>
+          <p:txBody>
+            <a:bodyPr rtlCol="0" anchor="ctr"/>
+            <a:lstStyle/>
+            <a:p>
+              <a:pPr algn="ctr"/>
+              <a:endParaRPr lang="en-US"/>
+            </a:p>
+          </p:txBody>
+        </p:sp>
+        <p:sp>
+          <p:nvSpPr>
+            <p:cNvPr id="34" name="楕円 33">
+              <a:extLst>
+                <a:ext uri="{FF2B5EF4-FFF2-40B4-BE49-F238E27FC236}">
+                  <a16:creationId xmlns:a16="http://schemas.microsoft.com/office/drawing/2014/main" id="{8F2680E7-1167-E539-2390-B498C32A1607}"/>
+                </a:ext>
+              </a:extLst>
+            </p:cNvPr>
+            <p:cNvSpPr/>
+            <p:nvPr/>
+          </p:nvSpPr>
+          <p:spPr>
+            <a:xfrm>
+              <a:off x="4729967" y="2445507"/>
+              <a:ext cx="36576" cy="36576"/>
+            </a:xfrm>
+            <a:prstGeom prst="ellipse">
+              <a:avLst/>
+            </a:prstGeom>
+            <a:solidFill>
+              <a:schemeClr val="tx1"/>
+            </a:solidFill>
+            <a:ln w="12700">
+              <a:solidFill>
+                <a:srgbClr val="C00000"/>
+              </a:solidFill>
+            </a:ln>
+          </p:spPr>
+          <p:style>
+            <a:lnRef idx="2">
+              <a:schemeClr val="accent1">
+                <a:shade val="15000"/>
+              </a:schemeClr>
+            </a:lnRef>
+            <a:fillRef idx="1">
+              <a:schemeClr val="accent1"/>
+            </a:fillRef>
+            <a:effectRef idx="0">
+              <a:schemeClr val="accent1"/>
+            </a:effectRef>
+            <a:fontRef idx="minor">
+              <a:schemeClr val="lt1"/>
+            </a:fontRef>
+          </p:style>
+          <p:txBody>
+            <a:bodyPr rtlCol="0" anchor="ctr"/>
+            <a:lstStyle/>
+            <a:p>
+              <a:pPr algn="ctr"/>
+              <a:endParaRPr lang="en-US"/>
+            </a:p>
+          </p:txBody>
+        </p:sp>
+      </p:grpSp>
+      <p:cxnSp>
+        <p:nvCxnSpPr>
+          <p:cNvPr id="2" name="Straight Arrow Connector 22">
+            <a:extLst>
+              <a:ext uri="{FF2B5EF4-FFF2-40B4-BE49-F238E27FC236}">
+                <a16:creationId xmlns:a16="http://schemas.microsoft.com/office/drawing/2014/main" id="{98C753AB-37E7-19A4-048C-D18D11179D45}"/>
+              </a:ext>
+            </a:extLst>
+          </p:cNvPr>
+          <p:cNvCxnSpPr>
+            <a:cxnSpLocks/>
+          </p:cNvCxnSpPr>
+          <p:nvPr/>
+        </p:nvCxnSpPr>
+        <p:spPr>
+          <a:xfrm>
+            <a:off x="3683930" y="3041650"/>
+            <a:ext cx="705779" cy="427703"/>
+          </a:xfrm>
+          <a:prstGeom prst="straightConnector1">
+            <a:avLst/>
+          </a:prstGeom>
+          <a:ln>
+            <a:solidFill>
+              <a:srgbClr val="FF0000"/>
+            </a:solidFill>
+            <a:prstDash val="sysDot"/>
+            <a:headEnd type="none" w="med" len="med"/>
+            <a:tailEnd type="none" w="med" len="med"/>
+          </a:ln>
+        </p:spPr>
+        <p:style>
+          <a:lnRef idx="2">
+            <a:schemeClr val="dk1"/>
+          </a:lnRef>
+          <a:fillRef idx="0">
+            <a:schemeClr val="dk1"/>
+          </a:fillRef>
+          <a:effectRef idx="1">
+            <a:schemeClr val="dk1"/>
+          </a:effectRef>
+          <a:fontRef idx="minor">
+            <a:schemeClr val="tx1"/>
+          </a:fontRef>
+        </p:style>
+      </p:cxnSp>
+      <p:cxnSp>
+        <p:nvCxnSpPr>
+          <p:cNvPr id="35" name="Straight Arrow Connector 22">
+            <a:extLst>
+              <a:ext uri="{FF2B5EF4-FFF2-40B4-BE49-F238E27FC236}">
+                <a16:creationId xmlns:a16="http://schemas.microsoft.com/office/drawing/2014/main" id="{7753F6C3-4431-3B85-9660-C900030B9FE1}"/>
+              </a:ext>
+            </a:extLst>
+          </p:cNvPr>
+          <p:cNvCxnSpPr>
+            <a:cxnSpLocks/>
+          </p:cNvCxnSpPr>
+          <p:nvPr/>
+        </p:nvCxnSpPr>
+        <p:spPr>
+          <a:xfrm>
+            <a:off x="4358873" y="3459169"/>
+            <a:ext cx="1080582" cy="657257"/>
+          </a:xfrm>
+          <a:prstGeom prst="straightConnector1">
+            <a:avLst/>
+          </a:prstGeom>
+          <a:ln>
+            <a:solidFill>
+              <a:srgbClr val="FF0000"/>
+            </a:solidFill>
+            <a:tailEnd type="triangle"/>
+          </a:ln>
+        </p:spPr>
+        <p:style>
+          <a:lnRef idx="2">
+            <a:schemeClr val="dk1"/>
+          </a:lnRef>
+          <a:fillRef idx="0">
+            <a:schemeClr val="dk1"/>
+          </a:fillRef>
+          <a:effectRef idx="1">
+            <a:schemeClr val="dk1"/>
+          </a:effectRef>
+          <a:fontRef idx="minor">
+            <a:schemeClr val="tx1"/>
+          </a:fontRef>
+        </p:style>
+      </p:cxnSp>
+    </p:spTree>
+    <p:extLst>
+      <p:ext uri="{BB962C8B-B14F-4D97-AF65-F5344CB8AC3E}">
+        <p14:creationId xmlns:p14="http://schemas.microsoft.com/office/powerpoint/2010/main" val="3528325271"/>
+      </p:ext>
+    </p:extLst>
+  </p:cSld>
+  <p:clrMapOvr>
+    <a:masterClrMapping/>
+  </p:clrMapOvr>
+</p:sld>
+</file>
+
+<file path=ppt/slides/slide14.xml><?xml version="1.0" encoding="utf-8"?>
 <p:sld xmlns:a="http://schemas.openxmlformats.org/drawingml/2006/main" xmlns:r="http://schemas.openxmlformats.org/officeDocument/2006/relationships" xmlns:p="http://schemas.openxmlformats.org/presentationml/2006/main">
   <p:cSld>
     <p:spTree>
@@ -9041,7 +12387,7 @@
 </p:sld>
 </file>
 
-<file path=ppt/slides/slide14.xml><?xml version="1.0" encoding="utf-8"?>
+<file path=ppt/slides/slide15.xml><?xml version="1.0" encoding="utf-8"?>
 <p:sld xmlns:a="http://schemas.openxmlformats.org/drawingml/2006/main" xmlns:r="http://schemas.openxmlformats.org/officeDocument/2006/relationships" xmlns:p="http://schemas.openxmlformats.org/presentationml/2006/main">
   <p:cSld>
     <p:spTree>
@@ -11422,7 +14768,7 @@
 </p:sld>
 </file>
 
-<file path=ppt/slides/slide15.xml><?xml version="1.0" encoding="utf-8"?>
+<file path=ppt/slides/slide16.xml><?xml version="1.0" encoding="utf-8"?>
 <p:sld xmlns:a="http://schemas.openxmlformats.org/drawingml/2006/main" xmlns:r="http://schemas.openxmlformats.org/officeDocument/2006/relationships" xmlns:p="http://schemas.openxmlformats.org/presentationml/2006/main">
   <p:cSld>
     <p:spTree>
@@ -14379,7 +17725,7 @@
 </p:sld>
 </file>
 
-<file path=ppt/slides/slide16.xml><?xml version="1.0" encoding="utf-8"?>
+<file path=ppt/slides/slide17.xml><?xml version="1.0" encoding="utf-8"?>
 <p:sld xmlns:a="http://schemas.openxmlformats.org/drawingml/2006/main" xmlns:r="http://schemas.openxmlformats.org/officeDocument/2006/relationships" xmlns:p="http://schemas.openxmlformats.org/presentationml/2006/main">
   <p:cSld>
     <p:spTree>
@@ -23294,6 +26640,15 @@
 </file>
 
 <file path=customXml/item1.xml><?xml version="1.0" encoding="utf-8"?>
+<?mso-contentType ?>
+<FormTemplates xmlns="http://schemas.microsoft.com/sharepoint/v3/contenttype/forms">
+  <Display>DocumentLibraryForm</Display>
+  <Edit>DocumentLibraryForm</Edit>
+  <New>DocumentLibraryForm</New>
+</FormTemplates>
+</file>
+
+<file path=customXml/item2.xml><?xml version="1.0" encoding="utf-8"?>
 <ct:contentTypeSchema xmlns:ct="http://schemas.microsoft.com/office/2006/metadata/contentType" xmlns:ma="http://schemas.microsoft.com/office/2006/metadata/properties/metaAttributes" ct:_="" ma:_="" ma:contentTypeName="ドキュメント" ma:contentTypeID="0x010100D291828BE931164DA279E7DB37510E8B" ma:contentTypeVersion="12" ma:contentTypeDescription="新しいドキュメントを作成します。" ma:contentTypeScope="" ma:versionID="d40e79753e265535ebdef0a9a1630dbe">
   <xsd:schema xmlns:xsd="http://www.w3.org/2001/XMLSchema" xmlns:xs="http://www.w3.org/2001/XMLSchema" xmlns:p="http://schemas.microsoft.com/office/2006/metadata/properties" xmlns:ns3="e5fea337-426f-4878-aaa1-6cc4dbed00d3" targetNamespace="http://schemas.microsoft.com/office/2006/metadata/properties" ma:root="true" ma:fieldsID="909ec013045a4ae227a46cef79b1603d" ns3:_="">
     <xsd:import namespace="e5fea337-426f-4878-aaa1-6cc4dbed00d3"/>
@@ -23487,15 +26842,6 @@
 </ct:contentTypeSchema>
 </file>
 
-<file path=customXml/item2.xml><?xml version="1.0" encoding="utf-8"?>
-<?mso-contentType ?>
-<FormTemplates xmlns="http://schemas.microsoft.com/sharepoint/v3/contenttype/forms">
-  <Display>DocumentLibraryForm</Display>
-  <Edit>DocumentLibraryForm</Edit>
-  <New>DocumentLibraryForm</New>
-</FormTemplates>
-</file>
-
 <file path=customXml/item3.xml><?xml version="1.0" encoding="utf-8"?>
 <p:properties xmlns:p="http://schemas.microsoft.com/office/2006/metadata/properties" xmlns:xsi="http://www.w3.org/2001/XMLSchema-instance" xmlns:pc="http://schemas.microsoft.com/office/infopath/2007/PartnerControls">
   <documentManagement>
@@ -23505,6 +26851,14 @@
 </file>
 
 <file path=customXml/itemProps1.xml><?xml version="1.0" encoding="utf-8"?>
+<ds:datastoreItem xmlns:ds="http://schemas.openxmlformats.org/officeDocument/2006/customXml" ds:itemID="{EBB85C3E-FFAD-4A75-A769-4B97E54A903C}">
+  <ds:schemaRefs>
+    <ds:schemaRef ds:uri="http://schemas.microsoft.com/sharepoint/v3/contenttype/forms"/>
+  </ds:schemaRefs>
+</ds:datastoreItem>
+</file>
+
+<file path=customXml/itemProps2.xml><?xml version="1.0" encoding="utf-8"?>
 <ds:datastoreItem xmlns:ds="http://schemas.openxmlformats.org/officeDocument/2006/customXml" ds:itemID="{6231A16C-3E0A-4893-9CB3-DA6770BA5700}">
   <ds:schemaRefs>
     <ds:schemaRef ds:uri="http://schemas.microsoft.com/office/2006/metadata/contentType"/>
@@ -23518,14 +26872,6 @@
     <ds:schemaRef ds:uri="http://purl.org/dc/elements/1.1/"/>
     <ds:schemaRef ds:uri="http://purl.org/dc/terms/"/>
     <ds:schemaRef ds:uri="http://schemas.microsoft.com/internal/obd"/>
-  </ds:schemaRefs>
-</ds:datastoreItem>
-</file>
-
-<file path=customXml/itemProps2.xml><?xml version="1.0" encoding="utf-8"?>
-<ds:datastoreItem xmlns:ds="http://schemas.openxmlformats.org/officeDocument/2006/customXml" ds:itemID="{EBB85C3E-FFAD-4A75-A769-4B97E54A903C}">
-  <ds:schemaRefs>
-    <ds:schemaRef ds:uri="http://schemas.microsoft.com/sharepoint/v3/contenttype/forms"/>
   </ds:schemaRefs>
 </ds:datastoreItem>
 </file>

--- a/Materials.pptx
+++ b/Materials.pptx
@@ -17,11 +17,10 @@
     <p:sldId id="264" r:id="rId14"/>
     <p:sldId id="266" r:id="rId15"/>
     <p:sldId id="274" r:id="rId16"/>
-    <p:sldId id="275" r:id="rId17"/>
-    <p:sldId id="267" r:id="rId18"/>
-    <p:sldId id="272" r:id="rId19"/>
-    <p:sldId id="271" r:id="rId20"/>
-    <p:sldId id="273" r:id="rId21"/>
+    <p:sldId id="267" r:id="rId17"/>
+    <p:sldId id="272" r:id="rId18"/>
+    <p:sldId id="271" r:id="rId19"/>
+    <p:sldId id="273" r:id="rId20"/>
   </p:sldIdLst>
   <p:sldSz cx="12192000" cy="6858000"/>
   <p:notesSz cx="7102475" cy="9388475"/>
@@ -131,7 +130,7 @@
 <file path=ppt/revisionInfo.xml><?xml version="1.0" encoding="utf-8"?>
 <p1510:revInfo xmlns:a="http://schemas.openxmlformats.org/drawingml/2006/main" xmlns:r="http://schemas.openxmlformats.org/officeDocument/2006/relationships" xmlns:p1510="http://schemas.microsoft.com/office/powerpoint/2015/10/main">
   <p1510:revLst>
-    <p1510:client id="{2E73B93B-076D-4B14-AC4D-A7B074A06377}" v="16" dt="2026-10-20T09:02:40.766"/>
+    <p1510:client id="{2E73B93B-076D-4B14-AC4D-A7B074A06377}" v="17" dt="2026-10-20T09:35:45.115"/>
   </p1510:revLst>
 </p1510:revInfo>
 </file>
@@ -141,7 +140,7 @@
   <pc:docChgLst>
     <pc:chgData name="全 香玉" userId="1f3450e5-81b9-4f7a-82d7-841c32c029e0" providerId="ADAL" clId="{670531AC-1667-4F97-B1A6-5D38F8A44A79}"/>
     <pc:docChg chg="undo redo custSel addSld delSld modSld sldOrd">
-      <pc:chgData name="全 香玉" userId="1f3450e5-81b9-4f7a-82d7-841c32c029e0" providerId="ADAL" clId="{670531AC-1667-4F97-B1A6-5D38F8A44A79}" dt="2026-10-20T09:03:04.789" v="3014" actId="14100"/>
+      <pc:chgData name="全 香玉" userId="1f3450e5-81b9-4f7a-82d7-841c32c029e0" providerId="ADAL" clId="{670531AC-1667-4F97-B1A6-5D38F8A44A79}" dt="2026-10-20T09:55:39.171" v="3033" actId="47"/>
       <pc:docMkLst>
         <pc:docMk/>
       </pc:docMkLst>
@@ -400,8 +399,8 @@
           </ac:cxnSpMkLst>
         </pc:cxnChg>
       </pc:sldChg>
-      <pc:sldChg chg="addSp modSp add mod">
-        <pc:chgData name="全 香玉" userId="1f3450e5-81b9-4f7a-82d7-841c32c029e0" providerId="ADAL" clId="{670531AC-1667-4F97-B1A6-5D38F8A44A79}" dt="2026-10-20T09:03:04.789" v="3014" actId="14100"/>
+      <pc:sldChg chg="addSp delSp modSp add del mod">
+        <pc:chgData name="全 香玉" userId="1f3450e5-81b9-4f7a-82d7-841c32c029e0" providerId="ADAL" clId="{670531AC-1667-4F97-B1A6-5D38F8A44A79}" dt="2026-10-20T09:55:39.171" v="3033" actId="47"/>
         <pc:sldMkLst>
           <pc:docMk/>
           <pc:sldMk cId="3528325271" sldId="275"/>
@@ -420,6 +419,14 @@
             <pc:docMk/>
             <pc:sldMk cId="3528325271" sldId="275"/>
             <ac:cxnSpMk id="35" creationId="{7753F6C3-4431-3B85-9660-C900030B9FE1}"/>
+          </ac:cxnSpMkLst>
+        </pc:cxnChg>
+        <pc:cxnChg chg="add del mod">
+          <ac:chgData name="全 香玉" userId="1f3450e5-81b9-4f7a-82d7-841c32c029e0" providerId="ADAL" clId="{670531AC-1667-4F97-B1A6-5D38F8A44A79}" dt="2026-10-20T09:37:03.481" v="3032" actId="478"/>
+          <ac:cxnSpMkLst>
+            <pc:docMk/>
+            <pc:sldMk cId="3528325271" sldId="275"/>
+            <ac:cxnSpMk id="43" creationId="{71A12D6F-2AFB-21C4-6B09-143BBBF57BAA}"/>
           </ac:cxnSpMkLst>
         </pc:cxnChg>
       </pc:sldChg>
@@ -8975,2692 +8982,6 @@
   <p:cSld>
     <p:spTree>
       <p:nvGrpSpPr>
-        <p:cNvPr id="1" name="">
-          <a:extLst>
-            <a:ext uri="{FF2B5EF4-FFF2-40B4-BE49-F238E27FC236}">
-              <a16:creationId xmlns:a16="http://schemas.microsoft.com/office/drawing/2014/main" id="{AD4D4DDE-BAEE-D76E-DFB4-99C383AD32CD}"/>
-            </a:ext>
-          </a:extLst>
-        </p:cNvPr>
-        <p:cNvGrpSpPr/>
-        <p:nvPr/>
-      </p:nvGrpSpPr>
-      <p:grpSpPr>
-        <a:xfrm>
-          <a:off x="0" y="0"/>
-          <a:ext cx="0" cy="0"/>
-          <a:chOff x="0" y="0"/>
-          <a:chExt cx="0" cy="0"/>
-        </a:xfrm>
-      </p:grpSpPr>
-      <p:cxnSp>
-        <p:nvCxnSpPr>
-          <p:cNvPr id="29" name="Straight Arrow Connector 22">
-            <a:extLst>
-              <a:ext uri="{FF2B5EF4-FFF2-40B4-BE49-F238E27FC236}">
-                <a16:creationId xmlns:a16="http://schemas.microsoft.com/office/drawing/2014/main" id="{63B16A5D-4B51-043C-0518-E1148855F686}"/>
-              </a:ext>
-            </a:extLst>
-          </p:cNvPr>
-          <p:cNvCxnSpPr>
-            <a:cxnSpLocks/>
-          </p:cNvCxnSpPr>
-          <p:nvPr/>
-        </p:nvCxnSpPr>
-        <p:spPr>
-          <a:xfrm flipH="1" flipV="1">
-            <a:off x="9398292" y="3059116"/>
-            <a:ext cx="1625319" cy="524261"/>
-          </a:xfrm>
-          <a:prstGeom prst="straightConnector1">
-            <a:avLst/>
-          </a:prstGeom>
-          <a:ln>
-            <a:solidFill>
-              <a:srgbClr val="FF0000"/>
-            </a:solidFill>
-            <a:tailEnd type="triangle"/>
-          </a:ln>
-        </p:spPr>
-        <p:style>
-          <a:lnRef idx="2">
-            <a:schemeClr val="dk1"/>
-          </a:lnRef>
-          <a:fillRef idx="0">
-            <a:schemeClr val="dk1"/>
-          </a:fillRef>
-          <a:effectRef idx="1">
-            <a:schemeClr val="dk1"/>
-          </a:effectRef>
-          <a:fontRef idx="minor">
-            <a:schemeClr val="tx1"/>
-          </a:fontRef>
-        </p:style>
-      </p:cxnSp>
-      <p:cxnSp>
-        <p:nvCxnSpPr>
-          <p:cNvPr id="24" name="Straight Arrow Connector 19">
-            <a:extLst>
-              <a:ext uri="{FF2B5EF4-FFF2-40B4-BE49-F238E27FC236}">
-                <a16:creationId xmlns:a16="http://schemas.microsoft.com/office/drawing/2014/main" id="{06DD9EE0-5BF2-AEAD-C58C-12FDDA9DDD4E}"/>
-              </a:ext>
-            </a:extLst>
-          </p:cNvPr>
-          <p:cNvCxnSpPr>
-            <a:cxnSpLocks/>
-          </p:cNvCxnSpPr>
-          <p:nvPr/>
-        </p:nvCxnSpPr>
-        <p:spPr>
-          <a:xfrm flipV="1">
-            <a:off x="9400688" y="1081445"/>
-            <a:ext cx="1462774" cy="2012161"/>
-          </a:xfrm>
-          <a:prstGeom prst="straightConnector1">
-            <a:avLst/>
-          </a:prstGeom>
-          <a:ln>
-            <a:prstDash val="sysDot"/>
-            <a:headEnd type="arrow" w="med" len="med"/>
-            <a:tailEnd type="none" w="med" len="med"/>
-          </a:ln>
-        </p:spPr>
-        <p:style>
-          <a:lnRef idx="2">
-            <a:schemeClr val="dk1"/>
-          </a:lnRef>
-          <a:fillRef idx="0">
-            <a:schemeClr val="dk1"/>
-          </a:fillRef>
-          <a:effectRef idx="1">
-            <a:schemeClr val="dk1"/>
-          </a:effectRef>
-          <a:fontRef idx="minor">
-            <a:schemeClr val="tx1"/>
-          </a:fontRef>
-        </p:style>
-      </p:cxnSp>
-      <p:sp>
-        <p:nvSpPr>
-          <p:cNvPr id="4" name="Oval 3">
-            <a:extLst>
-              <a:ext uri="{FF2B5EF4-FFF2-40B4-BE49-F238E27FC236}">
-                <a16:creationId xmlns:a16="http://schemas.microsoft.com/office/drawing/2014/main" id="{73C5F88A-A101-AA0E-A508-A68B3BC7C27B}"/>
-              </a:ext>
-            </a:extLst>
-          </p:cNvPr>
-          <p:cNvSpPr/>
-          <p:nvPr/>
-        </p:nvSpPr>
-        <p:spPr>
-          <a:xfrm>
-            <a:off x="2946400" y="1981200"/>
-            <a:ext cx="1479550" cy="2120900"/>
-          </a:xfrm>
-          <a:prstGeom prst="ellipse">
-            <a:avLst/>
-          </a:prstGeom>
-          <a:solidFill>
-            <a:schemeClr val="bg2">
-              <a:lumMod val="90000"/>
-            </a:schemeClr>
-          </a:solidFill>
-        </p:spPr>
-        <p:style>
-          <a:lnRef idx="2">
-            <a:schemeClr val="dk1">
-              <a:shade val="15000"/>
-            </a:schemeClr>
-          </a:lnRef>
-          <a:fillRef idx="1">
-            <a:schemeClr val="dk1"/>
-          </a:fillRef>
-          <a:effectRef idx="0">
-            <a:schemeClr val="dk1"/>
-          </a:effectRef>
-          <a:fontRef idx="minor">
-            <a:schemeClr val="lt1"/>
-          </a:fontRef>
-        </p:style>
-        <p:txBody>
-          <a:bodyPr rtlCol="0" anchor="ctr"/>
-          <a:lstStyle/>
-          <a:p>
-            <a:pPr algn="ctr"/>
-            <a:endParaRPr kumimoji="1" lang="ja-JP" altLang="en-US" dirty="0"/>
-          </a:p>
-        </p:txBody>
-      </p:sp>
-      <p:sp>
-        <p:nvSpPr>
-          <p:cNvPr id="5" name="Oval 4">
-            <a:extLst>
-              <a:ext uri="{FF2B5EF4-FFF2-40B4-BE49-F238E27FC236}">
-                <a16:creationId xmlns:a16="http://schemas.microsoft.com/office/drawing/2014/main" id="{1DDE4627-45C7-36C9-11E7-C763CE3863B7}"/>
-              </a:ext>
-            </a:extLst>
-          </p:cNvPr>
-          <p:cNvSpPr/>
-          <p:nvPr/>
-        </p:nvSpPr>
-        <p:spPr>
-          <a:xfrm>
-            <a:off x="3282950" y="2495550"/>
-            <a:ext cx="737532" cy="1057234"/>
-          </a:xfrm>
-          <a:prstGeom prst="ellipse">
-            <a:avLst/>
-          </a:prstGeom>
-          <a:solidFill>
-            <a:schemeClr val="bg1"/>
-          </a:solidFill>
-        </p:spPr>
-        <p:style>
-          <a:lnRef idx="2">
-            <a:schemeClr val="dk1">
-              <a:shade val="15000"/>
-            </a:schemeClr>
-          </a:lnRef>
-          <a:fillRef idx="1">
-            <a:schemeClr val="dk1"/>
-          </a:fillRef>
-          <a:effectRef idx="0">
-            <a:schemeClr val="dk1"/>
-          </a:effectRef>
-          <a:fontRef idx="minor">
-            <a:schemeClr val="lt1"/>
-          </a:fontRef>
-        </p:style>
-        <p:txBody>
-          <a:bodyPr rtlCol="0" anchor="ctr"/>
-          <a:lstStyle/>
-          <a:p>
-            <a:pPr algn="ctr"/>
-            <a:endParaRPr kumimoji="1" lang="ja-JP" altLang="en-US"/>
-          </a:p>
-        </p:txBody>
-      </p:sp>
-      <p:cxnSp>
-        <p:nvCxnSpPr>
-          <p:cNvPr id="7" name="Straight Connector 6">
-            <a:extLst>
-              <a:ext uri="{FF2B5EF4-FFF2-40B4-BE49-F238E27FC236}">
-                <a16:creationId xmlns:a16="http://schemas.microsoft.com/office/drawing/2014/main" id="{5033A3BD-3A8C-588A-9E7A-56B4C4D4D0F2}"/>
-              </a:ext>
-            </a:extLst>
-          </p:cNvPr>
-          <p:cNvCxnSpPr>
-            <a:stCxn id="4" idx="0"/>
-          </p:cNvCxnSpPr>
-          <p:nvPr/>
-        </p:nvCxnSpPr>
-        <p:spPr>
-          <a:xfrm>
-            <a:off x="3686175" y="1981200"/>
-            <a:ext cx="3971925" cy="0"/>
-          </a:xfrm>
-          <a:prstGeom prst="line">
-            <a:avLst/>
-          </a:prstGeom>
-        </p:spPr>
-        <p:style>
-          <a:lnRef idx="2">
-            <a:schemeClr val="dk1"/>
-          </a:lnRef>
-          <a:fillRef idx="0">
-            <a:schemeClr val="dk1"/>
-          </a:fillRef>
-          <a:effectRef idx="1">
-            <a:schemeClr val="dk1"/>
-          </a:effectRef>
-          <a:fontRef idx="minor">
-            <a:schemeClr val="tx1"/>
-          </a:fontRef>
-        </p:style>
-      </p:cxnSp>
-      <p:cxnSp>
-        <p:nvCxnSpPr>
-          <p:cNvPr id="8" name="Straight Connector 7">
-            <a:extLst>
-              <a:ext uri="{FF2B5EF4-FFF2-40B4-BE49-F238E27FC236}">
-                <a16:creationId xmlns:a16="http://schemas.microsoft.com/office/drawing/2014/main" id="{8065361E-D32D-0501-A657-BFFA876F2288}"/>
-              </a:ext>
-            </a:extLst>
-          </p:cNvPr>
-          <p:cNvCxnSpPr>
-            <a:cxnSpLocks/>
-            <a:stCxn id="4" idx="4"/>
-          </p:cNvCxnSpPr>
-          <p:nvPr/>
-        </p:nvCxnSpPr>
-        <p:spPr>
-          <a:xfrm>
-            <a:off x="3686175" y="4102100"/>
-            <a:ext cx="4079877" cy="0"/>
-          </a:xfrm>
-          <a:prstGeom prst="line">
-            <a:avLst/>
-          </a:prstGeom>
-        </p:spPr>
-        <p:style>
-          <a:lnRef idx="2">
-            <a:schemeClr val="dk1"/>
-          </a:lnRef>
-          <a:fillRef idx="0">
-            <a:schemeClr val="dk1"/>
-          </a:fillRef>
-          <a:effectRef idx="1">
-            <a:schemeClr val="dk1"/>
-          </a:effectRef>
-          <a:fontRef idx="minor">
-            <a:schemeClr val="tx1"/>
-          </a:fontRef>
-        </p:style>
-      </p:cxnSp>
-      <p:cxnSp>
-        <p:nvCxnSpPr>
-          <p:cNvPr id="20" name="Straight Arrow Connector 19">
-            <a:extLst>
-              <a:ext uri="{FF2B5EF4-FFF2-40B4-BE49-F238E27FC236}">
-                <a16:creationId xmlns:a16="http://schemas.microsoft.com/office/drawing/2014/main" id="{3C8F5B36-4EFA-8DEF-0ADF-58406D74F6C4}"/>
-              </a:ext>
-            </a:extLst>
-          </p:cNvPr>
-          <p:cNvCxnSpPr>
-            <a:cxnSpLocks/>
-          </p:cNvCxnSpPr>
-          <p:nvPr/>
-        </p:nvCxnSpPr>
-        <p:spPr>
-          <a:xfrm>
-            <a:off x="4425950" y="3088685"/>
-            <a:ext cx="3536950" cy="0"/>
-          </a:xfrm>
-          <a:prstGeom prst="straightConnector1">
-            <a:avLst/>
-          </a:prstGeom>
-          <a:ln>
-            <a:prstDash val="sysDot"/>
-            <a:tailEnd type="triangle"/>
-          </a:ln>
-        </p:spPr>
-        <p:style>
-          <a:lnRef idx="2">
-            <a:schemeClr val="dk1"/>
-          </a:lnRef>
-          <a:fillRef idx="0">
-            <a:schemeClr val="dk1"/>
-          </a:fillRef>
-          <a:effectRef idx="1">
-            <a:schemeClr val="dk1"/>
-          </a:effectRef>
-          <a:fontRef idx="minor">
-            <a:schemeClr val="tx1"/>
-          </a:fontRef>
-        </p:style>
-      </p:cxnSp>
-      <p:cxnSp>
-        <p:nvCxnSpPr>
-          <p:cNvPr id="21" name="Straight Arrow Connector 20">
-            <a:extLst>
-              <a:ext uri="{FF2B5EF4-FFF2-40B4-BE49-F238E27FC236}">
-                <a16:creationId xmlns:a16="http://schemas.microsoft.com/office/drawing/2014/main" id="{C0E66F11-D00D-6A8A-1273-48FB82BA6515}"/>
-              </a:ext>
-            </a:extLst>
-          </p:cNvPr>
-          <p:cNvCxnSpPr>
-            <a:cxnSpLocks/>
-          </p:cNvCxnSpPr>
-          <p:nvPr/>
-        </p:nvCxnSpPr>
-        <p:spPr>
-          <a:xfrm flipV="1">
-            <a:off x="3683918" y="1498600"/>
-            <a:ext cx="0" cy="3498850"/>
-          </a:xfrm>
-          <a:prstGeom prst="straightConnector1">
-            <a:avLst/>
-          </a:prstGeom>
-          <a:ln>
-            <a:prstDash val="sysDot"/>
-            <a:tailEnd type="triangle"/>
-          </a:ln>
-        </p:spPr>
-        <p:style>
-          <a:lnRef idx="2">
-            <a:schemeClr val="dk1"/>
-          </a:lnRef>
-          <a:fillRef idx="0">
-            <a:schemeClr val="dk1"/>
-          </a:fillRef>
-          <a:effectRef idx="1">
-            <a:schemeClr val="dk1"/>
-          </a:effectRef>
-          <a:fontRef idx="minor">
-            <a:schemeClr val="tx1"/>
-          </a:fontRef>
-        </p:style>
-      </p:cxnSp>
-      <p:sp>
-        <p:nvSpPr>
-          <p:cNvPr id="26" name="TextBox 25">
-            <a:extLst>
-              <a:ext uri="{FF2B5EF4-FFF2-40B4-BE49-F238E27FC236}">
-                <a16:creationId xmlns:a16="http://schemas.microsoft.com/office/drawing/2014/main" id="{3FEBA738-58D5-D278-38C0-7881AD1FD939}"/>
-              </a:ext>
-            </a:extLst>
-          </p:cNvPr>
-          <p:cNvSpPr txBox="1"/>
-          <p:nvPr/>
-        </p:nvSpPr>
-        <p:spPr>
-          <a:xfrm>
-            <a:off x="3533877" y="1084558"/>
-            <a:ext cx="300082" cy="369332"/>
-          </a:xfrm>
-          <a:prstGeom prst="rect">
-            <a:avLst/>
-          </a:prstGeom>
-          <a:noFill/>
-        </p:spPr>
-        <p:txBody>
-          <a:bodyPr wrap="none" rtlCol="0">
-            <a:spAutoFit/>
-          </a:bodyPr>
-          <a:lstStyle/>
-          <a:p>
-            <a:r>
-              <a:rPr kumimoji="1" lang="en-US" altLang="ja-JP" dirty="0">
-                <a:latin typeface="times" panose="02020603050405020304" pitchFamily="18" charset="0"/>
-                <a:cs typeface="times" panose="02020603050405020304" pitchFamily="18" charset="0"/>
-              </a:rPr>
-              <a:t>x</a:t>
-            </a:r>
-            <a:endParaRPr kumimoji="1" lang="ja-JP" altLang="en-US" dirty="0">
-              <a:latin typeface="times" panose="02020603050405020304" pitchFamily="18" charset="0"/>
-              <a:cs typeface="times" panose="02020603050405020304" pitchFamily="18" charset="0"/>
-            </a:endParaRPr>
-          </a:p>
-        </p:txBody>
-      </p:sp>
-      <p:sp>
-        <p:nvSpPr>
-          <p:cNvPr id="27" name="TextBox 26">
-            <a:extLst>
-              <a:ext uri="{FF2B5EF4-FFF2-40B4-BE49-F238E27FC236}">
-                <a16:creationId xmlns:a16="http://schemas.microsoft.com/office/drawing/2014/main" id="{08FF346C-E6F2-0510-1A29-31C2018F0D8D}"/>
-              </a:ext>
-            </a:extLst>
-          </p:cNvPr>
-          <p:cNvSpPr txBox="1"/>
-          <p:nvPr/>
-        </p:nvSpPr>
-        <p:spPr>
-          <a:xfrm>
-            <a:off x="2667607" y="1796446"/>
-            <a:ext cx="300082" cy="369332"/>
-          </a:xfrm>
-          <a:prstGeom prst="rect">
-            <a:avLst/>
-          </a:prstGeom>
-          <a:noFill/>
-        </p:spPr>
-        <p:txBody>
-          <a:bodyPr wrap="none" rtlCol="0">
-            <a:spAutoFit/>
-          </a:bodyPr>
-          <a:lstStyle/>
-          <a:p>
-            <a:r>
-              <a:rPr kumimoji="1" lang="en-US" altLang="ja-JP" dirty="0">
-                <a:latin typeface="times" panose="02020603050405020304" pitchFamily="18" charset="0"/>
-                <a:cs typeface="times" panose="02020603050405020304" pitchFamily="18" charset="0"/>
-              </a:rPr>
-              <a:t>y</a:t>
-            </a:r>
-            <a:endParaRPr kumimoji="1" lang="ja-JP" altLang="en-US" dirty="0">
-              <a:latin typeface="times" panose="02020603050405020304" pitchFamily="18" charset="0"/>
-              <a:cs typeface="times" panose="02020603050405020304" pitchFamily="18" charset="0"/>
-            </a:endParaRPr>
-          </a:p>
-        </p:txBody>
-      </p:sp>
-      <p:sp>
-        <p:nvSpPr>
-          <p:cNvPr id="28" name="TextBox 27">
-            <a:extLst>
-              <a:ext uri="{FF2B5EF4-FFF2-40B4-BE49-F238E27FC236}">
-                <a16:creationId xmlns:a16="http://schemas.microsoft.com/office/drawing/2014/main" id="{A21ECC67-1C4A-13FC-EF9E-D13EF3F2652B}"/>
-              </a:ext>
-            </a:extLst>
-          </p:cNvPr>
-          <p:cNvSpPr txBox="1"/>
-          <p:nvPr/>
-        </p:nvSpPr>
-        <p:spPr>
-          <a:xfrm>
-            <a:off x="7675642" y="3004643"/>
-            <a:ext cx="287258" cy="369332"/>
-          </a:xfrm>
-          <a:prstGeom prst="rect">
-            <a:avLst/>
-          </a:prstGeom>
-          <a:noFill/>
-        </p:spPr>
-        <p:txBody>
-          <a:bodyPr wrap="none" rtlCol="0">
-            <a:spAutoFit/>
-          </a:bodyPr>
-          <a:lstStyle/>
-          <a:p>
-            <a:r>
-              <a:rPr kumimoji="1" lang="en-US" altLang="ja-JP" dirty="0">
-                <a:latin typeface="times" panose="02020603050405020304" pitchFamily="18" charset="0"/>
-                <a:cs typeface="times" panose="02020603050405020304" pitchFamily="18" charset="0"/>
-              </a:rPr>
-              <a:t>z</a:t>
-            </a:r>
-            <a:endParaRPr kumimoji="1" lang="ja-JP" altLang="en-US" dirty="0">
-              <a:latin typeface="times" panose="02020603050405020304" pitchFamily="18" charset="0"/>
-              <a:cs typeface="times" panose="02020603050405020304" pitchFamily="18" charset="0"/>
-            </a:endParaRPr>
-          </a:p>
-        </p:txBody>
-      </p:sp>
-      <p:cxnSp>
-        <p:nvCxnSpPr>
-          <p:cNvPr id="6" name="Straight Arrow Connector 19">
-            <a:extLst>
-              <a:ext uri="{FF2B5EF4-FFF2-40B4-BE49-F238E27FC236}">
-                <a16:creationId xmlns:a16="http://schemas.microsoft.com/office/drawing/2014/main" id="{42C3E7C7-190E-C8D2-F022-FF4CF98EB436}"/>
-              </a:ext>
-            </a:extLst>
-          </p:cNvPr>
-          <p:cNvCxnSpPr>
-            <a:cxnSpLocks/>
-          </p:cNvCxnSpPr>
-          <p:nvPr/>
-        </p:nvCxnSpPr>
-        <p:spPr>
-          <a:xfrm>
-            <a:off x="2946400" y="2165778"/>
-            <a:ext cx="2011715" cy="2446487"/>
-          </a:xfrm>
-          <a:prstGeom prst="straightConnector1">
-            <a:avLst/>
-          </a:prstGeom>
-          <a:ln>
-            <a:prstDash val="sysDot"/>
-            <a:headEnd type="arrow" w="med" len="med"/>
-            <a:tailEnd type="none" w="med" len="med"/>
-          </a:ln>
-        </p:spPr>
-        <p:style>
-          <a:lnRef idx="2">
-            <a:schemeClr val="dk1"/>
-          </a:lnRef>
-          <a:fillRef idx="0">
-            <a:schemeClr val="dk1"/>
-          </a:fillRef>
-          <a:effectRef idx="1">
-            <a:schemeClr val="dk1"/>
-          </a:effectRef>
-          <a:fontRef idx="minor">
-            <a:schemeClr val="tx1"/>
-          </a:fontRef>
-        </p:style>
-      </p:cxnSp>
-      <p:cxnSp>
-        <p:nvCxnSpPr>
-          <p:cNvPr id="31" name="Straight Arrow Connector 19">
-            <a:extLst>
-              <a:ext uri="{FF2B5EF4-FFF2-40B4-BE49-F238E27FC236}">
-                <a16:creationId xmlns:a16="http://schemas.microsoft.com/office/drawing/2014/main" id="{136F74C8-F7A2-9CF4-CA13-7EC1C7058EB3}"/>
-              </a:ext>
-            </a:extLst>
-          </p:cNvPr>
-          <p:cNvCxnSpPr>
-            <a:cxnSpLocks/>
-          </p:cNvCxnSpPr>
-          <p:nvPr/>
-        </p:nvCxnSpPr>
-        <p:spPr>
-          <a:xfrm>
-            <a:off x="3683918" y="3074953"/>
-            <a:ext cx="336564" cy="0"/>
-          </a:xfrm>
-          <a:prstGeom prst="straightConnector1">
-            <a:avLst/>
-          </a:prstGeom>
-          <a:ln>
-            <a:prstDash val="sysDot"/>
-            <a:headEnd type="none" w="med" len="med"/>
-            <a:tailEnd type="none" w="med" len="med"/>
-          </a:ln>
-        </p:spPr>
-        <p:style>
-          <a:lnRef idx="2">
-            <a:schemeClr val="dk1"/>
-          </a:lnRef>
-          <a:fillRef idx="0">
-            <a:schemeClr val="dk1"/>
-          </a:fillRef>
-          <a:effectRef idx="1">
-            <a:schemeClr val="dk1"/>
-          </a:effectRef>
-          <a:fontRef idx="minor">
-            <a:schemeClr val="tx1"/>
-          </a:fontRef>
-        </p:style>
-      </p:cxnSp>
-      <p:grpSp>
-        <p:nvGrpSpPr>
-          <p:cNvPr id="59" name="그룹 58">
-            <a:extLst>
-              <a:ext uri="{FF2B5EF4-FFF2-40B4-BE49-F238E27FC236}">
-                <a16:creationId xmlns:a16="http://schemas.microsoft.com/office/drawing/2014/main" id="{909A0F58-1889-D9C2-2268-0DDFD6C82A31}"/>
-              </a:ext>
-            </a:extLst>
-          </p:cNvPr>
-          <p:cNvGrpSpPr/>
-          <p:nvPr/>
-        </p:nvGrpSpPr>
-        <p:grpSpPr>
-          <a:xfrm rot="378356">
-            <a:off x="1830944" y="1847269"/>
-            <a:ext cx="3674235" cy="2561673"/>
-            <a:chOff x="1845071" y="1861618"/>
-            <a:chExt cx="3674235" cy="2561673"/>
-          </a:xfrm>
-        </p:grpSpPr>
-        <p:cxnSp>
-          <p:nvCxnSpPr>
-            <p:cNvPr id="23" name="Straight Arrow Connector 22">
-              <a:extLst>
-                <a:ext uri="{FF2B5EF4-FFF2-40B4-BE49-F238E27FC236}">
-                  <a16:creationId xmlns:a16="http://schemas.microsoft.com/office/drawing/2014/main" id="{DB533987-1CFF-8959-9B0D-7540FFE4DABC}"/>
-                </a:ext>
-              </a:extLst>
-            </p:cNvPr>
-            <p:cNvCxnSpPr>
-              <a:cxnSpLocks/>
-            </p:cNvCxnSpPr>
-            <p:nvPr/>
-          </p:nvCxnSpPr>
-          <p:spPr>
-            <a:xfrm flipV="1">
-              <a:off x="1845071" y="3056062"/>
-              <a:ext cx="1888729" cy="1367229"/>
-            </a:xfrm>
-            <a:prstGeom prst="straightConnector1">
-              <a:avLst/>
-            </a:prstGeom>
-            <a:ln>
-              <a:solidFill>
-                <a:srgbClr val="FF0000"/>
-              </a:solidFill>
-              <a:tailEnd type="triangle"/>
-            </a:ln>
-          </p:spPr>
-          <p:style>
-            <a:lnRef idx="2">
-              <a:schemeClr val="dk1"/>
-            </a:lnRef>
-            <a:fillRef idx="0">
-              <a:schemeClr val="dk1"/>
-            </a:fillRef>
-            <a:effectRef idx="1">
-              <a:schemeClr val="dk1"/>
-            </a:effectRef>
-            <a:fontRef idx="minor">
-              <a:schemeClr val="tx1"/>
-            </a:fontRef>
-          </p:style>
-        </p:cxnSp>
-        <p:cxnSp>
-          <p:nvCxnSpPr>
-            <p:cNvPr id="39" name="Straight Arrow Connector 22">
-              <a:extLst>
-                <a:ext uri="{FF2B5EF4-FFF2-40B4-BE49-F238E27FC236}">
-                  <a16:creationId xmlns:a16="http://schemas.microsoft.com/office/drawing/2014/main" id="{3AAB29C5-10F8-6AEC-E603-8B34F68C0575}"/>
-                </a:ext>
-              </a:extLst>
-            </p:cNvPr>
-            <p:cNvCxnSpPr>
-              <a:cxnSpLocks/>
-            </p:cNvCxnSpPr>
-            <p:nvPr/>
-          </p:nvCxnSpPr>
-          <p:spPr>
-            <a:xfrm rot="21221644" flipV="1">
-              <a:off x="4308375" y="1861618"/>
-              <a:ext cx="1210931" cy="687748"/>
-            </a:xfrm>
-            <a:prstGeom prst="straightConnector1">
-              <a:avLst/>
-            </a:prstGeom>
-            <a:ln>
-              <a:solidFill>
-                <a:srgbClr val="FF0000"/>
-              </a:solidFill>
-              <a:tailEnd type="triangle"/>
-            </a:ln>
-          </p:spPr>
-          <p:style>
-            <a:lnRef idx="2">
-              <a:schemeClr val="dk1"/>
-            </a:lnRef>
-            <a:fillRef idx="0">
-              <a:schemeClr val="dk1"/>
-            </a:fillRef>
-            <a:effectRef idx="1">
-              <a:schemeClr val="dk1"/>
-            </a:effectRef>
-            <a:fontRef idx="minor">
-              <a:schemeClr val="tx1"/>
-            </a:fontRef>
-          </p:style>
-        </p:cxnSp>
-        <p:cxnSp>
-          <p:nvCxnSpPr>
-            <p:cNvPr id="44" name="Straight Arrow Connector 22">
-              <a:extLst>
-                <a:ext uri="{FF2B5EF4-FFF2-40B4-BE49-F238E27FC236}">
-                  <a16:creationId xmlns:a16="http://schemas.microsoft.com/office/drawing/2014/main" id="{46308FED-5A90-3739-EEF3-9D6B8CCF29A8}"/>
-                </a:ext>
-              </a:extLst>
-            </p:cNvPr>
-            <p:cNvCxnSpPr>
-              <a:cxnSpLocks/>
-            </p:cNvCxnSpPr>
-            <p:nvPr/>
-          </p:nvCxnSpPr>
-          <p:spPr>
-            <a:xfrm flipV="1">
-              <a:off x="3700367" y="2609702"/>
-              <a:ext cx="649919" cy="470469"/>
-            </a:xfrm>
-            <a:prstGeom prst="straightConnector1">
-              <a:avLst/>
-            </a:prstGeom>
-            <a:ln>
-              <a:solidFill>
-                <a:srgbClr val="FF0000"/>
-              </a:solidFill>
-              <a:prstDash val="sysDot"/>
-              <a:headEnd type="none" w="med" len="med"/>
-              <a:tailEnd type="none" w="med" len="med"/>
-            </a:ln>
-          </p:spPr>
-          <p:style>
-            <a:lnRef idx="2">
-              <a:schemeClr val="dk1"/>
-            </a:lnRef>
-            <a:fillRef idx="0">
-              <a:schemeClr val="dk1"/>
-            </a:fillRef>
-            <a:effectRef idx="1">
-              <a:schemeClr val="dk1"/>
-            </a:effectRef>
-            <a:fontRef idx="minor">
-              <a:schemeClr val="tx1"/>
-            </a:fontRef>
-          </p:style>
-        </p:cxnSp>
-      </p:grpSp>
-      <p:sp>
-        <p:nvSpPr>
-          <p:cNvPr id="49" name="막힌 원호 48">
-            <a:extLst>
-              <a:ext uri="{FF2B5EF4-FFF2-40B4-BE49-F238E27FC236}">
-                <a16:creationId xmlns:a16="http://schemas.microsoft.com/office/drawing/2014/main" id="{2F8FEBC0-1727-2317-804C-807573E84E08}"/>
-              </a:ext>
-            </a:extLst>
-          </p:cNvPr>
-          <p:cNvSpPr/>
-          <p:nvPr/>
-        </p:nvSpPr>
-        <p:spPr>
-          <a:xfrm rot="4701866">
-            <a:off x="4289355" y="2759001"/>
-            <a:ext cx="448730" cy="227548"/>
-          </a:xfrm>
-          <a:prstGeom prst="blockArc">
-            <a:avLst>
-              <a:gd name="adj1" fmla="val 10800000"/>
-              <a:gd name="adj2" fmla="val 21574061"/>
-              <a:gd name="adj3" fmla="val 0"/>
-            </a:avLst>
-          </a:prstGeom>
-        </p:spPr>
-        <p:style>
-          <a:lnRef idx="2">
-            <a:schemeClr val="accent1">
-              <a:shade val="15000"/>
-            </a:schemeClr>
-          </a:lnRef>
-          <a:fillRef idx="1">
-            <a:schemeClr val="accent1"/>
-          </a:fillRef>
-          <a:effectRef idx="0">
-            <a:schemeClr val="accent1"/>
-          </a:effectRef>
-          <a:fontRef idx="minor">
-            <a:schemeClr val="lt1"/>
-          </a:fontRef>
-        </p:style>
-        <p:txBody>
-          <a:bodyPr rtlCol="0" anchor="ctr"/>
-          <a:lstStyle/>
-          <a:p>
-            <a:pPr algn="ctr"/>
-            <a:endParaRPr lang="en-US">
-              <a:solidFill>
-                <a:schemeClr val="tx1"/>
-              </a:solidFill>
-            </a:endParaRPr>
-          </a:p>
-        </p:txBody>
-      </p:sp>
-      <mc:AlternateContent xmlns:mc="http://schemas.openxmlformats.org/markup-compatibility/2006" xmlns:a14="http://schemas.microsoft.com/office/drawing/2010/main">
-        <mc:Choice Requires="a14">
-          <p:sp>
-            <p:nvSpPr>
-              <p:cNvPr id="50" name="TextBox 49">
-                <a:extLst>
-                  <a:ext uri="{FF2B5EF4-FFF2-40B4-BE49-F238E27FC236}">
-                    <a16:creationId xmlns:a16="http://schemas.microsoft.com/office/drawing/2014/main" id="{69F5439B-EB51-A5F5-6A14-956DE0E76882}"/>
-                  </a:ext>
-                </a:extLst>
-              </p:cNvPr>
-              <p:cNvSpPr txBox="1"/>
-              <p:nvPr/>
-            </p:nvSpPr>
-            <p:spPr>
-              <a:xfrm>
-                <a:off x="4661968" y="2582222"/>
-                <a:ext cx="270330" cy="369332"/>
-              </a:xfrm>
-              <a:prstGeom prst="rect">
-                <a:avLst/>
-              </a:prstGeom>
-              <a:noFill/>
-            </p:spPr>
-            <p:txBody>
-              <a:bodyPr wrap="none" lIns="0" tIns="0" rIns="0" bIns="0" rtlCol="0">
-                <a:spAutoFit/>
-              </a:bodyPr>
-              <a:lstStyle/>
-              <a:p>
-                <a:pPr/>
-                <a14:m>
-                  <m:oMathPara xmlns:m="http://schemas.openxmlformats.org/officeDocument/2006/math">
-                    <m:oMath>
-                      <m:r>
-                        <a:rPr lang="en-US" sz="2400" i="1" smtClean="0">
-                          <a:latin typeface="Cambria Math" panose="02040503050406030204" pitchFamily="18" charset="0"/>
-                          <a:ea typeface="Cambria Math" panose="02040503050406030204" pitchFamily="18" charset="0"/>
-                        </a:rPr>
-                        <m:t>𝜃</m:t>
-                      </m:r>
-                    </m:oMath>
-                  </m:oMathPara>
-                </a14:m>
-                <a:endParaRPr lang="en-US" sz="2400" dirty="0"/>
-              </a:p>
-            </p:txBody>
-          </p:sp>
-        </mc:Choice>
-        <mc:Fallback xmlns="">
-          <p:sp>
-            <p:nvSpPr>
-              <p:cNvPr id="50" name="TextBox 49">
-                <a:extLst>
-                  <a:ext uri="{FF2B5EF4-FFF2-40B4-BE49-F238E27FC236}">
-                    <a16:creationId xmlns:a16="http://schemas.microsoft.com/office/drawing/2014/main" id="{57F4BA69-D557-1588-83C2-C9943254ACF6}"/>
-                  </a:ext>
-                </a:extLst>
-              </p:cNvPr>
-              <p:cNvSpPr txBox="1">
-                <a:spLocks noRot="1" noChangeAspect="1" noMove="1" noResize="1" noEditPoints="1" noAdjustHandles="1" noChangeArrowheads="1" noChangeShapeType="1" noTextEdit="1"/>
-              </p:cNvSpPr>
-              <p:nvPr/>
-            </p:nvSpPr>
-            <p:spPr>
-              <a:xfrm>
-                <a:off x="4661968" y="2582222"/>
-                <a:ext cx="270330" cy="369332"/>
-              </a:xfrm>
-              <a:prstGeom prst="rect">
-                <a:avLst/>
-              </a:prstGeom>
-              <a:blipFill>
-                <a:blip r:embed="rId2"/>
-                <a:stretch>
-                  <a:fillRect l="-25000" r="-18182" b="-5000"/>
-                </a:stretch>
-              </a:blipFill>
-            </p:spPr>
-            <p:txBody>
-              <a:bodyPr/>
-              <a:lstStyle/>
-              <a:p>
-                <a:r>
-                  <a:rPr lang="en-US">
-                    <a:noFill/>
-                  </a:rPr>
-                  <a:t> </a:t>
-                </a:r>
-              </a:p>
-            </p:txBody>
-          </p:sp>
-        </mc:Fallback>
-      </mc:AlternateContent>
-      <p:sp>
-        <p:nvSpPr>
-          <p:cNvPr id="68" name="Oval 3">
-            <a:extLst>
-              <a:ext uri="{FF2B5EF4-FFF2-40B4-BE49-F238E27FC236}">
-                <a16:creationId xmlns:a16="http://schemas.microsoft.com/office/drawing/2014/main" id="{3579053C-BA13-78DB-C32E-44DE65CBB979}"/>
-              </a:ext>
-            </a:extLst>
-          </p:cNvPr>
-          <p:cNvSpPr/>
-          <p:nvPr/>
-        </p:nvSpPr>
-        <p:spPr>
-          <a:xfrm>
-            <a:off x="8356032" y="1981200"/>
-            <a:ext cx="2102457" cy="2120900"/>
-          </a:xfrm>
-          <a:prstGeom prst="ellipse">
-            <a:avLst/>
-          </a:prstGeom>
-          <a:solidFill>
-            <a:schemeClr val="bg2"/>
-          </a:solidFill>
-        </p:spPr>
-        <p:style>
-          <a:lnRef idx="2">
-            <a:schemeClr val="dk1">
-              <a:shade val="15000"/>
-            </a:schemeClr>
-          </a:lnRef>
-          <a:fillRef idx="1">
-            <a:schemeClr val="dk1"/>
-          </a:fillRef>
-          <a:effectRef idx="0">
-            <a:schemeClr val="dk1"/>
-          </a:effectRef>
-          <a:fontRef idx="minor">
-            <a:schemeClr val="lt1"/>
-          </a:fontRef>
-        </p:style>
-        <p:txBody>
-          <a:bodyPr rtlCol="0" anchor="ctr"/>
-          <a:lstStyle/>
-          <a:p>
-            <a:pPr algn="ctr"/>
-            <a:endParaRPr kumimoji="1" lang="ja-JP" altLang="en-US" dirty="0"/>
-          </a:p>
-        </p:txBody>
-      </p:sp>
-      <p:cxnSp>
-        <p:nvCxnSpPr>
-          <p:cNvPr id="69" name="Straight Arrow Connector 19">
-            <a:extLst>
-              <a:ext uri="{FF2B5EF4-FFF2-40B4-BE49-F238E27FC236}">
-                <a16:creationId xmlns:a16="http://schemas.microsoft.com/office/drawing/2014/main" id="{66474824-C34E-F39D-C173-8300FE581968}"/>
-              </a:ext>
-            </a:extLst>
-          </p:cNvPr>
-          <p:cNvCxnSpPr>
-            <a:cxnSpLocks/>
-          </p:cNvCxnSpPr>
-          <p:nvPr/>
-        </p:nvCxnSpPr>
-        <p:spPr>
-          <a:xfrm flipH="1">
-            <a:off x="9407260" y="3087606"/>
-            <a:ext cx="1556985" cy="0"/>
-          </a:xfrm>
-          <a:prstGeom prst="straightConnector1">
-            <a:avLst/>
-          </a:prstGeom>
-          <a:ln>
-            <a:prstDash val="sysDot"/>
-            <a:headEnd type="arrow" w="med" len="med"/>
-            <a:tailEnd type="none" w="med" len="med"/>
-          </a:ln>
-        </p:spPr>
-        <p:style>
-          <a:lnRef idx="2">
-            <a:schemeClr val="dk1"/>
-          </a:lnRef>
-          <a:fillRef idx="0">
-            <a:schemeClr val="dk1"/>
-          </a:fillRef>
-          <a:effectRef idx="1">
-            <a:schemeClr val="dk1"/>
-          </a:effectRef>
-          <a:fontRef idx="minor">
-            <a:schemeClr val="tx1"/>
-          </a:fontRef>
-        </p:style>
-      </p:cxnSp>
-      <p:cxnSp>
-        <p:nvCxnSpPr>
-          <p:cNvPr id="72" name="Straight Arrow Connector 20">
-            <a:extLst>
-              <a:ext uri="{FF2B5EF4-FFF2-40B4-BE49-F238E27FC236}">
-                <a16:creationId xmlns:a16="http://schemas.microsoft.com/office/drawing/2014/main" id="{2A6AB7F3-583B-AEC9-6B21-22D4D41708C5}"/>
-              </a:ext>
-            </a:extLst>
-          </p:cNvPr>
-          <p:cNvCxnSpPr>
-            <a:cxnSpLocks/>
-          </p:cNvCxnSpPr>
-          <p:nvPr/>
-        </p:nvCxnSpPr>
-        <p:spPr>
-          <a:xfrm flipV="1">
-            <a:off x="9407260" y="1018745"/>
-            <a:ext cx="0" cy="2096732"/>
-          </a:xfrm>
-          <a:prstGeom prst="straightConnector1">
-            <a:avLst/>
-          </a:prstGeom>
-          <a:ln>
-            <a:prstDash val="sysDot"/>
-            <a:tailEnd type="triangle"/>
-          </a:ln>
-        </p:spPr>
-        <p:style>
-          <a:lnRef idx="2">
-            <a:schemeClr val="dk1"/>
-          </a:lnRef>
-          <a:fillRef idx="0">
-            <a:schemeClr val="dk1"/>
-          </a:fillRef>
-          <a:effectRef idx="1">
-            <a:schemeClr val="dk1"/>
-          </a:effectRef>
-          <a:fontRef idx="minor">
-            <a:schemeClr val="tx1"/>
-          </a:fontRef>
-        </p:style>
-      </p:cxnSp>
-      <p:sp>
-        <p:nvSpPr>
-          <p:cNvPr id="75" name="TextBox 74">
-            <a:extLst>
-              <a:ext uri="{FF2B5EF4-FFF2-40B4-BE49-F238E27FC236}">
-                <a16:creationId xmlns:a16="http://schemas.microsoft.com/office/drawing/2014/main" id="{3DF54444-C59C-8FAD-836B-31749EBFC54F}"/>
-              </a:ext>
-            </a:extLst>
-          </p:cNvPr>
-          <p:cNvSpPr txBox="1"/>
-          <p:nvPr/>
-        </p:nvSpPr>
-        <p:spPr>
-          <a:xfrm>
-            <a:off x="11006380" y="2828839"/>
-            <a:ext cx="300082" cy="369332"/>
-          </a:xfrm>
-          <a:prstGeom prst="rect">
-            <a:avLst/>
-          </a:prstGeom>
-          <a:noFill/>
-        </p:spPr>
-        <p:txBody>
-          <a:bodyPr wrap="square" rtlCol="0">
-            <a:spAutoFit/>
-          </a:bodyPr>
-          <a:lstStyle/>
-          <a:p>
-            <a:r>
-              <a:rPr kumimoji="1" lang="en-US" altLang="ja-JP" dirty="0">
-                <a:latin typeface="times" panose="02020603050405020304" pitchFamily="18" charset="0"/>
-                <a:cs typeface="times" panose="02020603050405020304" pitchFamily="18" charset="0"/>
-              </a:rPr>
-              <a:t>y</a:t>
-            </a:r>
-            <a:endParaRPr kumimoji="1" lang="ja-JP" altLang="en-US" dirty="0">
-              <a:latin typeface="times" panose="02020603050405020304" pitchFamily="18" charset="0"/>
-              <a:cs typeface="times" panose="02020603050405020304" pitchFamily="18" charset="0"/>
-            </a:endParaRPr>
-          </a:p>
-        </p:txBody>
-      </p:sp>
-      <p:sp>
-        <p:nvSpPr>
-          <p:cNvPr id="77" name="TextBox 76">
-            <a:extLst>
-              <a:ext uri="{FF2B5EF4-FFF2-40B4-BE49-F238E27FC236}">
-                <a16:creationId xmlns:a16="http://schemas.microsoft.com/office/drawing/2014/main" id="{261A1B73-C574-78F5-DAA8-D73F1BDC57AF}"/>
-              </a:ext>
-            </a:extLst>
-          </p:cNvPr>
-          <p:cNvSpPr txBox="1"/>
-          <p:nvPr/>
-        </p:nvSpPr>
-        <p:spPr>
-          <a:xfrm>
-            <a:off x="9407259" y="854949"/>
-            <a:ext cx="300082" cy="369332"/>
-          </a:xfrm>
-          <a:prstGeom prst="rect">
-            <a:avLst/>
-          </a:prstGeom>
-          <a:noFill/>
-        </p:spPr>
-        <p:txBody>
-          <a:bodyPr wrap="none" rtlCol="0">
-            <a:spAutoFit/>
-          </a:bodyPr>
-          <a:lstStyle/>
-          <a:p>
-            <a:r>
-              <a:rPr kumimoji="1" lang="en-US" altLang="ja-JP" dirty="0">
-                <a:latin typeface="times" panose="02020603050405020304" pitchFamily="18" charset="0"/>
-                <a:cs typeface="times" panose="02020603050405020304" pitchFamily="18" charset="0"/>
-              </a:rPr>
-              <a:t>x</a:t>
-            </a:r>
-            <a:endParaRPr kumimoji="1" lang="ja-JP" altLang="en-US" dirty="0">
-              <a:latin typeface="times" panose="02020603050405020304" pitchFamily="18" charset="0"/>
-              <a:cs typeface="times" panose="02020603050405020304" pitchFamily="18" charset="0"/>
-            </a:endParaRPr>
-          </a:p>
-        </p:txBody>
-      </p:sp>
-      <p:cxnSp>
-        <p:nvCxnSpPr>
-          <p:cNvPr id="78" name="Straight Arrow Connector 22">
-            <a:extLst>
-              <a:ext uri="{FF2B5EF4-FFF2-40B4-BE49-F238E27FC236}">
-                <a16:creationId xmlns:a16="http://schemas.microsoft.com/office/drawing/2014/main" id="{D4979701-4620-0E1D-A047-8432B4F211A0}"/>
-              </a:ext>
-            </a:extLst>
-          </p:cNvPr>
-          <p:cNvCxnSpPr>
-            <a:cxnSpLocks/>
-          </p:cNvCxnSpPr>
-          <p:nvPr/>
-        </p:nvCxnSpPr>
-        <p:spPr>
-          <a:xfrm flipH="1" flipV="1">
-            <a:off x="7746624" y="2535475"/>
-            <a:ext cx="1625319" cy="524261"/>
-          </a:xfrm>
-          <a:prstGeom prst="straightConnector1">
-            <a:avLst/>
-          </a:prstGeom>
-          <a:ln>
-            <a:solidFill>
-              <a:srgbClr val="FF0000"/>
-            </a:solidFill>
-            <a:tailEnd type="triangle"/>
-          </a:ln>
-        </p:spPr>
-        <p:style>
-          <a:lnRef idx="2">
-            <a:schemeClr val="dk1"/>
-          </a:lnRef>
-          <a:fillRef idx="0">
-            <a:schemeClr val="dk1"/>
-          </a:fillRef>
-          <a:effectRef idx="1">
-            <a:schemeClr val="dk1"/>
-          </a:effectRef>
-          <a:fontRef idx="minor">
-            <a:schemeClr val="tx1"/>
-          </a:fontRef>
-        </p:style>
-      </p:cxnSp>
-      <p:cxnSp>
-        <p:nvCxnSpPr>
-          <p:cNvPr id="81" name="Straight Arrow Connector 19">
-            <a:extLst>
-              <a:ext uri="{FF2B5EF4-FFF2-40B4-BE49-F238E27FC236}">
-                <a16:creationId xmlns:a16="http://schemas.microsoft.com/office/drawing/2014/main" id="{7374BFF7-CFCB-0D4B-2A99-38C27F3BCCE7}"/>
-              </a:ext>
-            </a:extLst>
-          </p:cNvPr>
-          <p:cNvCxnSpPr>
-            <a:cxnSpLocks/>
-          </p:cNvCxnSpPr>
-          <p:nvPr/>
-        </p:nvCxnSpPr>
-        <p:spPr>
-          <a:xfrm flipV="1">
-            <a:off x="8278622" y="3059736"/>
-            <a:ext cx="1128637" cy="1552529"/>
-          </a:xfrm>
-          <a:prstGeom prst="straightConnector1">
-            <a:avLst/>
-          </a:prstGeom>
-          <a:ln>
-            <a:prstDash val="sysDot"/>
-            <a:headEnd type="arrow" w="med" len="med"/>
-            <a:tailEnd type="none" w="med" len="med"/>
-          </a:ln>
-        </p:spPr>
-        <p:style>
-          <a:lnRef idx="2">
-            <a:schemeClr val="dk1"/>
-          </a:lnRef>
-          <a:fillRef idx="0">
-            <a:schemeClr val="dk1"/>
-          </a:fillRef>
-          <a:effectRef idx="1">
-            <a:schemeClr val="dk1"/>
-          </a:effectRef>
-          <a:fontRef idx="minor">
-            <a:schemeClr val="tx1"/>
-          </a:fontRef>
-        </p:style>
-      </p:cxnSp>
-      <p:sp>
-        <p:nvSpPr>
-          <p:cNvPr id="86" name="TextBox 85">
-            <a:extLst>
-              <a:ext uri="{FF2B5EF4-FFF2-40B4-BE49-F238E27FC236}">
-                <a16:creationId xmlns:a16="http://schemas.microsoft.com/office/drawing/2014/main" id="{DF0399A6-795D-0331-19AB-129EF70BA6FB}"/>
-              </a:ext>
-            </a:extLst>
-          </p:cNvPr>
-          <p:cNvSpPr txBox="1"/>
-          <p:nvPr/>
-        </p:nvSpPr>
-        <p:spPr>
-          <a:xfrm>
-            <a:off x="8356032" y="4489687"/>
-            <a:ext cx="300082" cy="369332"/>
-          </a:xfrm>
-          <a:prstGeom prst="rect">
-            <a:avLst/>
-          </a:prstGeom>
-          <a:noFill/>
-        </p:spPr>
-        <p:txBody>
-          <a:bodyPr wrap="square" rtlCol="0">
-            <a:spAutoFit/>
-          </a:bodyPr>
-          <a:lstStyle/>
-          <a:p>
-            <a:r>
-              <a:rPr kumimoji="1" lang="en-US" altLang="ja-JP" dirty="0">
-                <a:latin typeface="times" panose="02020603050405020304" pitchFamily="18" charset="0"/>
-                <a:cs typeface="times" panose="02020603050405020304" pitchFamily="18" charset="0"/>
-              </a:rPr>
-              <a:t>z</a:t>
-            </a:r>
-            <a:endParaRPr kumimoji="1" lang="ja-JP" altLang="en-US" dirty="0">
-              <a:latin typeface="times" panose="02020603050405020304" pitchFamily="18" charset="0"/>
-              <a:cs typeface="times" panose="02020603050405020304" pitchFamily="18" charset="0"/>
-            </a:endParaRPr>
-          </a:p>
-        </p:txBody>
-      </p:sp>
-      <p:cxnSp>
-        <p:nvCxnSpPr>
-          <p:cNvPr id="89" name="Straight Arrow Connector 22">
-            <a:extLst>
-              <a:ext uri="{FF2B5EF4-FFF2-40B4-BE49-F238E27FC236}">
-                <a16:creationId xmlns:a16="http://schemas.microsoft.com/office/drawing/2014/main" id="{9E9C3912-AB49-F86D-8287-9BF3776CB427}"/>
-              </a:ext>
-            </a:extLst>
-          </p:cNvPr>
-          <p:cNvCxnSpPr>
-            <a:cxnSpLocks/>
-          </p:cNvCxnSpPr>
-          <p:nvPr/>
-        </p:nvCxnSpPr>
-        <p:spPr>
-          <a:xfrm flipH="1" flipV="1">
-            <a:off x="7797282" y="2548409"/>
-            <a:ext cx="879214" cy="1473782"/>
-          </a:xfrm>
-          <a:prstGeom prst="straightConnector1">
-            <a:avLst/>
-          </a:prstGeom>
-          <a:ln>
-            <a:solidFill>
-              <a:srgbClr val="FF0000"/>
-            </a:solidFill>
-            <a:prstDash val="sysDot"/>
-            <a:headEnd type="none" w="med" len="med"/>
-            <a:tailEnd type="none" w="med" len="med"/>
-          </a:ln>
-        </p:spPr>
-        <p:style>
-          <a:lnRef idx="2">
-            <a:schemeClr val="dk1"/>
-          </a:lnRef>
-          <a:fillRef idx="0">
-            <a:schemeClr val="dk1"/>
-          </a:fillRef>
-          <a:effectRef idx="1">
-            <a:schemeClr val="dk1"/>
-          </a:effectRef>
-          <a:fontRef idx="minor">
-            <a:schemeClr val="tx1"/>
-          </a:fontRef>
-        </p:style>
-      </p:cxnSp>
-      <p:cxnSp>
-        <p:nvCxnSpPr>
-          <p:cNvPr id="93" name="Straight Arrow Connector 22">
-            <a:extLst>
-              <a:ext uri="{FF2B5EF4-FFF2-40B4-BE49-F238E27FC236}">
-                <a16:creationId xmlns:a16="http://schemas.microsoft.com/office/drawing/2014/main" id="{E659CD05-F478-0E5E-17B4-5FBAFF885B29}"/>
-              </a:ext>
-            </a:extLst>
-          </p:cNvPr>
-          <p:cNvCxnSpPr>
-            <a:cxnSpLocks/>
-          </p:cNvCxnSpPr>
-          <p:nvPr/>
-        </p:nvCxnSpPr>
-        <p:spPr>
-          <a:xfrm flipH="1">
-            <a:off x="7850276" y="1734218"/>
-            <a:ext cx="736071" cy="814027"/>
-          </a:xfrm>
-          <a:prstGeom prst="straightConnector1">
-            <a:avLst/>
-          </a:prstGeom>
-          <a:ln>
-            <a:solidFill>
-              <a:srgbClr val="FF0000"/>
-            </a:solidFill>
-            <a:prstDash val="sysDot"/>
-            <a:headEnd type="none" w="med" len="med"/>
-            <a:tailEnd type="none" w="med" len="med"/>
-          </a:ln>
-        </p:spPr>
-        <p:style>
-          <a:lnRef idx="2">
-            <a:schemeClr val="dk1"/>
-          </a:lnRef>
-          <a:fillRef idx="0">
-            <a:schemeClr val="dk1"/>
-          </a:fillRef>
-          <a:effectRef idx="1">
-            <a:schemeClr val="dk1"/>
-          </a:effectRef>
-          <a:fontRef idx="minor">
-            <a:schemeClr val="tx1"/>
-          </a:fontRef>
-        </p:style>
-      </p:cxnSp>
-      <p:cxnSp>
-        <p:nvCxnSpPr>
-          <p:cNvPr id="117" name="Straight Arrow Connector 22">
-            <a:extLst>
-              <a:ext uri="{FF2B5EF4-FFF2-40B4-BE49-F238E27FC236}">
-                <a16:creationId xmlns:a16="http://schemas.microsoft.com/office/drawing/2014/main" id="{D9BEF627-7CAA-B8FF-A82A-F4DFF6F30515}"/>
-              </a:ext>
-            </a:extLst>
-          </p:cNvPr>
-          <p:cNvCxnSpPr>
-            <a:cxnSpLocks/>
-          </p:cNvCxnSpPr>
-          <p:nvPr/>
-        </p:nvCxnSpPr>
-        <p:spPr>
-          <a:xfrm flipH="1" flipV="1">
-            <a:off x="8628482" y="1696300"/>
-            <a:ext cx="758840" cy="1345350"/>
-          </a:xfrm>
-          <a:prstGeom prst="straightConnector1">
-            <a:avLst/>
-          </a:prstGeom>
-          <a:ln>
-            <a:solidFill>
-              <a:srgbClr val="FF0000"/>
-            </a:solidFill>
-            <a:tailEnd type="triangle"/>
-          </a:ln>
-        </p:spPr>
-        <p:style>
-          <a:lnRef idx="2">
-            <a:schemeClr val="dk1"/>
-          </a:lnRef>
-          <a:fillRef idx="0">
-            <a:schemeClr val="dk1"/>
-          </a:fillRef>
-          <a:effectRef idx="1">
-            <a:schemeClr val="dk1"/>
-          </a:effectRef>
-          <a:fontRef idx="minor">
-            <a:schemeClr val="tx1"/>
-          </a:fontRef>
-        </p:style>
-      </p:cxnSp>
-      <p:cxnSp>
-        <p:nvCxnSpPr>
-          <p:cNvPr id="120" name="Straight Arrow Connector 22">
-            <a:extLst>
-              <a:ext uri="{FF2B5EF4-FFF2-40B4-BE49-F238E27FC236}">
-                <a16:creationId xmlns:a16="http://schemas.microsoft.com/office/drawing/2014/main" id="{4A41A855-23E4-95C2-6164-0091CE2F7B09}"/>
-              </a:ext>
-            </a:extLst>
-          </p:cNvPr>
-          <p:cNvCxnSpPr>
-            <a:cxnSpLocks/>
-          </p:cNvCxnSpPr>
-          <p:nvPr/>
-        </p:nvCxnSpPr>
-        <p:spPr>
-          <a:xfrm flipH="1">
-            <a:off x="8666410" y="3087970"/>
-            <a:ext cx="720912" cy="1003778"/>
-          </a:xfrm>
-          <a:prstGeom prst="straightConnector1">
-            <a:avLst/>
-          </a:prstGeom>
-          <a:ln>
-            <a:solidFill>
-              <a:srgbClr val="FF0000"/>
-            </a:solidFill>
-            <a:tailEnd type="triangle"/>
-          </a:ln>
-        </p:spPr>
-        <p:style>
-          <a:lnRef idx="2">
-            <a:schemeClr val="dk1"/>
-          </a:lnRef>
-          <a:fillRef idx="0">
-            <a:schemeClr val="dk1"/>
-          </a:fillRef>
-          <a:effectRef idx="1">
-            <a:schemeClr val="dk1"/>
-          </a:effectRef>
-          <a:fontRef idx="minor">
-            <a:schemeClr val="tx1"/>
-          </a:fontRef>
-        </p:style>
-      </p:cxnSp>
-      <p:sp>
-        <p:nvSpPr>
-          <p:cNvPr id="125" name="막힌 원호 124">
-            <a:extLst>
-              <a:ext uri="{FF2B5EF4-FFF2-40B4-BE49-F238E27FC236}">
-                <a16:creationId xmlns:a16="http://schemas.microsoft.com/office/drawing/2014/main" id="{52A5EEC9-9020-DE8B-6774-BB6E9D602DF5}"/>
-              </a:ext>
-            </a:extLst>
-          </p:cNvPr>
-          <p:cNvSpPr/>
-          <p:nvPr/>
-        </p:nvSpPr>
-        <p:spPr>
-          <a:xfrm rot="14184790">
-            <a:off x="9078423" y="3059226"/>
-            <a:ext cx="279822" cy="141896"/>
-          </a:xfrm>
-          <a:prstGeom prst="blockArc">
-            <a:avLst>
-              <a:gd name="adj1" fmla="val 10800000"/>
-              <a:gd name="adj2" fmla="val 21574061"/>
-              <a:gd name="adj3" fmla="val 0"/>
-            </a:avLst>
-          </a:prstGeom>
-        </p:spPr>
-        <p:style>
-          <a:lnRef idx="2">
-            <a:schemeClr val="accent1">
-              <a:shade val="15000"/>
-            </a:schemeClr>
-          </a:lnRef>
-          <a:fillRef idx="1">
-            <a:schemeClr val="accent1"/>
-          </a:fillRef>
-          <a:effectRef idx="0">
-            <a:schemeClr val="accent1"/>
-          </a:effectRef>
-          <a:fontRef idx="minor">
-            <a:schemeClr val="lt1"/>
-          </a:fontRef>
-        </p:style>
-        <p:txBody>
-          <a:bodyPr rtlCol="0" anchor="ctr"/>
-          <a:lstStyle/>
-          <a:p>
-            <a:pPr algn="ctr"/>
-            <a:endParaRPr lang="en-US">
-              <a:solidFill>
-                <a:schemeClr val="tx1"/>
-              </a:solidFill>
-            </a:endParaRPr>
-          </a:p>
-        </p:txBody>
-      </p:sp>
-      <mc:AlternateContent xmlns:mc="http://schemas.openxmlformats.org/markup-compatibility/2006" xmlns:a14="http://schemas.microsoft.com/office/drawing/2010/main">
-        <mc:Choice Requires="a14">
-          <p:sp>
-            <p:nvSpPr>
-              <p:cNvPr id="127" name="TextBox 126">
-                <a:extLst>
-                  <a:ext uri="{FF2B5EF4-FFF2-40B4-BE49-F238E27FC236}">
-                    <a16:creationId xmlns:a16="http://schemas.microsoft.com/office/drawing/2014/main" id="{7E79B2AC-6F3F-AF56-BF35-82B498E533D9}"/>
-                  </a:ext>
-                </a:extLst>
-              </p:cNvPr>
-              <p:cNvSpPr txBox="1"/>
-              <p:nvPr/>
-            </p:nvSpPr>
-            <p:spPr>
-              <a:xfrm>
-                <a:off x="8798136" y="3145914"/>
-                <a:ext cx="270330" cy="369332"/>
-              </a:xfrm>
-              <a:prstGeom prst="rect">
-                <a:avLst/>
-              </a:prstGeom>
-              <a:noFill/>
-            </p:spPr>
-            <p:txBody>
-              <a:bodyPr wrap="none" lIns="0" tIns="0" rIns="0" bIns="0" rtlCol="0">
-                <a:spAutoFit/>
-              </a:bodyPr>
-              <a:lstStyle/>
-              <a:p>
-                <a:pPr/>
-                <a14:m>
-                  <m:oMathPara xmlns:m="http://schemas.openxmlformats.org/officeDocument/2006/math">
-                    <m:oMath>
-                      <m:r>
-                        <a:rPr lang="en-US" sz="2400" i="1" smtClean="0">
-                          <a:latin typeface="Cambria Math" panose="02040503050406030204" pitchFamily="18" charset="0"/>
-                          <a:ea typeface="Cambria Math" panose="02040503050406030204" pitchFamily="18" charset="0"/>
-                        </a:rPr>
-                        <m:t>𝜃</m:t>
-                      </m:r>
-                    </m:oMath>
-                  </m:oMathPara>
-                </a14:m>
-                <a:endParaRPr lang="en-US" sz="2400" dirty="0"/>
-              </a:p>
-            </p:txBody>
-          </p:sp>
-        </mc:Choice>
-        <mc:Fallback xmlns="">
-          <p:sp>
-            <p:nvSpPr>
-              <p:cNvPr id="127" name="TextBox 126">
-                <a:extLst>
-                  <a:ext uri="{FF2B5EF4-FFF2-40B4-BE49-F238E27FC236}">
-                    <a16:creationId xmlns:a16="http://schemas.microsoft.com/office/drawing/2014/main" id="{4C37C059-7456-41F2-6FB2-21CCF6032028}"/>
-                  </a:ext>
-                </a:extLst>
-              </p:cNvPr>
-              <p:cNvSpPr txBox="1">
-                <a:spLocks noRot="1" noChangeAspect="1" noMove="1" noResize="1" noEditPoints="1" noAdjustHandles="1" noChangeArrowheads="1" noChangeShapeType="1" noTextEdit="1"/>
-              </p:cNvSpPr>
-              <p:nvPr/>
-            </p:nvSpPr>
-            <p:spPr>
-              <a:xfrm>
-                <a:off x="8798136" y="3145914"/>
-                <a:ext cx="270330" cy="369332"/>
-              </a:xfrm>
-              <a:prstGeom prst="rect">
-                <a:avLst/>
-              </a:prstGeom>
-              <a:blipFill>
-                <a:blip r:embed="rId3"/>
-                <a:stretch>
-                  <a:fillRect l="-22222" r="-17778" b="-4918"/>
-                </a:stretch>
-              </a:blipFill>
-            </p:spPr>
-            <p:txBody>
-              <a:bodyPr/>
-              <a:lstStyle/>
-              <a:p>
-                <a:r>
-                  <a:rPr lang="en-US">
-                    <a:noFill/>
-                  </a:rPr>
-                  <a:t> </a:t>
-                </a:r>
-              </a:p>
-            </p:txBody>
-          </p:sp>
-        </mc:Fallback>
-      </mc:AlternateContent>
-      <p:sp>
-        <p:nvSpPr>
-          <p:cNvPr id="128" name="화살표: 아래쪽 127">
-            <a:extLst>
-              <a:ext uri="{FF2B5EF4-FFF2-40B4-BE49-F238E27FC236}">
-                <a16:creationId xmlns:a16="http://schemas.microsoft.com/office/drawing/2014/main" id="{1E38CD4F-1F1D-FFCA-DA07-AA6001EC597D}"/>
-              </a:ext>
-            </a:extLst>
-          </p:cNvPr>
-          <p:cNvSpPr/>
-          <p:nvPr/>
-        </p:nvSpPr>
-        <p:spPr>
-          <a:xfrm rot="3217201">
-            <a:off x="4078016" y="1128800"/>
-            <a:ext cx="460574" cy="990712"/>
-          </a:xfrm>
-          <a:prstGeom prst="downArrow">
-            <a:avLst/>
-          </a:prstGeom>
-        </p:spPr>
-        <p:style>
-          <a:lnRef idx="2">
-            <a:schemeClr val="accent1">
-              <a:shade val="15000"/>
-            </a:schemeClr>
-          </a:lnRef>
-          <a:fillRef idx="1">
-            <a:schemeClr val="accent1"/>
-          </a:fillRef>
-          <a:effectRef idx="0">
-            <a:schemeClr val="accent1"/>
-          </a:effectRef>
-          <a:fontRef idx="minor">
-            <a:schemeClr val="lt1"/>
-          </a:fontRef>
-        </p:style>
-        <p:txBody>
-          <a:bodyPr rtlCol="0" anchor="ctr"/>
-          <a:lstStyle/>
-          <a:p>
-            <a:pPr algn="ctr"/>
-            <a:endParaRPr lang="en-US"/>
-          </a:p>
-        </p:txBody>
-      </p:sp>
-      <p:sp>
-        <p:nvSpPr>
-          <p:cNvPr id="129" name="TextBox 128">
-            <a:extLst>
-              <a:ext uri="{FF2B5EF4-FFF2-40B4-BE49-F238E27FC236}">
-                <a16:creationId xmlns:a16="http://schemas.microsoft.com/office/drawing/2014/main" id="{883C3BFF-D70D-43C2-FD2A-F3951BF68198}"/>
-              </a:ext>
-            </a:extLst>
-          </p:cNvPr>
-          <p:cNvSpPr txBox="1"/>
-          <p:nvPr/>
-        </p:nvSpPr>
-        <p:spPr>
-          <a:xfrm>
-            <a:off x="4711605" y="1082534"/>
-            <a:ext cx="4012637" cy="369332"/>
-          </a:xfrm>
-          <a:prstGeom prst="rect">
-            <a:avLst/>
-          </a:prstGeom>
-          <a:noFill/>
-        </p:spPr>
-        <p:txBody>
-          <a:bodyPr wrap="none" rtlCol="0">
-            <a:spAutoFit/>
-          </a:bodyPr>
-          <a:lstStyle/>
-          <a:p>
-            <a:r>
-              <a:rPr lang="en-US" dirty="0">
-                <a:latin typeface="Gungsuh" panose="02030600000101010101" pitchFamily="18" charset="-127"/>
-                <a:ea typeface="Gungsuh" panose="02030600000101010101" pitchFamily="18" charset="-127"/>
-              </a:rPr>
-              <a:t>Look at from this perspective</a:t>
-            </a:r>
-          </a:p>
-        </p:txBody>
-      </p:sp>
-      <mc:AlternateContent xmlns:mc="http://schemas.openxmlformats.org/markup-compatibility/2006" xmlns:a14="http://schemas.microsoft.com/office/drawing/2010/main">
-        <mc:Choice Requires="a14">
-          <p:sp>
-            <p:nvSpPr>
-              <p:cNvPr id="131" name="TextBox 130">
-                <a:extLst>
-                  <a:ext uri="{FF2B5EF4-FFF2-40B4-BE49-F238E27FC236}">
-                    <a16:creationId xmlns:a16="http://schemas.microsoft.com/office/drawing/2014/main" id="{3C2B27A5-5B9D-E66C-D5CE-436B6D790C87}"/>
-                  </a:ext>
-                </a:extLst>
-              </p:cNvPr>
-              <p:cNvSpPr txBox="1"/>
-              <p:nvPr/>
-            </p:nvSpPr>
-            <p:spPr>
-              <a:xfrm rot="21357679">
-                <a:off x="9111194" y="3304926"/>
-                <a:ext cx="283411" cy="369332"/>
-              </a:xfrm>
-              <a:prstGeom prst="rect">
-                <a:avLst/>
-              </a:prstGeom>
-              <a:noFill/>
-            </p:spPr>
-            <p:txBody>
-              <a:bodyPr wrap="none" lIns="0" tIns="0" rIns="0" bIns="0" rtlCol="0">
-                <a:spAutoFit/>
-              </a:bodyPr>
-              <a:lstStyle/>
-              <a:p>
-                <a:pPr/>
-                <a14:m>
-                  <m:oMathPara xmlns:m="http://schemas.openxmlformats.org/officeDocument/2006/math">
-                    <m:oMath>
-                      <m:r>
-                        <a:rPr lang="en-US" sz="2400" i="1" smtClean="0">
-                          <a:latin typeface="Cambria Math" panose="02040503050406030204" pitchFamily="18" charset="0"/>
-                          <a:ea typeface="Cambria Math" panose="02040503050406030204" pitchFamily="18" charset="0"/>
-                        </a:rPr>
-                        <m:t>𝛽</m:t>
-                      </m:r>
-                    </m:oMath>
-                  </m:oMathPara>
-                </a14:m>
-                <a:endParaRPr lang="en-US" sz="2400" dirty="0"/>
-              </a:p>
-            </p:txBody>
-          </p:sp>
-        </mc:Choice>
-        <mc:Fallback xmlns="">
-          <p:sp>
-            <p:nvSpPr>
-              <p:cNvPr id="131" name="TextBox 130">
-                <a:extLst>
-                  <a:ext uri="{FF2B5EF4-FFF2-40B4-BE49-F238E27FC236}">
-                    <a16:creationId xmlns:a16="http://schemas.microsoft.com/office/drawing/2014/main" id="{C5C2C5DD-6391-E3D7-1327-2DD30603514B}"/>
-                  </a:ext>
-                </a:extLst>
-              </p:cNvPr>
-              <p:cNvSpPr txBox="1">
-                <a:spLocks noRot="1" noChangeAspect="1" noMove="1" noResize="1" noEditPoints="1" noAdjustHandles="1" noChangeArrowheads="1" noChangeShapeType="1" noTextEdit="1"/>
-              </p:cNvSpPr>
-              <p:nvPr/>
-            </p:nvSpPr>
-            <p:spPr>
-              <a:xfrm rot="21357679">
-                <a:off x="9111194" y="3304926"/>
-                <a:ext cx="283411" cy="369332"/>
-              </a:xfrm>
-              <a:prstGeom prst="rect">
-                <a:avLst/>
-              </a:prstGeom>
-              <a:blipFill>
-                <a:blip r:embed="rId4"/>
-                <a:stretch>
-                  <a:fillRect l="-30769" t="-1538" r="-28846" b="-30769"/>
-                </a:stretch>
-              </a:blipFill>
-            </p:spPr>
-            <p:txBody>
-              <a:bodyPr/>
-              <a:lstStyle/>
-              <a:p>
-                <a:r>
-                  <a:rPr lang="en-US">
-                    <a:noFill/>
-                  </a:rPr>
-                  <a:t> </a:t>
-                </a:r>
-              </a:p>
-            </p:txBody>
-          </p:sp>
-        </mc:Fallback>
-      </mc:AlternateContent>
-      <mc:AlternateContent xmlns:mc="http://schemas.openxmlformats.org/markup-compatibility/2006" xmlns:a14="http://schemas.microsoft.com/office/drawing/2010/main">
-        <mc:Choice Requires="a14">
-          <p:sp>
-            <p:nvSpPr>
-              <p:cNvPr id="133" name="TextBox 132">
-                <a:extLst>
-                  <a:ext uri="{FF2B5EF4-FFF2-40B4-BE49-F238E27FC236}">
-                    <a16:creationId xmlns:a16="http://schemas.microsoft.com/office/drawing/2014/main" id="{B91F29FB-5077-3360-9073-E712E2B0DC77}"/>
-                  </a:ext>
-                </a:extLst>
-              </p:cNvPr>
-              <p:cNvSpPr txBox="1"/>
-              <p:nvPr/>
-            </p:nvSpPr>
-            <p:spPr>
-              <a:xfrm rot="20180983">
-                <a:off x="8939007" y="2035808"/>
-                <a:ext cx="396582" cy="369332"/>
-              </a:xfrm>
-              <a:prstGeom prst="rect">
-                <a:avLst/>
-              </a:prstGeom>
-              <a:noFill/>
-            </p:spPr>
-            <p:txBody>
-              <a:bodyPr wrap="none" lIns="0" tIns="0" rIns="0" bIns="0" rtlCol="0">
-                <a:spAutoFit/>
-              </a:bodyPr>
-              <a:lstStyle/>
-              <a:p>
-                <a:pPr/>
-                <a14:m>
-                  <m:oMathPara xmlns:m="http://schemas.openxmlformats.org/officeDocument/2006/math">
-                    <m:oMath>
-                      <m:sSub>
-                        <m:sSubPr>
-                          <m:ctrlPr>
-                            <a:rPr lang="en-US" sz="2400" b="0" i="1" smtClean="0">
-                              <a:latin typeface="Cambria Math" panose="02040503050406030204" pitchFamily="18" charset="0"/>
-                            </a:rPr>
-                          </m:ctrlPr>
-                        </m:sSubPr>
-                        <m:e>
-                          <m:r>
-                            <a:rPr lang="en-US" sz="2400" b="0" i="1" smtClean="0">
-                              <a:latin typeface="Cambria Math" panose="02040503050406030204" pitchFamily="18" charset="0"/>
-                            </a:rPr>
-                            <m:t>𝑘</m:t>
-                          </m:r>
-                        </m:e>
-                        <m:sub>
-                          <m:r>
-                            <a:rPr lang="en-US" sz="2400" b="0" i="1" smtClean="0">
-                              <a:latin typeface="Cambria Math" panose="02040503050406030204" pitchFamily="18" charset="0"/>
-                            </a:rPr>
-                            <m:t>𝑟</m:t>
-                          </m:r>
-                        </m:sub>
-                      </m:sSub>
-                    </m:oMath>
-                  </m:oMathPara>
-                </a14:m>
-                <a:endParaRPr lang="en-US" sz="2400" dirty="0"/>
-              </a:p>
-            </p:txBody>
-          </p:sp>
-        </mc:Choice>
-        <mc:Fallback xmlns="">
-          <p:sp>
-            <p:nvSpPr>
-              <p:cNvPr id="133" name="TextBox 132">
-                <a:extLst>
-                  <a:ext uri="{FF2B5EF4-FFF2-40B4-BE49-F238E27FC236}">
-                    <a16:creationId xmlns:a16="http://schemas.microsoft.com/office/drawing/2014/main" id="{52F9BC21-A2B1-D757-7F0F-231774C5EB1A}"/>
-                  </a:ext>
-                </a:extLst>
-              </p:cNvPr>
-              <p:cNvSpPr txBox="1">
-                <a:spLocks noRot="1" noChangeAspect="1" noMove="1" noResize="1" noEditPoints="1" noAdjustHandles="1" noChangeArrowheads="1" noChangeShapeType="1" noTextEdit="1"/>
-              </p:cNvSpPr>
-              <p:nvPr/>
-            </p:nvSpPr>
-            <p:spPr>
-              <a:xfrm rot="20180983">
-                <a:off x="8939007" y="2035808"/>
-                <a:ext cx="396582" cy="369332"/>
-              </a:xfrm>
-              <a:prstGeom prst="rect">
-                <a:avLst/>
-              </a:prstGeom>
-              <a:blipFill>
-                <a:blip r:embed="rId5"/>
-                <a:stretch>
-                  <a:fillRect l="-9412" r="-1176" b="-7229"/>
-                </a:stretch>
-              </a:blipFill>
-            </p:spPr>
-            <p:txBody>
-              <a:bodyPr/>
-              <a:lstStyle/>
-              <a:p>
-                <a:r>
-                  <a:rPr lang="en-US">
-                    <a:noFill/>
-                  </a:rPr>
-                  <a:t> </a:t>
-                </a:r>
-              </a:p>
-            </p:txBody>
-          </p:sp>
-        </mc:Fallback>
-      </mc:AlternateContent>
-      <p:sp>
-        <p:nvSpPr>
-          <p:cNvPr id="17" name="막힌 원호 124">
-            <a:extLst>
-              <a:ext uri="{FF2B5EF4-FFF2-40B4-BE49-F238E27FC236}">
-                <a16:creationId xmlns:a16="http://schemas.microsoft.com/office/drawing/2014/main" id="{A3E5CBB4-9114-AA47-CABC-71E7C3BBC1D3}"/>
-              </a:ext>
-            </a:extLst>
-          </p:cNvPr>
-          <p:cNvSpPr/>
-          <p:nvPr/>
-        </p:nvSpPr>
-        <p:spPr>
-          <a:xfrm rot="2486177">
-            <a:off x="9246690" y="2762512"/>
-            <a:ext cx="405325" cy="376596"/>
-          </a:xfrm>
-          <a:prstGeom prst="blockArc">
-            <a:avLst>
-              <a:gd name="adj1" fmla="val 10800000"/>
-              <a:gd name="adj2" fmla="val 21574061"/>
-              <a:gd name="adj3" fmla="val 0"/>
-            </a:avLst>
-          </a:prstGeom>
-        </p:spPr>
-        <p:style>
-          <a:lnRef idx="2">
-            <a:schemeClr val="accent1">
-              <a:shade val="15000"/>
-            </a:schemeClr>
-          </a:lnRef>
-          <a:fillRef idx="1">
-            <a:schemeClr val="accent1"/>
-          </a:fillRef>
-          <a:effectRef idx="0">
-            <a:schemeClr val="accent1"/>
-          </a:effectRef>
-          <a:fontRef idx="minor">
-            <a:schemeClr val="lt1"/>
-          </a:fontRef>
-        </p:style>
-        <p:txBody>
-          <a:bodyPr rtlCol="0" anchor="ctr"/>
-          <a:lstStyle/>
-          <a:p>
-            <a:pPr algn="ctr"/>
-            <a:endParaRPr lang="en-US">
-              <a:solidFill>
-                <a:schemeClr val="tx1"/>
-              </a:solidFill>
-            </a:endParaRPr>
-          </a:p>
-        </p:txBody>
-      </p:sp>
-      <mc:AlternateContent xmlns:mc="http://schemas.openxmlformats.org/markup-compatibility/2006" xmlns:a14="http://schemas.microsoft.com/office/drawing/2010/main">
-        <mc:Choice Requires="a14">
-          <p:sp>
-            <p:nvSpPr>
-              <p:cNvPr id="19" name="TextBox 130">
-                <a:extLst>
-                  <a:ext uri="{FF2B5EF4-FFF2-40B4-BE49-F238E27FC236}">
-                    <a16:creationId xmlns:a16="http://schemas.microsoft.com/office/drawing/2014/main" id="{C81DDDEE-42FB-9E59-0C7E-04E44F03CCEF}"/>
-                  </a:ext>
-                </a:extLst>
-              </p:cNvPr>
-              <p:cNvSpPr txBox="1"/>
-              <p:nvPr/>
-            </p:nvSpPr>
-            <p:spPr>
-              <a:xfrm rot="21357679">
-                <a:off x="9309252" y="2327560"/>
-                <a:ext cx="303160" cy="369332"/>
-              </a:xfrm>
-              <a:prstGeom prst="rect">
-                <a:avLst/>
-              </a:prstGeom>
-              <a:noFill/>
-            </p:spPr>
-            <p:txBody>
-              <a:bodyPr wrap="none" lIns="0" tIns="0" rIns="0" bIns="0" rtlCol="0">
-                <a:spAutoFit/>
-              </a:bodyPr>
-              <a:lstStyle/>
-              <a:p>
-                <a:pPr/>
-                <a14:m>
-                  <m:oMathPara xmlns:m="http://schemas.openxmlformats.org/officeDocument/2006/math">
-                    <m:oMath>
-                      <m:r>
-                        <a:rPr lang="en-US" sz="2400" i="1" smtClean="0">
-                          <a:latin typeface="Cambria Math" panose="02040503050406030204" pitchFamily="18" charset="0"/>
-                          <a:ea typeface="Cambria Math" panose="02040503050406030204" pitchFamily="18" charset="0"/>
-                        </a:rPr>
-                        <m:t>𝜑</m:t>
-                      </m:r>
-                    </m:oMath>
-                  </m:oMathPara>
-                </a14:m>
-                <a:endParaRPr lang="en-US" sz="2400" dirty="0"/>
-              </a:p>
-            </p:txBody>
-          </p:sp>
-        </mc:Choice>
-        <mc:Fallback xmlns="">
-          <p:sp>
-            <p:nvSpPr>
-              <p:cNvPr id="19" name="TextBox 130">
-                <a:extLst>
-                  <a:ext uri="{FF2B5EF4-FFF2-40B4-BE49-F238E27FC236}">
-                    <a16:creationId xmlns:a16="http://schemas.microsoft.com/office/drawing/2014/main" id="{F57FA24F-1BDF-BAD1-A090-50D115FAB0BD}"/>
-                  </a:ext>
-                </a:extLst>
-              </p:cNvPr>
-              <p:cNvSpPr txBox="1">
-                <a:spLocks noRot="1" noChangeAspect="1" noMove="1" noResize="1" noEditPoints="1" noAdjustHandles="1" noChangeArrowheads="1" noChangeShapeType="1" noTextEdit="1"/>
-              </p:cNvSpPr>
-              <p:nvPr/>
-            </p:nvSpPr>
-            <p:spPr>
-              <a:xfrm rot="21357679">
-                <a:off x="9309252" y="2327560"/>
-                <a:ext cx="303160" cy="369332"/>
-              </a:xfrm>
-              <a:prstGeom prst="rect">
-                <a:avLst/>
-              </a:prstGeom>
-              <a:blipFill>
-                <a:blip r:embed="rId6"/>
-                <a:stretch>
-                  <a:fillRect l="-18519" r="-18519" b="-21538"/>
-                </a:stretch>
-              </a:blipFill>
-            </p:spPr>
-            <p:txBody>
-              <a:bodyPr/>
-              <a:lstStyle/>
-              <a:p>
-                <a:r>
-                  <a:rPr lang="en-US">
-                    <a:noFill/>
-                  </a:rPr>
-                  <a:t> </a:t>
-                </a:r>
-              </a:p>
-            </p:txBody>
-          </p:sp>
-        </mc:Fallback>
-      </mc:AlternateContent>
-      <p:sp>
-        <p:nvSpPr>
-          <p:cNvPr id="30" name="テキスト ボックス 29">
-            <a:extLst>
-              <a:ext uri="{FF2B5EF4-FFF2-40B4-BE49-F238E27FC236}">
-                <a16:creationId xmlns:a16="http://schemas.microsoft.com/office/drawing/2014/main" id="{9E3C42CC-9D7A-7B79-C529-FC60BF660ABC}"/>
-              </a:ext>
-            </a:extLst>
-          </p:cNvPr>
-          <p:cNvSpPr txBox="1"/>
-          <p:nvPr/>
-        </p:nvSpPr>
-        <p:spPr>
-          <a:xfrm>
-            <a:off x="10458489" y="3515246"/>
-            <a:ext cx="1372492" cy="369332"/>
-          </a:xfrm>
-          <a:prstGeom prst="rect">
-            <a:avLst/>
-          </a:prstGeom>
-          <a:noFill/>
-        </p:spPr>
-        <p:txBody>
-          <a:bodyPr wrap="none" rtlCol="0">
-            <a:spAutoFit/>
-          </a:bodyPr>
-          <a:lstStyle/>
-          <a:p>
-            <a:r>
-              <a:rPr lang="en-US" dirty="0">
-                <a:latin typeface="Gungsuh" panose="02030600000101010101" pitchFamily="18" charset="-127"/>
-                <a:ea typeface="Gungsuh" panose="02030600000101010101" pitchFamily="18" charset="-127"/>
-              </a:rPr>
-              <a:t>Input ray</a:t>
-            </a:r>
-          </a:p>
-        </p:txBody>
-      </p:sp>
-      <p:sp>
-        <p:nvSpPr>
-          <p:cNvPr id="33" name="テキスト ボックス 32">
-            <a:extLst>
-              <a:ext uri="{FF2B5EF4-FFF2-40B4-BE49-F238E27FC236}">
-                <a16:creationId xmlns:a16="http://schemas.microsoft.com/office/drawing/2014/main" id="{D4E7D56C-6C0F-6A84-79F0-E2EA38DB28D2}"/>
-              </a:ext>
-            </a:extLst>
-          </p:cNvPr>
-          <p:cNvSpPr txBox="1"/>
-          <p:nvPr/>
-        </p:nvSpPr>
-        <p:spPr>
-          <a:xfrm>
-            <a:off x="10089998" y="764290"/>
-            <a:ext cx="1731564" cy="369332"/>
-          </a:xfrm>
-          <a:prstGeom prst="rect">
-            <a:avLst/>
-          </a:prstGeom>
-          <a:noFill/>
-        </p:spPr>
-        <p:txBody>
-          <a:bodyPr wrap="none" rtlCol="0">
-            <a:spAutoFit/>
-          </a:bodyPr>
-          <a:lstStyle/>
-          <a:p>
-            <a:r>
-              <a:rPr lang="en-US" dirty="0">
-                <a:latin typeface="Gungsuh" panose="02030600000101010101" pitchFamily="18" charset="-127"/>
-                <a:ea typeface="Gungsuh" panose="02030600000101010101" pitchFamily="18" charset="-127"/>
-              </a:rPr>
-              <a:t>Optical axis</a:t>
-            </a:r>
-          </a:p>
-        </p:txBody>
-      </p:sp>
-      <p:grpSp>
-        <p:nvGrpSpPr>
-          <p:cNvPr id="12" name="グループ化 11">
-            <a:extLst>
-              <a:ext uri="{FF2B5EF4-FFF2-40B4-BE49-F238E27FC236}">
-                <a16:creationId xmlns:a16="http://schemas.microsoft.com/office/drawing/2014/main" id="{438047D6-0C11-EC49-EE60-7AF44F48C927}"/>
-              </a:ext>
-            </a:extLst>
-          </p:cNvPr>
-          <p:cNvGrpSpPr/>
-          <p:nvPr/>
-        </p:nvGrpSpPr>
-        <p:grpSpPr>
-          <a:xfrm>
-            <a:off x="4683582" y="2405748"/>
-            <a:ext cx="124769" cy="124769"/>
-            <a:chOff x="4683582" y="2405748"/>
-            <a:chExt cx="124769" cy="124769"/>
-          </a:xfrm>
-        </p:grpSpPr>
-        <p:sp>
-          <p:nvSpPr>
-            <p:cNvPr id="9" name="楕円 8">
-              <a:extLst>
-                <a:ext uri="{FF2B5EF4-FFF2-40B4-BE49-F238E27FC236}">
-                  <a16:creationId xmlns:a16="http://schemas.microsoft.com/office/drawing/2014/main" id="{768A2AEE-BF83-8060-F8F8-E8D55F535065}"/>
-                </a:ext>
-              </a:extLst>
-            </p:cNvPr>
-            <p:cNvSpPr/>
-            <p:nvPr/>
-          </p:nvSpPr>
-          <p:spPr>
-            <a:xfrm>
-              <a:off x="4683582" y="2405748"/>
-              <a:ext cx="124769" cy="124769"/>
-            </a:xfrm>
-            <a:prstGeom prst="ellipse">
-              <a:avLst/>
-            </a:prstGeom>
-            <a:noFill/>
-            <a:ln w="12700">
-              <a:solidFill>
-                <a:srgbClr val="C00000"/>
-              </a:solidFill>
-            </a:ln>
-          </p:spPr>
-          <p:style>
-            <a:lnRef idx="2">
-              <a:schemeClr val="accent1">
-                <a:shade val="15000"/>
-              </a:schemeClr>
-            </a:lnRef>
-            <a:fillRef idx="1">
-              <a:schemeClr val="accent1"/>
-            </a:fillRef>
-            <a:effectRef idx="0">
-              <a:schemeClr val="accent1"/>
-            </a:effectRef>
-            <a:fontRef idx="minor">
-              <a:schemeClr val="lt1"/>
-            </a:fontRef>
-          </p:style>
-          <p:txBody>
-            <a:bodyPr rtlCol="0" anchor="ctr"/>
-            <a:lstStyle/>
-            <a:p>
-              <a:pPr algn="ctr"/>
-              <a:endParaRPr lang="en-US"/>
-            </a:p>
-          </p:txBody>
-        </p:sp>
-        <p:sp>
-          <p:nvSpPr>
-            <p:cNvPr id="11" name="楕円 10">
-              <a:extLst>
-                <a:ext uri="{FF2B5EF4-FFF2-40B4-BE49-F238E27FC236}">
-                  <a16:creationId xmlns:a16="http://schemas.microsoft.com/office/drawing/2014/main" id="{973D5274-4644-8A13-A948-BAC65BAF60B3}"/>
-                </a:ext>
-              </a:extLst>
-            </p:cNvPr>
-            <p:cNvSpPr/>
-            <p:nvPr/>
-          </p:nvSpPr>
-          <p:spPr>
-            <a:xfrm>
-              <a:off x="4729967" y="2445507"/>
-              <a:ext cx="36576" cy="36576"/>
-            </a:xfrm>
-            <a:prstGeom prst="ellipse">
-              <a:avLst/>
-            </a:prstGeom>
-            <a:solidFill>
-              <a:schemeClr val="tx1"/>
-            </a:solidFill>
-            <a:ln w="12700">
-              <a:solidFill>
-                <a:srgbClr val="C00000"/>
-              </a:solidFill>
-            </a:ln>
-          </p:spPr>
-          <p:style>
-            <a:lnRef idx="2">
-              <a:schemeClr val="accent1">
-                <a:shade val="15000"/>
-              </a:schemeClr>
-            </a:lnRef>
-            <a:fillRef idx="1">
-              <a:schemeClr val="accent1"/>
-            </a:fillRef>
-            <a:effectRef idx="0">
-              <a:schemeClr val="accent1"/>
-            </a:effectRef>
-            <a:fontRef idx="minor">
-              <a:schemeClr val="lt1"/>
-            </a:fontRef>
-          </p:style>
-          <p:txBody>
-            <a:bodyPr rtlCol="0" anchor="ctr"/>
-            <a:lstStyle/>
-            <a:p>
-              <a:pPr algn="ctr"/>
-              <a:endParaRPr lang="en-US"/>
-            </a:p>
-          </p:txBody>
-        </p:sp>
-      </p:grpSp>
-      <p:grpSp>
-        <p:nvGrpSpPr>
-          <p:cNvPr id="13" name="グループ化 12">
-            <a:extLst>
-              <a:ext uri="{FF2B5EF4-FFF2-40B4-BE49-F238E27FC236}">
-                <a16:creationId xmlns:a16="http://schemas.microsoft.com/office/drawing/2014/main" id="{CB2508A2-60D8-5B49-52B5-23A8E1E0A37D}"/>
-              </a:ext>
-            </a:extLst>
-          </p:cNvPr>
-          <p:cNvGrpSpPr/>
-          <p:nvPr/>
-        </p:nvGrpSpPr>
-        <p:grpSpPr>
-          <a:xfrm>
-            <a:off x="4849618" y="2306590"/>
-            <a:ext cx="124769" cy="124769"/>
-            <a:chOff x="4683582" y="2405748"/>
-            <a:chExt cx="124769" cy="124769"/>
-          </a:xfrm>
-        </p:grpSpPr>
-        <p:sp>
-          <p:nvSpPr>
-            <p:cNvPr id="14" name="楕円 13">
-              <a:extLst>
-                <a:ext uri="{FF2B5EF4-FFF2-40B4-BE49-F238E27FC236}">
-                  <a16:creationId xmlns:a16="http://schemas.microsoft.com/office/drawing/2014/main" id="{A723F351-A617-41FA-23F4-4E782AEC8897}"/>
-                </a:ext>
-              </a:extLst>
-            </p:cNvPr>
-            <p:cNvSpPr/>
-            <p:nvPr/>
-          </p:nvSpPr>
-          <p:spPr>
-            <a:xfrm>
-              <a:off x="4683582" y="2405748"/>
-              <a:ext cx="124769" cy="124769"/>
-            </a:xfrm>
-            <a:prstGeom prst="ellipse">
-              <a:avLst/>
-            </a:prstGeom>
-            <a:noFill/>
-            <a:ln w="12700">
-              <a:solidFill>
-                <a:srgbClr val="C00000"/>
-              </a:solidFill>
-            </a:ln>
-          </p:spPr>
-          <p:style>
-            <a:lnRef idx="2">
-              <a:schemeClr val="accent1">
-                <a:shade val="15000"/>
-              </a:schemeClr>
-            </a:lnRef>
-            <a:fillRef idx="1">
-              <a:schemeClr val="accent1"/>
-            </a:fillRef>
-            <a:effectRef idx="0">
-              <a:schemeClr val="accent1"/>
-            </a:effectRef>
-            <a:fontRef idx="minor">
-              <a:schemeClr val="lt1"/>
-            </a:fontRef>
-          </p:style>
-          <p:txBody>
-            <a:bodyPr rtlCol="0" anchor="ctr"/>
-            <a:lstStyle/>
-            <a:p>
-              <a:pPr algn="ctr"/>
-              <a:endParaRPr lang="en-US"/>
-            </a:p>
-          </p:txBody>
-        </p:sp>
-        <p:sp>
-          <p:nvSpPr>
-            <p:cNvPr id="15" name="楕円 14">
-              <a:extLst>
-                <a:ext uri="{FF2B5EF4-FFF2-40B4-BE49-F238E27FC236}">
-                  <a16:creationId xmlns:a16="http://schemas.microsoft.com/office/drawing/2014/main" id="{31416700-81C3-3EFA-8F67-23C89B92AF95}"/>
-                </a:ext>
-              </a:extLst>
-            </p:cNvPr>
-            <p:cNvSpPr/>
-            <p:nvPr/>
-          </p:nvSpPr>
-          <p:spPr>
-            <a:xfrm>
-              <a:off x="4729967" y="2445507"/>
-              <a:ext cx="36576" cy="36576"/>
-            </a:xfrm>
-            <a:prstGeom prst="ellipse">
-              <a:avLst/>
-            </a:prstGeom>
-            <a:solidFill>
-              <a:schemeClr val="tx1"/>
-            </a:solidFill>
-            <a:ln w="12700">
-              <a:solidFill>
-                <a:srgbClr val="C00000"/>
-              </a:solidFill>
-            </a:ln>
-          </p:spPr>
-          <p:style>
-            <a:lnRef idx="2">
-              <a:schemeClr val="accent1">
-                <a:shade val="15000"/>
-              </a:schemeClr>
-            </a:lnRef>
-            <a:fillRef idx="1">
-              <a:schemeClr val="accent1"/>
-            </a:fillRef>
-            <a:effectRef idx="0">
-              <a:schemeClr val="accent1"/>
-            </a:effectRef>
-            <a:fontRef idx="minor">
-              <a:schemeClr val="lt1"/>
-            </a:fontRef>
-          </p:style>
-          <p:txBody>
-            <a:bodyPr rtlCol="0" anchor="ctr"/>
-            <a:lstStyle/>
-            <a:p>
-              <a:pPr algn="ctr"/>
-              <a:endParaRPr lang="en-US"/>
-            </a:p>
-          </p:txBody>
-        </p:sp>
-      </p:grpSp>
-      <p:grpSp>
-        <p:nvGrpSpPr>
-          <p:cNvPr id="16" name="グループ化 15">
-            <a:extLst>
-              <a:ext uri="{FF2B5EF4-FFF2-40B4-BE49-F238E27FC236}">
-                <a16:creationId xmlns:a16="http://schemas.microsoft.com/office/drawing/2014/main" id="{80BDA3CD-1B33-824B-37E4-F31314C8FEEB}"/>
-              </a:ext>
-            </a:extLst>
-          </p:cNvPr>
-          <p:cNvGrpSpPr/>
-          <p:nvPr/>
-        </p:nvGrpSpPr>
-        <p:grpSpPr>
-          <a:xfrm>
-            <a:off x="5029281" y="2207324"/>
-            <a:ext cx="124769" cy="124769"/>
-            <a:chOff x="4683582" y="2405748"/>
-            <a:chExt cx="124769" cy="124769"/>
-          </a:xfrm>
-        </p:grpSpPr>
-        <p:sp>
-          <p:nvSpPr>
-            <p:cNvPr id="18" name="楕円 17">
-              <a:extLst>
-                <a:ext uri="{FF2B5EF4-FFF2-40B4-BE49-F238E27FC236}">
-                  <a16:creationId xmlns:a16="http://schemas.microsoft.com/office/drawing/2014/main" id="{902C171D-DA59-0706-22AD-117C030AE67C}"/>
-                </a:ext>
-              </a:extLst>
-            </p:cNvPr>
-            <p:cNvSpPr/>
-            <p:nvPr/>
-          </p:nvSpPr>
-          <p:spPr>
-            <a:xfrm>
-              <a:off x="4683582" y="2405748"/>
-              <a:ext cx="124769" cy="124769"/>
-            </a:xfrm>
-            <a:prstGeom prst="ellipse">
-              <a:avLst/>
-            </a:prstGeom>
-            <a:noFill/>
-            <a:ln w="12700">
-              <a:solidFill>
-                <a:srgbClr val="C00000"/>
-              </a:solidFill>
-            </a:ln>
-          </p:spPr>
-          <p:style>
-            <a:lnRef idx="2">
-              <a:schemeClr val="accent1">
-                <a:shade val="15000"/>
-              </a:schemeClr>
-            </a:lnRef>
-            <a:fillRef idx="1">
-              <a:schemeClr val="accent1"/>
-            </a:fillRef>
-            <a:effectRef idx="0">
-              <a:schemeClr val="accent1"/>
-            </a:effectRef>
-            <a:fontRef idx="minor">
-              <a:schemeClr val="lt1"/>
-            </a:fontRef>
-          </p:style>
-          <p:txBody>
-            <a:bodyPr rtlCol="0" anchor="ctr"/>
-            <a:lstStyle/>
-            <a:p>
-              <a:pPr algn="ctr"/>
-              <a:endParaRPr lang="en-US"/>
-            </a:p>
-          </p:txBody>
-        </p:sp>
-        <p:sp>
-          <p:nvSpPr>
-            <p:cNvPr id="22" name="楕円 21">
-              <a:extLst>
-                <a:ext uri="{FF2B5EF4-FFF2-40B4-BE49-F238E27FC236}">
-                  <a16:creationId xmlns:a16="http://schemas.microsoft.com/office/drawing/2014/main" id="{E834D704-74B6-B4B0-8829-7F04405D697B}"/>
-                </a:ext>
-              </a:extLst>
-            </p:cNvPr>
-            <p:cNvSpPr/>
-            <p:nvPr/>
-          </p:nvSpPr>
-          <p:spPr>
-            <a:xfrm>
-              <a:off x="4729967" y="2445507"/>
-              <a:ext cx="36576" cy="36576"/>
-            </a:xfrm>
-            <a:prstGeom prst="ellipse">
-              <a:avLst/>
-            </a:prstGeom>
-            <a:solidFill>
-              <a:schemeClr val="tx1"/>
-            </a:solidFill>
-            <a:ln w="12700">
-              <a:solidFill>
-                <a:srgbClr val="C00000"/>
-              </a:solidFill>
-            </a:ln>
-          </p:spPr>
-          <p:style>
-            <a:lnRef idx="2">
-              <a:schemeClr val="accent1">
-                <a:shade val="15000"/>
-              </a:schemeClr>
-            </a:lnRef>
-            <a:fillRef idx="1">
-              <a:schemeClr val="accent1"/>
-            </a:fillRef>
-            <a:effectRef idx="0">
-              <a:schemeClr val="accent1"/>
-            </a:effectRef>
-            <a:fontRef idx="minor">
-              <a:schemeClr val="lt1"/>
-            </a:fontRef>
-          </p:style>
-          <p:txBody>
-            <a:bodyPr rtlCol="0" anchor="ctr"/>
-            <a:lstStyle/>
-            <a:p>
-              <a:pPr algn="ctr"/>
-              <a:endParaRPr lang="en-US"/>
-            </a:p>
-          </p:txBody>
-        </p:sp>
-      </p:grpSp>
-      <p:grpSp>
-        <p:nvGrpSpPr>
-          <p:cNvPr id="25" name="グループ化 24">
-            <a:extLst>
-              <a:ext uri="{FF2B5EF4-FFF2-40B4-BE49-F238E27FC236}">
-                <a16:creationId xmlns:a16="http://schemas.microsoft.com/office/drawing/2014/main" id="{4F2BDE32-10A7-EA77-5388-68D77C61871F}"/>
-              </a:ext>
-            </a:extLst>
-          </p:cNvPr>
-          <p:cNvGrpSpPr/>
-          <p:nvPr/>
-        </p:nvGrpSpPr>
-        <p:grpSpPr>
-          <a:xfrm>
-            <a:off x="5202573" y="2112401"/>
-            <a:ext cx="124769" cy="124769"/>
-            <a:chOff x="4683582" y="2405748"/>
-            <a:chExt cx="124769" cy="124769"/>
-          </a:xfrm>
-        </p:grpSpPr>
-        <p:sp>
-          <p:nvSpPr>
-            <p:cNvPr id="32" name="楕円 31">
-              <a:extLst>
-                <a:ext uri="{FF2B5EF4-FFF2-40B4-BE49-F238E27FC236}">
-                  <a16:creationId xmlns:a16="http://schemas.microsoft.com/office/drawing/2014/main" id="{1BE1654D-9532-1F4E-D3F8-B5682D4341B3}"/>
-                </a:ext>
-              </a:extLst>
-            </p:cNvPr>
-            <p:cNvSpPr/>
-            <p:nvPr/>
-          </p:nvSpPr>
-          <p:spPr>
-            <a:xfrm>
-              <a:off x="4683582" y="2405748"/>
-              <a:ext cx="124769" cy="124769"/>
-            </a:xfrm>
-            <a:prstGeom prst="ellipse">
-              <a:avLst/>
-            </a:prstGeom>
-            <a:noFill/>
-            <a:ln w="12700">
-              <a:solidFill>
-                <a:srgbClr val="C00000"/>
-              </a:solidFill>
-            </a:ln>
-          </p:spPr>
-          <p:style>
-            <a:lnRef idx="2">
-              <a:schemeClr val="accent1">
-                <a:shade val="15000"/>
-              </a:schemeClr>
-            </a:lnRef>
-            <a:fillRef idx="1">
-              <a:schemeClr val="accent1"/>
-            </a:fillRef>
-            <a:effectRef idx="0">
-              <a:schemeClr val="accent1"/>
-            </a:effectRef>
-            <a:fontRef idx="minor">
-              <a:schemeClr val="lt1"/>
-            </a:fontRef>
-          </p:style>
-          <p:txBody>
-            <a:bodyPr rtlCol="0" anchor="ctr"/>
-            <a:lstStyle/>
-            <a:p>
-              <a:pPr algn="ctr"/>
-              <a:endParaRPr lang="en-US"/>
-            </a:p>
-          </p:txBody>
-        </p:sp>
-        <p:sp>
-          <p:nvSpPr>
-            <p:cNvPr id="34" name="楕円 33">
-              <a:extLst>
-                <a:ext uri="{FF2B5EF4-FFF2-40B4-BE49-F238E27FC236}">
-                  <a16:creationId xmlns:a16="http://schemas.microsoft.com/office/drawing/2014/main" id="{8F2680E7-1167-E539-2390-B498C32A1607}"/>
-                </a:ext>
-              </a:extLst>
-            </p:cNvPr>
-            <p:cNvSpPr/>
-            <p:nvPr/>
-          </p:nvSpPr>
-          <p:spPr>
-            <a:xfrm>
-              <a:off x="4729967" y="2445507"/>
-              <a:ext cx="36576" cy="36576"/>
-            </a:xfrm>
-            <a:prstGeom prst="ellipse">
-              <a:avLst/>
-            </a:prstGeom>
-            <a:solidFill>
-              <a:schemeClr val="tx1"/>
-            </a:solidFill>
-            <a:ln w="12700">
-              <a:solidFill>
-                <a:srgbClr val="C00000"/>
-              </a:solidFill>
-            </a:ln>
-          </p:spPr>
-          <p:style>
-            <a:lnRef idx="2">
-              <a:schemeClr val="accent1">
-                <a:shade val="15000"/>
-              </a:schemeClr>
-            </a:lnRef>
-            <a:fillRef idx="1">
-              <a:schemeClr val="accent1"/>
-            </a:fillRef>
-            <a:effectRef idx="0">
-              <a:schemeClr val="accent1"/>
-            </a:effectRef>
-            <a:fontRef idx="minor">
-              <a:schemeClr val="lt1"/>
-            </a:fontRef>
-          </p:style>
-          <p:txBody>
-            <a:bodyPr rtlCol="0" anchor="ctr"/>
-            <a:lstStyle/>
-            <a:p>
-              <a:pPr algn="ctr"/>
-              <a:endParaRPr lang="en-US"/>
-            </a:p>
-          </p:txBody>
-        </p:sp>
-      </p:grpSp>
-      <p:cxnSp>
-        <p:nvCxnSpPr>
-          <p:cNvPr id="2" name="Straight Arrow Connector 22">
-            <a:extLst>
-              <a:ext uri="{FF2B5EF4-FFF2-40B4-BE49-F238E27FC236}">
-                <a16:creationId xmlns:a16="http://schemas.microsoft.com/office/drawing/2014/main" id="{98C753AB-37E7-19A4-048C-D18D11179D45}"/>
-              </a:ext>
-            </a:extLst>
-          </p:cNvPr>
-          <p:cNvCxnSpPr>
-            <a:cxnSpLocks/>
-          </p:cNvCxnSpPr>
-          <p:nvPr/>
-        </p:nvCxnSpPr>
-        <p:spPr>
-          <a:xfrm>
-            <a:off x="3683930" y="3041650"/>
-            <a:ext cx="705779" cy="427703"/>
-          </a:xfrm>
-          <a:prstGeom prst="straightConnector1">
-            <a:avLst/>
-          </a:prstGeom>
-          <a:ln>
-            <a:solidFill>
-              <a:srgbClr val="FF0000"/>
-            </a:solidFill>
-            <a:prstDash val="sysDot"/>
-            <a:headEnd type="none" w="med" len="med"/>
-            <a:tailEnd type="none" w="med" len="med"/>
-          </a:ln>
-        </p:spPr>
-        <p:style>
-          <a:lnRef idx="2">
-            <a:schemeClr val="dk1"/>
-          </a:lnRef>
-          <a:fillRef idx="0">
-            <a:schemeClr val="dk1"/>
-          </a:fillRef>
-          <a:effectRef idx="1">
-            <a:schemeClr val="dk1"/>
-          </a:effectRef>
-          <a:fontRef idx="minor">
-            <a:schemeClr val="tx1"/>
-          </a:fontRef>
-        </p:style>
-      </p:cxnSp>
-      <p:cxnSp>
-        <p:nvCxnSpPr>
-          <p:cNvPr id="35" name="Straight Arrow Connector 22">
-            <a:extLst>
-              <a:ext uri="{FF2B5EF4-FFF2-40B4-BE49-F238E27FC236}">
-                <a16:creationId xmlns:a16="http://schemas.microsoft.com/office/drawing/2014/main" id="{7753F6C3-4431-3B85-9660-C900030B9FE1}"/>
-              </a:ext>
-            </a:extLst>
-          </p:cNvPr>
-          <p:cNvCxnSpPr>
-            <a:cxnSpLocks/>
-          </p:cNvCxnSpPr>
-          <p:nvPr/>
-        </p:nvCxnSpPr>
-        <p:spPr>
-          <a:xfrm>
-            <a:off x="4358873" y="3459169"/>
-            <a:ext cx="1080582" cy="657257"/>
-          </a:xfrm>
-          <a:prstGeom prst="straightConnector1">
-            <a:avLst/>
-          </a:prstGeom>
-          <a:ln>
-            <a:solidFill>
-              <a:srgbClr val="FF0000"/>
-            </a:solidFill>
-            <a:tailEnd type="triangle"/>
-          </a:ln>
-        </p:spPr>
-        <p:style>
-          <a:lnRef idx="2">
-            <a:schemeClr val="dk1"/>
-          </a:lnRef>
-          <a:fillRef idx="0">
-            <a:schemeClr val="dk1"/>
-          </a:fillRef>
-          <a:effectRef idx="1">
-            <a:schemeClr val="dk1"/>
-          </a:effectRef>
-          <a:fontRef idx="minor">
-            <a:schemeClr val="tx1"/>
-          </a:fontRef>
-        </p:style>
-      </p:cxnSp>
-    </p:spTree>
-    <p:extLst>
-      <p:ext uri="{BB962C8B-B14F-4D97-AF65-F5344CB8AC3E}">
-        <p14:creationId xmlns:p14="http://schemas.microsoft.com/office/powerpoint/2010/main" val="3528325271"/>
-      </p:ext>
-    </p:extLst>
-  </p:cSld>
-  <p:clrMapOvr>
-    <a:masterClrMapping/>
-  </p:clrMapOvr>
-</p:sld>
-</file>
-
-<file path=ppt/slides/slide14.xml><?xml version="1.0" encoding="utf-8"?>
-<p:sld xmlns:a="http://schemas.openxmlformats.org/drawingml/2006/main" xmlns:r="http://schemas.openxmlformats.org/officeDocument/2006/relationships" xmlns:p="http://schemas.openxmlformats.org/presentationml/2006/main">
-  <p:cSld>
-    <p:spTree>
-      <p:nvGrpSpPr>
         <p:cNvPr id="1" name=""/>
         <p:cNvGrpSpPr/>
         <p:nvPr/>
@@ -12387,7 +9708,7 @@
 </p:sld>
 </file>
 
-<file path=ppt/slides/slide15.xml><?xml version="1.0" encoding="utf-8"?>
+<file path=ppt/slides/slide14.xml><?xml version="1.0" encoding="utf-8"?>
 <p:sld xmlns:a="http://schemas.openxmlformats.org/drawingml/2006/main" xmlns:r="http://schemas.openxmlformats.org/officeDocument/2006/relationships" xmlns:p="http://schemas.openxmlformats.org/presentationml/2006/main">
   <p:cSld>
     <p:spTree>
@@ -14768,7 +12089,7 @@
 </p:sld>
 </file>
 
-<file path=ppt/slides/slide16.xml><?xml version="1.0" encoding="utf-8"?>
+<file path=ppt/slides/slide15.xml><?xml version="1.0" encoding="utf-8"?>
 <p:sld xmlns:a="http://schemas.openxmlformats.org/drawingml/2006/main" xmlns:r="http://schemas.openxmlformats.org/officeDocument/2006/relationships" xmlns:p="http://schemas.openxmlformats.org/presentationml/2006/main">
   <p:cSld>
     <p:spTree>
@@ -17725,7 +15046,7 @@
 </p:sld>
 </file>
 
-<file path=ppt/slides/slide17.xml><?xml version="1.0" encoding="utf-8"?>
+<file path=ppt/slides/slide16.xml><?xml version="1.0" encoding="utf-8"?>
 <p:sld xmlns:a="http://schemas.openxmlformats.org/drawingml/2006/main" xmlns:r="http://schemas.openxmlformats.org/officeDocument/2006/relationships" xmlns:p="http://schemas.openxmlformats.org/presentationml/2006/main">
   <p:cSld>
     <p:spTree>

--- a/Materials.pptx
+++ b/Materials.pptx
@@ -17,10 +17,11 @@
     <p:sldId id="264" r:id="rId14"/>
     <p:sldId id="266" r:id="rId15"/>
     <p:sldId id="274" r:id="rId16"/>
-    <p:sldId id="267" r:id="rId17"/>
-    <p:sldId id="272" r:id="rId18"/>
-    <p:sldId id="271" r:id="rId19"/>
-    <p:sldId id="273" r:id="rId20"/>
+    <p:sldId id="275" r:id="rId17"/>
+    <p:sldId id="267" r:id="rId18"/>
+    <p:sldId id="272" r:id="rId19"/>
+    <p:sldId id="271" r:id="rId20"/>
+    <p:sldId id="273" r:id="rId21"/>
   </p:sldIdLst>
   <p:sldSz cx="12192000" cy="6858000"/>
   <p:notesSz cx="7102475" cy="9388475"/>
@@ -130,7 +131,7 @@
 <file path=ppt/revisionInfo.xml><?xml version="1.0" encoding="utf-8"?>
 <p1510:revInfo xmlns:a="http://schemas.openxmlformats.org/drawingml/2006/main" xmlns:r="http://schemas.openxmlformats.org/officeDocument/2006/relationships" xmlns:p1510="http://schemas.microsoft.com/office/powerpoint/2015/10/main">
   <p1510:revLst>
-    <p1510:client id="{2E73B93B-076D-4B14-AC4D-A7B074A06377}" v="17" dt="2026-10-20T09:35:45.115"/>
+    <p1510:client id="{2E73B93B-076D-4B14-AC4D-A7B074A06377}" v="65" dt="2026-10-20T11:21:48.154"/>
   </p1510:revLst>
 </p1510:revInfo>
 </file>
@@ -140,7 +141,7 @@
   <pc:docChgLst>
     <pc:chgData name="全 香玉" userId="1f3450e5-81b9-4f7a-82d7-841c32c029e0" providerId="ADAL" clId="{670531AC-1667-4F97-B1A6-5D38F8A44A79}"/>
     <pc:docChg chg="undo redo custSel addSld delSld modSld sldOrd">
-      <pc:chgData name="全 香玉" userId="1f3450e5-81b9-4f7a-82d7-841c32c029e0" providerId="ADAL" clId="{670531AC-1667-4F97-B1A6-5D38F8A44A79}" dt="2026-10-20T09:55:39.171" v="3033" actId="47"/>
+      <pc:chgData name="全 香玉" userId="1f3450e5-81b9-4f7a-82d7-841c32c029e0" providerId="ADAL" clId="{670531AC-1667-4F97-B1A6-5D38F8A44A79}" dt="2026-10-20T11:25:43.264" v="3164" actId="22"/>
       <pc:docMkLst>
         <pc:docMk/>
       </pc:docMkLst>
@@ -396,6 +397,349 @@
             <pc:docMk/>
             <pc:sldMk cId="1716350635" sldId="274"/>
             <ac:cxnSpMk id="120" creationId="{E5E11A20-1B4B-2A02-6590-8892BFF39232}"/>
+          </ac:cxnSpMkLst>
+        </pc:cxnChg>
+      </pc:sldChg>
+      <pc:sldChg chg="addSp delSp modSp new mod">
+        <pc:chgData name="全 香玉" userId="1f3450e5-81b9-4f7a-82d7-841c32c029e0" providerId="ADAL" clId="{670531AC-1667-4F97-B1A6-5D38F8A44A79}" dt="2026-10-20T11:25:43.264" v="3164" actId="22"/>
+        <pc:sldMkLst>
+          <pc:docMk/>
+          <pc:sldMk cId="2217317503" sldId="275"/>
+        </pc:sldMkLst>
+        <pc:spChg chg="del">
+          <ac:chgData name="全 香玉" userId="1f3450e5-81b9-4f7a-82d7-841c32c029e0" providerId="ADAL" clId="{670531AC-1667-4F97-B1A6-5D38F8A44A79}" dt="2026-10-20T11:13:57.958" v="3035" actId="478"/>
+          <ac:spMkLst>
+            <pc:docMk/>
+            <pc:sldMk cId="2217317503" sldId="275"/>
+            <ac:spMk id="2" creationId="{5020A05B-B995-9D69-6615-FAF49082A839}"/>
+          </ac:spMkLst>
+        </pc:spChg>
+        <pc:spChg chg="del">
+          <ac:chgData name="全 香玉" userId="1f3450e5-81b9-4f7a-82d7-841c32c029e0" providerId="ADAL" clId="{670531AC-1667-4F97-B1A6-5D38F8A44A79}" dt="2026-10-20T11:13:58.714" v="3036" actId="478"/>
+          <ac:spMkLst>
+            <pc:docMk/>
+            <pc:sldMk cId="2217317503" sldId="275"/>
+            <ac:spMk id="3" creationId="{B0811A25-D2F8-3310-A52F-9204ACBF4D1E}"/>
+          </ac:spMkLst>
+        </pc:spChg>
+        <pc:spChg chg="add mod">
+          <ac:chgData name="全 香玉" userId="1f3450e5-81b9-4f7a-82d7-841c32c029e0" providerId="ADAL" clId="{670531AC-1667-4F97-B1A6-5D38F8A44A79}" dt="2026-10-20T11:17:04.374" v="3084" actId="1076"/>
+          <ac:spMkLst>
+            <pc:docMk/>
+            <pc:sldMk cId="2217317503" sldId="275"/>
+            <ac:spMk id="4" creationId="{061B69D4-B819-A583-E223-B83D4A87F1BC}"/>
+          </ac:spMkLst>
+        </pc:spChg>
+        <pc:spChg chg="add mod">
+          <ac:chgData name="全 香玉" userId="1f3450e5-81b9-4f7a-82d7-841c32c029e0" providerId="ADAL" clId="{670531AC-1667-4F97-B1A6-5D38F8A44A79}" dt="2026-10-20T11:17:15.374" v="3087" actId="1076"/>
+          <ac:spMkLst>
+            <pc:docMk/>
+            <pc:sldMk cId="2217317503" sldId="275"/>
+            <ac:spMk id="38" creationId="{51BBA901-2DA8-7337-CF43-C0A8027A7123}"/>
+          </ac:spMkLst>
+        </pc:spChg>
+        <pc:spChg chg="add mod">
+          <ac:chgData name="全 香玉" userId="1f3450e5-81b9-4f7a-82d7-841c32c029e0" providerId="ADAL" clId="{670531AC-1667-4F97-B1A6-5D38F8A44A79}" dt="2026-10-20T11:19:35.359" v="3121" actId="1076"/>
+          <ac:spMkLst>
+            <pc:docMk/>
+            <pc:sldMk cId="2217317503" sldId="275"/>
+            <ac:spMk id="54" creationId="{E807F195-FADE-C9D6-01FA-D3F69E0A5E4D}"/>
+          </ac:spMkLst>
+        </pc:spChg>
+        <pc:spChg chg="add mod">
+          <ac:chgData name="全 香玉" userId="1f3450e5-81b9-4f7a-82d7-841c32c029e0" providerId="ADAL" clId="{670531AC-1667-4F97-B1A6-5D38F8A44A79}" dt="2026-10-20T11:19:45.884" v="3124" actId="20577"/>
+          <ac:spMkLst>
+            <pc:docMk/>
+            <pc:sldMk cId="2217317503" sldId="275"/>
+            <ac:spMk id="56" creationId="{D5D70C2A-9C8B-84CB-EFDF-9EDCD311267F}"/>
+          </ac:spMkLst>
+        </pc:spChg>
+        <pc:spChg chg="add del mod">
+          <ac:chgData name="全 香玉" userId="1f3450e5-81b9-4f7a-82d7-841c32c029e0" providerId="ADAL" clId="{670531AC-1667-4F97-B1A6-5D38F8A44A79}" dt="2026-10-20T11:20:03.624" v="3126" actId="478"/>
+          <ac:spMkLst>
+            <pc:docMk/>
+            <pc:sldMk cId="2217317503" sldId="275"/>
+            <ac:spMk id="57" creationId="{68F5EC27-1D6E-38C6-A699-FB5B8036DEE1}"/>
+          </ac:spMkLst>
+        </pc:spChg>
+        <pc:spChg chg="add mod">
+          <ac:chgData name="全 香玉" userId="1f3450e5-81b9-4f7a-82d7-841c32c029e0" providerId="ADAL" clId="{670531AC-1667-4F97-B1A6-5D38F8A44A79}" dt="2026-10-20T11:21:13.736" v="3134" actId="1076"/>
+          <ac:spMkLst>
+            <pc:docMk/>
+            <pc:sldMk cId="2217317503" sldId="275"/>
+            <ac:spMk id="60" creationId="{B26168FB-AE70-4033-2CF7-0D9DCB4D33BD}"/>
+          </ac:spMkLst>
+        </pc:spChg>
+        <pc:spChg chg="add mod">
+          <ac:chgData name="全 香玉" userId="1f3450e5-81b9-4f7a-82d7-841c32c029e0" providerId="ADAL" clId="{670531AC-1667-4F97-B1A6-5D38F8A44A79}" dt="2026-10-20T11:21:48.154" v="3146" actId="20577"/>
+          <ac:spMkLst>
+            <pc:docMk/>
+            <pc:sldMk cId="2217317503" sldId="275"/>
+            <ac:spMk id="62" creationId="{BD113D8F-DDA2-818C-CF05-EEAEEFB42389}"/>
+          </ac:spMkLst>
+        </pc:spChg>
+        <pc:spChg chg="add mod">
+          <ac:chgData name="全 香玉" userId="1f3450e5-81b9-4f7a-82d7-841c32c029e0" providerId="ADAL" clId="{670531AC-1667-4F97-B1A6-5D38F8A44A79}" dt="2026-10-20T11:23:17.445" v="3149" actId="1076"/>
+          <ac:spMkLst>
+            <pc:docMk/>
+            <pc:sldMk cId="2217317503" sldId="275"/>
+            <ac:spMk id="63" creationId="{13A34A1A-57C7-3662-1F7B-98252C10AD67}"/>
+          </ac:spMkLst>
+        </pc:spChg>
+        <pc:spChg chg="add mod">
+          <ac:chgData name="全 香玉" userId="1f3450e5-81b9-4f7a-82d7-841c32c029e0" providerId="ADAL" clId="{670531AC-1667-4F97-B1A6-5D38F8A44A79}" dt="2026-10-20T11:23:25.124" v="3152" actId="1036"/>
+          <ac:spMkLst>
+            <pc:docMk/>
+            <pc:sldMk cId="2217317503" sldId="275"/>
+            <ac:spMk id="65" creationId="{DE73C767-8B0A-31D8-2BD7-14A103067B82}"/>
+          </ac:spMkLst>
+        </pc:spChg>
+        <pc:spChg chg="add mod">
+          <ac:chgData name="全 香玉" userId="1f3450e5-81b9-4f7a-82d7-841c32c029e0" providerId="ADAL" clId="{670531AC-1667-4F97-B1A6-5D38F8A44A79}" dt="2026-10-20T11:23:35.068" v="3154" actId="1076"/>
+          <ac:spMkLst>
+            <pc:docMk/>
+            <pc:sldMk cId="2217317503" sldId="275"/>
+            <ac:spMk id="67" creationId="{CD71FF95-E0A7-6A04-CE20-149EC3A56484}"/>
+          </ac:spMkLst>
+        </pc:spChg>
+        <pc:spChg chg="add mod">
+          <ac:chgData name="全 香玉" userId="1f3450e5-81b9-4f7a-82d7-841c32c029e0" providerId="ADAL" clId="{670531AC-1667-4F97-B1A6-5D38F8A44A79}" dt="2026-10-20T11:23:47.460" v="3157" actId="207"/>
+          <ac:spMkLst>
+            <pc:docMk/>
+            <pc:sldMk cId="2217317503" sldId="275"/>
+            <ac:spMk id="69" creationId="{D23068C0-7909-1B1A-9300-8CCAD7178D9B}"/>
+          </ac:spMkLst>
+        </pc:spChg>
+        <pc:spChg chg="add mod">
+          <ac:chgData name="全 香玉" userId="1f3450e5-81b9-4f7a-82d7-841c32c029e0" providerId="ADAL" clId="{670531AC-1667-4F97-B1A6-5D38F8A44A79}" dt="2026-10-20T11:23:54.264" v="3159" actId="1076"/>
+          <ac:spMkLst>
+            <pc:docMk/>
+            <pc:sldMk cId="2217317503" sldId="275"/>
+            <ac:spMk id="71" creationId="{A2791ADC-C080-8E89-8EE8-BC426520A70A}"/>
+          </ac:spMkLst>
+        </pc:spChg>
+        <pc:spChg chg="add mod">
+          <ac:chgData name="全 香玉" userId="1f3450e5-81b9-4f7a-82d7-841c32c029e0" providerId="ADAL" clId="{670531AC-1667-4F97-B1A6-5D38F8A44A79}" dt="2026-10-20T11:23:59.154" v="3161" actId="1076"/>
+          <ac:spMkLst>
+            <pc:docMk/>
+            <pc:sldMk cId="2217317503" sldId="275"/>
+            <ac:spMk id="73" creationId="{06BF93F6-82AB-11EA-A2B6-F1C919C97D48}"/>
+          </ac:spMkLst>
+        </pc:spChg>
+        <pc:picChg chg="add">
+          <ac:chgData name="全 香玉" userId="1f3450e5-81b9-4f7a-82d7-841c32c029e0" providerId="ADAL" clId="{670531AC-1667-4F97-B1A6-5D38F8A44A79}" dt="2026-10-20T11:25:32.632" v="3162" actId="22"/>
+          <ac:picMkLst>
+            <pc:docMk/>
+            <pc:sldMk cId="2217317503" sldId="275"/>
+            <ac:picMk id="75" creationId="{DAAD31B0-4130-B6A5-D10C-9AA717686659}"/>
+          </ac:picMkLst>
+        </pc:picChg>
+        <pc:picChg chg="add del">
+          <ac:chgData name="全 香玉" userId="1f3450e5-81b9-4f7a-82d7-841c32c029e0" providerId="ADAL" clId="{670531AC-1667-4F97-B1A6-5D38F8A44A79}" dt="2026-10-20T11:25:43.264" v="3164" actId="22"/>
+          <ac:picMkLst>
+            <pc:docMk/>
+            <pc:sldMk cId="2217317503" sldId="275"/>
+            <ac:picMk id="77" creationId="{A8D6FC21-3681-6483-F485-CCA1292DA29B}"/>
+          </ac:picMkLst>
+        </pc:picChg>
+        <pc:cxnChg chg="add mod">
+          <ac:chgData name="全 香玉" userId="1f3450e5-81b9-4f7a-82d7-841c32c029e0" providerId="ADAL" clId="{670531AC-1667-4F97-B1A6-5D38F8A44A79}" dt="2026-10-20T11:17:04.374" v="3084" actId="1076"/>
+          <ac:cxnSpMkLst>
+            <pc:docMk/>
+            <pc:sldMk cId="2217317503" sldId="275"/>
+            <ac:cxnSpMk id="6" creationId="{596AF677-4A25-E6C2-2400-02DB9BC855E8}"/>
+          </ac:cxnSpMkLst>
+        </pc:cxnChg>
+        <pc:cxnChg chg="add mod">
+          <ac:chgData name="全 香玉" userId="1f3450e5-81b9-4f7a-82d7-841c32c029e0" providerId="ADAL" clId="{670531AC-1667-4F97-B1A6-5D38F8A44A79}" dt="2026-10-20T11:18:06.054" v="3098" actId="208"/>
+          <ac:cxnSpMkLst>
+            <pc:docMk/>
+            <pc:sldMk cId="2217317503" sldId="275"/>
+            <ac:cxnSpMk id="7" creationId="{ADC8C37E-A949-A395-E6F3-69F539B52F5E}"/>
+          </ac:cxnSpMkLst>
+        </pc:cxnChg>
+        <pc:cxnChg chg="add del mod">
+          <ac:chgData name="全 香玉" userId="1f3450e5-81b9-4f7a-82d7-841c32c029e0" providerId="ADAL" clId="{670531AC-1667-4F97-B1A6-5D38F8A44A79}" dt="2026-10-20T11:14:44.864" v="3048" actId="11529"/>
+          <ac:cxnSpMkLst>
+            <pc:docMk/>
+            <pc:sldMk cId="2217317503" sldId="275"/>
+            <ac:cxnSpMk id="11" creationId="{FEDEE877-5AC6-E373-1F4F-BE1BF3136BC7}"/>
+          </ac:cxnSpMkLst>
+        </pc:cxnChg>
+        <pc:cxnChg chg="add mod">
+          <ac:chgData name="全 香玉" userId="1f3450e5-81b9-4f7a-82d7-841c32c029e0" providerId="ADAL" clId="{670531AC-1667-4F97-B1A6-5D38F8A44A79}" dt="2026-10-20T11:17:04.374" v="3084" actId="1076"/>
+          <ac:cxnSpMkLst>
+            <pc:docMk/>
+            <pc:sldMk cId="2217317503" sldId="275"/>
+            <ac:cxnSpMk id="13" creationId="{FD1880AA-E0DE-C4B7-4D09-C069AC89FDB3}"/>
+          </ac:cxnSpMkLst>
+        </pc:cxnChg>
+        <pc:cxnChg chg="add mod">
+          <ac:chgData name="全 香玉" userId="1f3450e5-81b9-4f7a-82d7-841c32c029e0" providerId="ADAL" clId="{670531AC-1667-4F97-B1A6-5D38F8A44A79}" dt="2026-10-20T11:17:04.374" v="3084" actId="1076"/>
+          <ac:cxnSpMkLst>
+            <pc:docMk/>
+            <pc:sldMk cId="2217317503" sldId="275"/>
+            <ac:cxnSpMk id="14" creationId="{FF8F7686-9C3E-7338-9FAA-D08319515328}"/>
+          </ac:cxnSpMkLst>
+        </pc:cxnChg>
+        <pc:cxnChg chg="add del mod">
+          <ac:chgData name="全 香玉" userId="1f3450e5-81b9-4f7a-82d7-841c32c029e0" providerId="ADAL" clId="{670531AC-1667-4F97-B1A6-5D38F8A44A79}" dt="2026-10-20T11:15:15.247" v="3059" actId="478"/>
+          <ac:cxnSpMkLst>
+            <pc:docMk/>
+            <pc:sldMk cId="2217317503" sldId="275"/>
+            <ac:cxnSpMk id="19" creationId="{48D292CF-9E9E-B670-C964-3AB91DE89A0F}"/>
+          </ac:cxnSpMkLst>
+        </pc:cxnChg>
+        <pc:cxnChg chg="add mod">
+          <ac:chgData name="全 香玉" userId="1f3450e5-81b9-4f7a-82d7-841c32c029e0" providerId="ADAL" clId="{670531AC-1667-4F97-B1A6-5D38F8A44A79}" dt="2026-10-20T11:17:04.374" v="3084" actId="1076"/>
+          <ac:cxnSpMkLst>
+            <pc:docMk/>
+            <pc:sldMk cId="2217317503" sldId="275"/>
+            <ac:cxnSpMk id="22" creationId="{BE792630-C852-55B8-845F-948BB124BF5B}"/>
+          </ac:cxnSpMkLst>
+        </pc:cxnChg>
+        <pc:cxnChg chg="add mod">
+          <ac:chgData name="全 香玉" userId="1f3450e5-81b9-4f7a-82d7-841c32c029e0" providerId="ADAL" clId="{670531AC-1667-4F97-B1A6-5D38F8A44A79}" dt="2026-10-20T11:17:04.374" v="3084" actId="1076"/>
+          <ac:cxnSpMkLst>
+            <pc:docMk/>
+            <pc:sldMk cId="2217317503" sldId="275"/>
+            <ac:cxnSpMk id="27" creationId="{35841C97-FA6D-1E61-7AF6-E753FB2FBF80}"/>
+          </ac:cxnSpMkLst>
+        </pc:cxnChg>
+        <pc:cxnChg chg="add mod">
+          <ac:chgData name="全 香玉" userId="1f3450e5-81b9-4f7a-82d7-841c32c029e0" providerId="ADAL" clId="{670531AC-1667-4F97-B1A6-5D38F8A44A79}" dt="2026-10-20T11:17:04.374" v="3084" actId="1076"/>
+          <ac:cxnSpMkLst>
+            <pc:docMk/>
+            <pc:sldMk cId="2217317503" sldId="275"/>
+            <ac:cxnSpMk id="29" creationId="{7834F117-518D-12CE-6793-275355F6AD8B}"/>
+          </ac:cxnSpMkLst>
+        </pc:cxnChg>
+        <pc:cxnChg chg="add mod">
+          <ac:chgData name="全 香玉" userId="1f3450e5-81b9-4f7a-82d7-841c32c029e0" providerId="ADAL" clId="{670531AC-1667-4F97-B1A6-5D38F8A44A79}" dt="2026-10-20T11:17:04.374" v="3084" actId="1076"/>
+          <ac:cxnSpMkLst>
+            <pc:docMk/>
+            <pc:sldMk cId="2217317503" sldId="275"/>
+            <ac:cxnSpMk id="30" creationId="{02DF5853-40F2-2E8B-9EC0-DB121CD3B28F}"/>
+          </ac:cxnSpMkLst>
+        </pc:cxnChg>
+        <pc:cxnChg chg="add mod">
+          <ac:chgData name="全 香玉" userId="1f3450e5-81b9-4f7a-82d7-841c32c029e0" providerId="ADAL" clId="{670531AC-1667-4F97-B1A6-5D38F8A44A79}" dt="2026-10-20T11:17:04.374" v="3084" actId="1076"/>
+          <ac:cxnSpMkLst>
+            <pc:docMk/>
+            <pc:sldMk cId="2217317503" sldId="275"/>
+            <ac:cxnSpMk id="34" creationId="{89985C6D-68D1-E329-CC33-1469C64694EC}"/>
+          </ac:cxnSpMkLst>
+        </pc:cxnChg>
+        <pc:cxnChg chg="add mod">
+          <ac:chgData name="全 香玉" userId="1f3450e5-81b9-4f7a-82d7-841c32c029e0" providerId="ADAL" clId="{670531AC-1667-4F97-B1A6-5D38F8A44A79}" dt="2026-10-20T11:17:07.057" v="3085"/>
+          <ac:cxnSpMkLst>
+            <pc:docMk/>
+            <pc:sldMk cId="2217317503" sldId="275"/>
+            <ac:cxnSpMk id="37" creationId="{1D78BAD2-926E-FA69-E8D2-55CD69A63A8B}"/>
+          </ac:cxnSpMkLst>
+        </pc:cxnChg>
+        <pc:cxnChg chg="add mod">
+          <ac:chgData name="全 香玉" userId="1f3450e5-81b9-4f7a-82d7-841c32c029e0" providerId="ADAL" clId="{670531AC-1667-4F97-B1A6-5D38F8A44A79}" dt="2026-10-20T11:17:15.374" v="3087" actId="1076"/>
+          <ac:cxnSpMkLst>
+            <pc:docMk/>
+            <pc:sldMk cId="2217317503" sldId="275"/>
+            <ac:cxnSpMk id="39" creationId="{89096FCF-9153-3EB8-299E-86085D1AA490}"/>
+          </ac:cxnSpMkLst>
+        </pc:cxnChg>
+        <pc:cxnChg chg="add mod">
+          <ac:chgData name="全 香玉" userId="1f3450e5-81b9-4f7a-82d7-841c32c029e0" providerId="ADAL" clId="{670531AC-1667-4F97-B1A6-5D38F8A44A79}" dt="2026-10-20T11:18:09.274" v="3099" actId="208"/>
+          <ac:cxnSpMkLst>
+            <pc:docMk/>
+            <pc:sldMk cId="2217317503" sldId="275"/>
+            <ac:cxnSpMk id="40" creationId="{932F73AD-DC22-4364-BF97-18DC2A9C948B}"/>
+          </ac:cxnSpMkLst>
+        </pc:cxnChg>
+        <pc:cxnChg chg="add mod">
+          <ac:chgData name="全 香玉" userId="1f3450e5-81b9-4f7a-82d7-841c32c029e0" providerId="ADAL" clId="{670531AC-1667-4F97-B1A6-5D38F8A44A79}" dt="2026-10-20T11:17:15.374" v="3087" actId="1076"/>
+          <ac:cxnSpMkLst>
+            <pc:docMk/>
+            <pc:sldMk cId="2217317503" sldId="275"/>
+            <ac:cxnSpMk id="41" creationId="{BA048E9F-CB02-E243-1300-0C905205EA20}"/>
+          </ac:cxnSpMkLst>
+        </pc:cxnChg>
+        <pc:cxnChg chg="add mod">
+          <ac:chgData name="全 香玉" userId="1f3450e5-81b9-4f7a-82d7-841c32c029e0" providerId="ADAL" clId="{670531AC-1667-4F97-B1A6-5D38F8A44A79}" dt="2026-10-20T11:17:15.374" v="3087" actId="1076"/>
+          <ac:cxnSpMkLst>
+            <pc:docMk/>
+            <pc:sldMk cId="2217317503" sldId="275"/>
+            <ac:cxnSpMk id="42" creationId="{BA18B6DA-E8AB-CD2A-E0F1-1041F3C22B36}"/>
+          </ac:cxnSpMkLst>
+        </pc:cxnChg>
+        <pc:cxnChg chg="add mod">
+          <ac:chgData name="全 香玉" userId="1f3450e5-81b9-4f7a-82d7-841c32c029e0" providerId="ADAL" clId="{670531AC-1667-4F97-B1A6-5D38F8A44A79}" dt="2026-10-20T11:17:15.374" v="3087" actId="1076"/>
+          <ac:cxnSpMkLst>
+            <pc:docMk/>
+            <pc:sldMk cId="2217317503" sldId="275"/>
+            <ac:cxnSpMk id="43" creationId="{70D5DD40-73AF-AC13-804B-8362253F0DC4}"/>
+          </ac:cxnSpMkLst>
+        </pc:cxnChg>
+        <pc:cxnChg chg="add mod">
+          <ac:chgData name="全 香玉" userId="1f3450e5-81b9-4f7a-82d7-841c32c029e0" providerId="ADAL" clId="{670531AC-1667-4F97-B1A6-5D38F8A44A79}" dt="2026-10-20T11:17:15.374" v="3087" actId="1076"/>
+          <ac:cxnSpMkLst>
+            <pc:docMk/>
+            <pc:sldMk cId="2217317503" sldId="275"/>
+            <ac:cxnSpMk id="44" creationId="{E3F2346E-E687-815F-E85B-B692AA541433}"/>
+          </ac:cxnSpMkLst>
+        </pc:cxnChg>
+        <pc:cxnChg chg="add mod">
+          <ac:chgData name="全 香玉" userId="1f3450e5-81b9-4f7a-82d7-841c32c029e0" providerId="ADAL" clId="{670531AC-1667-4F97-B1A6-5D38F8A44A79}" dt="2026-10-20T11:17:15.374" v="3087" actId="1076"/>
+          <ac:cxnSpMkLst>
+            <pc:docMk/>
+            <pc:sldMk cId="2217317503" sldId="275"/>
+            <ac:cxnSpMk id="45" creationId="{2AB3243C-AE70-58E6-865A-1AE7BC965722}"/>
+          </ac:cxnSpMkLst>
+        </pc:cxnChg>
+        <pc:cxnChg chg="add mod">
+          <ac:chgData name="全 香玉" userId="1f3450e5-81b9-4f7a-82d7-841c32c029e0" providerId="ADAL" clId="{670531AC-1667-4F97-B1A6-5D38F8A44A79}" dt="2026-10-20T11:17:15.374" v="3087" actId="1076"/>
+          <ac:cxnSpMkLst>
+            <pc:docMk/>
+            <pc:sldMk cId="2217317503" sldId="275"/>
+            <ac:cxnSpMk id="46" creationId="{AEB16441-894A-CEDB-7E80-F580330FFFD2}"/>
+          </ac:cxnSpMkLst>
+        </pc:cxnChg>
+        <pc:cxnChg chg="add mod">
+          <ac:chgData name="全 香玉" userId="1f3450e5-81b9-4f7a-82d7-841c32c029e0" providerId="ADAL" clId="{670531AC-1667-4F97-B1A6-5D38F8A44A79}" dt="2026-10-20T11:17:15.374" v="3087" actId="1076"/>
+          <ac:cxnSpMkLst>
+            <pc:docMk/>
+            <pc:sldMk cId="2217317503" sldId="275"/>
+            <ac:cxnSpMk id="47" creationId="{7C292A4A-AED6-3D5E-30C5-B0AC24E8E2B1}"/>
+          </ac:cxnSpMkLst>
+        </pc:cxnChg>
+        <pc:cxnChg chg="add mod">
+          <ac:chgData name="全 香玉" userId="1f3450e5-81b9-4f7a-82d7-841c32c029e0" providerId="ADAL" clId="{670531AC-1667-4F97-B1A6-5D38F8A44A79}" dt="2026-10-20T11:17:29.914" v="3090" actId="14100"/>
+          <ac:cxnSpMkLst>
+            <pc:docMk/>
+            <pc:sldMk cId="2217317503" sldId="275"/>
+            <ac:cxnSpMk id="48" creationId="{3200E527-4B04-27DC-FDB0-FAF0440F5C26}"/>
+          </ac:cxnSpMkLst>
+        </pc:cxnChg>
+        <pc:cxnChg chg="add del mod">
+          <ac:chgData name="全 香玉" userId="1f3450e5-81b9-4f7a-82d7-841c32c029e0" providerId="ADAL" clId="{670531AC-1667-4F97-B1A6-5D38F8A44A79}" dt="2026-10-20T11:17:39.154" v="3093" actId="478"/>
+          <ac:cxnSpMkLst>
+            <pc:docMk/>
+            <pc:sldMk cId="2217317503" sldId="275"/>
+            <ac:cxnSpMk id="50" creationId="{63C7F6B2-658D-60FB-44BD-D69CB1301884}"/>
+          </ac:cxnSpMkLst>
+        </pc:cxnChg>
+        <pc:cxnChg chg="add mod">
+          <ac:chgData name="全 香玉" userId="1f3450e5-81b9-4f7a-82d7-841c32c029e0" providerId="ADAL" clId="{670531AC-1667-4F97-B1A6-5D38F8A44A79}" dt="2026-10-20T11:18:12.507" v="3100" actId="208"/>
+          <ac:cxnSpMkLst>
+            <pc:docMk/>
+            <pc:sldMk cId="2217317503" sldId="275"/>
+            <ac:cxnSpMk id="52" creationId="{7384904D-A4AA-28F1-39F9-3EA688811125}"/>
+          </ac:cxnSpMkLst>
+        </pc:cxnChg>
+        <pc:cxnChg chg="add del mod">
+          <ac:chgData name="全 香玉" userId="1f3450e5-81b9-4f7a-82d7-841c32c029e0" providerId="ADAL" clId="{670531AC-1667-4F97-B1A6-5D38F8A44A79}" dt="2026-10-20T11:21:16.253" v="3135" actId="478"/>
+          <ac:cxnSpMkLst>
+            <pc:docMk/>
+            <pc:sldMk cId="2217317503" sldId="275"/>
+            <ac:cxnSpMk id="59" creationId="{C371A731-F45A-F9D7-64D4-F265988F7599}"/>
           </ac:cxnSpMkLst>
         </pc:cxnChg>
       </pc:sldChg>
@@ -8996,6 +9340,1889 @@
       </p:grpSpPr>
       <p:sp>
         <p:nvSpPr>
+          <p:cNvPr id="4" name="正方形/長方形 3">
+            <a:extLst>
+              <a:ext uri="{FF2B5EF4-FFF2-40B4-BE49-F238E27FC236}">
+                <a16:creationId xmlns:a16="http://schemas.microsoft.com/office/drawing/2014/main" id="{061B69D4-B819-A583-E223-B83D4A87F1BC}"/>
+              </a:ext>
+            </a:extLst>
+          </p:cNvPr>
+          <p:cNvSpPr/>
+          <p:nvPr/>
+        </p:nvSpPr>
+        <p:spPr>
+          <a:xfrm>
+            <a:off x="225911" y="1194099"/>
+            <a:ext cx="5378823" cy="1796527"/>
+          </a:xfrm>
+          <a:prstGeom prst="rect">
+            <a:avLst/>
+          </a:prstGeom>
+          <a:solidFill>
+            <a:schemeClr val="bg2"/>
+          </a:solidFill>
+          <a:ln>
+            <a:noFill/>
+          </a:ln>
+        </p:spPr>
+        <p:style>
+          <a:lnRef idx="2">
+            <a:schemeClr val="accent1">
+              <a:shade val="15000"/>
+            </a:schemeClr>
+          </a:lnRef>
+          <a:fillRef idx="1">
+            <a:schemeClr val="accent1"/>
+          </a:fillRef>
+          <a:effectRef idx="0">
+            <a:schemeClr val="accent1"/>
+          </a:effectRef>
+          <a:fontRef idx="minor">
+            <a:schemeClr val="lt1"/>
+          </a:fontRef>
+        </p:style>
+        <p:txBody>
+          <a:bodyPr rtlCol="0" anchor="ctr"/>
+          <a:lstStyle/>
+          <a:p>
+            <a:pPr algn="ctr"/>
+            <a:endParaRPr lang="en-US"/>
+          </a:p>
+        </p:txBody>
+      </p:sp>
+      <p:cxnSp>
+        <p:nvCxnSpPr>
+          <p:cNvPr id="6" name="直線矢印コネクタ 5">
+            <a:extLst>
+              <a:ext uri="{FF2B5EF4-FFF2-40B4-BE49-F238E27FC236}">
+                <a16:creationId xmlns:a16="http://schemas.microsoft.com/office/drawing/2014/main" id="{596AF677-4A25-E6C2-2400-02DB9BC855E8}"/>
+              </a:ext>
+            </a:extLst>
+          </p:cNvPr>
+          <p:cNvCxnSpPr>
+            <a:stCxn id="4" idx="1"/>
+            <a:endCxn id="4" idx="0"/>
+          </p:cNvCxnSpPr>
+          <p:nvPr/>
+        </p:nvCxnSpPr>
+        <p:spPr>
+          <a:xfrm flipV="1">
+            <a:off x="225911" y="1194099"/>
+            <a:ext cx="2689412" cy="898264"/>
+          </a:xfrm>
+          <a:prstGeom prst="straightConnector1">
+            <a:avLst/>
+          </a:prstGeom>
+          <a:ln>
+            <a:tailEnd type="triangle"/>
+          </a:ln>
+        </p:spPr>
+        <p:style>
+          <a:lnRef idx="2">
+            <a:schemeClr val="accent1"/>
+          </a:lnRef>
+          <a:fillRef idx="0">
+            <a:schemeClr val="accent1"/>
+          </a:fillRef>
+          <a:effectRef idx="1">
+            <a:schemeClr val="accent1"/>
+          </a:effectRef>
+          <a:fontRef idx="minor">
+            <a:schemeClr val="tx1"/>
+          </a:fontRef>
+        </p:style>
+      </p:cxnSp>
+      <p:cxnSp>
+        <p:nvCxnSpPr>
+          <p:cNvPr id="7" name="直線矢印コネクタ 6">
+            <a:extLst>
+              <a:ext uri="{FF2B5EF4-FFF2-40B4-BE49-F238E27FC236}">
+                <a16:creationId xmlns:a16="http://schemas.microsoft.com/office/drawing/2014/main" id="{ADC8C37E-A949-A395-E6F3-69F539B52F5E}"/>
+              </a:ext>
+            </a:extLst>
+          </p:cNvPr>
+          <p:cNvCxnSpPr>
+            <a:cxnSpLocks/>
+            <a:stCxn id="4" idx="0"/>
+          </p:cNvCxnSpPr>
+          <p:nvPr/>
+        </p:nvCxnSpPr>
+        <p:spPr>
+          <a:xfrm>
+            <a:off x="2915323" y="1194099"/>
+            <a:ext cx="914400" cy="305410"/>
+          </a:xfrm>
+          <a:prstGeom prst="straightConnector1">
+            <a:avLst/>
+          </a:prstGeom>
+          <a:ln>
+            <a:solidFill>
+              <a:srgbClr val="C00000"/>
+            </a:solidFill>
+            <a:tailEnd type="triangle"/>
+          </a:ln>
+        </p:spPr>
+        <p:style>
+          <a:lnRef idx="2">
+            <a:schemeClr val="accent1"/>
+          </a:lnRef>
+          <a:fillRef idx="0">
+            <a:schemeClr val="accent1"/>
+          </a:fillRef>
+          <a:effectRef idx="1">
+            <a:schemeClr val="accent1"/>
+          </a:effectRef>
+          <a:fontRef idx="minor">
+            <a:schemeClr val="tx1"/>
+          </a:fontRef>
+        </p:style>
+      </p:cxnSp>
+      <p:cxnSp>
+        <p:nvCxnSpPr>
+          <p:cNvPr id="13" name="直線コネクタ 12">
+            <a:extLst>
+              <a:ext uri="{FF2B5EF4-FFF2-40B4-BE49-F238E27FC236}">
+                <a16:creationId xmlns:a16="http://schemas.microsoft.com/office/drawing/2014/main" id="{FD1880AA-E0DE-C4B7-4D09-C069AC89FDB3}"/>
+              </a:ext>
+            </a:extLst>
+          </p:cNvPr>
+          <p:cNvCxnSpPr>
+            <a:cxnSpLocks/>
+          </p:cNvCxnSpPr>
+          <p:nvPr/>
+        </p:nvCxnSpPr>
+        <p:spPr>
+          <a:xfrm>
+            <a:off x="2915323" y="139850"/>
+            <a:ext cx="0" cy="3636084"/>
+          </a:xfrm>
+          <a:prstGeom prst="line">
+            <a:avLst/>
+          </a:prstGeom>
+          <a:ln>
+            <a:prstDash val="sysDash"/>
+          </a:ln>
+        </p:spPr>
+        <p:style>
+          <a:lnRef idx="2">
+            <a:schemeClr val="dk1"/>
+          </a:lnRef>
+          <a:fillRef idx="0">
+            <a:schemeClr val="dk1"/>
+          </a:fillRef>
+          <a:effectRef idx="1">
+            <a:schemeClr val="dk1"/>
+          </a:effectRef>
+          <a:fontRef idx="minor">
+            <a:schemeClr val="tx1"/>
+          </a:fontRef>
+        </p:style>
+      </p:cxnSp>
+      <p:cxnSp>
+        <p:nvCxnSpPr>
+          <p:cNvPr id="14" name="直線コネクタ 13">
+            <a:extLst>
+              <a:ext uri="{FF2B5EF4-FFF2-40B4-BE49-F238E27FC236}">
+                <a16:creationId xmlns:a16="http://schemas.microsoft.com/office/drawing/2014/main" id="{FF8F7686-9C3E-7338-9FAA-D08319515328}"/>
+              </a:ext>
+            </a:extLst>
+          </p:cNvPr>
+          <p:cNvCxnSpPr>
+            <a:cxnSpLocks/>
+            <a:stCxn id="4" idx="1"/>
+            <a:endCxn id="4" idx="3"/>
+          </p:cNvCxnSpPr>
+          <p:nvPr/>
+        </p:nvCxnSpPr>
+        <p:spPr>
+          <a:xfrm>
+            <a:off x="225911" y="2092363"/>
+            <a:ext cx="5378823" cy="0"/>
+          </a:xfrm>
+          <a:prstGeom prst="line">
+            <a:avLst/>
+          </a:prstGeom>
+          <a:ln>
+            <a:prstDash val="sysDash"/>
+          </a:ln>
+        </p:spPr>
+        <p:style>
+          <a:lnRef idx="2">
+            <a:schemeClr val="dk1"/>
+          </a:lnRef>
+          <a:fillRef idx="0">
+            <a:schemeClr val="dk1"/>
+          </a:fillRef>
+          <a:effectRef idx="1">
+            <a:schemeClr val="dk1"/>
+          </a:effectRef>
+          <a:fontRef idx="minor">
+            <a:schemeClr val="tx1"/>
+          </a:fontRef>
+        </p:style>
+      </p:cxnSp>
+      <p:cxnSp>
+        <p:nvCxnSpPr>
+          <p:cNvPr id="22" name="直線矢印コネクタ 21">
+            <a:extLst>
+              <a:ext uri="{FF2B5EF4-FFF2-40B4-BE49-F238E27FC236}">
+                <a16:creationId xmlns:a16="http://schemas.microsoft.com/office/drawing/2014/main" id="{BE792630-C852-55B8-845F-948BB124BF5B}"/>
+              </a:ext>
+            </a:extLst>
+          </p:cNvPr>
+          <p:cNvCxnSpPr>
+            <a:cxnSpLocks/>
+          </p:cNvCxnSpPr>
+          <p:nvPr/>
+        </p:nvCxnSpPr>
+        <p:spPr>
+          <a:xfrm flipV="1">
+            <a:off x="2915322" y="888689"/>
+            <a:ext cx="914401" cy="305410"/>
+          </a:xfrm>
+          <a:prstGeom prst="straightConnector1">
+            <a:avLst/>
+          </a:prstGeom>
+          <a:ln>
+            <a:tailEnd type="triangle"/>
+          </a:ln>
+        </p:spPr>
+        <p:style>
+          <a:lnRef idx="2">
+            <a:schemeClr val="accent1"/>
+          </a:lnRef>
+          <a:fillRef idx="0">
+            <a:schemeClr val="accent1"/>
+          </a:fillRef>
+          <a:effectRef idx="1">
+            <a:schemeClr val="accent1"/>
+          </a:effectRef>
+          <a:fontRef idx="minor">
+            <a:schemeClr val="tx1"/>
+          </a:fontRef>
+        </p:style>
+      </p:cxnSp>
+      <p:cxnSp>
+        <p:nvCxnSpPr>
+          <p:cNvPr id="27" name="直線矢印コネクタ 26">
+            <a:extLst>
+              <a:ext uri="{FF2B5EF4-FFF2-40B4-BE49-F238E27FC236}">
+                <a16:creationId xmlns:a16="http://schemas.microsoft.com/office/drawing/2014/main" id="{35841C97-FA6D-1E61-7AF6-E753FB2FBF80}"/>
+              </a:ext>
+            </a:extLst>
+          </p:cNvPr>
+          <p:cNvCxnSpPr>
+            <a:cxnSpLocks/>
+            <a:stCxn id="4" idx="0"/>
+          </p:cNvCxnSpPr>
+          <p:nvPr/>
+        </p:nvCxnSpPr>
+        <p:spPr>
+          <a:xfrm>
+            <a:off x="2915323" y="1194099"/>
+            <a:ext cx="914400" cy="0"/>
+          </a:xfrm>
+          <a:prstGeom prst="straightConnector1">
+            <a:avLst/>
+          </a:prstGeom>
+          <a:ln>
+            <a:solidFill>
+              <a:srgbClr val="7030A0"/>
+            </a:solidFill>
+            <a:tailEnd type="triangle"/>
+          </a:ln>
+        </p:spPr>
+        <p:style>
+          <a:lnRef idx="2">
+            <a:schemeClr val="accent1"/>
+          </a:lnRef>
+          <a:fillRef idx="0">
+            <a:schemeClr val="accent1"/>
+          </a:fillRef>
+          <a:effectRef idx="1">
+            <a:schemeClr val="accent1"/>
+          </a:effectRef>
+          <a:fontRef idx="minor">
+            <a:schemeClr val="tx1"/>
+          </a:fontRef>
+        </p:style>
+      </p:cxnSp>
+      <p:cxnSp>
+        <p:nvCxnSpPr>
+          <p:cNvPr id="29" name="直線矢印コネクタ 28">
+            <a:extLst>
+              <a:ext uri="{FF2B5EF4-FFF2-40B4-BE49-F238E27FC236}">
+                <a16:creationId xmlns:a16="http://schemas.microsoft.com/office/drawing/2014/main" id="{7834F117-518D-12CE-6793-275355F6AD8B}"/>
+              </a:ext>
+            </a:extLst>
+          </p:cNvPr>
+          <p:cNvCxnSpPr>
+            <a:cxnSpLocks/>
+          </p:cNvCxnSpPr>
+          <p:nvPr/>
+        </p:nvCxnSpPr>
+        <p:spPr>
+          <a:xfrm>
+            <a:off x="3829723" y="1194099"/>
+            <a:ext cx="914400" cy="0"/>
+          </a:xfrm>
+          <a:prstGeom prst="straightConnector1">
+            <a:avLst/>
+          </a:prstGeom>
+          <a:ln>
+            <a:solidFill>
+              <a:srgbClr val="7030A0"/>
+            </a:solidFill>
+            <a:tailEnd type="triangle"/>
+          </a:ln>
+        </p:spPr>
+        <p:style>
+          <a:lnRef idx="2">
+            <a:schemeClr val="accent1"/>
+          </a:lnRef>
+          <a:fillRef idx="0">
+            <a:schemeClr val="accent1"/>
+          </a:fillRef>
+          <a:effectRef idx="1">
+            <a:schemeClr val="accent1"/>
+          </a:effectRef>
+          <a:fontRef idx="minor">
+            <a:schemeClr val="tx1"/>
+          </a:fontRef>
+        </p:style>
+      </p:cxnSp>
+      <p:cxnSp>
+        <p:nvCxnSpPr>
+          <p:cNvPr id="30" name="直線矢印コネクタ 29">
+            <a:extLst>
+              <a:ext uri="{FF2B5EF4-FFF2-40B4-BE49-F238E27FC236}">
+                <a16:creationId xmlns:a16="http://schemas.microsoft.com/office/drawing/2014/main" id="{02DF5853-40F2-2E8B-9EC0-DB121CD3B28F}"/>
+              </a:ext>
+            </a:extLst>
+          </p:cNvPr>
+          <p:cNvCxnSpPr>
+            <a:cxnSpLocks/>
+            <a:stCxn id="4" idx="0"/>
+          </p:cNvCxnSpPr>
+          <p:nvPr/>
+        </p:nvCxnSpPr>
+        <p:spPr>
+          <a:xfrm flipV="1">
+            <a:off x="2915323" y="888689"/>
+            <a:ext cx="0" cy="305410"/>
+          </a:xfrm>
+          <a:prstGeom prst="straightConnector1">
+            <a:avLst/>
+          </a:prstGeom>
+          <a:ln>
+            <a:solidFill>
+              <a:srgbClr val="7030A0"/>
+            </a:solidFill>
+            <a:tailEnd type="triangle"/>
+          </a:ln>
+        </p:spPr>
+        <p:style>
+          <a:lnRef idx="2">
+            <a:schemeClr val="accent1"/>
+          </a:lnRef>
+          <a:fillRef idx="0">
+            <a:schemeClr val="accent1"/>
+          </a:fillRef>
+          <a:effectRef idx="1">
+            <a:schemeClr val="accent1"/>
+          </a:effectRef>
+          <a:fontRef idx="minor">
+            <a:schemeClr val="tx1"/>
+          </a:fontRef>
+        </p:style>
+      </p:cxnSp>
+      <p:cxnSp>
+        <p:nvCxnSpPr>
+          <p:cNvPr id="34" name="直線矢印コネクタ 33">
+            <a:extLst>
+              <a:ext uri="{FF2B5EF4-FFF2-40B4-BE49-F238E27FC236}">
+                <a16:creationId xmlns:a16="http://schemas.microsoft.com/office/drawing/2014/main" id="{89985C6D-68D1-E329-CC33-1469C64694EC}"/>
+              </a:ext>
+            </a:extLst>
+          </p:cNvPr>
+          <p:cNvCxnSpPr>
+            <a:cxnSpLocks/>
+            <a:stCxn id="4" idx="0"/>
+          </p:cNvCxnSpPr>
+          <p:nvPr/>
+        </p:nvCxnSpPr>
+        <p:spPr>
+          <a:xfrm flipH="1">
+            <a:off x="2915321" y="1194099"/>
+            <a:ext cx="2" cy="305410"/>
+          </a:xfrm>
+          <a:prstGeom prst="straightConnector1">
+            <a:avLst/>
+          </a:prstGeom>
+          <a:ln>
+            <a:solidFill>
+              <a:srgbClr val="7030A0"/>
+            </a:solidFill>
+            <a:tailEnd type="triangle"/>
+          </a:ln>
+        </p:spPr>
+        <p:style>
+          <a:lnRef idx="2">
+            <a:schemeClr val="accent1"/>
+          </a:lnRef>
+          <a:fillRef idx="0">
+            <a:schemeClr val="accent1"/>
+          </a:fillRef>
+          <a:effectRef idx="1">
+            <a:schemeClr val="accent1"/>
+          </a:effectRef>
+          <a:fontRef idx="minor">
+            <a:schemeClr val="tx1"/>
+          </a:fontRef>
+        </p:style>
+      </p:cxnSp>
+      <p:sp>
+        <p:nvSpPr>
+          <p:cNvPr id="38" name="正方形/長方形 37">
+            <a:extLst>
+              <a:ext uri="{FF2B5EF4-FFF2-40B4-BE49-F238E27FC236}">
+                <a16:creationId xmlns:a16="http://schemas.microsoft.com/office/drawing/2014/main" id="{51BBA901-2DA8-7337-CF43-C0A8027A7123}"/>
+              </a:ext>
+            </a:extLst>
+          </p:cNvPr>
+          <p:cNvSpPr/>
+          <p:nvPr/>
+        </p:nvSpPr>
+        <p:spPr>
+          <a:xfrm>
+            <a:off x="6176683" y="1194099"/>
+            <a:ext cx="5378823" cy="1796527"/>
+          </a:xfrm>
+          <a:prstGeom prst="rect">
+            <a:avLst/>
+          </a:prstGeom>
+          <a:solidFill>
+            <a:schemeClr val="bg2"/>
+          </a:solidFill>
+          <a:ln>
+            <a:noFill/>
+          </a:ln>
+        </p:spPr>
+        <p:style>
+          <a:lnRef idx="2">
+            <a:schemeClr val="accent1">
+              <a:shade val="15000"/>
+            </a:schemeClr>
+          </a:lnRef>
+          <a:fillRef idx="1">
+            <a:schemeClr val="accent1"/>
+          </a:fillRef>
+          <a:effectRef idx="0">
+            <a:schemeClr val="accent1"/>
+          </a:effectRef>
+          <a:fontRef idx="minor">
+            <a:schemeClr val="lt1"/>
+          </a:fontRef>
+        </p:style>
+        <p:txBody>
+          <a:bodyPr rtlCol="0" anchor="ctr"/>
+          <a:lstStyle/>
+          <a:p>
+            <a:pPr algn="ctr"/>
+            <a:endParaRPr lang="en-US"/>
+          </a:p>
+        </p:txBody>
+      </p:sp>
+      <p:cxnSp>
+        <p:nvCxnSpPr>
+          <p:cNvPr id="39" name="直線矢印コネクタ 38">
+            <a:extLst>
+              <a:ext uri="{FF2B5EF4-FFF2-40B4-BE49-F238E27FC236}">
+                <a16:creationId xmlns:a16="http://schemas.microsoft.com/office/drawing/2014/main" id="{89096FCF-9153-3EB8-299E-86085D1AA490}"/>
+              </a:ext>
+            </a:extLst>
+          </p:cNvPr>
+          <p:cNvCxnSpPr>
+            <a:stCxn id="38" idx="1"/>
+            <a:endCxn id="38" idx="0"/>
+          </p:cNvCxnSpPr>
+          <p:nvPr/>
+        </p:nvCxnSpPr>
+        <p:spPr>
+          <a:xfrm flipV="1">
+            <a:off x="6176683" y="1194099"/>
+            <a:ext cx="2689412" cy="898264"/>
+          </a:xfrm>
+          <a:prstGeom prst="straightConnector1">
+            <a:avLst/>
+          </a:prstGeom>
+          <a:ln>
+            <a:tailEnd type="triangle"/>
+          </a:ln>
+        </p:spPr>
+        <p:style>
+          <a:lnRef idx="2">
+            <a:schemeClr val="accent1"/>
+          </a:lnRef>
+          <a:fillRef idx="0">
+            <a:schemeClr val="accent1"/>
+          </a:fillRef>
+          <a:effectRef idx="1">
+            <a:schemeClr val="accent1"/>
+          </a:effectRef>
+          <a:fontRef idx="minor">
+            <a:schemeClr val="tx1"/>
+          </a:fontRef>
+        </p:style>
+      </p:cxnSp>
+      <p:cxnSp>
+        <p:nvCxnSpPr>
+          <p:cNvPr id="40" name="直線矢印コネクタ 39">
+            <a:extLst>
+              <a:ext uri="{FF2B5EF4-FFF2-40B4-BE49-F238E27FC236}">
+                <a16:creationId xmlns:a16="http://schemas.microsoft.com/office/drawing/2014/main" id="{932F73AD-DC22-4364-BF97-18DC2A9C948B}"/>
+              </a:ext>
+            </a:extLst>
+          </p:cNvPr>
+          <p:cNvCxnSpPr>
+            <a:cxnSpLocks/>
+            <a:stCxn id="38" idx="0"/>
+            <a:endCxn id="38" idx="3"/>
+          </p:cNvCxnSpPr>
+          <p:nvPr/>
+        </p:nvCxnSpPr>
+        <p:spPr>
+          <a:xfrm>
+            <a:off x="8866095" y="1194099"/>
+            <a:ext cx="2689411" cy="898264"/>
+          </a:xfrm>
+          <a:prstGeom prst="straightConnector1">
+            <a:avLst/>
+          </a:prstGeom>
+          <a:ln>
+            <a:solidFill>
+              <a:srgbClr val="C00000"/>
+            </a:solidFill>
+            <a:tailEnd type="triangle"/>
+          </a:ln>
+        </p:spPr>
+        <p:style>
+          <a:lnRef idx="2">
+            <a:schemeClr val="accent1"/>
+          </a:lnRef>
+          <a:fillRef idx="0">
+            <a:schemeClr val="accent1"/>
+          </a:fillRef>
+          <a:effectRef idx="1">
+            <a:schemeClr val="accent1"/>
+          </a:effectRef>
+          <a:fontRef idx="minor">
+            <a:schemeClr val="tx1"/>
+          </a:fontRef>
+        </p:style>
+      </p:cxnSp>
+      <p:cxnSp>
+        <p:nvCxnSpPr>
+          <p:cNvPr id="41" name="直線コネクタ 40">
+            <a:extLst>
+              <a:ext uri="{FF2B5EF4-FFF2-40B4-BE49-F238E27FC236}">
+                <a16:creationId xmlns:a16="http://schemas.microsoft.com/office/drawing/2014/main" id="{BA048E9F-CB02-E243-1300-0C905205EA20}"/>
+              </a:ext>
+            </a:extLst>
+          </p:cNvPr>
+          <p:cNvCxnSpPr>
+            <a:cxnSpLocks/>
+          </p:cNvCxnSpPr>
+          <p:nvPr/>
+        </p:nvCxnSpPr>
+        <p:spPr>
+          <a:xfrm>
+            <a:off x="8866095" y="139850"/>
+            <a:ext cx="0" cy="3636084"/>
+          </a:xfrm>
+          <a:prstGeom prst="line">
+            <a:avLst/>
+          </a:prstGeom>
+          <a:ln>
+            <a:prstDash val="sysDash"/>
+          </a:ln>
+        </p:spPr>
+        <p:style>
+          <a:lnRef idx="2">
+            <a:schemeClr val="dk1"/>
+          </a:lnRef>
+          <a:fillRef idx="0">
+            <a:schemeClr val="dk1"/>
+          </a:fillRef>
+          <a:effectRef idx="1">
+            <a:schemeClr val="dk1"/>
+          </a:effectRef>
+          <a:fontRef idx="minor">
+            <a:schemeClr val="tx1"/>
+          </a:fontRef>
+        </p:style>
+      </p:cxnSp>
+      <p:cxnSp>
+        <p:nvCxnSpPr>
+          <p:cNvPr id="42" name="直線コネクタ 41">
+            <a:extLst>
+              <a:ext uri="{FF2B5EF4-FFF2-40B4-BE49-F238E27FC236}">
+                <a16:creationId xmlns:a16="http://schemas.microsoft.com/office/drawing/2014/main" id="{BA18B6DA-E8AB-CD2A-E0F1-1041F3C22B36}"/>
+              </a:ext>
+            </a:extLst>
+          </p:cNvPr>
+          <p:cNvCxnSpPr>
+            <a:cxnSpLocks/>
+            <a:stCxn id="38" idx="1"/>
+            <a:endCxn id="38" idx="3"/>
+          </p:cNvCxnSpPr>
+          <p:nvPr/>
+        </p:nvCxnSpPr>
+        <p:spPr>
+          <a:xfrm>
+            <a:off x="6176683" y="2092363"/>
+            <a:ext cx="5378823" cy="0"/>
+          </a:xfrm>
+          <a:prstGeom prst="line">
+            <a:avLst/>
+          </a:prstGeom>
+          <a:ln>
+            <a:prstDash val="sysDash"/>
+          </a:ln>
+        </p:spPr>
+        <p:style>
+          <a:lnRef idx="2">
+            <a:schemeClr val="dk1"/>
+          </a:lnRef>
+          <a:fillRef idx="0">
+            <a:schemeClr val="dk1"/>
+          </a:fillRef>
+          <a:effectRef idx="1">
+            <a:schemeClr val="dk1"/>
+          </a:effectRef>
+          <a:fontRef idx="minor">
+            <a:schemeClr val="tx1"/>
+          </a:fontRef>
+        </p:style>
+      </p:cxnSp>
+      <p:cxnSp>
+        <p:nvCxnSpPr>
+          <p:cNvPr id="43" name="直線矢印コネクタ 42">
+            <a:extLst>
+              <a:ext uri="{FF2B5EF4-FFF2-40B4-BE49-F238E27FC236}">
+                <a16:creationId xmlns:a16="http://schemas.microsoft.com/office/drawing/2014/main" id="{70D5DD40-73AF-AC13-804B-8362253F0DC4}"/>
+              </a:ext>
+            </a:extLst>
+          </p:cNvPr>
+          <p:cNvCxnSpPr>
+            <a:cxnSpLocks/>
+          </p:cNvCxnSpPr>
+          <p:nvPr/>
+        </p:nvCxnSpPr>
+        <p:spPr>
+          <a:xfrm flipV="1">
+            <a:off x="8866094" y="888689"/>
+            <a:ext cx="914401" cy="305410"/>
+          </a:xfrm>
+          <a:prstGeom prst="straightConnector1">
+            <a:avLst/>
+          </a:prstGeom>
+          <a:ln>
+            <a:tailEnd type="triangle"/>
+          </a:ln>
+        </p:spPr>
+        <p:style>
+          <a:lnRef idx="2">
+            <a:schemeClr val="accent1"/>
+          </a:lnRef>
+          <a:fillRef idx="0">
+            <a:schemeClr val="accent1"/>
+          </a:fillRef>
+          <a:effectRef idx="1">
+            <a:schemeClr val="accent1"/>
+          </a:effectRef>
+          <a:fontRef idx="minor">
+            <a:schemeClr val="tx1"/>
+          </a:fontRef>
+        </p:style>
+      </p:cxnSp>
+      <p:cxnSp>
+        <p:nvCxnSpPr>
+          <p:cNvPr id="44" name="直線矢印コネクタ 43">
+            <a:extLst>
+              <a:ext uri="{FF2B5EF4-FFF2-40B4-BE49-F238E27FC236}">
+                <a16:creationId xmlns:a16="http://schemas.microsoft.com/office/drawing/2014/main" id="{E3F2346E-E687-815F-E85B-B692AA541433}"/>
+              </a:ext>
+            </a:extLst>
+          </p:cNvPr>
+          <p:cNvCxnSpPr>
+            <a:cxnSpLocks/>
+            <a:stCxn id="38" idx="0"/>
+          </p:cNvCxnSpPr>
+          <p:nvPr/>
+        </p:nvCxnSpPr>
+        <p:spPr>
+          <a:xfrm>
+            <a:off x="8866095" y="1194099"/>
+            <a:ext cx="914400" cy="0"/>
+          </a:xfrm>
+          <a:prstGeom prst="straightConnector1">
+            <a:avLst/>
+          </a:prstGeom>
+          <a:ln>
+            <a:solidFill>
+              <a:srgbClr val="7030A0"/>
+            </a:solidFill>
+            <a:tailEnd type="triangle"/>
+          </a:ln>
+        </p:spPr>
+        <p:style>
+          <a:lnRef idx="2">
+            <a:schemeClr val="accent1"/>
+          </a:lnRef>
+          <a:fillRef idx="0">
+            <a:schemeClr val="accent1"/>
+          </a:fillRef>
+          <a:effectRef idx="1">
+            <a:schemeClr val="accent1"/>
+          </a:effectRef>
+          <a:fontRef idx="minor">
+            <a:schemeClr val="tx1"/>
+          </a:fontRef>
+        </p:style>
+      </p:cxnSp>
+      <p:cxnSp>
+        <p:nvCxnSpPr>
+          <p:cNvPr id="45" name="直線矢印コネクタ 44">
+            <a:extLst>
+              <a:ext uri="{FF2B5EF4-FFF2-40B4-BE49-F238E27FC236}">
+                <a16:creationId xmlns:a16="http://schemas.microsoft.com/office/drawing/2014/main" id="{2AB3243C-AE70-58E6-865A-1AE7BC965722}"/>
+              </a:ext>
+            </a:extLst>
+          </p:cNvPr>
+          <p:cNvCxnSpPr>
+            <a:cxnSpLocks/>
+          </p:cNvCxnSpPr>
+          <p:nvPr/>
+        </p:nvCxnSpPr>
+        <p:spPr>
+          <a:xfrm>
+            <a:off x="9780495" y="1194099"/>
+            <a:ext cx="914400" cy="0"/>
+          </a:xfrm>
+          <a:prstGeom prst="straightConnector1">
+            <a:avLst/>
+          </a:prstGeom>
+          <a:ln>
+            <a:solidFill>
+              <a:srgbClr val="7030A0"/>
+            </a:solidFill>
+            <a:tailEnd type="triangle"/>
+          </a:ln>
+        </p:spPr>
+        <p:style>
+          <a:lnRef idx="2">
+            <a:schemeClr val="accent1"/>
+          </a:lnRef>
+          <a:fillRef idx="0">
+            <a:schemeClr val="accent1"/>
+          </a:fillRef>
+          <a:effectRef idx="1">
+            <a:schemeClr val="accent1"/>
+          </a:effectRef>
+          <a:fontRef idx="minor">
+            <a:schemeClr val="tx1"/>
+          </a:fontRef>
+        </p:style>
+      </p:cxnSp>
+      <p:cxnSp>
+        <p:nvCxnSpPr>
+          <p:cNvPr id="46" name="直線矢印コネクタ 45">
+            <a:extLst>
+              <a:ext uri="{FF2B5EF4-FFF2-40B4-BE49-F238E27FC236}">
+                <a16:creationId xmlns:a16="http://schemas.microsoft.com/office/drawing/2014/main" id="{AEB16441-894A-CEDB-7E80-F580330FFFD2}"/>
+              </a:ext>
+            </a:extLst>
+          </p:cNvPr>
+          <p:cNvCxnSpPr>
+            <a:cxnSpLocks/>
+            <a:stCxn id="38" idx="0"/>
+          </p:cNvCxnSpPr>
+          <p:nvPr/>
+        </p:nvCxnSpPr>
+        <p:spPr>
+          <a:xfrm flipV="1">
+            <a:off x="8866095" y="888689"/>
+            <a:ext cx="0" cy="305410"/>
+          </a:xfrm>
+          <a:prstGeom prst="straightConnector1">
+            <a:avLst/>
+          </a:prstGeom>
+          <a:ln>
+            <a:solidFill>
+              <a:srgbClr val="7030A0"/>
+            </a:solidFill>
+            <a:tailEnd type="triangle"/>
+          </a:ln>
+        </p:spPr>
+        <p:style>
+          <a:lnRef idx="2">
+            <a:schemeClr val="accent1"/>
+          </a:lnRef>
+          <a:fillRef idx="0">
+            <a:schemeClr val="accent1"/>
+          </a:fillRef>
+          <a:effectRef idx="1">
+            <a:schemeClr val="accent1"/>
+          </a:effectRef>
+          <a:fontRef idx="minor">
+            <a:schemeClr val="tx1"/>
+          </a:fontRef>
+        </p:style>
+      </p:cxnSp>
+      <p:cxnSp>
+        <p:nvCxnSpPr>
+          <p:cNvPr id="47" name="直線矢印コネクタ 46">
+            <a:extLst>
+              <a:ext uri="{FF2B5EF4-FFF2-40B4-BE49-F238E27FC236}">
+                <a16:creationId xmlns:a16="http://schemas.microsoft.com/office/drawing/2014/main" id="{7C292A4A-AED6-3D5E-30C5-B0AC24E8E2B1}"/>
+              </a:ext>
+            </a:extLst>
+          </p:cNvPr>
+          <p:cNvCxnSpPr>
+            <a:cxnSpLocks/>
+            <a:stCxn id="38" idx="0"/>
+          </p:cNvCxnSpPr>
+          <p:nvPr/>
+        </p:nvCxnSpPr>
+        <p:spPr>
+          <a:xfrm flipH="1">
+            <a:off x="8866093" y="1194099"/>
+            <a:ext cx="2" cy="305410"/>
+          </a:xfrm>
+          <a:prstGeom prst="straightConnector1">
+            <a:avLst/>
+          </a:prstGeom>
+          <a:ln>
+            <a:solidFill>
+              <a:srgbClr val="7030A0"/>
+            </a:solidFill>
+            <a:tailEnd type="triangle"/>
+          </a:ln>
+        </p:spPr>
+        <p:style>
+          <a:lnRef idx="2">
+            <a:schemeClr val="accent1"/>
+          </a:lnRef>
+          <a:fillRef idx="0">
+            <a:schemeClr val="accent1"/>
+          </a:fillRef>
+          <a:effectRef idx="1">
+            <a:schemeClr val="accent1"/>
+          </a:effectRef>
+          <a:fontRef idx="minor">
+            <a:schemeClr val="tx1"/>
+          </a:fontRef>
+        </p:style>
+      </p:cxnSp>
+      <p:cxnSp>
+        <p:nvCxnSpPr>
+          <p:cNvPr id="48" name="直線矢印コネクタ 47">
+            <a:extLst>
+              <a:ext uri="{FF2B5EF4-FFF2-40B4-BE49-F238E27FC236}">
+                <a16:creationId xmlns:a16="http://schemas.microsoft.com/office/drawing/2014/main" id="{3200E527-4B04-27DC-FDB0-FAF0440F5C26}"/>
+              </a:ext>
+            </a:extLst>
+          </p:cNvPr>
+          <p:cNvCxnSpPr>
+            <a:cxnSpLocks/>
+          </p:cNvCxnSpPr>
+          <p:nvPr/>
+        </p:nvCxnSpPr>
+        <p:spPr>
+          <a:xfrm flipV="1">
+            <a:off x="6176683" y="1804919"/>
+            <a:ext cx="3586738" cy="1197971"/>
+          </a:xfrm>
+          <a:prstGeom prst="straightConnector1">
+            <a:avLst/>
+          </a:prstGeom>
+          <a:ln>
+            <a:tailEnd type="triangle"/>
+          </a:ln>
+        </p:spPr>
+        <p:style>
+          <a:lnRef idx="2">
+            <a:schemeClr val="accent1"/>
+          </a:lnRef>
+          <a:fillRef idx="0">
+            <a:schemeClr val="accent1"/>
+          </a:fillRef>
+          <a:effectRef idx="1">
+            <a:schemeClr val="accent1"/>
+          </a:effectRef>
+          <a:fontRef idx="minor">
+            <a:schemeClr val="tx1"/>
+          </a:fontRef>
+        </p:style>
+      </p:cxnSp>
+      <p:cxnSp>
+        <p:nvCxnSpPr>
+          <p:cNvPr id="52" name="直線矢印コネクタ 51">
+            <a:extLst>
+              <a:ext uri="{FF2B5EF4-FFF2-40B4-BE49-F238E27FC236}">
+                <a16:creationId xmlns:a16="http://schemas.microsoft.com/office/drawing/2014/main" id="{7384904D-A4AA-28F1-39F9-3EA688811125}"/>
+              </a:ext>
+            </a:extLst>
+          </p:cNvPr>
+          <p:cNvCxnSpPr>
+            <a:cxnSpLocks/>
+          </p:cNvCxnSpPr>
+          <p:nvPr/>
+        </p:nvCxnSpPr>
+        <p:spPr>
+          <a:xfrm>
+            <a:off x="6176681" y="1212064"/>
+            <a:ext cx="3550024" cy="1185709"/>
+          </a:xfrm>
+          <a:prstGeom prst="straightConnector1">
+            <a:avLst/>
+          </a:prstGeom>
+          <a:ln>
+            <a:solidFill>
+              <a:srgbClr val="C00000"/>
+            </a:solidFill>
+            <a:tailEnd type="triangle"/>
+          </a:ln>
+        </p:spPr>
+        <p:style>
+          <a:lnRef idx="2">
+            <a:schemeClr val="accent1"/>
+          </a:lnRef>
+          <a:fillRef idx="0">
+            <a:schemeClr val="accent1"/>
+          </a:fillRef>
+          <a:effectRef idx="1">
+            <a:schemeClr val="accent1"/>
+          </a:effectRef>
+          <a:fontRef idx="minor">
+            <a:schemeClr val="tx1"/>
+          </a:fontRef>
+        </p:style>
+      </p:cxnSp>
+      <mc:AlternateContent xmlns:mc="http://schemas.openxmlformats.org/markup-compatibility/2006">
+        <mc:Choice xmlns:a14="http://schemas.microsoft.com/office/drawing/2010/main" Requires="a14">
+          <p:sp>
+            <p:nvSpPr>
+              <p:cNvPr id="54" name="テキスト ボックス 53">
+                <a:extLst>
+                  <a:ext uri="{FF2B5EF4-FFF2-40B4-BE49-F238E27FC236}">
+                    <a16:creationId xmlns:a16="http://schemas.microsoft.com/office/drawing/2014/main" id="{E807F195-FADE-C9D6-01FA-D3F69E0A5E4D}"/>
+                  </a:ext>
+                </a:extLst>
+              </p:cNvPr>
+              <p:cNvSpPr txBox="1"/>
+              <p:nvPr/>
+            </p:nvSpPr>
+            <p:spPr>
+              <a:xfrm>
+                <a:off x="3829723" y="674704"/>
+                <a:ext cx="1021562" cy="289951"/>
+              </a:xfrm>
+              <a:prstGeom prst="rect">
+                <a:avLst/>
+              </a:prstGeom>
+              <a:noFill/>
+            </p:spPr>
+            <p:txBody>
+              <a:bodyPr wrap="none" lIns="0" tIns="0" rIns="0" bIns="0" rtlCol="0">
+                <a:spAutoFit/>
+              </a:bodyPr>
+              <a:lstStyle/>
+              <a:p>
+                <a14:m>
+                  <m:oMathPara xmlns:m="http://schemas.openxmlformats.org/officeDocument/2006/math">
+                    <m:oMath>
+                      <m:sSup>
+                        <m:sSupPr>
+                          <m:ctrlPr>
+                            <a:rPr lang="en-US" b="0" i="1" smtClean="0">
+                              <a:latin typeface="Cambria Math" panose="02040503050406030204" pitchFamily="18" charset="0"/>
+                            </a:rPr>
+                          </m:ctrlPr>
+                        </m:sSupPr>
+                        <m:e>
+                          <m:r>
+                            <a:rPr lang="en-US" b="0" i="1" smtClean="0">
+                              <a:latin typeface="Cambria Math" panose="02040503050406030204" pitchFamily="18" charset="0"/>
+                            </a:rPr>
+                            <m:t>𝑒</m:t>
+                          </m:r>
+                        </m:e>
+                        <m:sup>
+                          <m:r>
+                            <a:rPr lang="en-US" b="0" i="1" smtClean="0">
+                              <a:latin typeface="Cambria Math" panose="02040503050406030204" pitchFamily="18" charset="0"/>
+                            </a:rPr>
+                            <m:t>𝑖</m:t>
+                          </m:r>
+                          <m:r>
+                            <a:rPr lang="en-US" b="0" i="1" smtClean="0">
+                              <a:latin typeface="Cambria Math" panose="02040503050406030204" pitchFamily="18" charset="0"/>
+                            </a:rPr>
+                            <m:t>(</m:t>
+                          </m:r>
+                          <m:sSub>
+                            <m:sSubPr>
+                              <m:ctrlPr>
+                                <a:rPr lang="en-US" b="0" i="1" smtClean="0">
+                                  <a:latin typeface="Cambria Math" panose="02040503050406030204" pitchFamily="18" charset="0"/>
+                                </a:rPr>
+                              </m:ctrlPr>
+                            </m:sSubPr>
+                            <m:e>
+                              <m:r>
+                                <a:rPr lang="en-US" b="0" i="1" smtClean="0">
+                                  <a:latin typeface="Cambria Math" panose="02040503050406030204" pitchFamily="18" charset="0"/>
+                                </a:rPr>
+                                <m:t>𝑘</m:t>
+                              </m:r>
+                            </m:e>
+                            <m:sub>
+                              <m:r>
+                                <a:rPr lang="en-US" b="0" i="1" smtClean="0">
+                                  <a:latin typeface="Cambria Math" panose="02040503050406030204" pitchFamily="18" charset="0"/>
+                                </a:rPr>
+                                <m:t>𝑟</m:t>
+                              </m:r>
+                            </m:sub>
+                          </m:sSub>
+                          <m:r>
+                            <a:rPr lang="en-US" b="0" i="1" smtClean="0">
+                              <a:latin typeface="Cambria Math" panose="02040503050406030204" pitchFamily="18" charset="0"/>
+                            </a:rPr>
+                            <m:t>𝑟</m:t>
+                          </m:r>
+                          <m:r>
+                            <a:rPr lang="en-US" b="0" i="1" smtClean="0">
+                              <a:latin typeface="Cambria Math" panose="02040503050406030204" pitchFamily="18" charset="0"/>
+                            </a:rPr>
+                            <m:t>+</m:t>
+                          </m:r>
+                          <m:r>
+                            <a:rPr lang="en-US" b="0" i="1" smtClean="0">
+                              <a:latin typeface="Cambria Math" panose="02040503050406030204" pitchFamily="18" charset="0"/>
+                              <a:ea typeface="Cambria Math" panose="02040503050406030204" pitchFamily="18" charset="0"/>
+                            </a:rPr>
+                            <m:t>𝛽</m:t>
+                          </m:r>
+                          <m:r>
+                            <a:rPr lang="en-US" b="0" i="1" smtClean="0">
+                              <a:latin typeface="Cambria Math" panose="02040503050406030204" pitchFamily="18" charset="0"/>
+                              <a:ea typeface="Cambria Math" panose="02040503050406030204" pitchFamily="18" charset="0"/>
+                            </a:rPr>
+                            <m:t>𝑧</m:t>
+                          </m:r>
+                          <m:r>
+                            <a:rPr lang="en-US" b="0" i="1" smtClean="0">
+                              <a:latin typeface="Cambria Math" panose="02040503050406030204" pitchFamily="18" charset="0"/>
+                              <a:ea typeface="Cambria Math" panose="02040503050406030204" pitchFamily="18" charset="0"/>
+                            </a:rPr>
+                            <m:t>)</m:t>
+                          </m:r>
+                        </m:sup>
+                      </m:sSup>
+                    </m:oMath>
+                  </m:oMathPara>
+                </a14:m>
+                <a:endParaRPr lang="en-US" dirty="0"/>
+              </a:p>
+            </p:txBody>
+          </p:sp>
+        </mc:Choice>
+        <mc:Fallback>
+          <p:sp>
+            <p:nvSpPr>
+              <p:cNvPr id="54" name="テキスト ボックス 53">
+                <a:extLst>
+                  <a:ext uri="{FF2B5EF4-FFF2-40B4-BE49-F238E27FC236}">
+                    <a16:creationId xmlns:a16="http://schemas.microsoft.com/office/drawing/2014/main" id="{E807F195-FADE-C9D6-01FA-D3F69E0A5E4D}"/>
+                  </a:ext>
+                </a:extLst>
+              </p:cNvPr>
+              <p:cNvSpPr txBox="1">
+                <a:spLocks noRot="1" noChangeAspect="1" noMove="1" noResize="1" noEditPoints="1" noAdjustHandles="1" noChangeArrowheads="1" noChangeShapeType="1" noTextEdit="1"/>
+              </p:cNvSpPr>
+              <p:nvPr/>
+            </p:nvSpPr>
+            <p:spPr>
+              <a:xfrm>
+                <a:off x="3829723" y="674704"/>
+                <a:ext cx="1021562" cy="289951"/>
+              </a:xfrm>
+              <a:prstGeom prst="rect">
+                <a:avLst/>
+              </a:prstGeom>
+              <a:blipFill>
+                <a:blip r:embed="rId2"/>
+                <a:stretch>
+                  <a:fillRect l="-2381" t="-6383" r="-2381"/>
+                </a:stretch>
+              </a:blipFill>
+            </p:spPr>
+            <p:txBody>
+              <a:bodyPr/>
+              <a:lstStyle/>
+              <a:p>
+                <a:r>
+                  <a:rPr lang="en-US">
+                    <a:noFill/>
+                  </a:rPr>
+                  <a:t> </a:t>
+                </a:r>
+              </a:p>
+            </p:txBody>
+          </p:sp>
+        </mc:Fallback>
+      </mc:AlternateContent>
+      <mc:AlternateContent xmlns:mc="http://schemas.openxmlformats.org/markup-compatibility/2006">
+        <mc:Choice xmlns:a14="http://schemas.microsoft.com/office/drawing/2010/main" Requires="a14">
+          <p:sp>
+            <p:nvSpPr>
+              <p:cNvPr id="56" name="テキスト ボックス 55">
+                <a:extLst>
+                  <a:ext uri="{FF2B5EF4-FFF2-40B4-BE49-F238E27FC236}">
+                    <a16:creationId xmlns:a16="http://schemas.microsoft.com/office/drawing/2014/main" id="{D5D70C2A-9C8B-84CB-EFDF-9EDCD311267F}"/>
+                  </a:ext>
+                </a:extLst>
+              </p:cNvPr>
+              <p:cNvSpPr txBox="1"/>
+              <p:nvPr/>
+            </p:nvSpPr>
+            <p:spPr>
+              <a:xfrm>
+                <a:off x="3837099" y="1361010"/>
+                <a:ext cx="1143390" cy="289951"/>
+              </a:xfrm>
+              <a:prstGeom prst="rect">
+                <a:avLst/>
+              </a:prstGeom>
+              <a:noFill/>
+            </p:spPr>
+            <p:txBody>
+              <a:bodyPr wrap="none" lIns="0" tIns="0" rIns="0" bIns="0" rtlCol="0">
+                <a:spAutoFit/>
+              </a:bodyPr>
+              <a:lstStyle/>
+              <a:p>
+                <a:pPr/>
+                <a14:m>
+                  <m:oMathPara xmlns:m="http://schemas.openxmlformats.org/officeDocument/2006/math">
+                    <m:oMath>
+                      <m:sSup>
+                        <m:sSupPr>
+                          <m:ctrlPr>
+                            <a:rPr lang="en-US" b="0" i="1" smtClean="0">
+                              <a:latin typeface="Cambria Math" panose="02040503050406030204" pitchFamily="18" charset="0"/>
+                            </a:rPr>
+                          </m:ctrlPr>
+                        </m:sSupPr>
+                        <m:e>
+                          <m:r>
+                            <a:rPr lang="en-US" b="0" i="1" smtClean="0">
+                              <a:latin typeface="Cambria Math" panose="02040503050406030204" pitchFamily="18" charset="0"/>
+                            </a:rPr>
+                            <m:t>𝑒</m:t>
+                          </m:r>
+                        </m:e>
+                        <m:sup>
+                          <m:r>
+                            <a:rPr lang="en-US" b="0" i="1" smtClean="0">
+                              <a:latin typeface="Cambria Math" panose="02040503050406030204" pitchFamily="18" charset="0"/>
+                            </a:rPr>
+                            <m:t>𝑖</m:t>
+                          </m:r>
+                          <m:r>
+                            <a:rPr lang="en-US" b="0" i="1" smtClean="0">
+                              <a:latin typeface="Cambria Math" panose="02040503050406030204" pitchFamily="18" charset="0"/>
+                            </a:rPr>
+                            <m:t>(</m:t>
+                          </m:r>
+                          <m:sSub>
+                            <m:sSubPr>
+                              <m:ctrlPr>
+                                <a:rPr lang="en-US" b="0" i="1" smtClean="0">
+                                  <a:latin typeface="Cambria Math" panose="02040503050406030204" pitchFamily="18" charset="0"/>
+                                </a:rPr>
+                              </m:ctrlPr>
+                            </m:sSubPr>
+                            <m:e>
+                              <m:r>
+                                <a:rPr lang="en-US" b="0" i="1" smtClean="0">
+                                  <a:latin typeface="Cambria Math" panose="02040503050406030204" pitchFamily="18" charset="0"/>
+                                </a:rPr>
+                                <m:t>−</m:t>
+                              </m:r>
+                              <m:r>
+                                <a:rPr lang="en-US" b="0" i="1" smtClean="0">
+                                  <a:latin typeface="Cambria Math" panose="02040503050406030204" pitchFamily="18" charset="0"/>
+                                </a:rPr>
+                                <m:t>𝑘</m:t>
+                              </m:r>
+                            </m:e>
+                            <m:sub>
+                              <m:r>
+                                <a:rPr lang="en-US" b="0" i="1" smtClean="0">
+                                  <a:latin typeface="Cambria Math" panose="02040503050406030204" pitchFamily="18" charset="0"/>
+                                </a:rPr>
+                                <m:t>𝑟</m:t>
+                              </m:r>
+                            </m:sub>
+                          </m:sSub>
+                          <m:r>
+                            <a:rPr lang="en-US" b="0" i="1" smtClean="0">
+                              <a:latin typeface="Cambria Math" panose="02040503050406030204" pitchFamily="18" charset="0"/>
+                            </a:rPr>
+                            <m:t>𝑟</m:t>
+                          </m:r>
+                          <m:r>
+                            <a:rPr lang="en-US" b="0" i="1" smtClean="0">
+                              <a:latin typeface="Cambria Math" panose="02040503050406030204" pitchFamily="18" charset="0"/>
+                            </a:rPr>
+                            <m:t>+</m:t>
+                          </m:r>
+                          <m:r>
+                            <a:rPr lang="en-US" b="0" i="1" smtClean="0">
+                              <a:latin typeface="Cambria Math" panose="02040503050406030204" pitchFamily="18" charset="0"/>
+                              <a:ea typeface="Cambria Math" panose="02040503050406030204" pitchFamily="18" charset="0"/>
+                            </a:rPr>
+                            <m:t>𝛽</m:t>
+                          </m:r>
+                          <m:r>
+                            <a:rPr lang="en-US" b="0" i="1" smtClean="0">
+                              <a:latin typeface="Cambria Math" panose="02040503050406030204" pitchFamily="18" charset="0"/>
+                              <a:ea typeface="Cambria Math" panose="02040503050406030204" pitchFamily="18" charset="0"/>
+                            </a:rPr>
+                            <m:t>𝑧</m:t>
+                          </m:r>
+                          <m:r>
+                            <a:rPr lang="en-US" b="0" i="1" smtClean="0">
+                              <a:latin typeface="Cambria Math" panose="02040503050406030204" pitchFamily="18" charset="0"/>
+                              <a:ea typeface="Cambria Math" panose="02040503050406030204" pitchFamily="18" charset="0"/>
+                            </a:rPr>
+                            <m:t>)</m:t>
+                          </m:r>
+                        </m:sup>
+                      </m:sSup>
+                    </m:oMath>
+                  </m:oMathPara>
+                </a14:m>
+                <a:endParaRPr lang="en-US" dirty="0"/>
+              </a:p>
+            </p:txBody>
+          </p:sp>
+        </mc:Choice>
+        <mc:Fallback>
+          <p:sp>
+            <p:nvSpPr>
+              <p:cNvPr id="56" name="テキスト ボックス 55">
+                <a:extLst>
+                  <a:ext uri="{FF2B5EF4-FFF2-40B4-BE49-F238E27FC236}">
+                    <a16:creationId xmlns:a16="http://schemas.microsoft.com/office/drawing/2014/main" id="{D5D70C2A-9C8B-84CB-EFDF-9EDCD311267F}"/>
+                  </a:ext>
+                </a:extLst>
+              </p:cNvPr>
+              <p:cNvSpPr txBox="1">
+                <a:spLocks noRot="1" noChangeAspect="1" noMove="1" noResize="1" noEditPoints="1" noAdjustHandles="1" noChangeArrowheads="1" noChangeShapeType="1" noTextEdit="1"/>
+              </p:cNvSpPr>
+              <p:nvPr/>
+            </p:nvSpPr>
+            <p:spPr>
+              <a:xfrm>
+                <a:off x="3837099" y="1361010"/>
+                <a:ext cx="1143390" cy="289951"/>
+              </a:xfrm>
+              <a:prstGeom prst="rect">
+                <a:avLst/>
+              </a:prstGeom>
+              <a:blipFill>
+                <a:blip r:embed="rId3"/>
+                <a:stretch>
+                  <a:fillRect l="-2128" t="-4167" r="-2128"/>
+                </a:stretch>
+              </a:blipFill>
+            </p:spPr>
+            <p:txBody>
+              <a:bodyPr/>
+              <a:lstStyle/>
+              <a:p>
+                <a:r>
+                  <a:rPr lang="en-US">
+                    <a:noFill/>
+                  </a:rPr>
+                  <a:t> </a:t>
+                </a:r>
+              </a:p>
+            </p:txBody>
+          </p:sp>
+        </mc:Fallback>
+      </mc:AlternateContent>
+      <mc:AlternateContent xmlns:mc="http://schemas.openxmlformats.org/markup-compatibility/2006">
+        <mc:Choice xmlns:a14="http://schemas.microsoft.com/office/drawing/2010/main" Requires="a14">
+          <p:sp>
+            <p:nvSpPr>
+              <p:cNvPr id="60" name="テキスト ボックス 59">
+                <a:extLst>
+                  <a:ext uri="{FF2B5EF4-FFF2-40B4-BE49-F238E27FC236}">
+                    <a16:creationId xmlns:a16="http://schemas.microsoft.com/office/drawing/2014/main" id="{B26168FB-AE70-4033-2CF7-0D9DCB4D33BD}"/>
+                  </a:ext>
+                </a:extLst>
+              </p:cNvPr>
+              <p:cNvSpPr txBox="1"/>
+              <p:nvPr/>
+            </p:nvSpPr>
+            <p:spPr>
+              <a:xfrm>
+                <a:off x="2969114" y="482174"/>
+                <a:ext cx="179793" cy="276999"/>
+              </a:xfrm>
+              <a:prstGeom prst="rect">
+                <a:avLst/>
+              </a:prstGeom>
+              <a:noFill/>
+            </p:spPr>
+            <p:txBody>
+              <a:bodyPr wrap="none" lIns="0" tIns="0" rIns="0" bIns="0" rtlCol="0">
+                <a:spAutoFit/>
+              </a:bodyPr>
+              <a:lstStyle/>
+              <a:p>
+                <a14:m>
+                  <m:oMathPara xmlns:m="http://schemas.openxmlformats.org/officeDocument/2006/math">
+                    <m:oMath>
+                      <m:acc>
+                        <m:accPr>
+                          <m:chr m:val="⃗"/>
+                          <m:ctrlPr>
+                            <a:rPr lang="en-US" b="0" i="1" smtClean="0">
+                              <a:latin typeface="Cambria Math" panose="02040503050406030204" pitchFamily="18" charset="0"/>
+                            </a:rPr>
+                          </m:ctrlPr>
+                        </m:accPr>
+                        <m:e>
+                          <m:r>
+                            <a:rPr lang="en-US" b="0" i="1" smtClean="0">
+                              <a:latin typeface="Cambria Math" panose="02040503050406030204" pitchFamily="18" charset="0"/>
+                            </a:rPr>
+                            <m:t>𝑟</m:t>
+                          </m:r>
+                        </m:e>
+                      </m:acc>
+                    </m:oMath>
+                  </m:oMathPara>
+                </a14:m>
+                <a:endParaRPr lang="en-US" dirty="0"/>
+              </a:p>
+            </p:txBody>
+          </p:sp>
+        </mc:Choice>
+        <mc:Fallback>
+          <p:sp>
+            <p:nvSpPr>
+              <p:cNvPr id="60" name="テキスト ボックス 59">
+                <a:extLst>
+                  <a:ext uri="{FF2B5EF4-FFF2-40B4-BE49-F238E27FC236}">
+                    <a16:creationId xmlns:a16="http://schemas.microsoft.com/office/drawing/2014/main" id="{B26168FB-AE70-4033-2CF7-0D9DCB4D33BD}"/>
+                  </a:ext>
+                </a:extLst>
+              </p:cNvPr>
+              <p:cNvSpPr txBox="1">
+                <a:spLocks noRot="1" noChangeAspect="1" noMove="1" noResize="1" noEditPoints="1" noAdjustHandles="1" noChangeArrowheads="1" noChangeShapeType="1" noTextEdit="1"/>
+              </p:cNvSpPr>
+              <p:nvPr/>
+            </p:nvSpPr>
+            <p:spPr>
+              <a:xfrm>
+                <a:off x="2969114" y="482174"/>
+                <a:ext cx="179793" cy="276999"/>
+              </a:xfrm>
+              <a:prstGeom prst="rect">
+                <a:avLst/>
+              </a:prstGeom>
+              <a:blipFill>
+                <a:blip r:embed="rId4"/>
+                <a:stretch>
+                  <a:fillRect l="-33333" t="-45652" r="-100000" b="-8696"/>
+                </a:stretch>
+              </a:blipFill>
+            </p:spPr>
+            <p:txBody>
+              <a:bodyPr/>
+              <a:lstStyle/>
+              <a:p>
+                <a:r>
+                  <a:rPr lang="en-US">
+                    <a:noFill/>
+                  </a:rPr>
+                  <a:t> </a:t>
+                </a:r>
+              </a:p>
+            </p:txBody>
+          </p:sp>
+        </mc:Fallback>
+      </mc:AlternateContent>
+      <mc:AlternateContent xmlns:mc="http://schemas.openxmlformats.org/markup-compatibility/2006">
+        <mc:Choice xmlns:a14="http://schemas.microsoft.com/office/drawing/2010/main" Requires="a14">
+          <p:sp>
+            <p:nvSpPr>
+              <p:cNvPr id="62" name="テキスト ボックス 61">
+                <a:extLst>
+                  <a:ext uri="{FF2B5EF4-FFF2-40B4-BE49-F238E27FC236}">
+                    <a16:creationId xmlns:a16="http://schemas.microsoft.com/office/drawing/2014/main" id="{BD113D8F-DDA2-818C-CF05-EEAEEFB42389}"/>
+                  </a:ext>
+                </a:extLst>
+              </p:cNvPr>
+              <p:cNvSpPr txBox="1"/>
+              <p:nvPr/>
+            </p:nvSpPr>
+            <p:spPr>
+              <a:xfrm>
+                <a:off x="5181600" y="2092362"/>
+                <a:ext cx="516835" cy="369332"/>
+              </a:xfrm>
+              <a:prstGeom prst="rect">
+                <a:avLst/>
+              </a:prstGeom>
+              <a:noFill/>
+            </p:spPr>
+            <p:txBody>
+              <a:bodyPr wrap="square">
+                <a:spAutoFit/>
+              </a:bodyPr>
+              <a:lstStyle/>
+              <a:p>
+                <a:pPr/>
+                <a14:m>
+                  <m:oMathPara xmlns:m="http://schemas.openxmlformats.org/officeDocument/2006/math">
+                    <m:oMath>
+                      <m:acc>
+                        <m:accPr>
+                          <m:chr m:val="⃗"/>
+                          <m:ctrlPr>
+                            <a:rPr lang="en-US" sz="1800" b="0" i="1" smtClean="0">
+                              <a:latin typeface="Cambria Math" panose="02040503050406030204" pitchFamily="18" charset="0"/>
+                            </a:rPr>
+                          </m:ctrlPr>
+                        </m:accPr>
+                        <m:e>
+                          <m:r>
+                            <a:rPr lang="en-US" sz="1800" b="0" i="1" smtClean="0">
+                              <a:latin typeface="Cambria Math" panose="02040503050406030204" pitchFamily="18" charset="0"/>
+                            </a:rPr>
+                            <m:t>𝑧</m:t>
+                          </m:r>
+                        </m:e>
+                      </m:acc>
+                    </m:oMath>
+                  </m:oMathPara>
+                </a14:m>
+                <a:endParaRPr lang="en-US" sz="1800" dirty="0"/>
+              </a:p>
+            </p:txBody>
+          </p:sp>
+        </mc:Choice>
+        <mc:Fallback>
+          <p:sp>
+            <p:nvSpPr>
+              <p:cNvPr id="62" name="テキスト ボックス 61">
+                <a:extLst>
+                  <a:ext uri="{FF2B5EF4-FFF2-40B4-BE49-F238E27FC236}">
+                    <a16:creationId xmlns:a16="http://schemas.microsoft.com/office/drawing/2014/main" id="{BD113D8F-DDA2-818C-CF05-EEAEEFB42389}"/>
+                  </a:ext>
+                </a:extLst>
+              </p:cNvPr>
+              <p:cNvSpPr txBox="1">
+                <a:spLocks noRot="1" noChangeAspect="1" noMove="1" noResize="1" noEditPoints="1" noAdjustHandles="1" noChangeArrowheads="1" noChangeShapeType="1" noTextEdit="1"/>
+              </p:cNvSpPr>
+              <p:nvPr/>
+            </p:nvSpPr>
+            <p:spPr>
+              <a:xfrm>
+                <a:off x="5181600" y="2092362"/>
+                <a:ext cx="516835" cy="369332"/>
+              </a:xfrm>
+              <a:prstGeom prst="rect">
+                <a:avLst/>
+              </a:prstGeom>
+              <a:blipFill>
+                <a:blip r:embed="rId5"/>
+                <a:stretch>
+                  <a:fillRect t="-22951" r="-34118"/>
+                </a:stretch>
+              </a:blipFill>
+            </p:spPr>
+            <p:txBody>
+              <a:bodyPr/>
+              <a:lstStyle/>
+              <a:p>
+                <a:r>
+                  <a:rPr lang="en-US">
+                    <a:noFill/>
+                  </a:rPr>
+                  <a:t> </a:t>
+                </a:r>
+              </a:p>
+            </p:txBody>
+          </p:sp>
+        </mc:Fallback>
+      </mc:AlternateContent>
+      <p:sp>
+        <p:nvSpPr>
+          <p:cNvPr id="63" name="楕円 62">
+            <a:extLst>
+              <a:ext uri="{FF2B5EF4-FFF2-40B4-BE49-F238E27FC236}">
+                <a16:creationId xmlns:a16="http://schemas.microsoft.com/office/drawing/2014/main" id="{13A34A1A-57C7-3662-1F7B-98252C10AD67}"/>
+              </a:ext>
+            </a:extLst>
+          </p:cNvPr>
+          <p:cNvSpPr/>
+          <p:nvPr/>
+        </p:nvSpPr>
+        <p:spPr>
+          <a:xfrm>
+            <a:off x="1929844" y="1455750"/>
+            <a:ext cx="88152" cy="88152"/>
+          </a:xfrm>
+          <a:prstGeom prst="ellipse">
+            <a:avLst/>
+          </a:prstGeom>
+        </p:spPr>
+        <p:style>
+          <a:lnRef idx="2">
+            <a:schemeClr val="accent1">
+              <a:shade val="15000"/>
+            </a:schemeClr>
+          </a:lnRef>
+          <a:fillRef idx="1">
+            <a:schemeClr val="accent1"/>
+          </a:fillRef>
+          <a:effectRef idx="0">
+            <a:schemeClr val="accent1"/>
+          </a:effectRef>
+          <a:fontRef idx="minor">
+            <a:schemeClr val="lt1"/>
+          </a:fontRef>
+        </p:style>
+        <p:txBody>
+          <a:bodyPr rtlCol="0" anchor="ctr"/>
+          <a:lstStyle/>
+          <a:p>
+            <a:pPr algn="ctr"/>
+            <a:endParaRPr lang="en-US"/>
+          </a:p>
+        </p:txBody>
+      </p:sp>
+      <p:sp>
+        <p:nvSpPr>
+          <p:cNvPr id="65" name="楕円 64">
+            <a:extLst>
+              <a:ext uri="{FF2B5EF4-FFF2-40B4-BE49-F238E27FC236}">
+                <a16:creationId xmlns:a16="http://schemas.microsoft.com/office/drawing/2014/main" id="{DE73C767-8B0A-31D8-2BD7-14A103067B82}"/>
+              </a:ext>
+            </a:extLst>
+          </p:cNvPr>
+          <p:cNvSpPr/>
+          <p:nvPr/>
+        </p:nvSpPr>
+        <p:spPr>
+          <a:xfrm>
+            <a:off x="2115375" y="1391705"/>
+            <a:ext cx="88152" cy="88152"/>
+          </a:xfrm>
+          <a:prstGeom prst="ellipse">
+            <a:avLst/>
+          </a:prstGeom>
+        </p:spPr>
+        <p:style>
+          <a:lnRef idx="2">
+            <a:schemeClr val="accent1">
+              <a:shade val="15000"/>
+            </a:schemeClr>
+          </a:lnRef>
+          <a:fillRef idx="1">
+            <a:schemeClr val="accent1"/>
+          </a:fillRef>
+          <a:effectRef idx="0">
+            <a:schemeClr val="accent1"/>
+          </a:effectRef>
+          <a:fontRef idx="minor">
+            <a:schemeClr val="lt1"/>
+          </a:fontRef>
+        </p:style>
+        <p:txBody>
+          <a:bodyPr rtlCol="0" anchor="ctr"/>
+          <a:lstStyle/>
+          <a:p>
+            <a:pPr algn="ctr"/>
+            <a:endParaRPr lang="en-US"/>
+          </a:p>
+        </p:txBody>
+      </p:sp>
+      <p:sp>
+        <p:nvSpPr>
+          <p:cNvPr id="67" name="楕円 66">
+            <a:extLst>
+              <a:ext uri="{FF2B5EF4-FFF2-40B4-BE49-F238E27FC236}">
+                <a16:creationId xmlns:a16="http://schemas.microsoft.com/office/drawing/2014/main" id="{CD71FF95-E0A7-6A04-CE20-149EC3A56484}"/>
+              </a:ext>
+            </a:extLst>
+          </p:cNvPr>
+          <p:cNvSpPr/>
+          <p:nvPr/>
+        </p:nvSpPr>
+        <p:spPr>
+          <a:xfrm>
+            <a:off x="2291076" y="1330122"/>
+            <a:ext cx="88152" cy="88152"/>
+          </a:xfrm>
+          <a:prstGeom prst="ellipse">
+            <a:avLst/>
+          </a:prstGeom>
+        </p:spPr>
+        <p:style>
+          <a:lnRef idx="2">
+            <a:schemeClr val="accent1">
+              <a:shade val="15000"/>
+            </a:schemeClr>
+          </a:lnRef>
+          <a:fillRef idx="1">
+            <a:schemeClr val="accent1"/>
+          </a:fillRef>
+          <a:effectRef idx="0">
+            <a:schemeClr val="accent1"/>
+          </a:effectRef>
+          <a:fontRef idx="minor">
+            <a:schemeClr val="lt1"/>
+          </a:fontRef>
+        </p:style>
+        <p:txBody>
+          <a:bodyPr rtlCol="0" anchor="ctr"/>
+          <a:lstStyle/>
+          <a:p>
+            <a:pPr algn="ctr"/>
+            <a:endParaRPr lang="en-US"/>
+          </a:p>
+        </p:txBody>
+      </p:sp>
+      <p:sp>
+        <p:nvSpPr>
+          <p:cNvPr id="69" name="楕円 68">
+            <a:extLst>
+              <a:ext uri="{FF2B5EF4-FFF2-40B4-BE49-F238E27FC236}">
+                <a16:creationId xmlns:a16="http://schemas.microsoft.com/office/drawing/2014/main" id="{D23068C0-7909-1B1A-9300-8CCAD7178D9B}"/>
+              </a:ext>
+            </a:extLst>
+          </p:cNvPr>
+          <p:cNvSpPr/>
+          <p:nvPr/>
+        </p:nvSpPr>
+        <p:spPr>
+          <a:xfrm>
+            <a:off x="3134505" y="1236902"/>
+            <a:ext cx="88152" cy="88152"/>
+          </a:xfrm>
+          <a:prstGeom prst="ellipse">
+            <a:avLst/>
+          </a:prstGeom>
+          <a:solidFill>
+            <a:srgbClr val="C00000"/>
+          </a:solidFill>
+        </p:spPr>
+        <p:style>
+          <a:lnRef idx="2">
+            <a:schemeClr val="accent1">
+              <a:shade val="15000"/>
+            </a:schemeClr>
+          </a:lnRef>
+          <a:fillRef idx="1">
+            <a:schemeClr val="accent1"/>
+          </a:fillRef>
+          <a:effectRef idx="0">
+            <a:schemeClr val="accent1"/>
+          </a:effectRef>
+          <a:fontRef idx="minor">
+            <a:schemeClr val="lt1"/>
+          </a:fontRef>
+        </p:style>
+        <p:txBody>
+          <a:bodyPr rtlCol="0" anchor="ctr"/>
+          <a:lstStyle/>
+          <a:p>
+            <a:pPr algn="ctr"/>
+            <a:endParaRPr lang="en-US"/>
+          </a:p>
+        </p:txBody>
+      </p:sp>
+      <p:sp>
+        <p:nvSpPr>
+          <p:cNvPr id="71" name="楕円 70">
+            <a:extLst>
+              <a:ext uri="{FF2B5EF4-FFF2-40B4-BE49-F238E27FC236}">
+                <a16:creationId xmlns:a16="http://schemas.microsoft.com/office/drawing/2014/main" id="{A2791ADC-C080-8E89-8EE8-BC426520A70A}"/>
+              </a:ext>
+            </a:extLst>
+          </p:cNvPr>
+          <p:cNvSpPr/>
+          <p:nvPr/>
+        </p:nvSpPr>
+        <p:spPr>
+          <a:xfrm>
+            <a:off x="3280481" y="1286362"/>
+            <a:ext cx="88152" cy="88152"/>
+          </a:xfrm>
+          <a:prstGeom prst="ellipse">
+            <a:avLst/>
+          </a:prstGeom>
+          <a:solidFill>
+            <a:srgbClr val="C00000"/>
+          </a:solidFill>
+        </p:spPr>
+        <p:style>
+          <a:lnRef idx="2">
+            <a:schemeClr val="accent1">
+              <a:shade val="15000"/>
+            </a:schemeClr>
+          </a:lnRef>
+          <a:fillRef idx="1">
+            <a:schemeClr val="accent1"/>
+          </a:fillRef>
+          <a:effectRef idx="0">
+            <a:schemeClr val="accent1"/>
+          </a:effectRef>
+          <a:fontRef idx="minor">
+            <a:schemeClr val="lt1"/>
+          </a:fontRef>
+        </p:style>
+        <p:txBody>
+          <a:bodyPr rtlCol="0" anchor="ctr"/>
+          <a:lstStyle/>
+          <a:p>
+            <a:pPr algn="ctr"/>
+            <a:endParaRPr lang="en-US"/>
+          </a:p>
+        </p:txBody>
+      </p:sp>
+      <p:sp>
+        <p:nvSpPr>
+          <p:cNvPr id="73" name="楕円 72">
+            <a:extLst>
+              <a:ext uri="{FF2B5EF4-FFF2-40B4-BE49-F238E27FC236}">
+                <a16:creationId xmlns:a16="http://schemas.microsoft.com/office/drawing/2014/main" id="{06BF93F6-82AB-11EA-A2B6-F1C919C97D48}"/>
+              </a:ext>
+            </a:extLst>
+          </p:cNvPr>
+          <p:cNvSpPr/>
+          <p:nvPr/>
+        </p:nvSpPr>
+        <p:spPr>
+          <a:xfrm>
+            <a:off x="3416004" y="1347629"/>
+            <a:ext cx="88152" cy="88152"/>
+          </a:xfrm>
+          <a:prstGeom prst="ellipse">
+            <a:avLst/>
+          </a:prstGeom>
+          <a:solidFill>
+            <a:srgbClr val="C00000"/>
+          </a:solidFill>
+        </p:spPr>
+        <p:style>
+          <a:lnRef idx="2">
+            <a:schemeClr val="accent1">
+              <a:shade val="15000"/>
+            </a:schemeClr>
+          </a:lnRef>
+          <a:fillRef idx="1">
+            <a:schemeClr val="accent1"/>
+          </a:fillRef>
+          <a:effectRef idx="0">
+            <a:schemeClr val="accent1"/>
+          </a:effectRef>
+          <a:fontRef idx="minor">
+            <a:schemeClr val="lt1"/>
+          </a:fontRef>
+        </p:style>
+        <p:txBody>
+          <a:bodyPr rtlCol="0" anchor="ctr"/>
+          <a:lstStyle/>
+          <a:p>
+            <a:pPr algn="ctr"/>
+            <a:endParaRPr lang="en-US"/>
+          </a:p>
+        </p:txBody>
+      </p:sp>
+      <p:pic>
+        <p:nvPicPr>
+          <p:cNvPr id="75" name="図 74">
+            <a:extLst>
+              <a:ext uri="{FF2B5EF4-FFF2-40B4-BE49-F238E27FC236}">
+                <a16:creationId xmlns:a16="http://schemas.microsoft.com/office/drawing/2014/main" id="{DAAD31B0-4130-B6A5-D10C-9AA717686659}"/>
+              </a:ext>
+            </a:extLst>
+          </p:cNvPr>
+          <p:cNvPicPr>
+            <a:picLocks noChangeAspect="1"/>
+          </p:cNvPicPr>
+          <p:nvPr/>
+        </p:nvPicPr>
+        <p:blipFill>
+          <a:blip r:embed="rId6"/>
+          <a:stretch>
+            <a:fillRect/>
+          </a:stretch>
+        </p:blipFill>
+        <p:spPr>
+          <a:xfrm>
+            <a:off x="3657259" y="990259"/>
+            <a:ext cx="4877481" cy="4877481"/>
+          </a:xfrm>
+          <a:prstGeom prst="rect">
+            <a:avLst/>
+          </a:prstGeom>
+        </p:spPr>
+      </p:pic>
+    </p:spTree>
+    <p:extLst>
+      <p:ext uri="{BB962C8B-B14F-4D97-AF65-F5344CB8AC3E}">
+        <p14:creationId xmlns:p14="http://schemas.microsoft.com/office/powerpoint/2010/main" val="2217317503"/>
+      </p:ext>
+    </p:extLst>
+  </p:cSld>
+  <p:clrMapOvr>
+    <a:masterClrMapping/>
+  </p:clrMapOvr>
+</p:sld>
+</file>
+
+<file path=ppt/slides/slide14.xml><?xml version="1.0" encoding="utf-8"?>
+<p:sld xmlns:a="http://schemas.openxmlformats.org/drawingml/2006/main" xmlns:r="http://schemas.openxmlformats.org/officeDocument/2006/relationships" xmlns:p="http://schemas.openxmlformats.org/presentationml/2006/main">
+  <p:cSld>
+    <p:spTree>
+      <p:nvGrpSpPr>
+        <p:cNvPr id="1" name=""/>
+        <p:cNvGrpSpPr/>
+        <p:nvPr/>
+      </p:nvGrpSpPr>
+      <p:grpSpPr>
+        <a:xfrm>
+          <a:off x="0" y="0"/>
+          <a:ext cx="0" cy="0"/>
+          <a:chOff x="0" y="0"/>
+          <a:chExt cx="0" cy="0"/>
+        </a:xfrm>
+      </p:grpSpPr>
+      <p:sp>
+        <p:nvSpPr>
           <p:cNvPr id="21" name="직사각형 20">
             <a:extLst>
               <a:ext uri="{FF2B5EF4-FFF2-40B4-BE49-F238E27FC236}">
@@ -9708,7 +11935,7 @@
 </p:sld>
 </file>
 
-<file path=ppt/slides/slide14.xml><?xml version="1.0" encoding="utf-8"?>
+<file path=ppt/slides/slide15.xml><?xml version="1.0" encoding="utf-8"?>
 <p:sld xmlns:a="http://schemas.openxmlformats.org/drawingml/2006/main" xmlns:r="http://schemas.openxmlformats.org/officeDocument/2006/relationships" xmlns:p="http://schemas.openxmlformats.org/presentationml/2006/main">
   <p:cSld>
     <p:spTree>
@@ -12089,7 +14316,7 @@
 </p:sld>
 </file>
 
-<file path=ppt/slides/slide15.xml><?xml version="1.0" encoding="utf-8"?>
+<file path=ppt/slides/slide16.xml><?xml version="1.0" encoding="utf-8"?>
 <p:sld xmlns:a="http://schemas.openxmlformats.org/drawingml/2006/main" xmlns:r="http://schemas.openxmlformats.org/officeDocument/2006/relationships" xmlns:p="http://schemas.openxmlformats.org/presentationml/2006/main">
   <p:cSld>
     <p:spTree>
@@ -15046,7 +17273,7 @@
 </p:sld>
 </file>
 
-<file path=ppt/slides/slide16.xml><?xml version="1.0" encoding="utf-8"?>
+<file path=ppt/slides/slide17.xml><?xml version="1.0" encoding="utf-8"?>
 <p:sld xmlns:a="http://schemas.openxmlformats.org/drawingml/2006/main" xmlns:r="http://schemas.openxmlformats.org/officeDocument/2006/relationships" xmlns:p="http://schemas.openxmlformats.org/presentationml/2006/main">
   <p:cSld>
     <p:spTree>
@@ -23961,15 +26188,6 @@
 </file>
 
 <file path=customXml/item1.xml><?xml version="1.0" encoding="utf-8"?>
-<?mso-contentType ?>
-<FormTemplates xmlns="http://schemas.microsoft.com/sharepoint/v3/contenttype/forms">
-  <Display>DocumentLibraryForm</Display>
-  <Edit>DocumentLibraryForm</Edit>
-  <New>DocumentLibraryForm</New>
-</FormTemplates>
-</file>
-
-<file path=customXml/item2.xml><?xml version="1.0" encoding="utf-8"?>
 <ct:contentTypeSchema xmlns:ct="http://schemas.microsoft.com/office/2006/metadata/contentType" xmlns:ma="http://schemas.microsoft.com/office/2006/metadata/properties/metaAttributes" ct:_="" ma:_="" ma:contentTypeName="ドキュメント" ma:contentTypeID="0x010100D291828BE931164DA279E7DB37510E8B" ma:contentTypeVersion="12" ma:contentTypeDescription="新しいドキュメントを作成します。" ma:contentTypeScope="" ma:versionID="d40e79753e265535ebdef0a9a1630dbe">
   <xsd:schema xmlns:xsd="http://www.w3.org/2001/XMLSchema" xmlns:xs="http://www.w3.org/2001/XMLSchema" xmlns:p="http://schemas.microsoft.com/office/2006/metadata/properties" xmlns:ns3="e5fea337-426f-4878-aaa1-6cc4dbed00d3" targetNamespace="http://schemas.microsoft.com/office/2006/metadata/properties" ma:root="true" ma:fieldsID="909ec013045a4ae227a46cef79b1603d" ns3:_="">
     <xsd:import namespace="e5fea337-426f-4878-aaa1-6cc4dbed00d3"/>
@@ -24163,6 +26381,15 @@
 </ct:contentTypeSchema>
 </file>
 
+<file path=customXml/item2.xml><?xml version="1.0" encoding="utf-8"?>
+<?mso-contentType ?>
+<FormTemplates xmlns="http://schemas.microsoft.com/sharepoint/v3/contenttype/forms">
+  <Display>DocumentLibraryForm</Display>
+  <Edit>DocumentLibraryForm</Edit>
+  <New>DocumentLibraryForm</New>
+</FormTemplates>
+</file>
+
 <file path=customXml/item3.xml><?xml version="1.0" encoding="utf-8"?>
 <p:properties xmlns:p="http://schemas.microsoft.com/office/2006/metadata/properties" xmlns:xsi="http://www.w3.org/2001/XMLSchema-instance" xmlns:pc="http://schemas.microsoft.com/office/infopath/2007/PartnerControls">
   <documentManagement>
@@ -24172,14 +26399,6 @@
 </file>
 
 <file path=customXml/itemProps1.xml><?xml version="1.0" encoding="utf-8"?>
-<ds:datastoreItem xmlns:ds="http://schemas.openxmlformats.org/officeDocument/2006/customXml" ds:itemID="{EBB85C3E-FFAD-4A75-A769-4B97E54A903C}">
-  <ds:schemaRefs>
-    <ds:schemaRef ds:uri="http://schemas.microsoft.com/sharepoint/v3/contenttype/forms"/>
-  </ds:schemaRefs>
-</ds:datastoreItem>
-</file>
-
-<file path=customXml/itemProps2.xml><?xml version="1.0" encoding="utf-8"?>
 <ds:datastoreItem xmlns:ds="http://schemas.openxmlformats.org/officeDocument/2006/customXml" ds:itemID="{6231A16C-3E0A-4893-9CB3-DA6770BA5700}">
   <ds:schemaRefs>
     <ds:schemaRef ds:uri="http://schemas.microsoft.com/office/2006/metadata/contentType"/>
@@ -24193,6 +26412,14 @@
     <ds:schemaRef ds:uri="http://purl.org/dc/elements/1.1/"/>
     <ds:schemaRef ds:uri="http://purl.org/dc/terms/"/>
     <ds:schemaRef ds:uri="http://schemas.microsoft.com/internal/obd"/>
+  </ds:schemaRefs>
+</ds:datastoreItem>
+</file>
+
+<file path=customXml/itemProps2.xml><?xml version="1.0" encoding="utf-8"?>
+<ds:datastoreItem xmlns:ds="http://schemas.openxmlformats.org/officeDocument/2006/customXml" ds:itemID="{EBB85C3E-FFAD-4A75-A769-4B97E54A903C}">
+  <ds:schemaRefs>
+    <ds:schemaRef ds:uri="http://schemas.microsoft.com/sharepoint/v3/contenttype/forms"/>
   </ds:schemaRefs>
 </ds:datastoreItem>
 </file>
